--- a/Part2_CoordFrames/ref/산출물/Chapter2_coordinate_systems.pptx
+++ b/Part2_CoordFrames/ref/산출물/Chapter2_coordinate_systems.pptx
@@ -37,6 +37,7 @@
     <p:sldId id="285" r:id="rId31"/>
     <p:sldId id="286" r:id="rId32"/>
     <p:sldId id="287" r:id="rId33"/>
+    <p:sldId id="290" r:id="rId41"/>
     <p:sldId id="288" r:id="rId34"/>
     <p:sldId id="289" r:id="rId35"/>
   </p:sldIdLst>
@@ -534,10 +535,14 @@
           <a:lstStyle/>
           <a:p>
             <a:r>
-              <a:rPr lang="en-US" dirty="0"/>
-              <a:t>레이다가 재는 것과 전시기가 보여줘야 하는 것 사이의 간극을 메우는 과정을 다룹니다. 개념 → 설계 → C 구현 검증 순서로 진행합니다.</a:t>
-            </a:r>
-            <a:endParaRPr lang="en-US" dirty="0"/>
+              <a:t>안녕하십니까. 이번 과제의 주제는 좌표계와 좌표변환입니다. 레이다 안테나가 잰 거리와 각도가 전시기의 위도 · 경도가 되기까지, 그 사이에 어떤 좌표계를 거치고 각 단계에서 무엇이 바뀌는지를 다루겠습니다.</a:t>
+            </a:r>
+          </a:p>
+          <a:p/>
+          <a:p>
+            <a:r>
+              <a:t>진행은 개념, 설계, C 구현 검증 순서입니다.</a:t>
+            </a:r>
           </a:p>
         </p:txBody>
       </p:sp>
@@ -622,10 +627,20 @@
           <a:lstStyle/>
           <a:p>
             <a:r>
-              <a:rPr lang="en-US" dirty="0"/>
-              <a:t/>
-            </a:r>
-            <a:endParaRPr lang="en-US" dirty="0"/>
+              <a:t>레이다가 물리적으로 잴 수 있는 것은 거리 하나와 각도 둘입니다.</a:t>
+            </a:r>
+          </a:p>
+          <a:p/>
+          <a:p>
+            <a:r>
+              <a:t>R 은 시선거리로 전파 왕복시간 곱하기 광속 나누기 2 입니다. Az 는 방위각으로 보어사이트에서 오른쪽으로 잰 각, El 은 고각으로 수평면에서 위로 잰 각입니다. 과제 예제값이 20 km, 30도, 0도입니다.</a:t>
+            </a:r>
+          </a:p>
+          <a:p/>
+          <a:p>
+            <a:r>
+              <a:t>보어사이트는 안테나가 똑바로 바라보는 방향입니다. 손전등으로 치면 빛이 가장 센 한가운데 방향입니다.</a:t>
+            </a:r>
           </a:p>
         </p:txBody>
       </p:sp>
@@ -710,10 +725,26 @@
           <a:lstStyle/>
           <a:p>
             <a:r>
-              <a:rPr lang="en-US" dirty="0"/>
-              <a:t/>
-            </a:r>
-            <a:endParaRPr lang="en-US" dirty="0"/>
+              <a:t>회전행렬을 곱하려면 x, y, z 세 성분으로 풀어써야 합니다. x 는 R cos(El) cos(Az) 로 보어사이트 방향 성분, y 는 R cos(El) sin(Az) 로 오른쪽 성분, z 는 −R sin(El) 로 아래 방향 성분입니다.</a:t>
+            </a:r>
+          </a:p>
+          <a:p/>
+          <a:p>
+            <a:r>
+              <a:t>예제값을 넣으면 x 는 +17,320.5081 m, y 는 +10,000 m, z 는 0 입니다.</a:t>
+            </a:r>
+          </a:p>
+          <a:p/>
+          <a:p>
+            <a:r>
+              <a:t>왜 직교좌표로 바꾸느냐 하면, 극좌표끼리는 회전을 합성할 수 없기 때문입니다. 회전행렬은 벡터에만 곱할 수 있으니, 각도로 표현된 방향을 세 성분으로 풀어쓰는 준비 단계입니다.</a:t>
+            </a:r>
+          </a:p>
+          <a:p/>
+          <a:p>
+            <a:r>
+              <a:t>역변환에서는 asin 대신 atan2 를 씁니다. 반올림으로 인자가 1 을 살짝 넘으면 asin 은 NaN 을 내고, ±90도 근처에서 정밀도가 무너지기 때문입니다. z 축은 아래가 양수라서 표적이 위에 있으면 z 가 음수가 됩니다.</a:t>
+            </a:r>
           </a:p>
         </p:txBody>
       </p:sp>
@@ -798,10 +829,20 @@
           <a:lstStyle/>
           <a:p>
             <a:r>
-              <a:rPr lang="en-US" dirty="0"/>
-              <a:t/>
-            </a:r>
-            <a:endParaRPr lang="en-US" dirty="0"/>
+              <a:t>표적 방향을 안테나 면에 드리운 그림자로 표현한 것이 UV, 방향코사인입니다.</a:t>
+            </a:r>
+          </a:p>
+          <a:p/>
+          <a:p>
+            <a:r>
+              <a:t>UV 를 쓰는 이유는 현대 레이다가 대부분 위상배열이기 때문입니다. 수백에서 수천 개 소자에 위상차를 줘서 빔 방향을 전자적으로 바꾸는데, 그 위상이 소자 번호에 u, v 를 곱하기만 하면 나옵니다. 각도 Az, El 로는 이렇게 단순해지지 않습니다.</a:t>
+            </a:r>
+          </a:p>
+          <a:p/>
+          <a:p>
+            <a:r>
+              <a:t>빔 굵기가 조향각과 무관하게 일정하고 격자로브 위치도 단순하게 나옵니다. 다만 이것은 빔 조향, 즉 안테나 내부의 일이라서 이번 데이터 처리 체인에는 들어가지 않습니다.</a:t>
+            </a:r>
           </a:p>
         </p:txBody>
       </p:sp>
@@ -886,10 +927,20 @@
           <a:lstStyle/>
           <a:p>
             <a:r>
-              <a:rPr lang="en-US" dirty="0"/>
-              <a:t>회전은 곱셈 순서를 바꾸면 결과가 달라집니다. 그래서 3-2-1 순서를 문서로 고정해야 합니다.</a:t>
-            </a:r>
-            <a:endParaRPr lang="en-US" dirty="0"/>
+              <a:t>배에 실린 모든 장비의 공통 기준입니다. 안테나, INS, 무장이 여기로 모입니다.</a:t>
+            </a:r>
+          </a:p>
+          <a:p/>
+          <a:p>
+            <a:r>
+              <a:t>원점은 배의 무게중심, 축은 x 가 선수, y 가 우현, z 가 아래라서 FRD 라고 부릅니다. 자세각은 roll 이 좌우 기울기, pitch 가 앞뒤 기울기, yaw 가 선수 방위입니다.</a:t>
+            </a:r>
+          </a:p>
+          <a:p/>
+          <a:p>
+            <a:r>
+              <a:t>주의할 점은 합치는 순서입니다. 회전은 곱셈 순서를 바꾸면 결과가 달라집니다. 그래서 yaw, pitch, roll 순서인 3-2-1 을 문서로 고정해야 합니다. 구현에서도 Rz(yaw) · Ry(pitch) · Rx(roll) 순서로 곱합니다.</a:t>
+            </a:r>
           </a:p>
         </p:txBody>
       </p:sp>
@@ -974,10 +1025,26 @@
           <a:lstStyle/>
           <a:p>
             <a:r>
-              <a:rPr lang="en-US" dirty="0"/>
-              <a:t/>
-            </a:r>
-            <a:endParaRPr lang="en-US" dirty="0"/>
+              <a:t>관성항법장치, INS 는 회전과 이동에 필요한 값을 공급합니다.</a:t>
+            </a:r>
+          </a:p>
+          <a:p/>
+          <a:p>
+            <a:r>
+              <a:t>자이로 세 개가 각속도, 즉 초당 몇 도씩 돌고 있는지를 재고, 시간에 대해 적분하면 자세가 나옵니다. 가속도계 세 개가 중력을 뺀 비력을 재고, 두 번 적분하면 속도와 위치가 나옵니다.</a:t>
+            </a:r>
+          </a:p>
+          <a:p/>
+          <a:p>
+            <a:r>
+              <a:t>핵심은 INS 가 바깥 세상을 전혀 보지 않는다는 것입니다. GPS 처럼 위성 신호를 받지도 지형을 관측하지도 않고, 출발점만 알려주면 자기가 느낀 각속도와 가속도를 계속 더해 나갑니다. 그래서 외부 신호가 필요 없어 전파방해에 강하고 갱신이 100 Hz 이상으로 빠르지만, 오차가 시간이 갈수록 쌓입니다. 그래서 GPS 같은 외부 기준과 결합해서 잡아줍니다.</a:t>
+            </a:r>
+          </a:p>
+          <a:p/>
+          <a:p>
+            <a:r>
+              <a:t>출항 전 초기 정렬에서 중력으로 수평을 잡고, 지구 자전을 감지해서 북쪽을 찾습니다.</a:t>
+            </a:r>
           </a:p>
         </p:txBody>
       </p:sp>
@@ -1062,10 +1129,20 @@
           <a:lstStyle/>
           <a:p>
             <a:r>
-              <a:rPr lang="en-US" dirty="0"/>
-              <a:t/>
-            </a:r>
-            <a:endParaRPr lang="en-US" dirty="0"/>
+              <a:t>"플랫폼 좌표계" 라는 말의 의미가 여기서 갈립니다.</a:t>
+            </a:r>
+          </a:p>
+          <a:p/>
+          <a:p>
+            <a:r>
+              <a:t>짐벌형은 센서가 짐벌 위에 얹혀 있고 모터가 늘 수평을 유지합니다. 플랫폼 좌표계가 실제로 존재하는 물리적 프레임입니다. 정밀하지만 크고 무겁고 비쌉니다.</a:t>
+            </a:r>
+          </a:p>
+          <a:p/>
+          <a:p>
+            <a:r>
+              <a:t>스트랩다운은 센서가 동체에 직접 고정되어 배와 함께 기울고, 수평 유지는 계산이 합니다. 플랫폼 좌표계는 소프트웨어 안의 상태값일 뿐입니다. 현대 함정 INS 는 사실상 전부 이쪽입니다.</a:t>
+            </a:r>
           </a:p>
         </p:txBody>
       </p:sp>
@@ -1150,10 +1227,20 @@
           <a:lstStyle/>
           <a:p>
             <a:r>
-              <a:rPr lang="en-US" dirty="0"/>
-              <a:t/>
-            </a:r>
-            <a:endParaRPr lang="en-US" dirty="0"/>
+              <a:t>과제 조건 하나가 복잡한 이야기를 통째로 없애줍니다. "INS 는 플랫폼 무게중심과 축이 일치한 상태로 설치되어 있음" 입니다.</a:t>
+            </a:r>
+          </a:p>
+          <a:p/>
+          <a:p>
+            <a:r>
+              <a:t>따라서 INS 좌표계는 동체 좌표계와 같습니다. 설치 오차 0, 레버암 0 입니다. 그래서 INS 를 독립된 변환 단계로 두지 않고, 좌표계가 아니라 값의 공급원으로만 씁니다.</a:t>
+            </a:r>
+          </a:p>
+          <a:p/>
+          <a:p>
+            <a:r>
+              <a:t>INS 가 주는 roll, pitch, yaw 는 3단계 동체에서 NED 로 가는 회전행렬에, 위도 · 경도 · 고도는 4단계 로컬에서 ECEF 로 가는 회전과 평행이동에 쓰입니다. 속도는 추적 필터나 도플러 보정에 쓰이는데 이번 발표 범위 밖입니다.</a:t>
+            </a:r>
           </a:p>
         </p:txBody>
       </p:sp>
@@ -1238,10 +1325,20 @@
           <a:lstStyle/>
           <a:p>
             <a:r>
-              <a:rPr lang="en-US" dirty="0"/>
-              <a:t/>
-            </a:r>
-            <a:endParaRPr lang="en-US" dirty="0"/>
+              <a:t>배가 아무리 흔들려도 북쪽은 계속 북쪽입니다. 이 좌표계의 존재 이유가 그것입니다. 배와 함께 이동하지만 함께 회전하지는 않습니다. 그래서 표적이 실제로 움직인 것과 배가 흔들린 것을 구분할 수 있고, 추적 필터를 여기서 돌립니다.</a:t>
+            </a:r>
+          </a:p>
+          <a:p/>
+          <a:p>
+            <a:r>
+              <a:t>두 가지 주의점이 있습니다. 첫째, "아래" 는 지구 중심 방향이 아니라 타원체 법선의 반대 방향입니다. 두 방향의 차이는 위도 45도 부근에서 최대 약 0.19도인데, 지표에서 21 km 에 해당합니다.</a:t>
+            </a:r>
+          </a:p>
+          <a:p/>
+          <a:p>
+            <a:r>
+              <a:t>둘째, 로컬 평면의 한계입니다. 지구는 둥글어서 원점에서 멀어질수록 실제 지표면이 평면 아래로 내려갑니다. 5 km 에서 2 m, 20 km 에서 31 m, 50 km 에서 196 m, 100 km 에서 783 m 입니다. 이 숫자는 뒤에서 다시 나옵니다.</a:t>
+            </a:r>
           </a:p>
         </p:txBody>
       </p:sp>
@@ -1326,10 +1423,20 @@
           <a:lstStyle/>
           <a:p>
             <a:r>
-              <a:rPr lang="en-US" dirty="0"/>
-              <a:t/>
-            </a:r>
-            <a:endParaRPr lang="en-US" dirty="0"/>
+              <a:t>둘 다 원점은 지구 중심이고, 축이 지구와 함께 도느냐 마느냐만 다릅니다.</a:t>
+            </a:r>
+          </a:p>
+          <a:p/>
+          <a:p>
+            <a:r>
+              <a:t>ECEF 가 필요한 이유는 로컬 좌표계에서 위경도로 곧장 갈 수 없기 때문입니다. 로컬 원점, 즉 배의 위치가 지구 어디인지는 지구 기준 좌표로만 표현됩니다. 다리 역할입니다.</a:t>
+            </a:r>
+          </a:p>
+          <a:p/>
+          <a:p>
+            <a:r>
+              <a:t>ECI 는 이번 설계에 필요 없습니다. 뉴턴 법칙은 회전하지 않는 좌표계에서만 그대로 성립하므로, 중력만 받고 날아가는 위성이나 탄도탄은 ECI 에서 계산합니다. 항공기나 수상함 표적은 ECEF 와 NED 로 충분합니다.</a:t>
+            </a:r>
           </a:p>
         </p:txBody>
       </p:sp>
@@ -1414,10 +1521,20 @@
           <a:lstStyle/>
           <a:p>
             <a:r>
-              <a:rPr lang="en-US" dirty="0"/>
-              <a:t/>
-            </a:r>
-            <a:endParaRPr lang="en-US" dirty="0"/>
+              <a:t>우리가 아는 그 지도 좌표입니다. 다만 지구는 구가 아닙니다.</a:t>
+            </a:r>
+          </a:p>
+          <a:p/>
+          <a:p>
+            <a:r>
+              <a:t>WGS-84 타원체는 장반경 6,378,137.0 m, 단반경 6,356,752.3 m, 편평률의 역수 298.257223563 입니다. 적도 반지름과 극 반지름의 차이가 약 21 km 로, 지구 크기에 비하면 0.3 % 정도지만 구로 계산하면 위치 오차가 수십 km 까지 벌어집니다. GPS 와 해도가 쓰는 것도 이것입니다.</a:t>
+            </a:r>
+          </a:p>
+          <a:p/>
+          <a:p>
+            <a:r>
+              <a:t>고도에 함정이 하나 있습니다. LLA 의 고도는 타원체고, HAE 이고 해도나 고도계의 "해발" 과 다릅니다. 해발고도는 타원체고에서 지오이드고를 뺀 값이고, 한국 근해 지오이드고는 약 +20 에서 +25 m 입니다. 시스템 내부는 하나로 통일해야 합니다.</a:t>
+            </a:r>
           </a:p>
         </p:txBody>
       </p:sp>
@@ -1502,10 +1619,14 @@
           <a:lstStyle/>
           <a:p>
             <a:r>
-              <a:rPr lang="en-US" dirty="0"/>
-              <a:t>안테나가 아는 것은 전파 왕복 시간과 자기 정면 기준 두 각도뿐입니다. 배의 방향도 위도도 모릅니다.</a:t>
-            </a:r>
-            <a:endParaRPr lang="en-US" dirty="0"/>
+              <a:t>같은 표적 하나를 두고 레이다는 "20 km 앞, 오른쪽으로 30도" 라고 말합니다. 안테나 자기 정면 기준입니다. 전시기는 "북위 36.2337도, 동경 127.3643도" 로 보여줘야 합니다. 지구 전체 기준입니다.</a:t>
+            </a:r>
+          </a:p>
+          <a:p/>
+          <a:p>
+            <a:r>
+              <a:t>안테나가 아는 것은 전파 왕복 시간과 자기 정면 기준 두 각도뿐입니다. 배가 어느 방향을 향하는지도, 지금 위도가 몇 도인지도 모릅니다. 그 사이를 메우는 것이 좌표변환이고, 오늘 이야기의 전부입니다.</a:t>
+            </a:r>
           </a:p>
         </p:txBody>
       </p:sp>
@@ -1590,10 +1711,20 @@
           <a:lstStyle/>
           <a:p>
             <a:r>
-              <a:rPr lang="en-US" dirty="0"/>
-              <a:t/>
-            </a:r>
-            <a:endParaRPr lang="en-US" dirty="0"/>
+              <a:t>여섯 좌표계를 표 하나로 모았습니다. 원점, 축, 붙은 곳, 주 용도 순서입니다.</a:t>
+            </a:r>
+          </a:p>
+          <a:p/>
+          <a:p>
+            <a:r>
+              <a:t>안테나와 동체와 INS 는 배에 붙어 있고, NED 는 바다 위 지점에 붙어 회전하지 않고, ECEF 는 지구에 붙어 자전하고, ECI 는 아무 데도 안 붙어 있고, LLA 는 지구 기준입니다.</a:t>
+            </a:r>
+          </a:p>
+          <a:p/>
+          <a:p>
+            <a:r>
+              <a:t>중요한 것은 순서를 건너뛸 수 없다는 점입니다. 안테나는 배에 붙어 있고, 배의 방향은 북쪽 기준으로 알려지고, 로컬 원점의 위치는 지구 좌표로만 표현되기 때문입니다.</a:t>
+            </a:r>
           </a:p>
         </p:txBody>
       </p:sp>
@@ -1678,10 +1809,44 @@
           <a:lstStyle/>
           <a:p>
             <a:r>
-              <a:rPr lang="en-US" dirty="0"/>
-              <a:t/>
-            </a:r>
-            <a:endParaRPr lang="en-US" dirty="0"/>
+              <a:t>전체 체인을 한 장으로 보겠습니다. 왼쪽이 좌표계 순서, 오른쪽이 각 단계의 변환입니다.</a:t>
+            </a:r>
+          </a:p>
+          <a:p/>
+          <a:p>
+            <a:r>
+              <a:t>신호처리 출력 R, Az, El 이 안테나 극좌표입니다. 1단계에서 이것을 x, y, z 세 성분으로 분해합니다. 표현만 바꿀 뿐 회전도 이동도 없습니다.</a:t>
+            </a:r>
+          </a:p>
+          <a:p/>
+          <a:p>
+            <a:r>
+              <a:t>2단계 안테나에서 동체로는 Rz(설치방위) 곱하기 Ry(백틸트) 로 회전하고 레버암을 더합니다. 설치 도면이 공급하고, 고정형이라 상수입니다.</a:t>
+            </a:r>
+          </a:p>
+          <a:p/>
+          <a:p>
+            <a:r>
+              <a:t>3단계 동체에서 NED 로는 Rz(yaw) · Ry(pitch) · Rx(roll) 로 회전만 합니다. INS 자세가 공급하고 매 순간 변합니다. 여기가 데이터 처리 구간입니다.</a:t>
+            </a:r>
+          </a:p>
+          <a:p/>
+          <a:p>
+            <a:r>
+              <a:t>4단계 NED 에서 ECEF 로는 위도 · 경도로 정해지는 회전에 배의 ECEF 위치를 더합니다. INS 위치가 공급합니다.</a:t>
+            </a:r>
+          </a:p>
+          <a:p/>
+          <a:p>
+            <a:r>
+              <a:t>5단계 ECEF 에서 LLA 로는 위도와 고도를 번갈아 계산하는 반복입니다. WGS-84 타원체 기준입니다.</a:t>
+            </a:r>
+          </a:p>
+          <a:p/>
+          <a:p>
+            <a:r>
+              <a:t>회전은 설치 도면과 INS 자세가, 이동은 레버암과 INS 위치가 공급합니다. 이 구분이 그대로 오차 예산의 항목이 됩니다.</a:t>
+            </a:r>
           </a:p>
         </p:txBody>
       </p:sp>
@@ -1766,10 +1931,8 @@
           <a:lstStyle/>
           <a:p>
             <a:r>
-              <a:rPr lang="en-US" dirty="0"/>
-              <a:t/>
-            </a:r>
-            <a:endParaRPr lang="en-US" dirty="0"/>
+              <a:t>두 번째 주제입니다. 함선 고정형 안테나를 놓고 변환 경로를 설계합니다. 흐름은 신호처리에서 데이터 처리, 즉 좌표변환과 추적을 거쳐 통제제어 전시기로 갑니다.</a:t>
+            </a:r>
           </a:p>
         </p:txBody>
       </p:sp>
@@ -1854,10 +2017,50 @@
           <a:lstStyle/>
           <a:p>
             <a:r>
-              <a:rPr lang="en-US" dirty="0"/>
-              <a:t/>
-            </a:r>
-            <a:endParaRPr lang="en-US" dirty="0"/>
+              <a:t>과제 조건 여섯 가지와 그것이 설계를 어떻게 묶는지입니다.</a:t>
+            </a:r>
+          </a:p>
+          <a:p/>
+          <a:p>
+            <a:r>
+              <a:t>조건 1, 해상 함선에 고정형 안테나입니다. 안테나가 돌지 않으니 회전행렬이 상수이고, 대신 배의 흔들림을 전부 계산으로 보상해야 합니다.</a:t>
+            </a:r>
+          </a:p>
+          <a:p/>
+          <a:p>
+            <a:r>
+              <a:t>조건 2, 안테나는 선수 기준 시계방향 90도, 무게중심에서 30 m 뒤, 10 m 위입니다. 설치 방위 90도, 백틸트 0도, 레버암 (−30, 0, −10) m 가 됩니다.</a:t>
+            </a:r>
+          </a:p>
+          <a:p/>
+          <a:p>
+            <a:r>
+              <a:t>조건 3, INS 는 무게중심과 축이 일치합니다. INS 좌표계가 동체 좌표계와 같아져서 변환 단계 하나가 통째로 생략됩니다.</a:t>
+            </a:r>
+          </a:p>
+          <a:p/>
+          <a:p>
+            <a:r>
+              <a:t>조건 4, 입력은 안테나 기준 거리 · 방위각 · 고각입니다. 체인의 출발점이 안테나 극좌표로 확정됩니다.</a:t>
+            </a:r>
+          </a:p>
+          <a:p/>
+          <a:p>
+            <a:r>
+              <a:t>조건 5, 처리는 로컬 좌표계에서 합니다. 체인의 중간 목적지가 NED 로 확정됩니다.</a:t>
+            </a:r>
+          </a:p>
+          <a:p/>
+          <a:p>
+            <a:r>
+              <a:t>조건 6, 출력은 위 · 경 · 고도와 안테나 극좌표 둘 다입니다. 정변환뿐 아니라 역변환도 필요합니다.</a:t>
+            </a:r>
+          </a:p>
+          <a:p/>
+          <a:p>
+            <a:r>
+              <a:t>조건 4, 5, 6 이 출발점, 중간점, 도착점을 이미 지정합니다. 설계자가 정할 것은 그 사이를 어떻게 이을 것인가입니다.</a:t>
+            </a:r>
           </a:p>
         </p:txBody>
       </p:sp>
@@ -1942,10 +2145,38 @@
           <a:lstStyle/>
           <a:p>
             <a:r>
-              <a:rPr lang="en-US" dirty="0"/>
-              <a:t/>
-            </a:r>
-            <a:endParaRPr lang="en-US" dirty="0"/>
+              <a:t>단계별로 어떤 좌표계를 골랐고 왜 골랐는지입니다.</a:t>
+            </a:r>
+          </a:p>
+          <a:p/>
+          <a:p>
+            <a:r>
+              <a:t>0단계 안테나 극좌표는 레이다가 물리적으로 잴 수 있는 것이 거리와 두 각도뿐이기 때문입니다. 1단계 안테나 직교좌표는 회전행렬이 벡터에만 곱해지기 때문입니다.</a:t>
+            </a:r>
+          </a:p>
+          <a:p/>
+          <a:p>
+            <a:r>
+              <a:t>2단계 동체는 안테나 · INS · 무장이 만나는 유일한 공통 기준이고, 배를 거치지 않고 바깥으로 나갈 방법이 없기 때문입니다.</a:t>
+            </a:r>
+          </a:p>
+          <a:p/>
+          <a:p>
+            <a:r>
+              <a:t>3단계 로컬 NED 는 배가 흔들려도 흔들리지 않기 때문입니다. ENU 가 아닌 NED 인 이유는 동체 FRD 와 축 의미가 맞아서입니다.</a:t>
+            </a:r>
+          </a:p>
+          <a:p/>
+          <a:p>
+            <a:r>
+              <a:t>4단계 ECEF 는 로컬에서 위경도로 곧장 갈 수 없어서 다리 역할이고, 5단계 LLA 는 전시기와 통제제어가 지도에 표시하는 형식입니다.</a:t>
+            </a:r>
+          </a:p>
+          <a:p/>
+          <a:p>
+            <a:r>
+              <a:t>쓰지 않은 좌표계도 이유가 있습니다. INS 는 조건 3 에 의해 동체와 일치해서 항등행렬을 곱하는 셈이고, UV 는 빔 조향이라 데이터 처리 체인 밖이고, ECI 는 관성 동역학 전파가 필요할 때만 쓰고, ENU 는 NED 와 정보량이 같아서 하나로 통일했습니다.</a:t>
+            </a:r>
           </a:p>
         </p:txBody>
       </p:sp>
@@ -2030,10 +2261,14 @@
           <a:lstStyle/>
           <a:p>
             <a:r>
-              <a:rPr lang="en-US" dirty="0"/>
-              <a:t/>
-            </a:r>
-            <a:endParaRPr lang="en-US" dirty="0"/>
+              <a:t>직관 확인입니다. 함수 45도, 안테나 설치 90도, 측정 방위각 30도를 더하면 165도입니다. 세 번 연달아 오른쪽으로 돌았을 뿐이니 당연합니다. 실제 계산값은 165.074도이고, 차이 0.074도는 레버암 30 m 때문입니다.</a:t>
+            </a:r>
+          </a:p>
+          <a:p/>
+          <a:p>
+            <a:r>
+              <a:t>그런데 왜 굳이 행렬을 쓰느냐 하면, roll 이나 pitch 가 조금이라도 있으면 이 덧셈은 즉시 깨지기 때문입니다. 세 축의 회전이 서로 섞입니다. 뒤의 확인 실험에서 그 숫자를 보여드리겠습니다.</a:t>
+            </a:r>
           </a:p>
         </p:txBody>
       </p:sp>
@@ -2118,10 +2353,32 @@
           <a:lstStyle/>
           <a:p>
             <a:r>
-              <a:rPr lang="en-US" dirty="0"/>
-              <a:t/>
-            </a:r>
-            <a:endParaRPr lang="en-US" dirty="0"/>
+              <a:t>예제값으로 앞 세 단계를 따라가 보겠습니다.</a:t>
+            </a:r>
+          </a:p>
+          <a:p/>
+          <a:p>
+            <a:r>
+              <a:t>1단계, 극좌표를 직교좌표로. 표현만 바꿉니다. x = +17,320.5081, y = +10,000, z = 0 입니다.</a:t>
+            </a:r>
+          </a:p>
+          <a:p/>
+          <a:p>
+            <a:r>
+              <a:t>2단계, 안테나에서 동체로. 회전과 평행이동입니다. C_body←ant 는 Rz(90°) · Ry(0°) 이고, 여기에 곱한 뒤 (−30, 0, −10) 을 더하면 (−10,030.0, +17,320.5, −10.0) 입니다. x 와 y 가 자리를 바꾸고 부호가 뒤집힌 것이 보입니다.</a:t>
+            </a:r>
+          </a:p>
+          <a:p/>
+          <a:p>
+            <a:r>
+              <a:t>3단계, 동체에서 NED 로. 원점이 같으니 회전만입니다. C_ned←body 는 Rz(45°) · Ry(0°) · Rx(0°) 이고, 결과는 N −19,339.73, E +5,155.17, D −10.0 입니다. 진북 기준 방위 165.074도입니다.</a:t>
+            </a:r>
+          </a:p>
+          <a:p/>
+          <a:p>
+            <a:r>
+              <a:t>여기가 데이터 처리 구간입니다. 추적과 필터링은 이 로컬 좌표계에서 수행합니다.</a:t>
+            </a:r>
           </a:p>
         </p:txBody>
       </p:sp>
@@ -2206,10 +2463,26 @@
           <a:lstStyle/>
           <a:p>
             <a:r>
-              <a:rPr lang="en-US" dirty="0"/>
-              <a:t/>
-            </a:r>
-            <a:endParaRPr lang="en-US" dirty="0"/>
+              <a:t>4단계, 로컬에서 ECEF 로. 회전과 평행이동입니다. 배의 위치를 ECEF 로 바꾸고, 로컬 벡터를 지구 방향으로 회전하고, 둘을 더합니다. 회전량은 배의 위도 · 경도가 결정합니다.</a:t>
+            </a:r>
+          </a:p>
+          <a:p/>
+          <a:p>
+            <a:r>
+              <a:t>5단계, ECEF 에서 LLA 로. 위도와 고도가 서로 물려 있어서 딱 떨어지는 공식이 없습니다. 위도를 알아야 곡률반경 N 을 구하는데 N 을 알아야 위도를 구할 수 있기 때문입니다. 그래서 지구를 구로 본 위도에서 출발해서 값이 안 변할 때까지 반복합니다. 보통 5 ~ 7회면 수렴합니다.</a:t>
+            </a:r>
+          </a:p>
+          <a:p/>
+          <a:p>
+            <a:r>
+              <a:t>표적 LLA 는 36.233700252°N, 127.364344961°E, 고도 41.4952 m 입니다.</a:t>
+            </a:r>
+          </a:p>
+          <a:p/>
+          <a:p>
+            <a:r>
+              <a:t>여기서 질문이 하나 나옵니다. 왜 고도가 10 m 가 아니라 41.5 m 인가. 레이다는 수평, El 0도로 쐈고 안테나는 10 m 높이니 표적 고도 10 m 일 것 같습니다. 그런데 빔은 직진하는데 바다 표면은 멀어질수록 아래로 휘어 내려갑니다. 20 km 지점에서 그 차이가 31.5 m 이고, 10 더하기 31.5 가 41.5 m 입니다. 앞에서 본 로컬 평면의 한계가 바로 이 숫자입니다.</a:t>
+            </a:r>
           </a:p>
         </p:txBody>
       </p:sp>
@@ -2294,10 +2567,26 @@
           <a:lstStyle/>
           <a:p>
             <a:r>
-              <a:rPr lang="en-US" dirty="0"/>
-              <a:t/>
-            </a:r>
-            <a:endParaRPr lang="en-US" dirty="0"/>
+              <a:t>조건 6 은 결과를 두 가지 형태로 요구합니다. 그래서 역변환이 필요한데, 새로 배울 것이 없습니다. 회전은 전치, 평행이동은 빼기, 순서는 거꾸로입니다.</a:t>
+            </a:r>
+          </a:p>
+          <a:p/>
+          <a:p>
+            <a:r>
+              <a:t>표적 LLA 에서 출발해 ECEF 로 가는 것은 정변환과 같은 공식이고, 로컬 NED 는 표적에서 배를 뺀 것을 회전하고, 동체는 C_ned←body 의 전치를 곱하고, 안테나는 레버암을 뺀 뒤 C_body←ant 의 전치를 곱하고, 마지막에 극좌표로 돌아옵니다. R 은 제곱합의 제곱근, Az 는 atan2(y, x), El 은 atan2(−z, 수평거리) 입니다.</a:t>
+            </a:r>
+          </a:p>
+          <a:p/>
+          <a:p>
+            <a:r>
+              <a:t>결과는 R = 20,000.000000 m, Az = 30.000000°, El = 0.000000° 입니다. 입력값과 정확히 같은 값이 돌아왔습니다. 왕복오차는 ΔR 0.0 m, ΔAz 1.8e−12° 로 컴퓨터 반올림 수준입니다.</a:t>
+            </a:r>
+          </a:p>
+          <a:p/>
+          <a:p>
+            <a:r>
+              <a:t>부호 하나, 전치 방향 하나만 틀려도 이 왕복 시험은 즉시 실패합니다. 그래서 가장 강력한 검증 수단이 됩니다.</a:t>
+            </a:r>
           </a:p>
         </p:txBody>
       </p:sp>
@@ -2382,10 +2671,8 @@
           <a:lstStyle/>
           <a:p>
             <a:r>
-              <a:rPr lang="en-US" dirty="0"/>
-              <a:t/>
-            </a:r>
-            <a:endParaRPr lang="en-US" dirty="0"/>
+              <a:t>세 번째 주제입니다. 좌표변환은 "적당히 그럴듯한 값" 이 나오기 때문에 눈으로는 검증되지 않습니다. 그래서 C 로 짜서 숫자로 확인했습니다. Visual Studio 2022, C17 로 경고 없이 빌드했고, 시험 12항목을 전부 통과했습니다.</a:t>
+            </a:r>
           </a:p>
         </p:txBody>
       </p:sp>
@@ -2470,10 +2757,32 @@
           <a:lstStyle/>
           <a:p>
             <a:r>
-              <a:rPr lang="en-US" dirty="0"/>
-              <a:t/>
-            </a:r>
-            <a:endParaRPr lang="en-US" dirty="0"/>
+              <a:t>세 단계로 진행하겠습니다.</a:t>
+            </a:r>
+          </a:p>
+          <a:p/>
+          <a:p>
+            <a:r>
+              <a:t>첫째, 좌표계 여섯 가지입니다. 안테나, 동체, INS, NED/ENU, ECEF/ECI, LLA 각각 원점이 어디이고 축이 어디를 향하는지, 왜 필요한지를 정리합니다.</a:t>
+            </a:r>
+          </a:p>
+          <a:p/>
+          <a:p>
+            <a:r>
+              <a:t>둘째, 실전 설계입니다. 함선에 고정된 안테나를 놓고 5단계 변환 경로를 설계하고, 각 단계에서 무엇이 회전과 이동을 공급하는지 봅니다.</a:t>
+            </a:r>
+          </a:p>
+          <a:p/>
+          <a:p>
+            <a:r>
+              <a:t>셋째, C 로 확인입니다. 설계한 변환을 구현하고 왕복 시험과 시험 12항목, 확인 실험 세 가지로 숫자로 검증합니다.</a:t>
+            </a:r>
+          </a:p>
+          <a:p/>
+          <a:p>
+            <a:r>
+              <a:t>사전 지식은 삼각함수와 행렬 곱셈 정도면 충분하고, 그마저도 필요한 곳에서 다시 설명하겠습니다.</a:t>
+            </a:r>
           </a:p>
         </p:txBody>
       </p:sp>
@@ -2558,10 +2867,32 @@
           <a:lstStyle/>
           <a:p>
             <a:r>
-              <a:rPr lang="en-US" dirty="0"/>
-              <a:t>T8 이 왜 따로 필요한가 — 전치 방향이 뒤바뀐 버그는 대칭적인 자세에서는 드러나지 않습니다. 단위행렬 테스트도 두 방향 모두 통과합니다.</a:t>
-            </a:r>
-            <a:endParaRPr lang="en-US" dirty="0"/>
+              <a:t>좌표변환 버그의 특징은 컴파일도 되고 값도 그럴듯해 보인다는 것입니다. 그래서 애초에 실수하기 어렵게 세 가지 원칙을 두었습니다.</a:t>
+            </a:r>
+          </a:p>
+          <a:p/>
+          <a:p>
+            <a:r>
+              <a:t>첫째, 함수 이름에 방향을 박았습니다. f_BodyToNed 와 f_NedToBody, f_AntToBody 와 f_BodyToAnt 처럼 어디서 어디로 가는지가 이름에 있습니다. 인자 순서를 헷갈릴 자리가 없습니다.</a:t>
+            </a:r>
+          </a:p>
+          <a:p/>
+          <a:p>
+            <a:r>
+              <a:t>둘째, 회전은 Rx, Ry, Rz 곱으로만 만들었습니다. 행렬 연산은 참고 소스로 받은 matrixCalcLib 을 그대로 썼습니다. 위치는 3x1, 회전은 3x3 matrix 로 두고, 동체에서 NED 로 가는 회전은 Matrix_Product3 에 Rz, Ry, Rx 를 넣어 만들고, 역변환은 Matrix_Transpose 하나입니다. 행렬 원소를 손으로 쓰지 않으니 부호 실수가 끼어들 자리가 없습니다.</a:t>
+            </a:r>
+          </a:p>
+          <a:p/>
+          <a:p>
+            <a:r>
+              <a:t>셋째, 단위는 안에서 하나로 통일했습니다. 라이브러리 안에서는 라디안과 미터만 쓰고, 도는 DEG2RAD, RAD2DEG 로 입출력에서만 바꿉니다. 중간에 도가 섞이면 값이 그럴듯해서 더 못 잡습니다.</a:t>
+            </a:r>
+          </a:p>
+          <a:p/>
+          <a:p>
+            <a:r>
+              <a:t>시험은 12항목이고 원리는 하나입니다. 갔다가 돌아오면 원래 값이 나와야 합니다. 극좌표와 직교, 안테나와 동체, 동체와 NED, NED 와 ECEF 를 단계별로 왕복해서 부호와 전치 방향 실수를 잡고, LLA 와 ECEF 는 위도 · 경도 · 고도 격자 189개 지점을 왕복해서 (1−e²) 누락이나 공식 오타를 잡습니다. 비대칭 자세 시험은 roll, pitch, yaw 를 전부 다른 값으로 둡니다. 전치 방향이 뒤바뀐 버그는 대칭적인 자세에서는 드러나지 않고 단위행렬 테스트도 두 방향 모두 통과하기 때문에 따로 둔 것입니다. 마지막으로 예제값은 손으로 계산한 동체 좌표, 표적 LLA, 왕복 R/Az/El 을 확인해서 체인 전체의 순서와 방향을 잡습니다.</a:t>
+            </a:r>
           </a:p>
         </p:txBody>
       </p:sp>
@@ -2646,10 +2977,26 @@
           <a:lstStyle/>
           <a:p>
             <a:r>
-              <a:rPr lang="en-US" dirty="0"/>
-              <a:t/>
-            </a:r>
-            <a:endParaRPr lang="en-US" dirty="0"/>
+              <a:t>조건 6 이 요구한 두 가지 형태입니다.</a:t>
+            </a:r>
+          </a:p>
+          <a:p/>
+          <a:p>
+            <a:r>
+              <a:t>첫째, 위 · 경 · 고도. 위도 36.233700252°N, 경도 127.364344961°E, 고도 41.4952 m 이고 WGS-84 타원체고입니다.</a:t>
+            </a:r>
+          </a:p>
+          <a:p/>
+          <a:p>
+            <a:r>
+              <a:t>둘째, 안테나 극좌표. 시선거리 20,000.0000 m, 방위각 30.000000°, 고각 0.000000° 입니다. 오른쪽 작은 숫자가 입력값과의 차이, 즉 왕복오차이고 거리는 0.0 m, 각도는 10의 −12승 도 수준입니다.</a:t>
+            </a:r>
+          </a:p>
+          <a:p/>
+          <a:p>
+            <a:r>
+              <a:t>역변환이 입력값과 컴퓨터 반올림 수준까지 일치합니다. 변환 체인 전체가 서로 정확히 역관계라는 뜻입니다. 시험 12항목 전부 통과, 컴파일 경고 0건, 왕복 오차 1e−9 m 미만입니다.</a:t>
+            </a:r>
           </a:p>
         </p:txBody>
       </p:sp>
@@ -2734,10 +3081,32 @@
           <a:lstStyle/>
           <a:p>
             <a:r>
-              <a:rPr lang="en-US" dirty="0"/>
-              <a:t/>
-            </a:r>
-            <a:endParaRPr lang="en-US" dirty="0"/>
+              <a:t>설계 판단이 실제로 근거가 있는지 세 가지 실험으로 확인했습니다.</a:t>
+            </a:r>
+          </a:p>
+          <a:p/>
+          <a:p>
+            <a:r>
+              <a:t>실험 A, 레버암을 빼먹으면 수평으로 정확히 30 m, 고도로 10 m 어긋납니다. 거리가 멀어져도 이 오차는 줄지 않습니다.</a:t>
+            </a:r>
+          </a:p>
+          <a:p/>
+          <a:p>
+            <a:r>
+              <a:t>실험 B, 배가 기울면. 같은 측정값 Az 30도, El 0도에 자세만 바꿔 넣었습니다. roll 0도에서 실제 고각 +0.03도, 10도에서 −8.61도, 20도에서 −17.19도입니다. 레이다는 여전히 "고각 0도" 라고 보고하지만 그건 안테나 기준일 뿐이고, 20 km 거리에서 고도로 약 5.9 km 차이입니다.</a:t>
+            </a:r>
+          </a:p>
+          <a:p/>
+          <a:p>
+            <a:r>
+              <a:t>실험 C, 지구 곡률. 5 km 에서 2 m, 20 km 에서 31 m, 100 km 에서 786 m 로 거리의 제곱에 비례해 커집니다.</a:t>
+            </a:r>
+          </a:p>
+          <a:p/>
+          <a:p>
+            <a:r>
+              <a:t>각도를 더하는 방식으로는 이 효과를 만들 수 없습니다. 해상 플랫폼에서 회전행렬은 선택이 아니라 필수입니다.</a:t>
+            </a:r>
           </a:p>
         </p:txBody>
       </p:sp>
@@ -2822,10 +3191,14 @@
           <a:lstStyle/>
           <a:p>
             <a:r>
-              <a:rPr lang="en-US" dirty="0"/>
-              <a:t/>
-            </a:r>
-            <a:endParaRPr lang="en-US" dirty="0"/>
+              <a:t>일곱 가지로 정리하겠습니다.</a:t>
+            </a:r>
+          </a:p>
+          <a:p/>
+          <a:p>
+            <a:r>
+              <a:t>하나, 좌표계는 "누구 입장에서 말하는가" 이고 좌표변환은 그 통역입니다. 둘, 변환의 재료는 회전과 평행이동 둘뿐입니다. 셋, 순서는 안테나, 동체, 로컬, ECEF, 위경도이고 건너뛸 수 없습니다. 넷, 회전은 INS 의 자세와 위치가, 평행이동은 설치 도면과 배의 위치가 공급합니다. 다섯, 돌아올 때는 전치하고 빼고 순서를 뒤집습니다. 왕복이 맞으면 구현이 맞은 것입니다. 여섯, 배가 기울면 각도 덧셈은 깨지고 회전행렬은 필수입니다. 일곱, 로컬 평면 좌표를 고도로 그대로 쓰면 안 됩니다. 지구는 둥급니다.</a:t>
+            </a:r>
           </a:p>
         </p:txBody>
       </p:sp>
@@ -2910,10 +3283,8 @@
           <a:lstStyle/>
           <a:p>
             <a:r>
-              <a:rPr lang="en-US" dirty="0"/>
-              <a:t/>
-            </a:r>
-            <a:endParaRPr lang="en-US" dirty="0"/>
+              <a:t>이상으로 발표를 마치겠습니다. 코드와 문서는 radar-sw-study 저장소의 Part2_CoordFrames 에 있습니다. 질문 환영합니다.</a:t>
+            </a:r>
           </a:p>
         </p:txBody>
       </p:sp>
@@ -2946,6 +3317,88 @@
         <p14:creationId xmlns:p14="http://schemas.microsoft.com/office/powerpoint/2010/main" val="1024086991"/>
       </p:ext>
     </p:extLst>
+  </p:cSld>
+  <p:clrMapOvr>
+    <a:masterClrMapping/>
+  </p:clrMapOvr>
+</p:notes>
+</file>
+
+<file path=ppt/notesSlides/notesSlide35.xml><?xml version="1.0" encoding="utf-8"?>
+<p:notes xmlns:a="http://schemas.openxmlformats.org/drawingml/2006/main" xmlns:p="http://schemas.openxmlformats.org/presentationml/2006/main" xmlns:r="http://schemas.openxmlformats.org/officeDocument/2006/relationships">
+  <p:cSld>
+    <p:spTree>
+      <p:nvGrpSpPr>
+        <p:cNvPr id="1" name=""/>
+        <p:cNvGrpSpPr/>
+        <p:nvPr/>
+      </p:nvGrpSpPr>
+      <p:grpSpPr>
+        <a:xfrm>
+          <a:off x="0" y="0"/>
+          <a:ext cx="0" cy="0"/>
+          <a:chOff x="0" y="0"/>
+          <a:chExt cx="0" cy="0"/>
+        </a:xfrm>
+      </p:grpSpPr>
+      <p:sp>
+        <p:nvSpPr>
+          <p:cNvPr id="2" name="Slide Image Placeholder 1"/>
+          <p:cNvSpPr>
+            <a:spLocks noGrp="1"/>
+          </p:cNvSpPr>
+          <p:nvPr>
+            <p:ph type="sldImg" idx="2"/>
+          </p:nvPr>
+        </p:nvSpPr>
+        <p:spPr/>
+      </p:sp>
+      <p:sp>
+        <p:nvSpPr>
+          <p:cNvPr id="3" name="Notes Placeholder 2"/>
+          <p:cNvSpPr>
+            <a:spLocks noGrp="1"/>
+          </p:cNvSpPr>
+          <p:nvPr>
+            <p:ph type="body" idx="3" sz="quarter"/>
+          </p:nvPr>
+        </p:nvSpPr>
+        <p:spPr/>
+        <p:txBody>
+          <a:bodyPr/>
+          <a:lstStyle/>
+          <a:p>
+            <a:r>
+              <a:t>C 코드는 프로젝트 세 개로 나눴습니다. 변환 함수와 참고 소스 matrixCalcLib 은 CoordCore 라는 정적 라이브러리에 두고, 콘솔 radar_coord 와 MFC 다이얼로그 CoordUI 가 같은 라이브러리를 씁니다. 콘솔은 과제 3.1 값을 찍고, test 인자를 주면 시험 12항목을 돌립니다.</a:t>
+            </a:r>
+          </a:p>
+          <a:p/>
+          <a:p>
+            <a:r>
+              <a:t>CoordUI 는 입력칸에 측정값, 플랫폼 위치와 자세, 안테나 설치값을 넣으면 바로 다시 계산해서 오른쪽 표에 단계별 값을, 아래에 최종 출력 두 가지와 왕복오차를 보여줍니다. 다이얼로그에는 변환 로직이 없고 라이브러리의 f_ 함수만 부릅니다.</a:t>
+            </a:r>
+          </a:p>
+          <a:p/>
+          <a:p>
+            <a:r>
+              <a:t>자세는 슬라이더로도 바꿀 수 있어서, roll 을 10도, 20도로 돌리면 앞 장 실험 B 의 고각 변화가 그 자리에서 보입니다. 발표 중에 직접 돌려 보겠습니다.</a:t>
+            </a:r>
+          </a:p>
+        </p:txBody>
+      </p:sp>
+      <p:sp>
+        <p:nvSpPr>
+          <p:cNvPr id="4" name="Slide Number Placeholder 3"/>
+          <p:cNvSpPr>
+            <a:spLocks noGrp="1"/>
+          </p:cNvSpPr>
+          <p:nvPr>
+            <p:ph type="sldNum" idx="5" sz="quarter"/>
+          </p:nvPr>
+        </p:nvSpPr>
+        <p:spPr/>
+      </p:sp>
+    </p:spTree>
   </p:cSld>
   <p:clrMapOvr>
     <a:masterClrMapping/>
@@ -2998,10 +3451,20 @@
           <a:lstStyle/>
           <a:p>
             <a:r>
-              <a:rPr lang="en-US" dirty="0"/>
-              <a:t>표적은 하나뿐인데 언어가 여러 개입니다. 화자를 바꿀 때마다 통역이 필요하고, 그 통역이 좌표변환입니다.</a:t>
-            </a:r>
-            <a:endParaRPr lang="en-US" dirty="0"/>
+              <a:t>이 슬라이드의 다섯 줄은 전부 같은 표적 하나입니다.</a:t>
+            </a:r>
+          </a:p>
+          <a:p/>
+          <a:p>
+            <a:r>
+              <a:t>안테나는 "정면에서 오른쪽 30도, 20 km", 함선은 "선수 기준 오른쪽 뒤 120도, 20 km", 바다 위 이 지점 기준으로는 "남쪽으로 19,340 m, 동쪽으로 5,155 m, 위로 10 m", 지구 기준으로는 지구 중심에서 (−3,125,892, +4,093,775, +3,749,164) m, 지도 기준으로는 "북위 36.2337도, 동경 127.3643도, 고도 41.5 m" 입니다.</a:t>
+            </a:r>
+          </a:p>
+          <a:p/>
+          <a:p>
+            <a:r>
+              <a:t>다섯 문장 모두 맞습니다. 다른 것은 기준점, 즉 원점과 기준 방향, 즉 축뿐입니다. 표적은 하나인데 언어가 여러 개이고, 화자를 바꿀 때마다 통역이 필요합니다. 그 통역이 좌표변환입니다.</a:t>
+            </a:r>
           </a:p>
         </p:txBody>
       </p:sp>
@@ -3086,10 +3549,32 @@
           <a:lstStyle/>
           <a:p>
             <a:r>
-              <a:rPr lang="en-US" dirty="0"/>
-              <a:t/>
-            </a:r>
-            <a:endParaRPr lang="en-US" dirty="0"/>
+              <a:t>새 좌표계를 만나면 세 가지만 확인하면 됩니다.</a:t>
+            </a:r>
+          </a:p>
+          <a:p/>
+          <a:p>
+            <a:r>
+              <a:t>첫째, 원점이 어디인가. (0, 0, 0) 이 물리적으로 어느 지점인지입니다. 평행이동의 기준이 됩니다.</a:t>
+            </a:r>
+          </a:p>
+          <a:p/>
+          <a:p>
+            <a:r>
+              <a:t>둘째, 축이 어디를 향하는가. 특히 z 가 위인지 아래인지입니다. 항법 분야는 z 를 아래로 두는 관습이 있어서 처음엔 거의 반드시 헷갈립니다.</a:t>
+            </a:r>
+          </a:p>
+          <a:p/>
+          <a:p>
+            <a:r>
+              <a:t>셋째, 무엇에 붙어 있는가. 배에 붙어 있으면 배가 흔들릴 때 좌표계도 같이 흔들립니다. 표적이 가만히 있어도 좌표값이 변합니다.</a:t>
+            </a:r>
+          </a:p>
+          <a:p/>
+          <a:p>
+            <a:r>
+              <a:t>이 발표의 약속 하나만 기억해 주십시오. 모든 좌표계에서 z 는 아래입니다. "10 m 위" 는 z = −10 입니다.</a:t>
+            </a:r>
           </a:p>
         </p:txBody>
       </p:sp>
@@ -3174,10 +3659,26 @@
           <a:lstStyle/>
           <a:p>
             <a:r>
-              <a:rPr lang="en-US" dirty="0"/>
-              <a:t/>
-            </a:r>
-            <a:endParaRPr lang="en-US" dirty="0"/>
+              <a:t>복잡한 수학처럼 들리지만 실제로 하는 일은 두 가지입니다.</a:t>
+            </a:r>
+          </a:p>
+          <a:p/>
+          <a:p>
+            <a:r>
+              <a:t>하나는 회전입니다. 기준 방향이 다를 때 필요합니다. 안테나가 우현 90도를 보고 있으니 안테나의 "앞" 은 배의 "오른쪽" 입니다.</a:t>
+            </a:r>
+          </a:p>
+          <a:p/>
+          <a:p>
+            <a:r>
+              <a:t>다른 하나는 평행이동입니다. 기준점이 다를 때 필요합니다. 안테나가 무게중심에서 30 m 뒤, 10 m 위에 있으면 그만큼 옮겨줘야 합니다. 이 오프셋을 레버암이라고 부릅니다.</a:t>
+            </a:r>
+          </a:p>
+          <a:p/>
+          <a:p>
+            <a:r>
+              <a:t>아래 식이 그 둘을 한 줄로 쓴 것입니다. 함선 좌표 = Rz(90°) 곱하기 안테나 좌표, 더하기 (−30, 0, −10). 모든 단계는 이 둘 중 하나거나 둘 다입니다. 그게 전부입니다.</a:t>
+            </a:r>
           </a:p>
         </p:txBody>
       </p:sp>
@@ -3262,10 +3763,14 @@
           <a:lstStyle/>
           <a:p>
             <a:r>
-              <a:rPr lang="en-US" dirty="0"/>
-              <a:t>두 그림에서 주황색 화살표의 위치는 완전히 같습니다. 달라진 것은 축뿐입니다.</a:t>
-            </a:r>
-            <a:endParaRPr lang="en-US" dirty="0"/>
+              <a:t>회전에서 가장 헷갈리는 부분입니다. 두 그림에서 주황색 화살표, 즉 표적의 위치는 완전히 같습니다. 달라진 것은 축뿐입니다.</a:t>
+            </a:r>
+          </a:p>
+          <a:p/>
+          <a:p>
+            <a:r>
+              <a:t>안테나의 정면이 함선의 우현이라서, 같은 표적이 (+17,320, +10,000) 에서 (−10,000, +17,320) 이 됩니다. 두 숫자가 자리를 바꾸고 부호 하나가 뒤집혔습니다. 이것이 90도 회전의 정체입니다. 표적을 돌리는 것이 아니라 자를 돌리는 것입니다.</a:t>
+            </a:r>
           </a:p>
         </p:txBody>
       </p:sp>
@@ -3350,10 +3855,20 @@
           <a:lstStyle/>
           <a:p>
             <a:r>
-              <a:rPr lang="en-US" dirty="0"/>
-              <a:t/>
-            </a:r>
-            <a:endParaRPr lang="en-US" dirty="0"/>
+              <a:t>회전행렬은 외울 것이 아니라 삼각함수 덧셈정리 한 줄에서 바로 나옵니다. 각도 θ 만큼 돌린 축에서 좌표를 다시 읽으면 cos 과 sin 이 이렇게 배치된 3x3 행렬 Rz(θ) 가 됩니다.</a:t>
+            </a:r>
+          </a:p>
+          <a:p/>
+          <a:p>
+            <a:r>
+              <a:t>회전행렬은 늘 세 가지 성질을 갖습니다. 각 행과 열의 길이가 1 이고 서로 직교한다, 행렬식이 +1 이라서 늘이거나 뒤집지 않는다, 그리고 역행렬이 전치와 같다. 마지막 성질 덕분에 되돌리기가 공짜입니다.</a:t>
+            </a:r>
+          </a:p>
+          <a:p/>
+          <a:p>
+            <a:r>
+              <a:t>행렬을 쓰는 이유는 세 가지입니다. 세 축을 한 번에 처리하고, 여러 회전을 곱해서 하나로 합치고, 되돌아갈 때는 전치만 하면 됩니다. 구현에서도 정확히 이 세 가지만 씁니다.</a:t>
+            </a:r>
           </a:p>
         </p:txBody>
       </p:sp>
@@ -3438,10 +3953,8 @@
           <a:lstStyle/>
           <a:p>
             <a:r>
-              <a:rPr lang="en-US" dirty="0"/>
-              <a:t/>
-            </a:r>
-            <a:endParaRPr lang="en-US" dirty="0"/>
+              <a:t>첫 번째 주제입니다. 여섯 가지 좌표계를 측정에서 지도까지 순서대로 보겠습니다. 각각 원점이 어디이고, 축이 어디를 향하고, 무엇에 붙어 있는지를 기준으로 봅니다.</a:t>
+            </a:r>
           </a:p>
         </p:txBody>
       </p:sp>
@@ -3955,6 +4468,10 @@
             <a:prstDash val="solid"/>
           </a:ln>
         </p:spPr>
+        <p:txBody>
+          <a:bodyPr/>
+          <a:p/>
+        </p:txBody>
       </p:sp>
       <p:sp>
         <p:nvSpPr>
@@ -4057,6 +4574,10 @@
             <a:prstDash val="solid"/>
           </a:ln>
         </p:spPr>
+        <p:txBody>
+          <a:bodyPr/>
+          <a:p/>
+        </p:txBody>
       </p:sp>
       <p:sp>
         <p:nvSpPr>
@@ -4159,6 +4680,10 @@
             <a:prstDash val="solid"/>
           </a:ln>
         </p:spPr>
+        <p:txBody>
+          <a:bodyPr/>
+          <a:p/>
+        </p:txBody>
       </p:sp>
       <p:sp>
         <p:nvSpPr>
@@ -4261,6 +4786,10 @@
             <a:prstDash val="solid"/>
           </a:ln>
         </p:spPr>
+        <p:txBody>
+          <a:bodyPr/>
+          <a:p/>
+        </p:txBody>
       </p:sp>
       <p:sp>
         <p:nvSpPr>
@@ -4363,6 +4892,10 @@
             <a:prstDash val="solid"/>
           </a:ln>
         </p:spPr>
+        <p:txBody>
+          <a:bodyPr/>
+          <a:p/>
+        </p:txBody>
       </p:sp>
       <p:sp>
         <p:nvSpPr>
@@ -4465,6 +4998,10 @@
             <a:prstDash val="solid"/>
           </a:ln>
         </p:spPr>
+        <p:txBody>
+          <a:bodyPr/>
+          <a:p/>
+        </p:txBody>
       </p:sp>
       <p:sp>
         <p:nvSpPr>
@@ -4680,6 +5217,10 @@
             <a:prstDash val="solid"/>
           </a:ln>
         </p:spPr>
+        <p:txBody>
+          <a:bodyPr/>
+          <a:p/>
+        </p:txBody>
       </p:sp>
       <p:sp>
         <p:nvSpPr>
@@ -4782,6 +5323,10 @@
             <a:prstDash val="solid"/>
           </a:ln>
         </p:spPr>
+        <p:txBody>
+          <a:bodyPr/>
+          <a:p/>
+        </p:txBody>
       </p:sp>
       <p:sp>
         <p:nvSpPr>
@@ -4884,6 +5429,10 @@
             <a:prstDash val="solid"/>
           </a:ln>
         </p:spPr>
+        <p:txBody>
+          <a:bodyPr/>
+          <a:p/>
+        </p:txBody>
       </p:sp>
       <p:sp>
         <p:nvSpPr>
@@ -4986,6 +5535,10 @@
             <a:prstDash val="solid"/>
           </a:ln>
         </p:spPr>
+        <p:txBody>
+          <a:bodyPr/>
+          <a:p/>
+        </p:txBody>
       </p:sp>
       <p:sp>
         <p:nvSpPr>
@@ -5088,6 +5641,10 @@
             <a:prstDash val="solid"/>
           </a:ln>
         </p:spPr>
+        <p:txBody>
+          <a:bodyPr/>
+          <a:p/>
+        </p:txBody>
       </p:sp>
       <p:sp>
         <p:nvSpPr>
@@ -5190,6 +5747,10 @@
             <a:prstDash val="solid"/>
           </a:ln>
         </p:spPr>
+        <p:txBody>
+          <a:bodyPr/>
+          <a:p/>
+        </p:txBody>
       </p:sp>
       <p:sp>
         <p:nvSpPr>
@@ -5280,6 +5841,10 @@
             <a:prstDash val="solid"/>
           </a:ln>
         </p:spPr>
+        <p:txBody>
+          <a:bodyPr/>
+          <a:p/>
+        </p:txBody>
       </p:sp>
       <p:sp>
         <p:nvSpPr>
@@ -5506,6 +6071,10 @@
             <a:prstDash val="solid"/>
           </a:ln>
         </p:spPr>
+        <p:txBody>
+          <a:bodyPr/>
+          <a:p/>
+        </p:txBody>
       </p:sp>
       <p:sp>
         <p:nvSpPr>
@@ -5721,6 +6290,10 @@
             <a:prstDash val="solid"/>
           </a:ln>
         </p:spPr>
+        <p:txBody>
+          <a:bodyPr/>
+          <a:p/>
+        </p:txBody>
       </p:sp>
       <p:sp>
         <p:nvSpPr>
@@ -5823,6 +6396,10 @@
             <a:prstDash val="solid"/>
           </a:ln>
         </p:spPr>
+        <p:txBody>
+          <a:bodyPr/>
+          <a:p/>
+        </p:txBody>
       </p:sp>
       <p:sp>
         <p:nvSpPr>
@@ -5925,6 +6502,10 @@
             <a:prstDash val="solid"/>
           </a:ln>
         </p:spPr>
+        <p:txBody>
+          <a:bodyPr/>
+          <a:p/>
+        </p:txBody>
       </p:sp>
       <p:sp>
         <p:nvSpPr>
@@ -6027,6 +6608,10 @@
             <a:prstDash val="solid"/>
           </a:ln>
         </p:spPr>
+        <p:txBody>
+          <a:bodyPr/>
+          <a:p/>
+        </p:txBody>
       </p:sp>
       <p:sp>
         <p:nvSpPr>
@@ -6129,6 +6714,10 @@
             <a:prstDash val="solid"/>
           </a:ln>
         </p:spPr>
+        <p:txBody>
+          <a:bodyPr/>
+          <a:p/>
+        </p:txBody>
       </p:sp>
       <p:sp>
         <p:nvSpPr>
@@ -6231,6 +6820,10 @@
             <a:prstDash val="solid"/>
           </a:ln>
         </p:spPr>
+        <p:txBody>
+          <a:bodyPr/>
+          <a:p/>
+        </p:txBody>
       </p:sp>
       <p:sp>
         <p:nvSpPr>
@@ -6297,6 +6890,10 @@
             <a:prstDash val="solid"/>
           </a:ln>
         </p:spPr>
+        <p:txBody>
+          <a:bodyPr/>
+          <a:p/>
+        </p:txBody>
       </p:sp>
       <p:sp>
         <p:nvSpPr>
@@ -6445,6 +7042,10 @@
             <a:prstDash val="solid"/>
           </a:ln>
         </p:spPr>
+        <p:txBody>
+          <a:bodyPr/>
+          <a:p/>
+        </p:txBody>
       </p:sp>
       <p:sp>
         <p:nvSpPr>
@@ -6554,6 +7155,10 @@
             <a:prstDash val="solid"/>
           </a:ln>
         </p:spPr>
+        <p:txBody>
+          <a:bodyPr/>
+          <a:p/>
+        </p:txBody>
       </p:sp>
       <p:sp>
         <p:nvSpPr>
@@ -7022,6 +7627,10 @@
             <a:prstDash val="solid"/>
           </a:ln>
         </p:spPr>
+        <p:txBody>
+          <a:bodyPr/>
+          <a:p/>
+        </p:txBody>
       </p:sp>
       <p:sp>
         <p:nvSpPr>
@@ -7124,6 +7733,10 @@
             <a:prstDash val="solid"/>
           </a:ln>
         </p:spPr>
+        <p:txBody>
+          <a:bodyPr/>
+          <a:p/>
+        </p:txBody>
       </p:sp>
       <p:sp>
         <p:nvSpPr>
@@ -7226,6 +7839,10 @@
             <a:prstDash val="solid"/>
           </a:ln>
         </p:spPr>
+        <p:txBody>
+          <a:bodyPr/>
+          <a:p/>
+        </p:txBody>
       </p:sp>
       <p:sp>
         <p:nvSpPr>
@@ -7328,6 +7945,10 @@
             <a:prstDash val="solid"/>
           </a:ln>
         </p:spPr>
+        <p:txBody>
+          <a:bodyPr/>
+          <a:p/>
+        </p:txBody>
       </p:sp>
       <p:sp>
         <p:nvSpPr>
@@ -7430,6 +8051,10 @@
             <a:prstDash val="solid"/>
           </a:ln>
         </p:spPr>
+        <p:txBody>
+          <a:bodyPr/>
+          <a:p/>
+        </p:txBody>
       </p:sp>
       <p:sp>
         <p:nvSpPr>
@@ -7532,6 +8157,10 @@
             <a:prstDash val="solid"/>
           </a:ln>
         </p:spPr>
+        <p:txBody>
+          <a:bodyPr/>
+          <a:p/>
+        </p:txBody>
       </p:sp>
       <p:sp>
         <p:nvSpPr>
@@ -7622,6 +8251,10 @@
             <a:prstDash val="solid"/>
           </a:ln>
         </p:spPr>
+        <p:txBody>
+          <a:bodyPr/>
+          <a:p/>
+        </p:txBody>
       </p:sp>
       <p:sp>
         <p:nvSpPr>
@@ -7770,6 +8403,10 @@
             <a:prstDash val="solid"/>
           </a:ln>
         </p:spPr>
+        <p:txBody>
+          <a:bodyPr/>
+          <a:p/>
+        </p:txBody>
       </p:sp>
       <p:sp>
         <p:nvSpPr>
@@ -8047,6 +8684,10 @@
             <a:prstDash val="solid"/>
           </a:ln>
         </p:spPr>
+        <p:txBody>
+          <a:bodyPr/>
+          <a:p/>
+        </p:txBody>
       </p:sp>
       <p:sp>
         <p:nvSpPr>
@@ -8149,6 +8790,10 @@
             <a:prstDash val="solid"/>
           </a:ln>
         </p:spPr>
+        <p:txBody>
+          <a:bodyPr/>
+          <a:p/>
+        </p:txBody>
       </p:sp>
       <p:sp>
         <p:nvSpPr>
@@ -8251,6 +8896,10 @@
             <a:prstDash val="solid"/>
           </a:ln>
         </p:spPr>
+        <p:txBody>
+          <a:bodyPr/>
+          <a:p/>
+        </p:txBody>
       </p:sp>
       <p:sp>
         <p:nvSpPr>
@@ -8353,6 +9002,10 @@
             <a:prstDash val="solid"/>
           </a:ln>
         </p:spPr>
+        <p:txBody>
+          <a:bodyPr/>
+          <a:p/>
+        </p:txBody>
       </p:sp>
       <p:sp>
         <p:nvSpPr>
@@ -8455,6 +9108,10 @@
             <a:prstDash val="solid"/>
           </a:ln>
         </p:spPr>
+        <p:txBody>
+          <a:bodyPr/>
+          <a:p/>
+        </p:txBody>
       </p:sp>
       <p:sp>
         <p:nvSpPr>
@@ -8557,6 +9214,10 @@
             <a:prstDash val="solid"/>
           </a:ln>
         </p:spPr>
+        <p:txBody>
+          <a:bodyPr/>
+          <a:p/>
+        </p:txBody>
       </p:sp>
       <p:sp>
         <p:nvSpPr>
@@ -8647,6 +9308,10 @@
             <a:prstDash val="solid"/>
           </a:ln>
         </p:spPr>
+        <p:txBody>
+          <a:bodyPr/>
+          <a:p/>
+        </p:txBody>
       </p:sp>
       <p:sp>
         <p:nvSpPr>
@@ -8755,6 +9420,10 @@
             <a:prstDash val="solid"/>
           </a:ln>
         </p:spPr>
+        <p:txBody>
+          <a:bodyPr/>
+          <a:p/>
+        </p:txBody>
       </p:sp>
       <p:sp>
         <p:nvSpPr>
@@ -8863,6 +9532,10 @@
             <a:prstDash val="solid"/>
           </a:ln>
         </p:spPr>
+        <p:txBody>
+          <a:bodyPr/>
+          <a:p/>
+        </p:txBody>
       </p:sp>
       <p:sp>
         <p:nvSpPr>
@@ -8971,6 +9644,10 @@
             <a:prstDash val="solid"/>
           </a:ln>
         </p:spPr>
+        <p:txBody>
+          <a:bodyPr/>
+          <a:p/>
+        </p:txBody>
       </p:sp>
       <p:sp>
         <p:nvSpPr>
@@ -9189,6 +9866,10 @@
             <a:prstDash val="solid"/>
           </a:ln>
         </p:spPr>
+        <p:txBody>
+          <a:bodyPr/>
+          <a:p/>
+        </p:txBody>
       </p:sp>
       <p:sp>
         <p:nvSpPr>
@@ -9291,6 +9972,10 @@
             <a:prstDash val="solid"/>
           </a:ln>
         </p:spPr>
+        <p:txBody>
+          <a:bodyPr/>
+          <a:p/>
+        </p:txBody>
       </p:sp>
       <p:sp>
         <p:nvSpPr>
@@ -9393,6 +10078,10 @@
             <a:prstDash val="solid"/>
           </a:ln>
         </p:spPr>
+        <p:txBody>
+          <a:bodyPr/>
+          <a:p/>
+        </p:txBody>
       </p:sp>
       <p:sp>
         <p:nvSpPr>
@@ -9495,6 +10184,10 @@
             <a:prstDash val="solid"/>
           </a:ln>
         </p:spPr>
+        <p:txBody>
+          <a:bodyPr/>
+          <a:p/>
+        </p:txBody>
       </p:sp>
       <p:sp>
         <p:nvSpPr>
@@ -9597,6 +10290,10 @@
             <a:prstDash val="solid"/>
           </a:ln>
         </p:spPr>
+        <p:txBody>
+          <a:bodyPr/>
+          <a:p/>
+        </p:txBody>
       </p:sp>
       <p:sp>
         <p:nvSpPr>
@@ -9699,6 +10396,10 @@
             <a:prstDash val="solid"/>
           </a:ln>
         </p:spPr>
+        <p:txBody>
+          <a:bodyPr/>
+          <a:p/>
+        </p:txBody>
       </p:sp>
       <p:sp>
         <p:nvSpPr>
@@ -9765,6 +10466,10 @@
             <a:prstDash val="solid"/>
           </a:ln>
         </p:spPr>
+        <p:txBody>
+          <a:bodyPr/>
+          <a:p/>
+        </p:txBody>
       </p:sp>
       <p:sp>
         <p:nvSpPr>
@@ -9893,6 +10598,10 @@
             <a:prstDash val="solid"/>
           </a:ln>
         </p:spPr>
+        <p:txBody>
+          <a:bodyPr/>
+          <a:p/>
+        </p:txBody>
       </p:sp>
       <p:sp>
         <p:nvSpPr>
@@ -10021,6 +10730,10 @@
             <a:prstDash val="solid"/>
           </a:ln>
         </p:spPr>
+        <p:txBody>
+          <a:bodyPr/>
+          <a:p/>
+        </p:txBody>
       </p:sp>
       <p:sp>
         <p:nvSpPr>
@@ -10493,6 +11206,10 @@
             <a:prstDash val="solid"/>
           </a:ln>
         </p:spPr>
+        <p:txBody>
+          <a:bodyPr/>
+          <a:p/>
+        </p:txBody>
       </p:sp>
       <p:sp>
         <p:nvSpPr>
@@ -10595,6 +11312,10 @@
             <a:prstDash val="solid"/>
           </a:ln>
         </p:spPr>
+        <p:txBody>
+          <a:bodyPr/>
+          <a:p/>
+        </p:txBody>
       </p:sp>
       <p:sp>
         <p:nvSpPr>
@@ -10697,6 +11418,10 @@
             <a:prstDash val="solid"/>
           </a:ln>
         </p:spPr>
+        <p:txBody>
+          <a:bodyPr/>
+          <a:p/>
+        </p:txBody>
       </p:sp>
       <p:sp>
         <p:nvSpPr>
@@ -10799,6 +11524,10 @@
             <a:prstDash val="solid"/>
           </a:ln>
         </p:spPr>
+        <p:txBody>
+          <a:bodyPr/>
+          <a:p/>
+        </p:txBody>
       </p:sp>
       <p:sp>
         <p:nvSpPr>
@@ -10901,6 +11630,10 @@
             <a:prstDash val="solid"/>
           </a:ln>
         </p:spPr>
+        <p:txBody>
+          <a:bodyPr/>
+          <a:p/>
+        </p:txBody>
       </p:sp>
       <p:sp>
         <p:nvSpPr>
@@ -11003,6 +11736,10 @@
             <a:prstDash val="solid"/>
           </a:ln>
         </p:spPr>
+        <p:txBody>
+          <a:bodyPr/>
+          <a:p/>
+        </p:txBody>
       </p:sp>
       <p:sp>
         <p:nvSpPr>
@@ -12217,6 +12954,10 @@
             <a:prstDash val="solid"/>
           </a:ln>
         </p:spPr>
+        <p:txBody>
+          <a:bodyPr/>
+          <a:p/>
+        </p:txBody>
       </p:sp>
       <p:sp>
         <p:nvSpPr>
@@ -12319,6 +13060,10 @@
             <a:prstDash val="solid"/>
           </a:ln>
         </p:spPr>
+        <p:txBody>
+          <a:bodyPr/>
+          <a:p/>
+        </p:txBody>
       </p:sp>
       <p:sp>
         <p:nvSpPr>
@@ -12421,6 +13166,10 @@
             <a:prstDash val="solid"/>
           </a:ln>
         </p:spPr>
+        <p:txBody>
+          <a:bodyPr/>
+          <a:p/>
+        </p:txBody>
       </p:sp>
       <p:sp>
         <p:nvSpPr>
@@ -12523,6 +13272,10 @@
             <a:prstDash val="solid"/>
           </a:ln>
         </p:spPr>
+        <p:txBody>
+          <a:bodyPr/>
+          <a:p/>
+        </p:txBody>
       </p:sp>
       <p:sp>
         <p:nvSpPr>
@@ -12625,6 +13378,10 @@
             <a:prstDash val="solid"/>
           </a:ln>
         </p:spPr>
+        <p:txBody>
+          <a:bodyPr/>
+          <a:p/>
+        </p:txBody>
       </p:sp>
       <p:sp>
         <p:nvSpPr>
@@ -12727,6 +13484,10 @@
             <a:prstDash val="solid"/>
           </a:ln>
         </p:spPr>
+        <p:txBody>
+          <a:bodyPr/>
+          <a:p/>
+        </p:txBody>
       </p:sp>
       <p:sp>
         <p:nvSpPr>
@@ -12793,6 +13554,10 @@
             <a:prstDash val="solid"/>
           </a:ln>
         </p:spPr>
+        <p:txBody>
+          <a:bodyPr/>
+          <a:p/>
+        </p:txBody>
       </p:sp>
       <p:sp>
         <p:nvSpPr>
@@ -12895,6 +13660,10 @@
             <a:prstDash val="solid"/>
           </a:ln>
         </p:spPr>
+        <p:txBody>
+          <a:bodyPr/>
+          <a:p/>
+        </p:txBody>
       </p:sp>
       <p:sp>
         <p:nvSpPr>
@@ -13674,6 +14443,10 @@
             <a:prstDash val="solid"/>
           </a:ln>
         </p:spPr>
+        <p:txBody>
+          <a:bodyPr/>
+          <a:p/>
+        </p:txBody>
       </p:sp>
       <p:sp>
         <p:nvSpPr>
@@ -13776,6 +14549,10 @@
             <a:prstDash val="solid"/>
           </a:ln>
         </p:spPr>
+        <p:txBody>
+          <a:bodyPr/>
+          <a:p/>
+        </p:txBody>
       </p:sp>
       <p:sp>
         <p:nvSpPr>
@@ -13878,6 +14655,10 @@
             <a:prstDash val="solid"/>
           </a:ln>
         </p:spPr>
+        <p:txBody>
+          <a:bodyPr/>
+          <a:p/>
+        </p:txBody>
       </p:sp>
       <p:sp>
         <p:nvSpPr>
@@ -13980,6 +14761,10 @@
             <a:prstDash val="solid"/>
           </a:ln>
         </p:spPr>
+        <p:txBody>
+          <a:bodyPr/>
+          <a:p/>
+        </p:txBody>
       </p:sp>
       <p:sp>
         <p:nvSpPr>
@@ -14082,6 +14867,10 @@
             <a:prstDash val="solid"/>
           </a:ln>
         </p:spPr>
+        <p:txBody>
+          <a:bodyPr/>
+          <a:p/>
+        </p:txBody>
       </p:sp>
       <p:sp>
         <p:nvSpPr>
@@ -14184,6 +14973,10 @@
             <a:prstDash val="solid"/>
           </a:ln>
         </p:spPr>
+        <p:txBody>
+          <a:bodyPr/>
+          <a:p/>
+        </p:txBody>
       </p:sp>
       <p:sp>
         <p:nvSpPr>
@@ -14274,6 +15067,10 @@
             <a:prstDash val="solid"/>
           </a:ln>
         </p:spPr>
+        <p:txBody>
+          <a:bodyPr/>
+          <a:p/>
+        </p:txBody>
       </p:sp>
       <p:sp>
         <p:nvSpPr>
@@ -14480,6 +15277,10 @@
             <a:prstDash val="solid"/>
           </a:ln>
         </p:spPr>
+        <p:txBody>
+          <a:bodyPr/>
+          <a:p/>
+        </p:txBody>
       </p:sp>
       <p:sp>
         <p:nvSpPr>
@@ -14608,6 +15409,10 @@
             <a:prstDash val="solid"/>
           </a:ln>
         </p:spPr>
+        <p:txBody>
+          <a:bodyPr/>
+          <a:p/>
+        </p:txBody>
       </p:sp>
       <p:sp>
         <p:nvSpPr>
@@ -14846,6 +15651,10 @@
             <a:prstDash val="solid"/>
           </a:ln>
         </p:spPr>
+        <p:txBody>
+          <a:bodyPr/>
+          <a:p/>
+        </p:txBody>
       </p:sp>
       <p:sp>
         <p:nvSpPr>
@@ -14948,6 +15757,10 @@
             <a:prstDash val="solid"/>
           </a:ln>
         </p:spPr>
+        <p:txBody>
+          <a:bodyPr/>
+          <a:p/>
+        </p:txBody>
       </p:sp>
       <p:sp>
         <p:nvSpPr>
@@ -15050,6 +15863,10 @@
             <a:prstDash val="solid"/>
           </a:ln>
         </p:spPr>
+        <p:txBody>
+          <a:bodyPr/>
+          <a:p/>
+        </p:txBody>
       </p:sp>
       <p:sp>
         <p:nvSpPr>
@@ -15152,6 +15969,10 @@
             <a:prstDash val="solid"/>
           </a:ln>
         </p:spPr>
+        <p:txBody>
+          <a:bodyPr/>
+          <a:p/>
+        </p:txBody>
       </p:sp>
       <p:sp>
         <p:nvSpPr>
@@ -15254,6 +16075,10 @@
             <a:prstDash val="solid"/>
           </a:ln>
         </p:spPr>
+        <p:txBody>
+          <a:bodyPr/>
+          <a:p/>
+        </p:txBody>
       </p:sp>
       <p:sp>
         <p:nvSpPr>
@@ -15356,6 +16181,10 @@
             <a:prstDash val="solid"/>
           </a:ln>
         </p:spPr>
+        <p:txBody>
+          <a:bodyPr/>
+          <a:p/>
+        </p:txBody>
       </p:sp>
       <p:sp>
         <p:nvSpPr>
@@ -15446,6 +16275,10 @@
             <a:prstDash val="solid"/>
           </a:ln>
         </p:spPr>
+        <p:txBody>
+          <a:bodyPr/>
+          <a:p/>
+        </p:txBody>
       </p:sp>
       <p:sp>
         <p:nvSpPr>
@@ -15594,6 +16427,10 @@
             <a:prstDash val="solid"/>
           </a:ln>
         </p:spPr>
+        <p:txBody>
+          <a:bodyPr/>
+          <a:p/>
+        </p:txBody>
       </p:sp>
       <p:sp>
         <p:nvSpPr>
@@ -15852,6 +16689,10 @@
             <a:prstDash val="solid"/>
           </a:ln>
         </p:spPr>
+        <p:txBody>
+          <a:bodyPr/>
+          <a:p/>
+        </p:txBody>
       </p:sp>
       <p:sp>
         <p:nvSpPr>
@@ -15954,6 +16795,10 @@
             <a:prstDash val="solid"/>
           </a:ln>
         </p:spPr>
+        <p:txBody>
+          <a:bodyPr/>
+          <a:p/>
+        </p:txBody>
       </p:sp>
       <p:sp>
         <p:nvSpPr>
@@ -16056,6 +16901,10 @@
             <a:prstDash val="solid"/>
           </a:ln>
         </p:spPr>
+        <p:txBody>
+          <a:bodyPr/>
+          <a:p/>
+        </p:txBody>
       </p:sp>
       <p:sp>
         <p:nvSpPr>
@@ -16158,6 +17007,10 @@
             <a:prstDash val="solid"/>
           </a:ln>
         </p:spPr>
+        <p:txBody>
+          <a:bodyPr/>
+          <a:p/>
+        </p:txBody>
       </p:sp>
       <p:sp>
         <p:nvSpPr>
@@ -16260,6 +17113,10 @@
             <a:prstDash val="solid"/>
           </a:ln>
         </p:spPr>
+        <p:txBody>
+          <a:bodyPr/>
+          <a:p/>
+        </p:txBody>
       </p:sp>
       <p:sp>
         <p:nvSpPr>
@@ -16362,6 +17219,10 @@
             <a:prstDash val="solid"/>
           </a:ln>
         </p:spPr>
+        <p:txBody>
+          <a:bodyPr/>
+          <a:p/>
+        </p:txBody>
       </p:sp>
       <p:sp>
         <p:nvSpPr>
@@ -16452,6 +17313,10 @@
             <a:prstDash val="solid"/>
           </a:ln>
         </p:spPr>
+        <p:txBody>
+          <a:bodyPr/>
+          <a:p/>
+        </p:txBody>
       </p:sp>
       <p:sp>
         <p:nvSpPr>
@@ -16741,6 +17606,10 @@
             <a:prstDash val="solid"/>
           </a:ln>
         </p:spPr>
+        <p:txBody>
+          <a:bodyPr/>
+          <a:p/>
+        </p:txBody>
       </p:sp>
       <p:sp>
         <p:nvSpPr>
@@ -16912,6 +17781,10 @@
           </a:solidFill>
           <a:ln/>
         </p:spPr>
+        <p:txBody>
+          <a:bodyPr/>
+          <a:p/>
+        </p:txBody>
       </p:sp>
       <p:sp>
         <p:nvSpPr>
@@ -17074,6 +17947,10 @@
           </a:solidFill>
           <a:ln/>
         </p:spPr>
+        <p:txBody>
+          <a:bodyPr/>
+          <a:p/>
+        </p:txBody>
       </p:sp>
       <p:sp>
         <p:nvSpPr>
@@ -20075,6 +20952,10 @@
             <a:prstDash val="solid"/>
           </a:ln>
         </p:spPr>
+        <p:txBody>
+          <a:bodyPr/>
+          <a:p/>
+        </p:txBody>
       </p:sp>
       <p:sp>
         <p:nvSpPr>
@@ -20251,6 +21132,10 @@
             <a:prstDash val="solid"/>
           </a:ln>
         </p:spPr>
+        <p:txBody>
+          <a:bodyPr/>
+          <a:p/>
+        </p:txBody>
       </p:sp>
       <p:sp>
         <p:nvSpPr>
@@ -20392,6 +21277,10 @@
             <a:prstDash val="solid"/>
           </a:ln>
         </p:spPr>
+        <p:txBody>
+          <a:bodyPr/>
+          <a:p/>
+        </p:txBody>
       </p:sp>
       <p:sp>
         <p:nvSpPr>
@@ -20533,6 +21422,10 @@
             <a:prstDash val="solid"/>
           </a:ln>
         </p:spPr>
+        <p:txBody>
+          <a:bodyPr/>
+          <a:p/>
+        </p:txBody>
       </p:sp>
       <p:sp>
         <p:nvSpPr>
@@ -20674,6 +21567,10 @@
             <a:prstDash val="solid"/>
           </a:ln>
         </p:spPr>
+        <p:txBody>
+          <a:bodyPr/>
+          <a:p/>
+        </p:txBody>
       </p:sp>
       <p:sp>
         <p:nvSpPr>
@@ -20815,6 +21712,10 @@
             <a:prstDash val="solid"/>
           </a:ln>
         </p:spPr>
+        <p:txBody>
+          <a:bodyPr/>
+          <a:p/>
+        </p:txBody>
       </p:sp>
       <p:sp>
         <p:nvSpPr>
@@ -20956,6 +21857,10 @@
             <a:prstDash val="solid"/>
           </a:ln>
         </p:spPr>
+        <p:txBody>
+          <a:bodyPr/>
+          <a:p/>
+        </p:txBody>
       </p:sp>
       <p:sp>
         <p:nvSpPr>
@@ -21422,7 +22327,7 @@
                 <a:ea typeface="Consolas" pitchFamily="34" charset="-122"/>
                 <a:cs typeface="Consolas" pitchFamily="34" charset="-120"/>
               </a:rPr>
-              <a:t>Bowring 공식 (반복 2회)</a:t>
+              <a:t>위도 · 고도 반복 계산 (값이 안 변할 때까지)</a:t>
             </a:r>
             <a:endParaRPr lang="en-US" sz="1200" dirty="0"/>
           </a:p>
@@ -23294,6 +24199,10 @@
             <a:prstDash val="solid"/>
           </a:ln>
         </p:spPr>
+        <p:txBody>
+          <a:bodyPr/>
+          <a:p/>
+        </p:txBody>
       </p:sp>
       <p:sp>
         <p:nvSpPr>
@@ -24931,6 +25840,10 @@
             <a:prstDash val="solid"/>
           </a:ln>
         </p:spPr>
+        <p:txBody>
+          <a:bodyPr/>
+          <a:p/>
+        </p:txBody>
       </p:sp>
       <p:sp>
         <p:nvSpPr>
@@ -25039,6 +25952,10 @@
             <a:prstDash val="solid"/>
           </a:ln>
         </p:spPr>
+        <p:txBody>
+          <a:bodyPr/>
+          <a:p/>
+        </p:txBody>
       </p:sp>
       <p:sp>
         <p:nvSpPr>
@@ -25147,6 +26064,10 @@
             <a:prstDash val="solid"/>
           </a:ln>
         </p:spPr>
+        <p:txBody>
+          <a:bodyPr/>
+          <a:p/>
+        </p:txBody>
       </p:sp>
       <p:sp>
         <p:nvSpPr>
@@ -25255,6 +26176,10 @@
             <a:prstDash val="solid"/>
           </a:ln>
         </p:spPr>
+        <p:txBody>
+          <a:bodyPr/>
+          <a:p/>
+        </p:txBody>
       </p:sp>
       <p:sp>
         <p:nvSpPr>
@@ -25458,6 +26383,10 @@
             <a:prstDash val="solid"/>
           </a:ln>
         </p:spPr>
+        <p:txBody>
+          <a:bodyPr/>
+          <a:p/>
+        </p:txBody>
       </p:sp>
       <p:sp>
         <p:nvSpPr>
@@ -25914,6 +26843,10 @@
             <a:prstDash val="solid"/>
           </a:ln>
         </p:spPr>
+        <p:txBody>
+          <a:bodyPr/>
+          <a:p/>
+        </p:txBody>
       </p:sp>
       <p:sp>
         <p:nvSpPr>
@@ -26142,6 +27075,10 @@
             <a:prstDash val="solid"/>
           </a:ln>
         </p:spPr>
+        <p:txBody>
+          <a:bodyPr/>
+          <a:p/>
+        </p:txBody>
       </p:sp>
       <p:sp>
         <p:nvSpPr>
@@ -26162,6 +27099,10 @@
           </a:solidFill>
           <a:ln/>
         </p:spPr>
+        <p:txBody>
+          <a:bodyPr/>
+          <a:p/>
+        </p:txBody>
       </p:sp>
       <p:sp>
         <p:nvSpPr>
@@ -26388,6 +27329,10 @@
             <a:prstDash val="solid"/>
           </a:ln>
         </p:spPr>
+        <p:txBody>
+          <a:bodyPr/>
+          <a:p/>
+        </p:txBody>
       </p:sp>
       <p:sp>
         <p:nvSpPr>
@@ -26408,6 +27353,10 @@
           </a:solidFill>
           <a:ln/>
         </p:spPr>
+        <p:txBody>
+          <a:bodyPr/>
+          <a:p/>
+        </p:txBody>
       </p:sp>
       <p:sp>
         <p:nvSpPr>
@@ -26634,6 +27583,10 @@
             <a:prstDash val="solid"/>
           </a:ln>
         </p:spPr>
+        <p:txBody>
+          <a:bodyPr/>
+          <a:p/>
+        </p:txBody>
       </p:sp>
       <p:sp>
         <p:nvSpPr>
@@ -26654,6 +27607,10 @@
           </a:solidFill>
           <a:ln/>
         </p:spPr>
+        <p:txBody>
+          <a:bodyPr/>
+          <a:p/>
+        </p:txBody>
       </p:sp>
       <p:sp>
         <p:nvSpPr>
@@ -26880,6 +27837,10 @@
             <a:prstDash val="solid"/>
           </a:ln>
         </p:spPr>
+        <p:txBody>
+          <a:bodyPr/>
+          <a:p/>
+        </p:txBody>
       </p:sp>
       <p:sp>
         <p:nvSpPr>
@@ -27017,6 +27978,10 @@
             <a:prstDash val="solid"/>
           </a:ln>
         </p:spPr>
+        <p:txBody>
+          <a:bodyPr/>
+          <a:p/>
+        </p:txBody>
       </p:sp>
       <p:sp>
         <p:nvSpPr>
@@ -27037,6 +28002,10 @@
           </a:solidFill>
           <a:ln/>
         </p:spPr>
+        <p:txBody>
+          <a:bodyPr/>
+          <a:p/>
+        </p:txBody>
       </p:sp>
       <p:sp>
         <p:nvSpPr>
@@ -27283,6 +28252,10 @@
             <a:prstDash val="solid"/>
           </a:ln>
         </p:spPr>
+        <p:txBody>
+          <a:bodyPr/>
+          <a:p/>
+        </p:txBody>
       </p:sp>
       <p:sp>
         <p:nvSpPr>
@@ -27303,6 +28276,10 @@
           </a:solidFill>
           <a:ln/>
         </p:spPr>
+        <p:txBody>
+          <a:bodyPr/>
+          <a:p/>
+        </p:txBody>
       </p:sp>
       <p:sp>
         <p:nvSpPr>
@@ -27415,7 +28392,7 @@
                 <a:ea typeface="Malgun Gothic" pitchFamily="34" charset="-122"/>
                 <a:cs typeface="Malgun Gothic" pitchFamily="34" charset="-120"/>
               </a:rPr>
-              <a:t>Bowring 공식 + 개선 반복</a:t>
+              <a:t>위도 · 고도 반복 계산</a:t>
             </a:r>
             <a:endParaRPr lang="en-US" sz="1200" dirty="0"/>
           </a:p>
@@ -27517,7 +28494,7 @@
                 <a:ea typeface="Malgun Gothic" pitchFamily="34" charset="-122"/>
                 <a:cs typeface="Malgun Gothic" pitchFamily="34" charset="-120"/>
               </a:rPr>
-              <a:t>→ 좋은 초기값을 잡고 두 번 다듬는다</a:t>
+              <a:t>→ 구로 본 위도에서 출발, 값이 안 변할 때까지 반복</a:t>
             </a:r>
             <a:endParaRPr lang="en-US" sz="1250" dirty="0"/>
           </a:p>
@@ -27549,6 +28526,10 @@
             <a:prstDash val="solid"/>
           </a:ln>
         </p:spPr>
+        <p:txBody>
+          <a:bodyPr/>
+          <a:p/>
+        </p:txBody>
       </p:sp>
       <p:sp>
         <p:nvSpPr>
@@ -27615,6 +28596,10 @@
             <a:prstDash val="solid"/>
           </a:ln>
         </p:spPr>
+        <p:txBody>
+          <a:bodyPr/>
+          <a:p/>
+        </p:txBody>
       </p:sp>
       <p:sp>
         <p:nvSpPr>
@@ -27853,6 +28838,10 @@
             <a:prstDash val="solid"/>
           </a:ln>
         </p:spPr>
+        <p:txBody>
+          <a:bodyPr/>
+          <a:p/>
+        </p:txBody>
       </p:sp>
       <p:sp>
         <p:nvSpPr>
@@ -27958,6 +28947,10 @@
             <a:prstDash val="solid"/>
           </a:ln>
         </p:spPr>
+        <p:txBody>
+          <a:bodyPr/>
+          <a:p/>
+        </p:txBody>
       </p:sp>
       <p:sp>
         <p:nvSpPr>
@@ -28127,6 +29120,10 @@
             <a:prstDash val="solid"/>
           </a:ln>
         </p:spPr>
+        <p:txBody>
+          <a:bodyPr/>
+          <a:p/>
+        </p:txBody>
       </p:sp>
       <p:sp>
         <p:nvSpPr>
@@ -28200,7 +29197,7 @@
                 <a:ea typeface="Malgun Gothic" pitchFamily="34" charset="-122"/>
                 <a:cs typeface="Malgun Gothic" pitchFamily="34" charset="-120"/>
               </a:rPr>
-              <a:t>입력값과 정확히 같은 값이 돌아왔습니다.  왕복오차 ΔR = 8.3e−10 m — 컴퓨터 반올림 수준입니다.</a:t>
+              <a:t>입력값과 정확히 같은 값이 돌아왔습니다.  왕복오차 ΔR = 0.0 m, ΔAz = 1.8e−12° — 컴퓨터 반올림 수준입니다.</a:t>
             </a:r>
             <a:endParaRPr lang="en-US" sz="1400" dirty="0"/>
           </a:p>
@@ -28427,7 +29424,7 @@
                 <a:ea typeface="Consolas" pitchFamily="34" charset="-122"/>
                 <a:cs typeface="Consolas" pitchFamily="34" charset="-120"/>
               </a:rPr>
-              <a:t>Visual Studio 2022  ·  C17  ·  경고 0건  ·  단위 시험 31항목 전부 통과</a:t>
+              <a:t>Visual Studio 2022  ·  C17  ·  경고 0건  ·  시험 12항목 전부 통과</a:t>
             </a:r>
             <a:endParaRPr lang="en-US" sz="1600" dirty="0"/>
           </a:p>
@@ -28569,6 +29566,10 @@
             <a:prstDash val="solid"/>
           </a:ln>
         </p:spPr>
+        <p:txBody>
+          <a:bodyPr/>
+          <a:p/>
+        </p:txBody>
       </p:sp>
       <p:sp>
         <p:nvSpPr>
@@ -28589,6 +29590,10 @@
           </a:solidFill>
           <a:ln/>
         </p:spPr>
+        <p:txBody>
+          <a:bodyPr/>
+          <a:p/>
+        </p:txBody>
       </p:sp>
       <p:sp>
         <p:nvSpPr>
@@ -28805,6 +29810,10 @@
             <a:prstDash val="solid"/>
           </a:ln>
         </p:spPr>
+        <p:txBody>
+          <a:bodyPr/>
+          <a:p/>
+        </p:txBody>
       </p:sp>
       <p:sp>
         <p:nvSpPr>
@@ -28825,6 +29834,10 @@
           </a:solidFill>
           <a:ln/>
         </p:spPr>
+        <p:txBody>
+          <a:bodyPr/>
+          <a:p/>
+        </p:txBody>
       </p:sp>
       <p:sp>
         <p:nvSpPr>
@@ -29041,6 +30054,10 @@
             <a:prstDash val="solid"/>
           </a:ln>
         </p:spPr>
+        <p:txBody>
+          <a:bodyPr/>
+          <a:p/>
+        </p:txBody>
       </p:sp>
       <p:sp>
         <p:nvSpPr>
@@ -29061,6 +30078,10 @@
           </a:solidFill>
           <a:ln/>
         </p:spPr>
+        <p:txBody>
+          <a:bodyPr/>
+          <a:p/>
+        </p:txBody>
       </p:sp>
       <p:sp>
         <p:nvSpPr>
@@ -29225,7 +30246,7 @@
                 <a:ea typeface="Malgun Gothic" pitchFamily="34" charset="-122"/>
                 <a:cs typeface="Malgun Gothic" pitchFamily="34" charset="-120"/>
               </a:rPr>
-              <a:t>왕복 시험 · 단위 시험 31항목</a:t>
+              <a:t>왕복 시험 · 시험 12항목</a:t>
             </a:r>
             <a:endParaRPr lang="en-US" sz="1350" dirty="0"/>
           </a:p>
@@ -29426,6 +30447,10 @@
             <a:prstDash val="solid"/>
           </a:ln>
         </p:spPr>
+        <p:txBody>
+          <a:bodyPr/>
+          <a:p/>
+        </p:txBody>
       </p:sp>
       <p:sp>
         <p:nvSpPr>
@@ -29541,7 +30566,7 @@
                 <a:ea typeface="Consolas" pitchFamily="34" charset="-122"/>
                 <a:cs typeface="Consolas" pitchFamily="34" charset="-120"/>
               </a:rPr>
-              <a:t>cf_dcm_ned_from_body()</a:t>
+              <a:t>f_BodyToNed()  /  f_NedToBody()</a:t>
             </a:r>
             <a:endParaRPr lang="en-US" sz="1150" dirty="0"/>
           </a:p>
@@ -29561,7 +30586,7 @@
                 <a:ea typeface="Consolas" pitchFamily="34" charset="-122"/>
                 <a:cs typeface="Consolas" pitchFamily="34" charset="-120"/>
               </a:rPr>
-              <a:t>cf_ned_from_body()  /  cf_body_from_ned()</a:t>
+              <a:t>f_AntToBody()  /  f_BodyToAnt()  /  f_EcefToLla()</a:t>
             </a:r>
             <a:endParaRPr lang="en-US" sz="1150" dirty="0"/>
           </a:p>
@@ -29593,6 +30618,10 @@
             <a:prstDash val="solid"/>
           </a:ln>
         </p:spPr>
+        <p:txBody>
+          <a:bodyPr/>
+          <a:p/>
+        </p:txBody>
       </p:sp>
       <p:sp>
         <p:nvSpPr>
@@ -29666,7 +30695,7 @@
                 <a:ea typeface="Malgun Gothic" pitchFamily="34" charset="-122"/>
                 <a:cs typeface="Malgun Gothic" pitchFamily="34" charset="-120"/>
               </a:rPr>
-              <a:t>좌표계마다 다른 타입을 쓴다</a:t>
+              <a:t>회전은 Rx·Ry·Rz 곱으로만 만든다</a:t>
             </a:r>
             <a:endParaRPr lang="en-US" sz="1600" dirty="0"/>
           </a:p>
@@ -29708,7 +30737,7 @@
                 <a:ea typeface="Consolas" pitchFamily="34" charset="-122"/>
                 <a:cs typeface="Consolas" pitchFamily="34" charset="-120"/>
               </a:rPr>
-              <a:t>pos_ned_t  /  pos_ecef_t  /  cf_polar_t</a:t>
+              <a:t>Matrix_Product3(&amp;Rz, &amp;Ry, &amp;Rx)  /  역변환은 Matrix_Transpose()</a:t>
             </a:r>
             <a:endParaRPr lang="en-US" sz="1150" dirty="0"/>
           </a:p>
@@ -29728,7 +30757,7 @@
                 <a:ea typeface="Consolas" pitchFamily="34" charset="-122"/>
                 <a:cs typeface="Consolas" pitchFamily="34" charset="-120"/>
               </a:rPr>
-              <a:t>double[3] 로 다니면 컴파일러가 못 잡는다</a:t>
+              <a:t>행렬 연산은 참고 소스 matrixCalcLib 그대로. 원소를 손으로 안 쓴다</a:t>
             </a:r>
             <a:endParaRPr lang="en-US" sz="1150" dirty="0"/>
           </a:p>
@@ -29760,6 +30789,10 @@
             <a:prstDash val="solid"/>
           </a:ln>
         </p:spPr>
+        <p:txBody>
+          <a:bodyPr/>
+          <a:p/>
+        </p:txBody>
       </p:sp>
       <p:sp>
         <p:nvSpPr>
@@ -29833,7 +30866,7 @@
                 <a:ea typeface="Malgun Gothic" pitchFamily="34" charset="-122"/>
                 <a:cs typeface="Malgun Gothic" pitchFamily="34" charset="-120"/>
               </a:rPr>
-              <a:t>변수 이름에 단위를 붙인다</a:t>
+              <a:t>단위는 안에서 하나로 통일한다</a:t>
             </a:r>
             <a:endParaRPr lang="en-US" sz="1600" dirty="0"/>
           </a:p>
@@ -29875,7 +30908,7 @@
                 <a:ea typeface="Consolas" pitchFamily="34" charset="-122"/>
                 <a:cs typeface="Consolas" pitchFamily="34" charset="-120"/>
               </a:rPr>
-              <a:t>range_m  /  az_rad  /  alt_m</a:t>
+              <a:t>rad · m 만 쓴다.  deg 는 DEG2RAD() / RAD2DEG() 로 입출력에서만</a:t>
             </a:r>
             <a:endParaRPr lang="en-US" sz="1150" dirty="0"/>
           </a:p>
@@ -29895,7 +30928,7 @@
                 <a:ea typeface="Consolas" pitchFamily="34" charset="-122"/>
                 <a:cs typeface="Consolas" pitchFamily="34" charset="-120"/>
               </a:rPr>
-              <a:t>주석은 읽히지 않지만 이름은 읽힌다</a:t>
+              <a:t>중간에 deg 가 섞이면 값이 그럴듯해서 더 못 잡는다</a:t>
             </a:r>
             <a:endParaRPr lang="en-US" sz="1150" dirty="0"/>
           </a:p>
@@ -29934,7 +30967,7 @@
                 <a:ea typeface="Malgun Gothic" pitchFamily="34" charset="-122"/>
                 <a:cs typeface="Malgun Gothic" pitchFamily="34" charset="-120"/>
               </a:rPr>
-              <a:t>단위 시험 9종 31항목 — 각 시험이 특정 유형의 버그를 겨냥합니다</a:t>
+              <a:t>시험 12항목 — 갔다가 돌아오면 원래 값이 나와야 합니다</a:t>
             </a:r>
             <a:endParaRPr lang="en-US" sz="1500" dirty="0"/>
           </a:p>
@@ -29985,7 +31018,7 @@
                           <a:ea typeface="Malgun Gothic" pitchFamily="34" charset="-122"/>
                           <a:cs typeface="Malgun Gothic" pitchFamily="34" charset="-120"/>
                         </a:rPr>
-                        <a:t>T1 행렬 성질</a:t>
+                        <a:t>단계별 왕복</a:t>
                       </a:r>
                       <a:endParaRPr lang="en-US" sz="1150" dirty="0">
                         <a:latin typeface="Malgun Gothic" charset="0"/>
@@ -30050,7 +31083,7 @@
                           <a:ea typeface="Malgun Gothic" pitchFamily="34" charset="-122"/>
                           <a:cs typeface="Malgun Gothic" pitchFamily="34" charset="-120"/>
                         </a:rPr>
-                        <a:t>det = +1, A^T·A = I</a:t>
+                        <a:t>극좌표↔직교 · 안테나↔동체 · 동체↔NED · NED↔ECEF</a:t>
                       </a:r>
                       <a:endParaRPr lang="en-US" sz="1150" dirty="0">
                         <a:latin typeface="Malgun Gothic" charset="0"/>
@@ -30115,7 +31148,7 @@
                           <a:ea typeface="Malgun Gothic" pitchFamily="34" charset="-122"/>
                           <a:cs typeface="Malgun Gothic" pitchFamily="34" charset="-120"/>
                         </a:rPr>
-                        <a:t>회전행렬 구성 오류</a:t>
+                        <a:t>부호 · 전치 방향 실수</a:t>
                       </a:r>
                       <a:endParaRPr lang="en-US" sz="1150" dirty="0">
                         <a:latin typeface="Malgun Gothic" charset="0"/>
@@ -30182,7 +31215,7 @@
                           <a:ea typeface="Malgun Gothic" pitchFamily="34" charset="-122"/>
                           <a:cs typeface="Malgun Gothic" pitchFamily="34" charset="-120"/>
                         </a:rPr>
-                        <a:t>T4 LLA↔ECEF 왕복</a:t>
+                        <a:t>LLA↔ECEF 왕복</a:t>
                       </a:r>
                       <a:endParaRPr lang="en-US" sz="1150" dirty="0">
                         <a:latin typeface="Malgun Gothic" charset="0"/>
@@ -30247,7 +31280,7 @@
                           <a:ea typeface="Malgun Gothic" pitchFamily="34" charset="-122"/>
                           <a:cs typeface="Malgun Gothic" pitchFamily="34" charset="-120"/>
                         </a:rPr>
-                        <a:t>20만 개 무작위 지점</a:t>
+                        <a:t>위도·경도·고도 격자 189개 지점</a:t>
                       </a:r>
                       <a:endParaRPr lang="en-US" sz="1150" dirty="0">
                         <a:latin typeface="Malgun Gothic" charset="0"/>
@@ -30379,7 +31412,7 @@
                           <a:ea typeface="Malgun Gothic" pitchFamily="34" charset="-122"/>
                           <a:cs typeface="Malgun Gothic" pitchFamily="34" charset="-120"/>
                         </a:rPr>
-                        <a:t>T8 비대칭 자세</a:t>
+                        <a:t>비대칭 자세</a:t>
                       </a:r>
                       <a:endParaRPr lang="en-US" sz="1150" dirty="0">
                         <a:latin typeface="Malgun Gothic" charset="0"/>
@@ -30576,7 +31609,7 @@
                           <a:ea typeface="Malgun Gothic" pitchFamily="34" charset="-122"/>
                           <a:cs typeface="Malgun Gothic" pitchFamily="34" charset="-120"/>
                         </a:rPr>
-                        <a:t>T9 부호 민감도</a:t>
+                        <a:t>예제값 확인</a:t>
                       </a:r>
                       <a:endParaRPr lang="en-US" sz="1150" dirty="0">
                         <a:latin typeface="Malgun Gothic" charset="0"/>
@@ -30641,7 +31674,7 @@
                           <a:ea typeface="Malgun Gothic" pitchFamily="34" charset="-122"/>
                           <a:cs typeface="Malgun Gothic" pitchFamily="34" charset="-120"/>
                         </a:rPr>
-                        <a:t>부호를 뒤집으면 결과가 달라지는가</a:t>
+                        <a:t>동체 좌표 손계산 · 표적 LLA · 왕복 R/Az/El</a:t>
                       </a:r>
                       <a:endParaRPr lang="en-US" sz="1150" dirty="0">
                         <a:latin typeface="Malgun Gothic" charset="0"/>
@@ -30706,7 +31739,7 @@
                           <a:ea typeface="Malgun Gothic" pitchFamily="34" charset="-122"/>
                           <a:cs typeface="Malgun Gothic" pitchFamily="34" charset="-120"/>
                         </a:rPr>
-                        <a:t>그 항이 실제로 안 쓰이는 실수</a:t>
+                        <a:t>체인 순서 · 방향 실수</a:t>
                       </a:r>
                       <a:endParaRPr lang="en-US" sz="1150" dirty="0">
                         <a:latin typeface="Malgun Gothic" charset="0"/>
@@ -30895,6 +31928,10 @@
             <a:prstDash val="solid"/>
           </a:ln>
         </p:spPr>
+        <p:txBody>
+          <a:bodyPr/>
+          <a:p/>
+        </p:txBody>
       </p:sp>
       <p:sp>
         <p:nvSpPr>
@@ -31234,6 +32271,10 @@
             <a:prstDash val="solid"/>
           </a:ln>
         </p:spPr>
+        <p:txBody>
+          <a:bodyPr/>
+          <a:p/>
+        </p:txBody>
       </p:sp>
       <p:sp>
         <p:nvSpPr>
@@ -31385,7 +32426,7 @@
                 <a:ea typeface="Consolas" pitchFamily="34" charset="-122"/>
                 <a:cs typeface="Consolas" pitchFamily="34" charset="-120"/>
               </a:rPr>
-              <a:t>8.3e−10 m</a:t>
+              <a:t>0.0 m</a:t>
             </a:r>
             <a:endParaRPr lang="en-US" sz="1100" dirty="0"/>
           </a:p>
@@ -31502,7 +32543,7 @@
                 <a:ea typeface="Consolas" pitchFamily="34" charset="-122"/>
                 <a:cs typeface="Consolas" pitchFamily="34" charset="-120"/>
               </a:rPr>
-              <a:t>1.5e−12 °</a:t>
+              <a:t>1.8e−12 °</a:t>
             </a:r>
             <a:endParaRPr lang="en-US" sz="1100" dirty="0"/>
           </a:p>
@@ -31619,7 +32660,7 @@
                 <a:ea typeface="Consolas" pitchFamily="34" charset="-122"/>
                 <a:cs typeface="Consolas" pitchFamily="34" charset="-120"/>
               </a:rPr>
-              <a:t>9.4e−13 °</a:t>
+              <a:t>1.7e−12 °</a:t>
             </a:r>
             <a:endParaRPr lang="en-US" sz="1100" dirty="0"/>
           </a:p>
@@ -31690,6 +32731,10 @@
             <a:prstDash val="solid"/>
           </a:ln>
         </p:spPr>
+        <p:txBody>
+          <a:bodyPr/>
+          <a:p/>
+        </p:txBody>
       </p:sp>
       <p:sp>
         <p:nvSpPr>
@@ -31756,6 +32801,10 @@
             <a:prstDash val="solid"/>
           </a:ln>
         </p:spPr>
+        <p:txBody>
+          <a:bodyPr/>
+          <a:p/>
+        </p:txBody>
       </p:sp>
       <p:sp>
         <p:nvSpPr>
@@ -31790,7 +32839,7 @@
                 <a:ea typeface="Consolas" pitchFamily="34" charset="-122"/>
                 <a:cs typeface="Consolas" pitchFamily="34" charset="-120"/>
               </a:rPr>
-              <a:t>31 / 31</a:t>
+              <a:t>12 / 12</a:t>
             </a:r>
             <a:endParaRPr lang="en-US" sz="2200" dirty="0"/>
           </a:p>
@@ -31829,7 +32878,7 @@
                 <a:ea typeface="Malgun Gothic" pitchFamily="34" charset="-122"/>
                 <a:cs typeface="Malgun Gothic" pitchFamily="34" charset="-120"/>
               </a:rPr>
-              <a:t>단위 시험 통과</a:t>
+              <a:t>시험 통과</a:t>
             </a:r>
             <a:endParaRPr lang="en-US" sz="1200" dirty="0"/>
           </a:p>
@@ -31861,6 +32910,10 @@
             <a:prstDash val="solid"/>
           </a:ln>
         </p:spPr>
+        <p:txBody>
+          <a:bodyPr/>
+          <a:p/>
+        </p:txBody>
       </p:sp>
       <p:sp>
         <p:nvSpPr>
@@ -31966,6 +33019,10 @@
             <a:prstDash val="solid"/>
           </a:ln>
         </p:spPr>
+        <p:txBody>
+          <a:bodyPr/>
+          <a:p/>
+        </p:txBody>
       </p:sp>
       <p:sp>
         <p:nvSpPr>
@@ -32166,6 +33223,10 @@
             <a:prstDash val="solid"/>
           </a:ln>
         </p:spPr>
+        <p:txBody>
+          <a:bodyPr/>
+          <a:p/>
+        </p:txBody>
       </p:sp>
       <p:sp>
         <p:nvSpPr>
@@ -32940,6 +34001,10 @@
             <a:prstDash val="solid"/>
           </a:ln>
         </p:spPr>
+        <p:txBody>
+          <a:bodyPr/>
+          <a:p/>
+        </p:txBody>
       </p:sp>
       <p:sp>
         <p:nvSpPr>
@@ -33107,6 +34172,10 @@
             <a:prstDash val="solid"/>
           </a:ln>
         </p:spPr>
+        <p:txBody>
+          <a:bodyPr/>
+          <a:p/>
+        </p:txBody>
       </p:sp>
       <p:sp>
         <p:nvSpPr>
@@ -33296,6 +34365,3233 @@
 </file>
 
 <file path=ppt/slides/slide33.xml><?xml version="1.0" encoding="utf-8"?>
+<p:sld xmlns:a="http://schemas.openxmlformats.org/drawingml/2006/main" xmlns:p="http://schemas.openxmlformats.org/presentationml/2006/main" xmlns:r="http://schemas.openxmlformats.org/officeDocument/2006/relationships">
+  <p:cSld>
+    <p:bg>
+      <p:bgPr>
+        <a:solidFill>
+          <a:srgbClr val="FFFFFF"/>
+        </a:solidFill>
+        <a:effectLst/>
+      </p:bgPr>
+    </p:bg>
+    <p:spTree>
+      <p:nvGrpSpPr>
+        <p:cNvPr id="1" name=""/>
+        <p:cNvGrpSpPr/>
+        <p:nvPr/>
+      </p:nvGrpSpPr>
+      <p:grpSpPr/>
+      <p:sp>
+        <p:nvSpPr>
+          <p:cNvPr id="2" name="TextBox 1"/>
+          <p:cNvSpPr txBox="1"/>
+          <p:nvPr/>
+        </p:nvSpPr>
+        <p:spPr>
+          <a:xfrm>
+            <a:off x="566928" y="310896"/>
+            <a:ext cx="11064240" cy="566928"/>
+          </a:xfrm>
+          <a:prstGeom prst="rect">
+            <a:avLst/>
+          </a:prstGeom>
+          <a:noFill/>
+        </p:spPr>
+        <p:txBody>
+          <a:bodyPr wrap="square">
+            <a:spAutoFit/>
+          </a:bodyPr>
+          <a:lstStyle/>
+          <a:p>
+            <a:r>
+              <a:rPr sz="3000" b="1">
+                <a:solidFill>
+                  <a:srgbClr val="1A2233"/>
+                </a:solidFill>
+                <a:latin typeface="Malgun Gothic"/>
+              </a:rPr>
+              <a:t>UI 로 확인 — CoordUI</a:t>
+            </a:r>
+          </a:p>
+        </p:txBody>
+      </p:sp>
+      <p:sp>
+        <p:nvSpPr>
+          <p:cNvPr id="3" name="TextBox 2"/>
+          <p:cNvSpPr txBox="1"/>
+          <p:nvPr/>
+        </p:nvSpPr>
+        <p:spPr>
+          <a:xfrm>
+            <a:off x="566928" y="905256"/>
+            <a:ext cx="11064240" cy="329184"/>
+          </a:xfrm>
+          <a:prstGeom prst="rect">
+            <a:avLst/>
+          </a:prstGeom>
+          <a:noFill/>
+        </p:spPr>
+        <p:txBody>
+          <a:bodyPr wrap="square">
+            <a:spAutoFit/>
+          </a:bodyPr>
+          <a:lstStyle/>
+          <a:p>
+            <a:r>
+              <a:rPr sz="1400" b="0">
+                <a:solidFill>
+                  <a:srgbClr val="5A6478"/>
+                </a:solidFill>
+                <a:latin typeface="Malgun Gothic"/>
+              </a:rPr>
+              <a:t>같은 CoordCore 를 물고, 입력을 바꾸면 바로 다시 계산해서 단계별 값을 보여줍니다</a:t>
+            </a:r>
+          </a:p>
+        </p:txBody>
+      </p:sp>
+      <p:sp>
+        <p:nvSpPr>
+          <p:cNvPr id="4" name="Rounded Rectangle 3"/>
+          <p:cNvSpPr/>
+          <p:nvPr/>
+        </p:nvSpPr>
+        <p:spPr>
+          <a:xfrm>
+            <a:off x="566928" y="1408176"/>
+            <a:ext cx="3931920" cy="4480560"/>
+          </a:xfrm>
+          <a:prstGeom prst="roundRect">
+            <a:avLst>
+              <a:gd name="adj" fmla="val 5000"/>
+            </a:avLst>
+          </a:prstGeom>
+          <a:solidFill>
+            <a:srgbClr val="EEF1F7"/>
+          </a:solidFill>
+          <a:ln w="9525">
+            <a:solidFill>
+              <a:srgbClr val="FFFFFF"/>
+            </a:solidFill>
+          </a:ln>
+          <a:effectLst/>
+        </p:spPr>
+        <p:style>
+          <a:lnRef idx="1">
+            <a:schemeClr val="accent1"/>
+          </a:lnRef>
+          <a:fillRef idx="3">
+            <a:schemeClr val="accent1"/>
+          </a:fillRef>
+          <a:effectRef idx="2">
+            <a:schemeClr val="accent1"/>
+          </a:effectRef>
+          <a:fontRef idx="minor">
+            <a:schemeClr val="lt1"/>
+          </a:fontRef>
+        </p:style>
+        <p:txBody>
+          <a:bodyPr rtlCol="0" anchor="ctr"/>
+          <a:lstStyle/>
+          <a:p>
+            <a:pPr algn="ctr"/>
+          </a:p>
+        </p:txBody>
+      </p:sp>
+      <p:sp>
+        <p:nvSpPr>
+          <p:cNvPr id="5" name="TextBox 4"/>
+          <p:cNvSpPr txBox="1"/>
+          <p:nvPr/>
+        </p:nvSpPr>
+        <p:spPr>
+          <a:xfrm>
+            <a:off x="749808" y="1535000"/>
+            <a:ext cx="3566160" cy="329184"/>
+          </a:xfrm>
+          <a:prstGeom prst="rect">
+            <a:avLst/>
+          </a:prstGeom>
+          <a:noFill/>
+        </p:spPr>
+        <p:txBody>
+          <a:bodyPr wrap="square">
+            <a:spAutoFit/>
+          </a:bodyPr>
+          <a:lstStyle/>
+          <a:p>
+            <a:r>
+              <a:rPr sz="1500" b="1">
+                <a:solidFill>
+                  <a:srgbClr val="2B57A6"/>
+                </a:solidFill>
+                <a:latin typeface="Malgun Gothic"/>
+              </a:rPr>
+              <a:t>프로그램 구성</a:t>
+            </a:r>
+          </a:p>
+        </p:txBody>
+      </p:sp>
+      <p:sp>
+        <p:nvSpPr>
+          <p:cNvPr id="6" name="TextBox 5"/>
+          <p:cNvSpPr txBox="1"/>
+          <p:nvPr/>
+        </p:nvSpPr>
+        <p:spPr>
+          <a:xfrm>
+            <a:off x="749808" y="1980000"/>
+            <a:ext cx="3566160" cy="300000"/>
+          </a:xfrm>
+          <a:prstGeom prst="rect">
+            <a:avLst/>
+          </a:prstGeom>
+          <a:noFill/>
+        </p:spPr>
+        <p:txBody>
+          <a:bodyPr wrap="square">
+            <a:spAutoFit/>
+          </a:bodyPr>
+          <a:lstStyle/>
+          <a:p>
+            <a:r>
+              <a:rPr sz="1300" b="1">
+                <a:solidFill>
+                  <a:srgbClr val="1A2233"/>
+                </a:solidFill>
+                <a:latin typeface="Consolas"/>
+              </a:rPr>
+              <a:t>CoordCore</a:t>
+            </a:r>
+          </a:p>
+        </p:txBody>
+      </p:sp>
+      <p:sp>
+        <p:nvSpPr>
+          <p:cNvPr id="7" name="TextBox 6"/>
+          <p:cNvSpPr txBox="1"/>
+          <p:nvPr/>
+        </p:nvSpPr>
+        <p:spPr>
+          <a:xfrm>
+            <a:off x="749808" y="2280000"/>
+            <a:ext cx="3566160" cy="560000"/>
+          </a:xfrm>
+          <a:prstGeom prst="rect">
+            <a:avLst/>
+          </a:prstGeom>
+          <a:noFill/>
+        </p:spPr>
+        <p:txBody>
+          <a:bodyPr wrap="square">
+            <a:spAutoFit/>
+          </a:bodyPr>
+          <a:lstStyle/>
+          <a:p>
+            <a:r>
+              <a:rPr sz="1150" b="0">
+                <a:solidFill>
+                  <a:srgbClr val="5A6478"/>
+                </a:solidFill>
+                <a:latin typeface="Malgun Gothic"/>
+              </a:rPr>
+              <a:t>좌표변환 정적 라이브러리 (C)</a:t>
+            </a:r>
+          </a:p>
+          <a:p>
+            <a:r>
+              <a:rPr sz="1150" b="0">
+                <a:solidFill>
+                  <a:srgbClr val="5A6478"/>
+                </a:solidFill>
+                <a:latin typeface="Malgun Gothic"/>
+              </a:rPr>
+              <a:t>coord_frames + 참고 소스 matrixCalcLib</a:t>
+            </a:r>
+          </a:p>
+        </p:txBody>
+      </p:sp>
+      <p:sp>
+        <p:nvSpPr>
+          <p:cNvPr id="8" name="TextBox 7"/>
+          <p:cNvSpPr txBox="1"/>
+          <p:nvPr/>
+        </p:nvSpPr>
+        <p:spPr>
+          <a:xfrm>
+            <a:off x="749808" y="3060000"/>
+            <a:ext cx="3566160" cy="300000"/>
+          </a:xfrm>
+          <a:prstGeom prst="rect">
+            <a:avLst/>
+          </a:prstGeom>
+          <a:noFill/>
+        </p:spPr>
+        <p:txBody>
+          <a:bodyPr wrap="square">
+            <a:spAutoFit/>
+          </a:bodyPr>
+          <a:lstStyle/>
+          <a:p>
+            <a:r>
+              <a:rPr sz="1300" b="1">
+                <a:solidFill>
+                  <a:srgbClr val="1A2233"/>
+                </a:solidFill>
+                <a:latin typeface="Consolas"/>
+              </a:rPr>
+              <a:t>radar_coord</a:t>
+            </a:r>
+          </a:p>
+        </p:txBody>
+      </p:sp>
+      <p:sp>
+        <p:nvSpPr>
+          <p:cNvPr id="9" name="TextBox 8"/>
+          <p:cNvSpPr txBox="1"/>
+          <p:nvPr/>
+        </p:nvSpPr>
+        <p:spPr>
+          <a:xfrm>
+            <a:off x="749808" y="3360000"/>
+            <a:ext cx="3566160" cy="560000"/>
+          </a:xfrm>
+          <a:prstGeom prst="rect">
+            <a:avLst/>
+          </a:prstGeom>
+          <a:noFill/>
+        </p:spPr>
+        <p:txBody>
+          <a:bodyPr wrap="square">
+            <a:spAutoFit/>
+          </a:bodyPr>
+          <a:lstStyle/>
+          <a:p>
+            <a:r>
+              <a:rPr sz="1150" b="0">
+                <a:solidFill>
+                  <a:srgbClr val="5A6478"/>
+                </a:solidFill>
+                <a:latin typeface="Malgun Gothic"/>
+              </a:rPr>
+              <a:t>콘솔. 과제 3.1 입력값으로 단계별 값 출력</a:t>
+            </a:r>
+          </a:p>
+          <a:p>
+            <a:r>
+              <a:rPr sz="1150" b="0">
+                <a:solidFill>
+                  <a:srgbClr val="5A6478"/>
+                </a:solidFill>
+                <a:latin typeface="Malgun Gothic"/>
+              </a:rPr>
+              <a:t>radar_coord test 로 시험 12항목</a:t>
+            </a:r>
+          </a:p>
+        </p:txBody>
+      </p:sp>
+      <p:sp>
+        <p:nvSpPr>
+          <p:cNvPr id="10" name="TextBox 9"/>
+          <p:cNvSpPr txBox="1"/>
+          <p:nvPr/>
+        </p:nvSpPr>
+        <p:spPr>
+          <a:xfrm>
+            <a:off x="749808" y="4140000"/>
+            <a:ext cx="3566160" cy="300000"/>
+          </a:xfrm>
+          <a:prstGeom prst="rect">
+            <a:avLst/>
+          </a:prstGeom>
+          <a:noFill/>
+        </p:spPr>
+        <p:txBody>
+          <a:bodyPr wrap="square">
+            <a:spAutoFit/>
+          </a:bodyPr>
+          <a:lstStyle/>
+          <a:p>
+            <a:r>
+              <a:rPr sz="1300" b="1">
+                <a:solidFill>
+                  <a:srgbClr val="1A2233"/>
+                </a:solidFill>
+                <a:latin typeface="Consolas"/>
+              </a:rPr>
+              <a:t>CoordUI</a:t>
+            </a:r>
+          </a:p>
+        </p:txBody>
+      </p:sp>
+      <p:sp>
+        <p:nvSpPr>
+          <p:cNvPr id="11" name="TextBox 10"/>
+          <p:cNvSpPr txBox="1"/>
+          <p:nvPr/>
+        </p:nvSpPr>
+        <p:spPr>
+          <a:xfrm>
+            <a:off x="749808" y="4440000"/>
+            <a:ext cx="3566160" cy="560000"/>
+          </a:xfrm>
+          <a:prstGeom prst="rect">
+            <a:avLst/>
+          </a:prstGeom>
+          <a:noFill/>
+        </p:spPr>
+        <p:txBody>
+          <a:bodyPr wrap="square">
+            <a:spAutoFit/>
+          </a:bodyPr>
+          <a:lstStyle/>
+          <a:p>
+            <a:r>
+              <a:rPr sz="1150" b="0">
+                <a:solidFill>
+                  <a:srgbClr val="5A6478"/>
+                </a:solidFill>
+                <a:latin typeface="Malgun Gothic"/>
+              </a:rPr>
+              <a:t>MFC 다이얼로그. 오른쪽 화면</a:t>
+            </a:r>
+          </a:p>
+          <a:p>
+            <a:r>
+              <a:rPr sz="1150" b="0">
+                <a:solidFill>
+                  <a:srgbClr val="5A6478"/>
+                </a:solidFill>
+                <a:latin typeface="Malgun Gothic"/>
+              </a:rPr>
+              <a:t>변환 로직 없이 f_* 함수만 부름</a:t>
+            </a:r>
+          </a:p>
+        </p:txBody>
+      </p:sp>
+      <p:sp>
+        <p:nvSpPr>
+          <p:cNvPr id="12" name="TextBox 11"/>
+          <p:cNvSpPr txBox="1"/>
+          <p:nvPr/>
+        </p:nvSpPr>
+        <p:spPr>
+          <a:xfrm>
+            <a:off x="749808" y="5330000"/>
+            <a:ext cx="3566160" cy="420000"/>
+          </a:xfrm>
+          <a:prstGeom prst="rect">
+            <a:avLst/>
+          </a:prstGeom>
+          <a:noFill/>
+        </p:spPr>
+        <p:txBody>
+          <a:bodyPr wrap="square">
+            <a:spAutoFit/>
+          </a:bodyPr>
+          <a:lstStyle/>
+          <a:p>
+            <a:r>
+              <a:rPr sz="1100" b="0">
+                <a:solidFill>
+                  <a:srgbClr val="5A6478"/>
+                </a:solidFill>
+                <a:latin typeface="Malgun Gothic"/>
+              </a:rPr>
+              <a:t>실행 프로젝트 둘 다 CoordCore 를</a:t>
+            </a:r>
+          </a:p>
+          <a:p>
+            <a:r>
+              <a:rPr sz="1100" b="0">
+                <a:solidFill>
+                  <a:srgbClr val="5A6478"/>
+                </a:solidFill>
+                <a:latin typeface="Malgun Gothic"/>
+              </a:rPr>
+              <a:t>ProjectReference 로 물고 있음</a:t>
+            </a:r>
+          </a:p>
+        </p:txBody>
+      </p:sp>
+      <p:sp>
+        <p:nvSpPr>
+          <p:cNvPr id="13" name="Rounded Rectangle 12"/>
+          <p:cNvSpPr/>
+          <p:nvPr/>
+        </p:nvSpPr>
+        <p:spPr>
+          <a:xfrm>
+            <a:off x="4754880" y="1408176"/>
+            <a:ext cx="6876288" cy="4480560"/>
+          </a:xfrm>
+          <a:prstGeom prst="roundRect">
+            <a:avLst>
+              <a:gd name="adj" fmla="val 2000"/>
+            </a:avLst>
+          </a:prstGeom>
+          <a:solidFill>
+            <a:srgbClr val="FFFFFF"/>
+          </a:solidFill>
+          <a:ln w="9525">
+            <a:solidFill>
+              <a:srgbClr val="C9CFDA"/>
+            </a:solidFill>
+          </a:ln>
+          <a:effectLst/>
+        </p:spPr>
+        <p:style>
+          <a:lnRef idx="1">
+            <a:schemeClr val="accent1"/>
+          </a:lnRef>
+          <a:fillRef idx="3">
+            <a:schemeClr val="accent1"/>
+          </a:fillRef>
+          <a:effectRef idx="2">
+            <a:schemeClr val="accent1"/>
+          </a:effectRef>
+          <a:fontRef idx="minor">
+            <a:schemeClr val="lt1"/>
+          </a:fontRef>
+        </p:style>
+        <p:txBody>
+          <a:bodyPr rtlCol="0" anchor="ctr"/>
+          <a:lstStyle/>
+          <a:p>
+            <a:pPr algn="ctr"/>
+          </a:p>
+        </p:txBody>
+      </p:sp>
+      <p:sp>
+        <p:nvSpPr>
+          <p:cNvPr id="14" name="TextBox 13"/>
+          <p:cNvSpPr txBox="1"/>
+          <p:nvPr/>
+        </p:nvSpPr>
+        <p:spPr>
+          <a:xfrm>
+            <a:off x="4874880" y="1458176"/>
+            <a:ext cx="3000000" cy="280000"/>
+          </a:xfrm>
+          <a:prstGeom prst="rect">
+            <a:avLst/>
+          </a:prstGeom>
+          <a:noFill/>
+        </p:spPr>
+        <p:txBody>
+          <a:bodyPr wrap="square">
+            <a:spAutoFit/>
+          </a:bodyPr>
+          <a:lstStyle/>
+          <a:p>
+            <a:r>
+              <a:rPr sz="1100" b="1">
+                <a:solidFill>
+                  <a:srgbClr val="1A2233"/>
+                </a:solidFill>
+                <a:latin typeface="Malgun Gothic"/>
+              </a:rPr>
+              <a:t>CoordFrames</a:t>
+            </a:r>
+          </a:p>
+        </p:txBody>
+      </p:sp>
+      <p:sp>
+        <p:nvSpPr>
+          <p:cNvPr id="15" name="Rounded Rectangle 14"/>
+          <p:cNvSpPr/>
+          <p:nvPr/>
+        </p:nvSpPr>
+        <p:spPr>
+          <a:xfrm>
+            <a:off x="4904880" y="1808176"/>
+            <a:ext cx="2650000" cy="560000"/>
+          </a:xfrm>
+          <a:prstGeom prst="roundRect">
+            <a:avLst>
+              <a:gd name="adj" fmla="val 8000"/>
+            </a:avLst>
+          </a:prstGeom>
+          <a:solidFill>
+            <a:srgbClr val="F5F7FB"/>
+          </a:solidFill>
+          <a:ln w="9525">
+            <a:solidFill>
+              <a:srgbClr val="D0D5DE"/>
+            </a:solidFill>
+          </a:ln>
+          <a:effectLst/>
+        </p:spPr>
+        <p:style>
+          <a:lnRef idx="1">
+            <a:schemeClr val="accent1"/>
+          </a:lnRef>
+          <a:fillRef idx="3">
+            <a:schemeClr val="accent1"/>
+          </a:fillRef>
+          <a:effectRef idx="2">
+            <a:schemeClr val="accent1"/>
+          </a:effectRef>
+          <a:fontRef idx="minor">
+            <a:schemeClr val="lt1"/>
+          </a:fontRef>
+        </p:style>
+        <p:txBody>
+          <a:bodyPr rtlCol="0" anchor="ctr"/>
+          <a:lstStyle/>
+          <a:p>
+            <a:pPr algn="ctr"/>
+          </a:p>
+        </p:txBody>
+      </p:sp>
+      <p:sp>
+        <p:nvSpPr>
+          <p:cNvPr id="16" name="TextBox 15"/>
+          <p:cNvSpPr txBox="1"/>
+          <p:nvPr/>
+        </p:nvSpPr>
+        <p:spPr>
+          <a:xfrm>
+            <a:off x="4964880" y="1828176"/>
+            <a:ext cx="2530000" cy="240000"/>
+          </a:xfrm>
+          <a:prstGeom prst="rect">
+            <a:avLst/>
+          </a:prstGeom>
+          <a:noFill/>
+        </p:spPr>
+        <p:txBody>
+          <a:bodyPr wrap="square">
+            <a:spAutoFit/>
+          </a:bodyPr>
+          <a:lstStyle/>
+          <a:p>
+            <a:r>
+              <a:rPr sz="900" b="1">
+                <a:solidFill>
+                  <a:srgbClr val="1A2233"/>
+                </a:solidFill>
+                <a:latin typeface="Malgun Gothic"/>
+              </a:rPr>
+              <a:t>측정값  R [m] / Az / El [deg]</a:t>
+            </a:r>
+          </a:p>
+        </p:txBody>
+      </p:sp>
+      <p:sp>
+        <p:nvSpPr>
+          <p:cNvPr id="17" name="Rectangle 16"/>
+          <p:cNvSpPr/>
+          <p:nvPr/>
+        </p:nvSpPr>
+        <p:spPr>
+          <a:xfrm>
+            <a:off x="4984880" y="2098176"/>
+            <a:ext cx="783333" cy="210000"/>
+          </a:xfrm>
+          <a:prstGeom prst="rect">
+            <a:avLst/>
+          </a:prstGeom>
+          <a:solidFill>
+            <a:srgbClr val="FFFFFF"/>
+          </a:solidFill>
+          <a:ln w="9525">
+            <a:solidFill>
+              <a:srgbClr val="B9C0CC"/>
+            </a:solidFill>
+          </a:ln>
+          <a:effectLst/>
+        </p:spPr>
+        <p:style>
+          <a:lnRef idx="1">
+            <a:schemeClr val="accent1"/>
+          </a:lnRef>
+          <a:fillRef idx="3">
+            <a:schemeClr val="accent1"/>
+          </a:fillRef>
+          <a:effectRef idx="2">
+            <a:schemeClr val="accent1"/>
+          </a:effectRef>
+          <a:fontRef idx="minor">
+            <a:schemeClr val="lt1"/>
+          </a:fontRef>
+        </p:style>
+        <p:txBody>
+          <a:bodyPr rtlCol="0" anchor="ctr"/>
+          <a:lstStyle/>
+          <a:p>
+            <a:pPr algn="ctr"/>
+          </a:p>
+        </p:txBody>
+      </p:sp>
+      <p:sp>
+        <p:nvSpPr>
+          <p:cNvPr id="18" name="TextBox 17"/>
+          <p:cNvSpPr txBox="1"/>
+          <p:nvPr/>
+        </p:nvSpPr>
+        <p:spPr>
+          <a:xfrm>
+            <a:off x="4984880" y="2076176"/>
+            <a:ext cx="783333" cy="240000"/>
+          </a:xfrm>
+          <a:prstGeom prst="rect">
+            <a:avLst/>
+          </a:prstGeom>
+          <a:noFill/>
+        </p:spPr>
+        <p:txBody>
+          <a:bodyPr wrap="square" lIns="30000" rIns="30000">
+            <a:spAutoFit/>
+          </a:bodyPr>
+          <a:lstStyle/>
+          <a:p>
+            <a:pPr algn="r"/>
+            <a:r>
+              <a:rPr sz="800" b="0">
+                <a:solidFill>
+                  <a:srgbClr val="1A2233"/>
+                </a:solidFill>
+                <a:latin typeface="Consolas"/>
+              </a:rPr>
+              <a:t>20000.0</a:t>
+            </a:r>
+          </a:p>
+        </p:txBody>
+      </p:sp>
+      <p:sp>
+        <p:nvSpPr>
+          <p:cNvPr id="19" name="Rectangle 18"/>
+          <p:cNvSpPr/>
+          <p:nvPr/>
+        </p:nvSpPr>
+        <p:spPr>
+          <a:xfrm>
+            <a:off x="5838213" y="2098176"/>
+            <a:ext cx="783333" cy="210000"/>
+          </a:xfrm>
+          <a:prstGeom prst="rect">
+            <a:avLst/>
+          </a:prstGeom>
+          <a:solidFill>
+            <a:srgbClr val="FFFFFF"/>
+          </a:solidFill>
+          <a:ln w="9525">
+            <a:solidFill>
+              <a:srgbClr val="B9C0CC"/>
+            </a:solidFill>
+          </a:ln>
+          <a:effectLst/>
+        </p:spPr>
+        <p:style>
+          <a:lnRef idx="1">
+            <a:schemeClr val="accent1"/>
+          </a:lnRef>
+          <a:fillRef idx="3">
+            <a:schemeClr val="accent1"/>
+          </a:fillRef>
+          <a:effectRef idx="2">
+            <a:schemeClr val="accent1"/>
+          </a:effectRef>
+          <a:fontRef idx="minor">
+            <a:schemeClr val="lt1"/>
+          </a:fontRef>
+        </p:style>
+        <p:txBody>
+          <a:bodyPr rtlCol="0" anchor="ctr"/>
+          <a:lstStyle/>
+          <a:p>
+            <a:pPr algn="ctr"/>
+          </a:p>
+        </p:txBody>
+      </p:sp>
+      <p:sp>
+        <p:nvSpPr>
+          <p:cNvPr id="20" name="TextBox 19"/>
+          <p:cNvSpPr txBox="1"/>
+          <p:nvPr/>
+        </p:nvSpPr>
+        <p:spPr>
+          <a:xfrm>
+            <a:off x="5838213" y="2076176"/>
+            <a:ext cx="783333" cy="240000"/>
+          </a:xfrm>
+          <a:prstGeom prst="rect">
+            <a:avLst/>
+          </a:prstGeom>
+          <a:noFill/>
+        </p:spPr>
+        <p:txBody>
+          <a:bodyPr wrap="square" lIns="30000" rIns="30000">
+            <a:spAutoFit/>
+          </a:bodyPr>
+          <a:lstStyle/>
+          <a:p>
+            <a:pPr algn="r"/>
+            <a:r>
+              <a:rPr sz="800" b="0">
+                <a:solidFill>
+                  <a:srgbClr val="1A2233"/>
+                </a:solidFill>
+                <a:latin typeface="Consolas"/>
+              </a:rPr>
+              <a:t>30.000</a:t>
+            </a:r>
+          </a:p>
+        </p:txBody>
+      </p:sp>
+      <p:sp>
+        <p:nvSpPr>
+          <p:cNvPr id="21" name="Rectangle 20"/>
+          <p:cNvSpPr/>
+          <p:nvPr/>
+        </p:nvSpPr>
+        <p:spPr>
+          <a:xfrm>
+            <a:off x="6691546" y="2098176"/>
+            <a:ext cx="783333" cy="210000"/>
+          </a:xfrm>
+          <a:prstGeom prst="rect">
+            <a:avLst/>
+          </a:prstGeom>
+          <a:solidFill>
+            <a:srgbClr val="FFFFFF"/>
+          </a:solidFill>
+          <a:ln w="9525">
+            <a:solidFill>
+              <a:srgbClr val="B9C0CC"/>
+            </a:solidFill>
+          </a:ln>
+          <a:effectLst/>
+        </p:spPr>
+        <p:style>
+          <a:lnRef idx="1">
+            <a:schemeClr val="accent1"/>
+          </a:lnRef>
+          <a:fillRef idx="3">
+            <a:schemeClr val="accent1"/>
+          </a:fillRef>
+          <a:effectRef idx="2">
+            <a:schemeClr val="accent1"/>
+          </a:effectRef>
+          <a:fontRef idx="minor">
+            <a:schemeClr val="lt1"/>
+          </a:fontRef>
+        </p:style>
+        <p:txBody>
+          <a:bodyPr rtlCol="0" anchor="ctr"/>
+          <a:lstStyle/>
+          <a:p>
+            <a:pPr algn="ctr"/>
+          </a:p>
+        </p:txBody>
+      </p:sp>
+      <p:sp>
+        <p:nvSpPr>
+          <p:cNvPr id="22" name="TextBox 21"/>
+          <p:cNvSpPr txBox="1"/>
+          <p:nvPr/>
+        </p:nvSpPr>
+        <p:spPr>
+          <a:xfrm>
+            <a:off x="6691546" y="2076176"/>
+            <a:ext cx="783333" cy="240000"/>
+          </a:xfrm>
+          <a:prstGeom prst="rect">
+            <a:avLst/>
+          </a:prstGeom>
+          <a:noFill/>
+        </p:spPr>
+        <p:txBody>
+          <a:bodyPr wrap="square" lIns="30000" rIns="30000">
+            <a:spAutoFit/>
+          </a:bodyPr>
+          <a:lstStyle/>
+          <a:p>
+            <a:pPr algn="r"/>
+            <a:r>
+              <a:rPr sz="800" b="0">
+                <a:solidFill>
+                  <a:srgbClr val="1A2233"/>
+                </a:solidFill>
+                <a:latin typeface="Consolas"/>
+              </a:rPr>
+              <a:t>0.000</a:t>
+            </a:r>
+          </a:p>
+        </p:txBody>
+      </p:sp>
+      <p:sp>
+        <p:nvSpPr>
+          <p:cNvPr id="23" name="Rounded Rectangle 22"/>
+          <p:cNvSpPr/>
+          <p:nvPr/>
+        </p:nvSpPr>
+        <p:spPr>
+          <a:xfrm>
+            <a:off x="4904880" y="2428176"/>
+            <a:ext cx="2650000" cy="560000"/>
+          </a:xfrm>
+          <a:prstGeom prst="roundRect">
+            <a:avLst>
+              <a:gd name="adj" fmla="val 8000"/>
+            </a:avLst>
+          </a:prstGeom>
+          <a:solidFill>
+            <a:srgbClr val="F5F7FB"/>
+          </a:solidFill>
+          <a:ln w="9525">
+            <a:solidFill>
+              <a:srgbClr val="D0D5DE"/>
+            </a:solidFill>
+          </a:ln>
+          <a:effectLst/>
+        </p:spPr>
+        <p:style>
+          <a:lnRef idx="1">
+            <a:schemeClr val="accent1"/>
+          </a:lnRef>
+          <a:fillRef idx="3">
+            <a:schemeClr val="accent1"/>
+          </a:fillRef>
+          <a:effectRef idx="2">
+            <a:schemeClr val="accent1"/>
+          </a:effectRef>
+          <a:fontRef idx="minor">
+            <a:schemeClr val="lt1"/>
+          </a:fontRef>
+        </p:style>
+        <p:txBody>
+          <a:bodyPr rtlCol="0" anchor="ctr"/>
+          <a:lstStyle/>
+          <a:p>
+            <a:pPr algn="ctr"/>
+          </a:p>
+        </p:txBody>
+      </p:sp>
+      <p:sp>
+        <p:nvSpPr>
+          <p:cNvPr id="24" name="TextBox 23"/>
+          <p:cNvSpPr txBox="1"/>
+          <p:nvPr/>
+        </p:nvSpPr>
+        <p:spPr>
+          <a:xfrm>
+            <a:off x="4964880" y="2448176"/>
+            <a:ext cx="2530000" cy="240000"/>
+          </a:xfrm>
+          <a:prstGeom prst="rect">
+            <a:avLst/>
+          </a:prstGeom>
+          <a:noFill/>
+        </p:spPr>
+        <p:txBody>
+          <a:bodyPr wrap="square">
+            <a:spAutoFit/>
+          </a:bodyPr>
+          <a:lstStyle/>
+          <a:p>
+            <a:r>
+              <a:rPr sz="900" b="1">
+                <a:solidFill>
+                  <a:srgbClr val="1A2233"/>
+                </a:solidFill>
+                <a:latin typeface="Malgun Gothic"/>
+              </a:rPr>
+              <a:t>플랫폼 위치  lat / lon [deg] / alt [m]</a:t>
+            </a:r>
+          </a:p>
+        </p:txBody>
+      </p:sp>
+      <p:sp>
+        <p:nvSpPr>
+          <p:cNvPr id="25" name="Rectangle 24"/>
+          <p:cNvSpPr/>
+          <p:nvPr/>
+        </p:nvSpPr>
+        <p:spPr>
+          <a:xfrm>
+            <a:off x="4984880" y="2718176"/>
+            <a:ext cx="783333" cy="210000"/>
+          </a:xfrm>
+          <a:prstGeom prst="rect">
+            <a:avLst/>
+          </a:prstGeom>
+          <a:solidFill>
+            <a:srgbClr val="FFFFFF"/>
+          </a:solidFill>
+          <a:ln w="9525">
+            <a:solidFill>
+              <a:srgbClr val="B9C0CC"/>
+            </a:solidFill>
+          </a:ln>
+          <a:effectLst/>
+        </p:spPr>
+        <p:style>
+          <a:lnRef idx="1">
+            <a:schemeClr val="accent1"/>
+          </a:lnRef>
+          <a:fillRef idx="3">
+            <a:schemeClr val="accent1"/>
+          </a:fillRef>
+          <a:effectRef idx="2">
+            <a:schemeClr val="accent1"/>
+          </a:effectRef>
+          <a:fontRef idx="minor">
+            <a:schemeClr val="lt1"/>
+          </a:fontRef>
+        </p:style>
+        <p:txBody>
+          <a:bodyPr rtlCol="0" anchor="ctr"/>
+          <a:lstStyle/>
+          <a:p>
+            <a:pPr algn="ctr"/>
+          </a:p>
+        </p:txBody>
+      </p:sp>
+      <p:sp>
+        <p:nvSpPr>
+          <p:cNvPr id="26" name="TextBox 25"/>
+          <p:cNvSpPr txBox="1"/>
+          <p:nvPr/>
+        </p:nvSpPr>
+        <p:spPr>
+          <a:xfrm>
+            <a:off x="4984880" y="2696176"/>
+            <a:ext cx="783333" cy="240000"/>
+          </a:xfrm>
+          <a:prstGeom prst="rect">
+            <a:avLst/>
+          </a:prstGeom>
+          <a:noFill/>
+        </p:spPr>
+        <p:txBody>
+          <a:bodyPr wrap="square" lIns="30000" rIns="30000">
+            <a:spAutoFit/>
+          </a:bodyPr>
+          <a:lstStyle/>
+          <a:p>
+            <a:pPr algn="r"/>
+            <a:r>
+              <a:rPr sz="800" b="0">
+                <a:solidFill>
+                  <a:srgbClr val="1A2233"/>
+                </a:solidFill>
+                <a:latin typeface="Consolas"/>
+              </a:rPr>
+              <a:t>36.408</a:t>
+            </a:r>
+          </a:p>
+        </p:txBody>
+      </p:sp>
+      <p:sp>
+        <p:nvSpPr>
+          <p:cNvPr id="27" name="Rectangle 26"/>
+          <p:cNvSpPr/>
+          <p:nvPr/>
+        </p:nvSpPr>
+        <p:spPr>
+          <a:xfrm>
+            <a:off x="5838213" y="2718176"/>
+            <a:ext cx="783333" cy="210000"/>
+          </a:xfrm>
+          <a:prstGeom prst="rect">
+            <a:avLst/>
+          </a:prstGeom>
+          <a:solidFill>
+            <a:srgbClr val="FFFFFF"/>
+          </a:solidFill>
+          <a:ln w="9525">
+            <a:solidFill>
+              <a:srgbClr val="B9C0CC"/>
+            </a:solidFill>
+          </a:ln>
+          <a:effectLst/>
+        </p:spPr>
+        <p:style>
+          <a:lnRef idx="1">
+            <a:schemeClr val="accent1"/>
+          </a:lnRef>
+          <a:fillRef idx="3">
+            <a:schemeClr val="accent1"/>
+          </a:fillRef>
+          <a:effectRef idx="2">
+            <a:schemeClr val="accent1"/>
+          </a:effectRef>
+          <a:fontRef idx="minor">
+            <a:schemeClr val="lt1"/>
+          </a:fontRef>
+        </p:style>
+        <p:txBody>
+          <a:bodyPr rtlCol="0" anchor="ctr"/>
+          <a:lstStyle/>
+          <a:p>
+            <a:pPr algn="ctr"/>
+          </a:p>
+        </p:txBody>
+      </p:sp>
+      <p:sp>
+        <p:nvSpPr>
+          <p:cNvPr id="28" name="TextBox 27"/>
+          <p:cNvSpPr txBox="1"/>
+          <p:nvPr/>
+        </p:nvSpPr>
+        <p:spPr>
+          <a:xfrm>
+            <a:off x="5838213" y="2696176"/>
+            <a:ext cx="783333" cy="240000"/>
+          </a:xfrm>
+          <a:prstGeom prst="rect">
+            <a:avLst/>
+          </a:prstGeom>
+          <a:noFill/>
+        </p:spPr>
+        <p:txBody>
+          <a:bodyPr wrap="square" lIns="30000" rIns="30000">
+            <a:spAutoFit/>
+          </a:bodyPr>
+          <a:lstStyle/>
+          <a:p>
+            <a:pPr algn="r"/>
+            <a:r>
+              <a:rPr sz="800" b="0">
+                <a:solidFill>
+                  <a:srgbClr val="1A2233"/>
+                </a:solidFill>
+                <a:latin typeface="Consolas"/>
+              </a:rPr>
+              <a:t>127.307</a:t>
+            </a:r>
+          </a:p>
+        </p:txBody>
+      </p:sp>
+      <p:sp>
+        <p:nvSpPr>
+          <p:cNvPr id="29" name="Rectangle 28"/>
+          <p:cNvSpPr/>
+          <p:nvPr/>
+        </p:nvSpPr>
+        <p:spPr>
+          <a:xfrm>
+            <a:off x="6691546" y="2718176"/>
+            <a:ext cx="783333" cy="210000"/>
+          </a:xfrm>
+          <a:prstGeom prst="rect">
+            <a:avLst/>
+          </a:prstGeom>
+          <a:solidFill>
+            <a:srgbClr val="FFFFFF"/>
+          </a:solidFill>
+          <a:ln w="9525">
+            <a:solidFill>
+              <a:srgbClr val="B9C0CC"/>
+            </a:solidFill>
+          </a:ln>
+          <a:effectLst/>
+        </p:spPr>
+        <p:style>
+          <a:lnRef idx="1">
+            <a:schemeClr val="accent1"/>
+          </a:lnRef>
+          <a:fillRef idx="3">
+            <a:schemeClr val="accent1"/>
+          </a:fillRef>
+          <a:effectRef idx="2">
+            <a:schemeClr val="accent1"/>
+          </a:effectRef>
+          <a:fontRef idx="minor">
+            <a:schemeClr val="lt1"/>
+          </a:fontRef>
+        </p:style>
+        <p:txBody>
+          <a:bodyPr rtlCol="0" anchor="ctr"/>
+          <a:lstStyle/>
+          <a:p>
+            <a:pPr algn="ctr"/>
+          </a:p>
+        </p:txBody>
+      </p:sp>
+      <p:sp>
+        <p:nvSpPr>
+          <p:cNvPr id="30" name="TextBox 29"/>
+          <p:cNvSpPr txBox="1"/>
+          <p:nvPr/>
+        </p:nvSpPr>
+        <p:spPr>
+          <a:xfrm>
+            <a:off x="6691546" y="2696176"/>
+            <a:ext cx="783333" cy="240000"/>
+          </a:xfrm>
+          <a:prstGeom prst="rect">
+            <a:avLst/>
+          </a:prstGeom>
+          <a:noFill/>
+        </p:spPr>
+        <p:txBody>
+          <a:bodyPr wrap="square" lIns="30000" rIns="30000">
+            <a:spAutoFit/>
+          </a:bodyPr>
+          <a:lstStyle/>
+          <a:p>
+            <a:pPr algn="r"/>
+            <a:r>
+              <a:rPr sz="800" b="0">
+                <a:solidFill>
+                  <a:srgbClr val="1A2233"/>
+                </a:solidFill>
+                <a:latin typeface="Consolas"/>
+              </a:rPr>
+              <a:t>0.0</a:t>
+            </a:r>
+          </a:p>
+        </p:txBody>
+      </p:sp>
+      <p:sp>
+        <p:nvSpPr>
+          <p:cNvPr id="31" name="Rounded Rectangle 30"/>
+          <p:cNvSpPr/>
+          <p:nvPr/>
+        </p:nvSpPr>
+        <p:spPr>
+          <a:xfrm>
+            <a:off x="4904880" y="3048176"/>
+            <a:ext cx="2650000" cy="900000"/>
+          </a:xfrm>
+          <a:prstGeom prst="roundRect">
+            <a:avLst>
+              <a:gd name="adj" fmla="val 8000"/>
+            </a:avLst>
+          </a:prstGeom>
+          <a:solidFill>
+            <a:srgbClr val="F5F7FB"/>
+          </a:solidFill>
+          <a:ln w="9525">
+            <a:solidFill>
+              <a:srgbClr val="D0D5DE"/>
+            </a:solidFill>
+          </a:ln>
+          <a:effectLst/>
+        </p:spPr>
+        <p:style>
+          <a:lnRef idx="1">
+            <a:schemeClr val="accent1"/>
+          </a:lnRef>
+          <a:fillRef idx="3">
+            <a:schemeClr val="accent1"/>
+          </a:fillRef>
+          <a:effectRef idx="2">
+            <a:schemeClr val="accent1"/>
+          </a:effectRef>
+          <a:fontRef idx="minor">
+            <a:schemeClr val="lt1"/>
+          </a:fontRef>
+        </p:style>
+        <p:txBody>
+          <a:bodyPr rtlCol="0" anchor="ctr"/>
+          <a:lstStyle/>
+          <a:p>
+            <a:pPr algn="ctr"/>
+          </a:p>
+        </p:txBody>
+      </p:sp>
+      <p:sp>
+        <p:nvSpPr>
+          <p:cNvPr id="32" name="TextBox 31"/>
+          <p:cNvSpPr txBox="1"/>
+          <p:nvPr/>
+        </p:nvSpPr>
+        <p:spPr>
+          <a:xfrm>
+            <a:off x="4964880" y="3068176"/>
+            <a:ext cx="2530000" cy="240000"/>
+          </a:xfrm>
+          <a:prstGeom prst="rect">
+            <a:avLst/>
+          </a:prstGeom>
+          <a:noFill/>
+        </p:spPr>
+        <p:txBody>
+          <a:bodyPr wrap="square">
+            <a:spAutoFit/>
+          </a:bodyPr>
+          <a:lstStyle/>
+          <a:p>
+            <a:r>
+              <a:rPr sz="900" b="1">
+                <a:solidFill>
+                  <a:srgbClr val="1A2233"/>
+                </a:solidFill>
+                <a:latin typeface="Malgun Gothic"/>
+              </a:rPr>
+              <a:t>플랫폼 자세 [deg]  roll / pitch / yaw</a:t>
+            </a:r>
+          </a:p>
+        </p:txBody>
+      </p:sp>
+      <p:sp>
+        <p:nvSpPr>
+          <p:cNvPr id="33" name="TextBox 32"/>
+          <p:cNvSpPr txBox="1"/>
+          <p:nvPr/>
+        </p:nvSpPr>
+        <p:spPr>
+          <a:xfrm>
+            <a:off x="4964880" y="3318176"/>
+            <a:ext cx="480000" cy="220000"/>
+          </a:xfrm>
+          <a:prstGeom prst="rect">
+            <a:avLst/>
+          </a:prstGeom>
+          <a:noFill/>
+        </p:spPr>
+        <p:txBody>
+          <a:bodyPr wrap="square" lIns="20000" rIns="20000">
+            <a:spAutoFit/>
+          </a:bodyPr>
+          <a:lstStyle/>
+          <a:p>
+            <a:r>
+              <a:rPr sz="800" b="0">
+                <a:solidFill>
+                  <a:srgbClr val="5A6478"/>
+                </a:solidFill>
+                <a:latin typeface="Malgun Gothic"/>
+              </a:rPr>
+              <a:t>roll</a:t>
+            </a:r>
+          </a:p>
+        </p:txBody>
+      </p:sp>
+      <p:sp>
+        <p:nvSpPr>
+          <p:cNvPr id="34" name="Rectangle 33"/>
+          <p:cNvSpPr/>
+          <p:nvPr/>
+        </p:nvSpPr>
+        <p:spPr>
+          <a:xfrm>
+            <a:off x="5444880" y="3348176"/>
+            <a:ext cx="400000" cy="170000"/>
+          </a:xfrm>
+          <a:prstGeom prst="rect">
+            <a:avLst/>
+          </a:prstGeom>
+          <a:solidFill>
+            <a:srgbClr val="FFFFFF"/>
+          </a:solidFill>
+          <a:ln w="9525">
+            <a:solidFill>
+              <a:srgbClr val="B9C0CC"/>
+            </a:solidFill>
+          </a:ln>
+          <a:effectLst/>
+        </p:spPr>
+        <p:style>
+          <a:lnRef idx="1">
+            <a:schemeClr val="accent1"/>
+          </a:lnRef>
+          <a:fillRef idx="3">
+            <a:schemeClr val="accent1"/>
+          </a:fillRef>
+          <a:effectRef idx="2">
+            <a:schemeClr val="accent1"/>
+          </a:effectRef>
+          <a:fontRef idx="minor">
+            <a:schemeClr val="lt1"/>
+          </a:fontRef>
+        </p:style>
+        <p:txBody>
+          <a:bodyPr rtlCol="0" anchor="ctr"/>
+          <a:lstStyle/>
+          <a:p>
+            <a:pPr algn="ctr"/>
+          </a:p>
+        </p:txBody>
+      </p:sp>
+      <p:sp>
+        <p:nvSpPr>
+          <p:cNvPr id="35" name="TextBox 34"/>
+          <p:cNvSpPr txBox="1"/>
+          <p:nvPr/>
+        </p:nvSpPr>
+        <p:spPr>
+          <a:xfrm>
+            <a:off x="5444880" y="3318176"/>
+            <a:ext cx="400000" cy="220000"/>
+          </a:xfrm>
+          <a:prstGeom prst="rect">
+            <a:avLst/>
+          </a:prstGeom>
+          <a:noFill/>
+        </p:spPr>
+        <p:txBody>
+          <a:bodyPr wrap="square" lIns="30000" rIns="30000">
+            <a:spAutoFit/>
+          </a:bodyPr>
+          <a:lstStyle/>
+          <a:p>
+            <a:pPr algn="r"/>
+            <a:r>
+              <a:rPr sz="800" b="0">
+                <a:solidFill>
+                  <a:srgbClr val="1A2233"/>
+                </a:solidFill>
+                <a:latin typeface="Consolas"/>
+              </a:rPr>
+              <a:t>0.0</a:t>
+            </a:r>
+          </a:p>
+        </p:txBody>
+      </p:sp>
+      <p:sp>
+        <p:nvSpPr>
+          <p:cNvPr id="36" name="Rectangle 35"/>
+          <p:cNvSpPr/>
+          <p:nvPr/>
+        </p:nvSpPr>
+        <p:spPr>
+          <a:xfrm>
+            <a:off x="5944880" y="3418176"/>
+            <a:ext cx="1530000" cy="30000"/>
+          </a:xfrm>
+          <a:prstGeom prst="rect">
+            <a:avLst/>
+          </a:prstGeom>
+          <a:solidFill>
+            <a:srgbClr val="B9C0CC"/>
+          </a:solidFill>
+          <a:ln w="9525">
+            <a:solidFill>
+              <a:srgbClr val="B9C0CC"/>
+            </a:solidFill>
+          </a:ln>
+          <a:effectLst/>
+        </p:spPr>
+        <p:style>
+          <a:lnRef idx="1">
+            <a:schemeClr val="accent1"/>
+          </a:lnRef>
+          <a:fillRef idx="3">
+            <a:schemeClr val="accent1"/>
+          </a:fillRef>
+          <a:effectRef idx="2">
+            <a:schemeClr val="accent1"/>
+          </a:effectRef>
+          <a:fontRef idx="minor">
+            <a:schemeClr val="lt1"/>
+          </a:fontRef>
+        </p:style>
+        <p:txBody>
+          <a:bodyPr rtlCol="0" anchor="ctr"/>
+          <a:lstStyle/>
+          <a:p>
+            <a:pPr algn="ctr"/>
+          </a:p>
+        </p:txBody>
+      </p:sp>
+      <p:sp>
+        <p:nvSpPr>
+          <p:cNvPr id="37" name="Rectangle 36"/>
+          <p:cNvSpPr/>
+          <p:nvPr/>
+        </p:nvSpPr>
+        <p:spPr>
+          <a:xfrm>
+            <a:off x="6669880" y="3358176"/>
+            <a:ext cx="80000" cy="150000"/>
+          </a:xfrm>
+          <a:prstGeom prst="rect">
+            <a:avLst/>
+          </a:prstGeom>
+          <a:solidFill>
+            <a:srgbClr val="2B57A6"/>
+          </a:solidFill>
+          <a:ln w="9525">
+            <a:solidFill>
+              <a:srgbClr val="2B57A6"/>
+            </a:solidFill>
+          </a:ln>
+          <a:effectLst/>
+        </p:spPr>
+        <p:style>
+          <a:lnRef idx="1">
+            <a:schemeClr val="accent1"/>
+          </a:lnRef>
+          <a:fillRef idx="3">
+            <a:schemeClr val="accent1"/>
+          </a:fillRef>
+          <a:effectRef idx="2">
+            <a:schemeClr val="accent1"/>
+          </a:effectRef>
+          <a:fontRef idx="minor">
+            <a:schemeClr val="lt1"/>
+          </a:fontRef>
+        </p:style>
+        <p:txBody>
+          <a:bodyPr rtlCol="0" anchor="ctr"/>
+          <a:lstStyle/>
+          <a:p>
+            <a:pPr algn="ctr"/>
+          </a:p>
+        </p:txBody>
+      </p:sp>
+      <p:sp>
+        <p:nvSpPr>
+          <p:cNvPr id="38" name="TextBox 37"/>
+          <p:cNvSpPr txBox="1"/>
+          <p:nvPr/>
+        </p:nvSpPr>
+        <p:spPr>
+          <a:xfrm>
+            <a:off x="4964880" y="3508176"/>
+            <a:ext cx="480000" cy="220000"/>
+          </a:xfrm>
+          <a:prstGeom prst="rect">
+            <a:avLst/>
+          </a:prstGeom>
+          <a:noFill/>
+        </p:spPr>
+        <p:txBody>
+          <a:bodyPr wrap="square" lIns="20000" rIns="20000">
+            <a:spAutoFit/>
+          </a:bodyPr>
+          <a:lstStyle/>
+          <a:p>
+            <a:r>
+              <a:rPr sz="800" b="0">
+                <a:solidFill>
+                  <a:srgbClr val="5A6478"/>
+                </a:solidFill>
+                <a:latin typeface="Malgun Gothic"/>
+              </a:rPr>
+              <a:t>pitch</a:t>
+            </a:r>
+          </a:p>
+        </p:txBody>
+      </p:sp>
+      <p:sp>
+        <p:nvSpPr>
+          <p:cNvPr id="39" name="Rectangle 38"/>
+          <p:cNvSpPr/>
+          <p:nvPr/>
+        </p:nvSpPr>
+        <p:spPr>
+          <a:xfrm>
+            <a:off x="5444880" y="3538176"/>
+            <a:ext cx="400000" cy="170000"/>
+          </a:xfrm>
+          <a:prstGeom prst="rect">
+            <a:avLst/>
+          </a:prstGeom>
+          <a:solidFill>
+            <a:srgbClr val="FFFFFF"/>
+          </a:solidFill>
+          <a:ln w="9525">
+            <a:solidFill>
+              <a:srgbClr val="B9C0CC"/>
+            </a:solidFill>
+          </a:ln>
+          <a:effectLst/>
+        </p:spPr>
+        <p:style>
+          <a:lnRef idx="1">
+            <a:schemeClr val="accent1"/>
+          </a:lnRef>
+          <a:fillRef idx="3">
+            <a:schemeClr val="accent1"/>
+          </a:fillRef>
+          <a:effectRef idx="2">
+            <a:schemeClr val="accent1"/>
+          </a:effectRef>
+          <a:fontRef idx="minor">
+            <a:schemeClr val="lt1"/>
+          </a:fontRef>
+        </p:style>
+        <p:txBody>
+          <a:bodyPr rtlCol="0" anchor="ctr"/>
+          <a:lstStyle/>
+          <a:p>
+            <a:pPr algn="ctr"/>
+          </a:p>
+        </p:txBody>
+      </p:sp>
+      <p:sp>
+        <p:nvSpPr>
+          <p:cNvPr id="40" name="TextBox 39"/>
+          <p:cNvSpPr txBox="1"/>
+          <p:nvPr/>
+        </p:nvSpPr>
+        <p:spPr>
+          <a:xfrm>
+            <a:off x="5444880" y="3508176"/>
+            <a:ext cx="400000" cy="220000"/>
+          </a:xfrm>
+          <a:prstGeom prst="rect">
+            <a:avLst/>
+          </a:prstGeom>
+          <a:noFill/>
+        </p:spPr>
+        <p:txBody>
+          <a:bodyPr wrap="square" lIns="30000" rIns="30000">
+            <a:spAutoFit/>
+          </a:bodyPr>
+          <a:lstStyle/>
+          <a:p>
+            <a:pPr algn="r"/>
+            <a:r>
+              <a:rPr sz="800" b="0">
+                <a:solidFill>
+                  <a:srgbClr val="1A2233"/>
+                </a:solidFill>
+                <a:latin typeface="Consolas"/>
+              </a:rPr>
+              <a:t>0.0</a:t>
+            </a:r>
+          </a:p>
+        </p:txBody>
+      </p:sp>
+      <p:sp>
+        <p:nvSpPr>
+          <p:cNvPr id="41" name="Rectangle 40"/>
+          <p:cNvSpPr/>
+          <p:nvPr/>
+        </p:nvSpPr>
+        <p:spPr>
+          <a:xfrm>
+            <a:off x="5944880" y="3608176"/>
+            <a:ext cx="1530000" cy="30000"/>
+          </a:xfrm>
+          <a:prstGeom prst="rect">
+            <a:avLst/>
+          </a:prstGeom>
+          <a:solidFill>
+            <a:srgbClr val="B9C0CC"/>
+          </a:solidFill>
+          <a:ln w="9525">
+            <a:solidFill>
+              <a:srgbClr val="B9C0CC"/>
+            </a:solidFill>
+          </a:ln>
+          <a:effectLst/>
+        </p:spPr>
+        <p:style>
+          <a:lnRef idx="1">
+            <a:schemeClr val="accent1"/>
+          </a:lnRef>
+          <a:fillRef idx="3">
+            <a:schemeClr val="accent1"/>
+          </a:fillRef>
+          <a:effectRef idx="2">
+            <a:schemeClr val="accent1"/>
+          </a:effectRef>
+          <a:fontRef idx="minor">
+            <a:schemeClr val="lt1"/>
+          </a:fontRef>
+        </p:style>
+        <p:txBody>
+          <a:bodyPr rtlCol="0" anchor="ctr"/>
+          <a:lstStyle/>
+          <a:p>
+            <a:pPr algn="ctr"/>
+          </a:p>
+        </p:txBody>
+      </p:sp>
+      <p:sp>
+        <p:nvSpPr>
+          <p:cNvPr id="42" name="Rectangle 41"/>
+          <p:cNvSpPr/>
+          <p:nvPr/>
+        </p:nvSpPr>
+        <p:spPr>
+          <a:xfrm>
+            <a:off x="6669880" y="3548176"/>
+            <a:ext cx="80000" cy="150000"/>
+          </a:xfrm>
+          <a:prstGeom prst="rect">
+            <a:avLst/>
+          </a:prstGeom>
+          <a:solidFill>
+            <a:srgbClr val="2B57A6"/>
+          </a:solidFill>
+          <a:ln w="9525">
+            <a:solidFill>
+              <a:srgbClr val="2B57A6"/>
+            </a:solidFill>
+          </a:ln>
+          <a:effectLst/>
+        </p:spPr>
+        <p:style>
+          <a:lnRef idx="1">
+            <a:schemeClr val="accent1"/>
+          </a:lnRef>
+          <a:fillRef idx="3">
+            <a:schemeClr val="accent1"/>
+          </a:fillRef>
+          <a:effectRef idx="2">
+            <a:schemeClr val="accent1"/>
+          </a:effectRef>
+          <a:fontRef idx="minor">
+            <a:schemeClr val="lt1"/>
+          </a:fontRef>
+        </p:style>
+        <p:txBody>
+          <a:bodyPr rtlCol="0" anchor="ctr"/>
+          <a:lstStyle/>
+          <a:p>
+            <a:pPr algn="ctr"/>
+          </a:p>
+        </p:txBody>
+      </p:sp>
+      <p:sp>
+        <p:nvSpPr>
+          <p:cNvPr id="43" name="TextBox 42"/>
+          <p:cNvSpPr txBox="1"/>
+          <p:nvPr/>
+        </p:nvSpPr>
+        <p:spPr>
+          <a:xfrm>
+            <a:off x="4964880" y="3698176"/>
+            <a:ext cx="480000" cy="220000"/>
+          </a:xfrm>
+          <a:prstGeom prst="rect">
+            <a:avLst/>
+          </a:prstGeom>
+          <a:noFill/>
+        </p:spPr>
+        <p:txBody>
+          <a:bodyPr wrap="square" lIns="20000" rIns="20000">
+            <a:spAutoFit/>
+          </a:bodyPr>
+          <a:lstStyle/>
+          <a:p>
+            <a:r>
+              <a:rPr sz="800" b="0">
+                <a:solidFill>
+                  <a:srgbClr val="5A6478"/>
+                </a:solidFill>
+                <a:latin typeface="Malgun Gothic"/>
+              </a:rPr>
+              <a:t>yaw</a:t>
+            </a:r>
+          </a:p>
+        </p:txBody>
+      </p:sp>
+      <p:sp>
+        <p:nvSpPr>
+          <p:cNvPr id="44" name="Rectangle 43"/>
+          <p:cNvSpPr/>
+          <p:nvPr/>
+        </p:nvSpPr>
+        <p:spPr>
+          <a:xfrm>
+            <a:off x="5444880" y="3728176"/>
+            <a:ext cx="400000" cy="170000"/>
+          </a:xfrm>
+          <a:prstGeom prst="rect">
+            <a:avLst/>
+          </a:prstGeom>
+          <a:solidFill>
+            <a:srgbClr val="FFFFFF"/>
+          </a:solidFill>
+          <a:ln w="9525">
+            <a:solidFill>
+              <a:srgbClr val="B9C0CC"/>
+            </a:solidFill>
+          </a:ln>
+          <a:effectLst/>
+        </p:spPr>
+        <p:style>
+          <a:lnRef idx="1">
+            <a:schemeClr val="accent1"/>
+          </a:lnRef>
+          <a:fillRef idx="3">
+            <a:schemeClr val="accent1"/>
+          </a:fillRef>
+          <a:effectRef idx="2">
+            <a:schemeClr val="accent1"/>
+          </a:effectRef>
+          <a:fontRef idx="minor">
+            <a:schemeClr val="lt1"/>
+          </a:fontRef>
+        </p:style>
+        <p:txBody>
+          <a:bodyPr rtlCol="0" anchor="ctr"/>
+          <a:lstStyle/>
+          <a:p>
+            <a:pPr algn="ctr"/>
+          </a:p>
+        </p:txBody>
+      </p:sp>
+      <p:sp>
+        <p:nvSpPr>
+          <p:cNvPr id="45" name="TextBox 44"/>
+          <p:cNvSpPr txBox="1"/>
+          <p:nvPr/>
+        </p:nvSpPr>
+        <p:spPr>
+          <a:xfrm>
+            <a:off x="5444880" y="3698176"/>
+            <a:ext cx="400000" cy="220000"/>
+          </a:xfrm>
+          <a:prstGeom prst="rect">
+            <a:avLst/>
+          </a:prstGeom>
+          <a:noFill/>
+        </p:spPr>
+        <p:txBody>
+          <a:bodyPr wrap="square" lIns="30000" rIns="30000">
+            <a:spAutoFit/>
+          </a:bodyPr>
+          <a:lstStyle/>
+          <a:p>
+            <a:pPr algn="r"/>
+            <a:r>
+              <a:rPr sz="800" b="0">
+                <a:solidFill>
+                  <a:srgbClr val="1A2233"/>
+                </a:solidFill>
+                <a:latin typeface="Consolas"/>
+              </a:rPr>
+              <a:t>45.0</a:t>
+            </a:r>
+          </a:p>
+        </p:txBody>
+      </p:sp>
+      <p:sp>
+        <p:nvSpPr>
+          <p:cNvPr id="46" name="Rectangle 45"/>
+          <p:cNvSpPr/>
+          <p:nvPr/>
+        </p:nvSpPr>
+        <p:spPr>
+          <a:xfrm>
+            <a:off x="5944880" y="3798176"/>
+            <a:ext cx="1530000" cy="30000"/>
+          </a:xfrm>
+          <a:prstGeom prst="rect">
+            <a:avLst/>
+          </a:prstGeom>
+          <a:solidFill>
+            <a:srgbClr val="B9C0CC"/>
+          </a:solidFill>
+          <a:ln w="9525">
+            <a:solidFill>
+              <a:srgbClr val="B9C0CC"/>
+            </a:solidFill>
+          </a:ln>
+          <a:effectLst/>
+        </p:spPr>
+        <p:style>
+          <a:lnRef idx="1">
+            <a:schemeClr val="accent1"/>
+          </a:lnRef>
+          <a:fillRef idx="3">
+            <a:schemeClr val="accent1"/>
+          </a:fillRef>
+          <a:effectRef idx="2">
+            <a:schemeClr val="accent1"/>
+          </a:effectRef>
+          <a:fontRef idx="minor">
+            <a:schemeClr val="lt1"/>
+          </a:fontRef>
+        </p:style>
+        <p:txBody>
+          <a:bodyPr rtlCol="0" anchor="ctr"/>
+          <a:lstStyle/>
+          <a:p>
+            <a:pPr algn="ctr"/>
+          </a:p>
+        </p:txBody>
+      </p:sp>
+      <p:sp>
+        <p:nvSpPr>
+          <p:cNvPr id="47" name="Rectangle 46"/>
+          <p:cNvSpPr/>
+          <p:nvPr/>
+        </p:nvSpPr>
+        <p:spPr>
+          <a:xfrm>
+            <a:off x="6096130" y="3738176"/>
+            <a:ext cx="80000" cy="150000"/>
+          </a:xfrm>
+          <a:prstGeom prst="rect">
+            <a:avLst/>
+          </a:prstGeom>
+          <a:solidFill>
+            <a:srgbClr val="2B57A6"/>
+          </a:solidFill>
+          <a:ln w="9525">
+            <a:solidFill>
+              <a:srgbClr val="2B57A6"/>
+            </a:solidFill>
+          </a:ln>
+          <a:effectLst/>
+        </p:spPr>
+        <p:style>
+          <a:lnRef idx="1">
+            <a:schemeClr val="accent1"/>
+          </a:lnRef>
+          <a:fillRef idx="3">
+            <a:schemeClr val="accent1"/>
+          </a:fillRef>
+          <a:effectRef idx="2">
+            <a:schemeClr val="accent1"/>
+          </a:effectRef>
+          <a:fontRef idx="minor">
+            <a:schemeClr val="lt1"/>
+          </a:fontRef>
+        </p:style>
+        <p:txBody>
+          <a:bodyPr rtlCol="0" anchor="ctr"/>
+          <a:lstStyle/>
+          <a:p>
+            <a:pPr algn="ctr"/>
+          </a:p>
+        </p:txBody>
+      </p:sp>
+      <p:sp>
+        <p:nvSpPr>
+          <p:cNvPr id="48" name="Rounded Rectangle 47"/>
+          <p:cNvSpPr/>
+          <p:nvPr/>
+        </p:nvSpPr>
+        <p:spPr>
+          <a:xfrm>
+            <a:off x="4904880" y="4008176"/>
+            <a:ext cx="2650000" cy="560000"/>
+          </a:xfrm>
+          <a:prstGeom prst="roundRect">
+            <a:avLst>
+              <a:gd name="adj" fmla="val 8000"/>
+            </a:avLst>
+          </a:prstGeom>
+          <a:solidFill>
+            <a:srgbClr val="F5F7FB"/>
+          </a:solidFill>
+          <a:ln w="9525">
+            <a:solidFill>
+              <a:srgbClr val="D0D5DE"/>
+            </a:solidFill>
+          </a:ln>
+          <a:effectLst/>
+        </p:spPr>
+        <p:style>
+          <a:lnRef idx="1">
+            <a:schemeClr val="accent1"/>
+          </a:lnRef>
+          <a:fillRef idx="3">
+            <a:schemeClr val="accent1"/>
+          </a:fillRef>
+          <a:effectRef idx="2">
+            <a:schemeClr val="accent1"/>
+          </a:effectRef>
+          <a:fontRef idx="minor">
+            <a:schemeClr val="lt1"/>
+          </a:fontRef>
+        </p:style>
+        <p:txBody>
+          <a:bodyPr rtlCol="0" anchor="ctr"/>
+          <a:lstStyle/>
+          <a:p>
+            <a:pPr algn="ctr"/>
+          </a:p>
+        </p:txBody>
+      </p:sp>
+      <p:sp>
+        <p:nvSpPr>
+          <p:cNvPr id="49" name="TextBox 48"/>
+          <p:cNvSpPr txBox="1"/>
+          <p:nvPr/>
+        </p:nvSpPr>
+        <p:spPr>
+          <a:xfrm>
+            <a:off x="4964880" y="4028176"/>
+            <a:ext cx="2530000" cy="240000"/>
+          </a:xfrm>
+          <a:prstGeom prst="rect">
+            <a:avLst/>
+          </a:prstGeom>
+          <a:noFill/>
+        </p:spPr>
+        <p:txBody>
+          <a:bodyPr wrap="square">
+            <a:spAutoFit/>
+          </a:bodyPr>
+          <a:lstStyle/>
+          <a:p>
+            <a:r>
+              <a:rPr sz="900" b="1">
+                <a:solidFill>
+                  <a:srgbClr val="1A2233"/>
+                </a:solidFill>
+                <a:latin typeface="Malgun Gothic"/>
+              </a:rPr>
+              <a:t>안테나 설치  az / tilt [deg] / offset [m]</a:t>
+            </a:r>
+          </a:p>
+        </p:txBody>
+      </p:sp>
+      <p:sp>
+        <p:nvSpPr>
+          <p:cNvPr id="50" name="Rectangle 49"/>
+          <p:cNvSpPr/>
+          <p:nvPr/>
+        </p:nvSpPr>
+        <p:spPr>
+          <a:xfrm>
+            <a:off x="4984880" y="4298176"/>
+            <a:ext cx="658000" cy="210000"/>
+          </a:xfrm>
+          <a:prstGeom prst="rect">
+            <a:avLst/>
+          </a:prstGeom>
+          <a:solidFill>
+            <a:srgbClr val="FFFFFF"/>
+          </a:solidFill>
+          <a:ln w="9525">
+            <a:solidFill>
+              <a:srgbClr val="B9C0CC"/>
+            </a:solidFill>
+          </a:ln>
+          <a:effectLst/>
+        </p:spPr>
+        <p:style>
+          <a:lnRef idx="1">
+            <a:schemeClr val="accent1"/>
+          </a:lnRef>
+          <a:fillRef idx="3">
+            <a:schemeClr val="accent1"/>
+          </a:fillRef>
+          <a:effectRef idx="2">
+            <a:schemeClr val="accent1"/>
+          </a:effectRef>
+          <a:fontRef idx="minor">
+            <a:schemeClr val="lt1"/>
+          </a:fontRef>
+        </p:style>
+        <p:txBody>
+          <a:bodyPr rtlCol="0" anchor="ctr"/>
+          <a:lstStyle/>
+          <a:p>
+            <a:pPr algn="ctr"/>
+          </a:p>
+        </p:txBody>
+      </p:sp>
+      <p:sp>
+        <p:nvSpPr>
+          <p:cNvPr id="51" name="TextBox 50"/>
+          <p:cNvSpPr txBox="1"/>
+          <p:nvPr/>
+        </p:nvSpPr>
+        <p:spPr>
+          <a:xfrm>
+            <a:off x="4984880" y="4276176"/>
+            <a:ext cx="658000" cy="240000"/>
+          </a:xfrm>
+          <a:prstGeom prst="rect">
+            <a:avLst/>
+          </a:prstGeom>
+          <a:noFill/>
+        </p:spPr>
+        <p:txBody>
+          <a:bodyPr wrap="square" lIns="30000" rIns="30000">
+            <a:spAutoFit/>
+          </a:bodyPr>
+          <a:lstStyle/>
+          <a:p>
+            <a:pPr algn="r"/>
+            <a:r>
+              <a:rPr sz="800" b="0">
+                <a:solidFill>
+                  <a:srgbClr val="1A2233"/>
+                </a:solidFill>
+                <a:latin typeface="Consolas"/>
+              </a:rPr>
+              <a:t>90.000</a:t>
+            </a:r>
+          </a:p>
+        </p:txBody>
+      </p:sp>
+      <p:sp>
+        <p:nvSpPr>
+          <p:cNvPr id="52" name="Rectangle 51"/>
+          <p:cNvSpPr/>
+          <p:nvPr/>
+        </p:nvSpPr>
+        <p:spPr>
+          <a:xfrm>
+            <a:off x="5712880" y="4298176"/>
+            <a:ext cx="658000" cy="210000"/>
+          </a:xfrm>
+          <a:prstGeom prst="rect">
+            <a:avLst/>
+          </a:prstGeom>
+          <a:solidFill>
+            <a:srgbClr val="FFFFFF"/>
+          </a:solidFill>
+          <a:ln w="9525">
+            <a:solidFill>
+              <a:srgbClr val="B9C0CC"/>
+            </a:solidFill>
+          </a:ln>
+          <a:effectLst/>
+        </p:spPr>
+        <p:style>
+          <a:lnRef idx="1">
+            <a:schemeClr val="accent1"/>
+          </a:lnRef>
+          <a:fillRef idx="3">
+            <a:schemeClr val="accent1"/>
+          </a:fillRef>
+          <a:effectRef idx="2">
+            <a:schemeClr val="accent1"/>
+          </a:effectRef>
+          <a:fontRef idx="minor">
+            <a:schemeClr val="lt1"/>
+          </a:fontRef>
+        </p:style>
+        <p:txBody>
+          <a:bodyPr rtlCol="0" anchor="ctr"/>
+          <a:lstStyle/>
+          <a:p>
+            <a:pPr algn="ctr"/>
+          </a:p>
+        </p:txBody>
+      </p:sp>
+      <p:sp>
+        <p:nvSpPr>
+          <p:cNvPr id="53" name="TextBox 52"/>
+          <p:cNvSpPr txBox="1"/>
+          <p:nvPr/>
+        </p:nvSpPr>
+        <p:spPr>
+          <a:xfrm>
+            <a:off x="5712880" y="4276176"/>
+            <a:ext cx="658000" cy="240000"/>
+          </a:xfrm>
+          <a:prstGeom prst="rect">
+            <a:avLst/>
+          </a:prstGeom>
+          <a:noFill/>
+        </p:spPr>
+        <p:txBody>
+          <a:bodyPr wrap="square" lIns="30000" rIns="30000">
+            <a:spAutoFit/>
+          </a:bodyPr>
+          <a:lstStyle/>
+          <a:p>
+            <a:pPr algn="r"/>
+            <a:r>
+              <a:rPr sz="800" b="0">
+                <a:solidFill>
+                  <a:srgbClr val="1A2233"/>
+                </a:solidFill>
+                <a:latin typeface="Consolas"/>
+              </a:rPr>
+              <a:t>0.000</a:t>
+            </a:r>
+          </a:p>
+        </p:txBody>
+      </p:sp>
+      <p:sp>
+        <p:nvSpPr>
+          <p:cNvPr id="54" name="Rectangle 53"/>
+          <p:cNvSpPr/>
+          <p:nvPr/>
+        </p:nvSpPr>
+        <p:spPr>
+          <a:xfrm>
+            <a:off x="6440880" y="4298176"/>
+            <a:ext cx="1034000" cy="210000"/>
+          </a:xfrm>
+          <a:prstGeom prst="rect">
+            <a:avLst/>
+          </a:prstGeom>
+          <a:solidFill>
+            <a:srgbClr val="FFFFFF"/>
+          </a:solidFill>
+          <a:ln w="9525">
+            <a:solidFill>
+              <a:srgbClr val="B9C0CC"/>
+            </a:solidFill>
+          </a:ln>
+          <a:effectLst/>
+        </p:spPr>
+        <p:style>
+          <a:lnRef idx="1">
+            <a:schemeClr val="accent1"/>
+          </a:lnRef>
+          <a:fillRef idx="3">
+            <a:schemeClr val="accent1"/>
+          </a:fillRef>
+          <a:effectRef idx="2">
+            <a:schemeClr val="accent1"/>
+          </a:effectRef>
+          <a:fontRef idx="minor">
+            <a:schemeClr val="lt1"/>
+          </a:fontRef>
+        </p:style>
+        <p:txBody>
+          <a:bodyPr rtlCol="0" anchor="ctr"/>
+          <a:lstStyle/>
+          <a:p>
+            <a:pPr algn="ctr"/>
+          </a:p>
+        </p:txBody>
+      </p:sp>
+      <p:sp>
+        <p:nvSpPr>
+          <p:cNvPr id="55" name="TextBox 54"/>
+          <p:cNvSpPr txBox="1"/>
+          <p:nvPr/>
+        </p:nvSpPr>
+        <p:spPr>
+          <a:xfrm>
+            <a:off x="6440880" y="4276176"/>
+            <a:ext cx="1034000" cy="240000"/>
+          </a:xfrm>
+          <a:prstGeom prst="rect">
+            <a:avLst/>
+          </a:prstGeom>
+          <a:noFill/>
+        </p:spPr>
+        <p:txBody>
+          <a:bodyPr wrap="square" lIns="30000" rIns="30000">
+            <a:spAutoFit/>
+          </a:bodyPr>
+          <a:lstStyle/>
+          <a:p>
+            <a:pPr algn="r"/>
+            <a:r>
+              <a:rPr sz="800" b="0">
+                <a:solidFill>
+                  <a:srgbClr val="1A2233"/>
+                </a:solidFill>
+                <a:latin typeface="Consolas"/>
+              </a:rPr>
+              <a:t>-30, 0, -10</a:t>
+            </a:r>
+          </a:p>
+        </p:txBody>
+      </p:sp>
+      <p:sp>
+        <p:nvSpPr>
+          <p:cNvPr id="56" name="Rounded Rectangle 55"/>
+          <p:cNvSpPr/>
+          <p:nvPr/>
+        </p:nvSpPr>
+        <p:spPr>
+          <a:xfrm>
+            <a:off x="4904880" y="4668176"/>
+            <a:ext cx="900000" cy="240000"/>
+          </a:xfrm>
+          <a:prstGeom prst="roundRect">
+            <a:avLst>
+              <a:gd name="adj" fmla="val 15000"/>
+            </a:avLst>
+          </a:prstGeom>
+          <a:solidFill>
+            <a:srgbClr val="E4E8F0"/>
+          </a:solidFill>
+          <a:ln w="9525">
+            <a:solidFill>
+              <a:srgbClr val="C9CFDA"/>
+            </a:solidFill>
+          </a:ln>
+          <a:effectLst/>
+        </p:spPr>
+        <p:style>
+          <a:lnRef idx="1">
+            <a:schemeClr val="accent1"/>
+          </a:lnRef>
+          <a:fillRef idx="3">
+            <a:schemeClr val="accent1"/>
+          </a:fillRef>
+          <a:effectRef idx="2">
+            <a:schemeClr val="accent1"/>
+          </a:effectRef>
+          <a:fontRef idx="minor">
+            <a:schemeClr val="lt1"/>
+          </a:fontRef>
+        </p:style>
+        <p:txBody>
+          <a:bodyPr rtlCol="0" anchor="ctr"/>
+          <a:lstStyle/>
+          <a:p>
+            <a:pPr algn="ctr"/>
+          </a:p>
+        </p:txBody>
+      </p:sp>
+      <p:sp>
+        <p:nvSpPr>
+          <p:cNvPr id="57" name="TextBox 56"/>
+          <p:cNvSpPr txBox="1"/>
+          <p:nvPr/>
+        </p:nvSpPr>
+        <p:spPr>
+          <a:xfrm>
+            <a:off x="4904880" y="4643176"/>
+            <a:ext cx="900000" cy="280000"/>
+          </a:xfrm>
+          <a:prstGeom prst="rect">
+            <a:avLst/>
+          </a:prstGeom>
+          <a:noFill/>
+        </p:spPr>
+        <p:txBody>
+          <a:bodyPr wrap="square">
+            <a:spAutoFit/>
+          </a:bodyPr>
+          <a:lstStyle/>
+          <a:p>
+            <a:pPr algn="ctr"/>
+            <a:r>
+              <a:rPr sz="850" b="0">
+                <a:solidFill>
+                  <a:srgbClr val="1A2233"/>
+                </a:solidFill>
+                <a:latin typeface="Malgun Gothic"/>
+              </a:rPr>
+              <a:t>예제값 복원</a:t>
+            </a:r>
+          </a:p>
+        </p:txBody>
+      </p:sp>
+      <p:sp>
+        <p:nvSpPr>
+          <p:cNvPr id="58" name="TextBox 57"/>
+          <p:cNvSpPr txBox="1"/>
+          <p:nvPr/>
+        </p:nvSpPr>
+        <p:spPr>
+          <a:xfrm>
+            <a:off x="4904880" y="4968176"/>
+            <a:ext cx="2650000" cy="240000"/>
+          </a:xfrm>
+          <a:prstGeom prst="rect">
+            <a:avLst/>
+          </a:prstGeom>
+          <a:noFill/>
+        </p:spPr>
+        <p:txBody>
+          <a:bodyPr wrap="square">
+            <a:spAutoFit/>
+          </a:bodyPr>
+          <a:lstStyle/>
+          <a:p>
+            <a:r>
+              <a:rPr sz="800" b="0">
+                <a:solidFill>
+                  <a:srgbClr val="5A6478"/>
+                </a:solidFill>
+                <a:latin typeface="Malgun Gothic"/>
+              </a:rPr>
+              <a:t>입력 각도: 도 / 변환 계산: 라디안, m</a:t>
+            </a:r>
+          </a:p>
+        </p:txBody>
+      </p:sp>
+      <p:sp>
+        <p:nvSpPr>
+          <p:cNvPr id="59" name="TextBox 58"/>
+          <p:cNvSpPr txBox="1"/>
+          <p:nvPr/>
+        </p:nvSpPr>
+        <p:spPr>
+          <a:xfrm>
+            <a:off x="7704880" y="1808176"/>
+            <a:ext cx="3776288" cy="240000"/>
+          </a:xfrm>
+          <a:prstGeom prst="rect">
+            <a:avLst/>
+          </a:prstGeom>
+          <a:noFill/>
+        </p:spPr>
+        <p:txBody>
+          <a:bodyPr wrap="square">
+            <a:spAutoFit/>
+          </a:bodyPr>
+          <a:lstStyle/>
+          <a:p>
+            <a:r>
+              <a:rPr sz="900" b="1">
+                <a:solidFill>
+                  <a:srgbClr val="1A2233"/>
+                </a:solidFill>
+                <a:latin typeface="Malgun Gothic"/>
+              </a:rPr>
+              <a:t>단계별 결과</a:t>
+            </a:r>
+          </a:p>
+        </p:txBody>
+      </p:sp>
+      <p:graphicFrame>
+        <p:nvGraphicFramePr>
+          <p:cNvPr id="60" name="Table 59"/>
+          <p:cNvGraphicFramePr>
+            <a:graphicFrameLocks noGrp="1"/>
+          </p:cNvGraphicFramePr>
+          <p:nvPr/>
+        </p:nvGraphicFramePr>
+        <p:xfrm>
+          <a:off x="7704880" y="2068176"/>
+          <a:ext cx="3776288" cy="1960000"/>
+        </p:xfrm>
+        <a:graphic>
+          <a:graphicData uri="http://schemas.openxmlformats.org/drawingml/2006/table">
+            <a:tbl>
+              <a:tblPr firstRow="1">
+                <a:tableStyleId>{5C22544A-7EE6-4342-B048-85BDC9FD1C3A}</a:tableStyleId>
+              </a:tblPr>
+              <a:tblGrid>
+                <a:gridCol w="1400000"/>
+                <a:gridCol w="792096"/>
+                <a:gridCol w="792096"/>
+                <a:gridCol w="792096"/>
+              </a:tblGrid>
+              <a:tr h="280000">
+                <a:tc>
+                  <a:txBody>
+                    <a:bodyPr/>
+                    <a:lstStyle/>
+                    <a:p>
+                      <a:pPr algn="l"/>
+                      <a:r>
+                        <a:rPr sz="750" b="1">
+                          <a:solidFill>
+                            <a:srgbClr val="1A2233"/>
+                          </a:solidFill>
+                          <a:latin typeface="Malgun Gothic"/>
+                        </a:rPr>
+                        <a:t>단계</a:t>
+                      </a:r>
+                    </a:p>
+                  </a:txBody>
+                  <a:tcPr marL="45000" marR="45000" marT="15000" marB="15000" anchor="ctr">
+                    <a:solidFill>
+                      <a:srgbClr val="EEF1F7"/>
+                    </a:solidFill>
+                  </a:tcPr>
+                </a:tc>
+                <a:tc>
+                  <a:txBody>
+                    <a:bodyPr/>
+                    <a:lstStyle/>
+                    <a:p>
+                      <a:pPr algn="r"/>
+                      <a:r>
+                        <a:rPr sz="750" b="1">
+                          <a:solidFill>
+                            <a:srgbClr val="1A2233"/>
+                          </a:solidFill>
+                          <a:latin typeface="Consolas"/>
+                        </a:rPr>
+                        <a:t>x / N / X</a:t>
+                      </a:r>
+                    </a:p>
+                  </a:txBody>
+                  <a:tcPr marL="45000" marR="45000" marT="15000" marB="15000" anchor="ctr">
+                    <a:solidFill>
+                      <a:srgbClr val="EEF1F7"/>
+                    </a:solidFill>
+                  </a:tcPr>
+                </a:tc>
+                <a:tc>
+                  <a:txBody>
+                    <a:bodyPr/>
+                    <a:lstStyle/>
+                    <a:p>
+                      <a:pPr algn="r"/>
+                      <a:r>
+                        <a:rPr sz="750" b="1">
+                          <a:solidFill>
+                            <a:srgbClr val="1A2233"/>
+                          </a:solidFill>
+                          <a:latin typeface="Consolas"/>
+                        </a:rPr>
+                        <a:t>y / E / Y</a:t>
+                      </a:r>
+                    </a:p>
+                  </a:txBody>
+                  <a:tcPr marL="45000" marR="45000" marT="15000" marB="15000" anchor="ctr">
+                    <a:solidFill>
+                      <a:srgbClr val="EEF1F7"/>
+                    </a:solidFill>
+                  </a:tcPr>
+                </a:tc>
+                <a:tc>
+                  <a:txBody>
+                    <a:bodyPr/>
+                    <a:lstStyle/>
+                    <a:p>
+                      <a:pPr algn="r"/>
+                      <a:r>
+                        <a:rPr sz="750" b="1">
+                          <a:solidFill>
+                            <a:srgbClr val="1A2233"/>
+                          </a:solidFill>
+                          <a:latin typeface="Consolas"/>
+                        </a:rPr>
+                        <a:t>z / D / Z</a:t>
+                      </a:r>
+                    </a:p>
+                  </a:txBody>
+                  <a:tcPr marL="45000" marR="45000" marT="15000" marB="15000" anchor="ctr">
+                    <a:solidFill>
+                      <a:srgbClr val="EEF1F7"/>
+                    </a:solidFill>
+                  </a:tcPr>
+                </a:tc>
+              </a:tr>
+              <a:tr h="280000">
+                <a:tc>
+                  <a:txBody>
+                    <a:bodyPr/>
+                    <a:lstStyle/>
+                    <a:p>
+                      <a:pPr algn="l"/>
+                      <a:r>
+                        <a:rPr sz="750" b="0">
+                          <a:solidFill>
+                            <a:srgbClr val="5A6478"/>
+                          </a:solidFill>
+                          <a:latin typeface="Malgun Gothic"/>
+                        </a:rPr>
+                        <a:t>1) 극좌표 -&gt; 안테나 직교</a:t>
+                      </a:r>
+                    </a:p>
+                  </a:txBody>
+                  <a:tcPr marL="45000" marR="45000" marT="15000" marB="15000" anchor="ctr">
+                    <a:solidFill>
+                      <a:srgbClr val="FFFFFF"/>
+                    </a:solidFill>
+                  </a:tcPr>
+                </a:tc>
+                <a:tc>
+                  <a:txBody>
+                    <a:bodyPr/>
+                    <a:lstStyle/>
+                    <a:p>
+                      <a:pPr algn="r"/>
+                      <a:r>
+                        <a:rPr sz="750" b="0">
+                          <a:solidFill>
+                            <a:srgbClr val="5A6478"/>
+                          </a:solidFill>
+                          <a:latin typeface="Consolas"/>
+                        </a:rPr>
+                        <a:t>17320.5</a:t>
+                      </a:r>
+                    </a:p>
+                  </a:txBody>
+                  <a:tcPr marL="45000" marR="45000" marT="15000" marB="15000" anchor="ctr">
+                    <a:solidFill>
+                      <a:srgbClr val="FFFFFF"/>
+                    </a:solidFill>
+                  </a:tcPr>
+                </a:tc>
+                <a:tc>
+                  <a:txBody>
+                    <a:bodyPr/>
+                    <a:lstStyle/>
+                    <a:p>
+                      <a:pPr algn="r"/>
+                      <a:r>
+                        <a:rPr sz="750" b="0">
+                          <a:solidFill>
+                            <a:srgbClr val="5A6478"/>
+                          </a:solidFill>
+                          <a:latin typeface="Consolas"/>
+                        </a:rPr>
+                        <a:t>10000.0</a:t>
+                      </a:r>
+                    </a:p>
+                  </a:txBody>
+                  <a:tcPr marL="45000" marR="45000" marT="15000" marB="15000" anchor="ctr">
+                    <a:solidFill>
+                      <a:srgbClr val="FFFFFF"/>
+                    </a:solidFill>
+                  </a:tcPr>
+                </a:tc>
+                <a:tc>
+                  <a:txBody>
+                    <a:bodyPr/>
+                    <a:lstStyle/>
+                    <a:p>
+                      <a:pPr algn="r"/>
+                      <a:r>
+                        <a:rPr sz="750" b="0">
+                          <a:solidFill>
+                            <a:srgbClr val="5A6478"/>
+                          </a:solidFill>
+                          <a:latin typeface="Consolas"/>
+                        </a:rPr>
+                        <a:t>0.0</a:t>
+                      </a:r>
+                    </a:p>
+                  </a:txBody>
+                  <a:tcPr marL="45000" marR="45000" marT="15000" marB="15000" anchor="ctr">
+                    <a:solidFill>
+                      <a:srgbClr val="FFFFFF"/>
+                    </a:solidFill>
+                  </a:tcPr>
+                </a:tc>
+              </a:tr>
+              <a:tr h="280000">
+                <a:tc>
+                  <a:txBody>
+                    <a:bodyPr/>
+                    <a:lstStyle/>
+                    <a:p>
+                      <a:pPr algn="l"/>
+                      <a:r>
+                        <a:rPr sz="750" b="0">
+                          <a:solidFill>
+                            <a:srgbClr val="5A6478"/>
+                          </a:solidFill>
+                          <a:latin typeface="Malgun Gothic"/>
+                        </a:rPr>
+                        <a:t>2) 안테나 -&gt; 동체</a:t>
+                      </a:r>
+                    </a:p>
+                  </a:txBody>
+                  <a:tcPr marL="45000" marR="45000" marT="15000" marB="15000" anchor="ctr">
+                    <a:solidFill>
+                      <a:srgbClr val="FFFFFF"/>
+                    </a:solidFill>
+                  </a:tcPr>
+                </a:tc>
+                <a:tc>
+                  <a:txBody>
+                    <a:bodyPr/>
+                    <a:lstStyle/>
+                    <a:p>
+                      <a:pPr algn="r"/>
+                      <a:r>
+                        <a:rPr sz="750" b="0">
+                          <a:solidFill>
+                            <a:srgbClr val="5A6478"/>
+                          </a:solidFill>
+                          <a:latin typeface="Consolas"/>
+                        </a:rPr>
+                        <a:t>-10030.0</a:t>
+                      </a:r>
+                    </a:p>
+                  </a:txBody>
+                  <a:tcPr marL="45000" marR="45000" marT="15000" marB="15000" anchor="ctr">
+                    <a:solidFill>
+                      <a:srgbClr val="FFFFFF"/>
+                    </a:solidFill>
+                  </a:tcPr>
+                </a:tc>
+                <a:tc>
+                  <a:txBody>
+                    <a:bodyPr/>
+                    <a:lstStyle/>
+                    <a:p>
+                      <a:pPr algn="r"/>
+                      <a:r>
+                        <a:rPr sz="750" b="0">
+                          <a:solidFill>
+                            <a:srgbClr val="5A6478"/>
+                          </a:solidFill>
+                          <a:latin typeface="Consolas"/>
+                        </a:rPr>
+                        <a:t>17320.5</a:t>
+                      </a:r>
+                    </a:p>
+                  </a:txBody>
+                  <a:tcPr marL="45000" marR="45000" marT="15000" marB="15000" anchor="ctr">
+                    <a:solidFill>
+                      <a:srgbClr val="FFFFFF"/>
+                    </a:solidFill>
+                  </a:tcPr>
+                </a:tc>
+                <a:tc>
+                  <a:txBody>
+                    <a:bodyPr/>
+                    <a:lstStyle/>
+                    <a:p>
+                      <a:pPr algn="r"/>
+                      <a:r>
+                        <a:rPr sz="750" b="0">
+                          <a:solidFill>
+                            <a:srgbClr val="5A6478"/>
+                          </a:solidFill>
+                          <a:latin typeface="Consolas"/>
+                        </a:rPr>
+                        <a:t>-10.0</a:t>
+                      </a:r>
+                    </a:p>
+                  </a:txBody>
+                  <a:tcPr marL="45000" marR="45000" marT="15000" marB="15000" anchor="ctr">
+                    <a:solidFill>
+                      <a:srgbClr val="FFFFFF"/>
+                    </a:solidFill>
+                  </a:tcPr>
+                </a:tc>
+              </a:tr>
+              <a:tr h="280000">
+                <a:tc>
+                  <a:txBody>
+                    <a:bodyPr/>
+                    <a:lstStyle/>
+                    <a:p>
+                      <a:pPr algn="l"/>
+                      <a:r>
+                        <a:rPr sz="750" b="0">
+                          <a:solidFill>
+                            <a:srgbClr val="5A6478"/>
+                          </a:solidFill>
+                          <a:latin typeface="Malgun Gothic"/>
+                        </a:rPr>
+                        <a:t>3) 동체 -&gt; NED</a:t>
+                      </a:r>
+                    </a:p>
+                  </a:txBody>
+                  <a:tcPr marL="45000" marR="45000" marT="15000" marB="15000" anchor="ctr">
+                    <a:solidFill>
+                      <a:srgbClr val="FFFFFF"/>
+                    </a:solidFill>
+                  </a:tcPr>
+                </a:tc>
+                <a:tc>
+                  <a:txBody>
+                    <a:bodyPr/>
+                    <a:lstStyle/>
+                    <a:p>
+                      <a:pPr algn="r"/>
+                      <a:r>
+                        <a:rPr sz="750" b="0">
+                          <a:solidFill>
+                            <a:srgbClr val="5A6478"/>
+                          </a:solidFill>
+                          <a:latin typeface="Consolas"/>
+                        </a:rPr>
+                        <a:t>-19339.7</a:t>
+                      </a:r>
+                    </a:p>
+                  </a:txBody>
+                  <a:tcPr marL="45000" marR="45000" marT="15000" marB="15000" anchor="ctr">
+                    <a:solidFill>
+                      <a:srgbClr val="FFFFFF"/>
+                    </a:solidFill>
+                  </a:tcPr>
+                </a:tc>
+                <a:tc>
+                  <a:txBody>
+                    <a:bodyPr/>
+                    <a:lstStyle/>
+                    <a:p>
+                      <a:pPr algn="r"/>
+                      <a:r>
+                        <a:rPr sz="750" b="0">
+                          <a:solidFill>
+                            <a:srgbClr val="5A6478"/>
+                          </a:solidFill>
+                          <a:latin typeface="Consolas"/>
+                        </a:rPr>
+                        <a:t>5155.2</a:t>
+                      </a:r>
+                    </a:p>
+                  </a:txBody>
+                  <a:tcPr marL="45000" marR="45000" marT="15000" marB="15000" anchor="ctr">
+                    <a:solidFill>
+                      <a:srgbClr val="FFFFFF"/>
+                    </a:solidFill>
+                  </a:tcPr>
+                </a:tc>
+                <a:tc>
+                  <a:txBody>
+                    <a:bodyPr/>
+                    <a:lstStyle/>
+                    <a:p>
+                      <a:pPr algn="r"/>
+                      <a:r>
+                        <a:rPr sz="750" b="0">
+                          <a:solidFill>
+                            <a:srgbClr val="5A6478"/>
+                          </a:solidFill>
+                          <a:latin typeface="Consolas"/>
+                        </a:rPr>
+                        <a:t>-10.0</a:t>
+                      </a:r>
+                    </a:p>
+                  </a:txBody>
+                  <a:tcPr marL="45000" marR="45000" marT="15000" marB="15000" anchor="ctr">
+                    <a:solidFill>
+                      <a:srgbClr val="FFFFFF"/>
+                    </a:solidFill>
+                  </a:tcPr>
+                </a:tc>
+              </a:tr>
+              <a:tr h="280000">
+                <a:tc>
+                  <a:txBody>
+                    <a:bodyPr/>
+                    <a:lstStyle/>
+                    <a:p>
+                      <a:pPr algn="l"/>
+                      <a:r>
+                        <a:rPr sz="750" b="0">
+                          <a:solidFill>
+                            <a:srgbClr val="5A6478"/>
+                          </a:solidFill>
+                          <a:latin typeface="Malgun Gothic"/>
+                        </a:rPr>
+                        <a:t>4) NED -&gt; ECEF</a:t>
+                      </a:r>
+                    </a:p>
+                  </a:txBody>
+                  <a:tcPr marL="45000" marR="45000" marT="15000" marB="15000" anchor="ctr">
+                    <a:solidFill>
+                      <a:srgbClr val="FFFFFF"/>
+                    </a:solidFill>
+                  </a:tcPr>
+                </a:tc>
+                <a:tc>
+                  <a:txBody>
+                    <a:bodyPr/>
+                    <a:lstStyle/>
+                    <a:p>
+                      <a:pPr algn="r"/>
+                      <a:r>
+                        <a:rPr sz="750" b="0">
+                          <a:solidFill>
+                            <a:srgbClr val="5A6478"/>
+                          </a:solidFill>
+                          <a:latin typeface="Consolas"/>
+                        </a:rPr>
+                        <a:t>-3125892.5</a:t>
+                      </a:r>
+                    </a:p>
+                  </a:txBody>
+                  <a:tcPr marL="45000" marR="45000" marT="15000" marB="15000" anchor="ctr">
+                    <a:solidFill>
+                      <a:srgbClr val="FFFFFF"/>
+                    </a:solidFill>
+                  </a:tcPr>
+                </a:tc>
+                <a:tc>
+                  <a:txBody>
+                    <a:bodyPr/>
+                    <a:lstStyle/>
+                    <a:p>
+                      <a:pPr algn="r"/>
+                      <a:r>
+                        <a:rPr sz="750" b="0">
+                          <a:solidFill>
+                            <a:srgbClr val="5A6478"/>
+                          </a:solidFill>
+                          <a:latin typeface="Consolas"/>
+                        </a:rPr>
+                        <a:t>4093775.0</a:t>
+                      </a:r>
+                    </a:p>
+                  </a:txBody>
+                  <a:tcPr marL="45000" marR="45000" marT="15000" marB="15000" anchor="ctr">
+                    <a:solidFill>
+                      <a:srgbClr val="FFFFFF"/>
+                    </a:solidFill>
+                  </a:tcPr>
+                </a:tc>
+                <a:tc>
+                  <a:txBody>
+                    <a:bodyPr/>
+                    <a:lstStyle/>
+                    <a:p>
+                      <a:pPr algn="r"/>
+                      <a:r>
+                        <a:rPr sz="750" b="0">
+                          <a:solidFill>
+                            <a:srgbClr val="5A6478"/>
+                          </a:solidFill>
+                          <a:latin typeface="Consolas"/>
+                        </a:rPr>
+                        <a:t>3749164.2</a:t>
+                      </a:r>
+                    </a:p>
+                  </a:txBody>
+                  <a:tcPr marL="45000" marR="45000" marT="15000" marB="15000" anchor="ctr">
+                    <a:solidFill>
+                      <a:srgbClr val="FFFFFF"/>
+                    </a:solidFill>
+                  </a:tcPr>
+                </a:tc>
+              </a:tr>
+              <a:tr h="280000">
+                <a:tc>
+                  <a:txBody>
+                    <a:bodyPr/>
+                    <a:lstStyle/>
+                    <a:p>
+                      <a:pPr algn="l"/>
+                      <a:r>
+                        <a:rPr sz="750" b="0">
+                          <a:solidFill>
+                            <a:srgbClr val="5A6478"/>
+                          </a:solidFill>
+                          <a:latin typeface="Malgun Gothic"/>
+                        </a:rPr>
+                        <a:t>5) ECEF -&gt; LLA</a:t>
+                      </a:r>
+                    </a:p>
+                  </a:txBody>
+                  <a:tcPr marL="45000" marR="45000" marT="15000" marB="15000" anchor="ctr">
+                    <a:solidFill>
+                      <a:srgbClr val="FFFFFF"/>
+                    </a:solidFill>
+                  </a:tcPr>
+                </a:tc>
+                <a:tc>
+                  <a:txBody>
+                    <a:bodyPr/>
+                    <a:lstStyle/>
+                    <a:p>
+                      <a:pPr algn="r"/>
+                      <a:r>
+                        <a:rPr sz="750" b="0">
+                          <a:solidFill>
+                            <a:srgbClr val="5A6478"/>
+                          </a:solidFill>
+                          <a:latin typeface="Consolas"/>
+                        </a:rPr>
+                        <a:t>36.233700</a:t>
+                      </a:r>
+                    </a:p>
+                  </a:txBody>
+                  <a:tcPr marL="45000" marR="45000" marT="15000" marB="15000" anchor="ctr">
+                    <a:solidFill>
+                      <a:srgbClr val="FFFFFF"/>
+                    </a:solidFill>
+                  </a:tcPr>
+                </a:tc>
+                <a:tc>
+                  <a:txBody>
+                    <a:bodyPr/>
+                    <a:lstStyle/>
+                    <a:p>
+                      <a:pPr algn="r"/>
+                      <a:r>
+                        <a:rPr sz="750" b="0">
+                          <a:solidFill>
+                            <a:srgbClr val="5A6478"/>
+                          </a:solidFill>
+                          <a:latin typeface="Consolas"/>
+                        </a:rPr>
+                        <a:t>127.364345</a:t>
+                      </a:r>
+                    </a:p>
+                  </a:txBody>
+                  <a:tcPr marL="45000" marR="45000" marT="15000" marB="15000" anchor="ctr">
+                    <a:solidFill>
+                      <a:srgbClr val="FFFFFF"/>
+                    </a:solidFill>
+                  </a:tcPr>
+                </a:tc>
+                <a:tc>
+                  <a:txBody>
+                    <a:bodyPr/>
+                    <a:lstStyle/>
+                    <a:p>
+                      <a:pPr algn="r"/>
+                      <a:r>
+                        <a:rPr sz="750" b="0">
+                          <a:solidFill>
+                            <a:srgbClr val="5A6478"/>
+                          </a:solidFill>
+                          <a:latin typeface="Consolas"/>
+                        </a:rPr>
+                        <a:t>41.4952</a:t>
+                      </a:r>
+                    </a:p>
+                  </a:txBody>
+                  <a:tcPr marL="45000" marR="45000" marT="15000" marB="15000" anchor="ctr">
+                    <a:solidFill>
+                      <a:srgbClr val="FFFFFF"/>
+                    </a:solidFill>
+                  </a:tcPr>
+                </a:tc>
+              </a:tr>
+              <a:tr h="280000">
+                <a:tc>
+                  <a:txBody>
+                    <a:bodyPr/>
+                    <a:lstStyle/>
+                    <a:p>
+                      <a:pPr algn="l"/>
+                      <a:r>
+                        <a:rPr sz="750" b="0">
+                          <a:solidFill>
+                            <a:srgbClr val="5A6478"/>
+                          </a:solidFill>
+                          <a:latin typeface="Malgun Gothic"/>
+                        </a:rPr>
+                        <a:t>역변환 -&gt; 극좌표 </a:t>
+                      </a:r>
+                    </a:p>
+                  </a:txBody>
+                  <a:tcPr marL="45000" marR="45000" marT="15000" marB="15000" anchor="ctr">
+                    <a:solidFill>
+                      <a:srgbClr val="FFFFFF"/>
+                    </a:solidFill>
+                  </a:tcPr>
+                </a:tc>
+                <a:tc>
+                  <a:txBody>
+                    <a:bodyPr/>
+                    <a:lstStyle/>
+                    <a:p>
+                      <a:pPr algn="r"/>
+                      <a:r>
+                        <a:rPr sz="750" b="0">
+                          <a:solidFill>
+                            <a:srgbClr val="5A6478"/>
+                          </a:solidFill>
+                          <a:latin typeface="Consolas"/>
+                        </a:rPr>
+                        <a:t>20000.0</a:t>
+                      </a:r>
+                    </a:p>
+                  </a:txBody>
+                  <a:tcPr marL="45000" marR="45000" marT="15000" marB="15000" anchor="ctr">
+                    <a:solidFill>
+                      <a:srgbClr val="FFFFFF"/>
+                    </a:solidFill>
+                  </a:tcPr>
+                </a:tc>
+                <a:tc>
+                  <a:txBody>
+                    <a:bodyPr/>
+                    <a:lstStyle/>
+                    <a:p>
+                      <a:pPr algn="r"/>
+                      <a:r>
+                        <a:rPr sz="750" b="0">
+                          <a:solidFill>
+                            <a:srgbClr val="5A6478"/>
+                          </a:solidFill>
+                          <a:latin typeface="Consolas"/>
+                        </a:rPr>
+                        <a:t>30.000000</a:t>
+                      </a:r>
+                    </a:p>
+                  </a:txBody>
+                  <a:tcPr marL="45000" marR="45000" marT="15000" marB="15000" anchor="ctr">
+                    <a:solidFill>
+                      <a:srgbClr val="FFFFFF"/>
+                    </a:solidFill>
+                  </a:tcPr>
+                </a:tc>
+                <a:tc>
+                  <a:txBody>
+                    <a:bodyPr/>
+                    <a:lstStyle/>
+                    <a:p>
+                      <a:pPr algn="r"/>
+                      <a:r>
+                        <a:rPr sz="750" b="0">
+                          <a:solidFill>
+                            <a:srgbClr val="5A6478"/>
+                          </a:solidFill>
+                          <a:latin typeface="Consolas"/>
+                        </a:rPr>
+                        <a:t>0.000000</a:t>
+                      </a:r>
+                    </a:p>
+                  </a:txBody>
+                  <a:tcPr marL="45000" marR="45000" marT="15000" marB="15000" anchor="ctr">
+                    <a:solidFill>
+                      <a:srgbClr val="FFFFFF"/>
+                    </a:solidFill>
+                  </a:tcPr>
+                </a:tc>
+              </a:tr>
+            </a:tbl>
+          </a:graphicData>
+        </a:graphic>
+      </p:graphicFrame>
+      <p:sp>
+        <p:nvSpPr>
+          <p:cNvPr id="61" name="Rounded Rectangle 60"/>
+          <p:cNvSpPr/>
+          <p:nvPr/>
+        </p:nvSpPr>
+        <p:spPr>
+          <a:xfrm>
+            <a:off x="7704880" y="4208176"/>
+            <a:ext cx="3776288" cy="1050000"/>
+          </a:xfrm>
+          <a:prstGeom prst="roundRect">
+            <a:avLst>
+              <a:gd name="adj" fmla="val 5000"/>
+            </a:avLst>
+          </a:prstGeom>
+          <a:solidFill>
+            <a:srgbClr val="FBEADF"/>
+          </a:solidFill>
+          <a:ln w="9525">
+            <a:solidFill>
+              <a:srgbClr val="FFFFFF"/>
+            </a:solidFill>
+          </a:ln>
+          <a:effectLst/>
+        </p:spPr>
+        <p:style>
+          <a:lnRef idx="1">
+            <a:schemeClr val="accent1"/>
+          </a:lnRef>
+          <a:fillRef idx="3">
+            <a:schemeClr val="accent1"/>
+          </a:fillRef>
+          <a:effectRef idx="2">
+            <a:schemeClr val="accent1"/>
+          </a:effectRef>
+          <a:fontRef idx="minor">
+            <a:schemeClr val="lt1"/>
+          </a:fontRef>
+        </p:style>
+        <p:txBody>
+          <a:bodyPr rtlCol="0" anchor="ctr"/>
+          <a:lstStyle/>
+          <a:p>
+            <a:pPr algn="ctr"/>
+          </a:p>
+        </p:txBody>
+      </p:sp>
+      <p:sp>
+        <p:nvSpPr>
+          <p:cNvPr id="62" name="TextBox 61"/>
+          <p:cNvSpPr txBox="1"/>
+          <p:nvPr/>
+        </p:nvSpPr>
+        <p:spPr>
+          <a:xfrm>
+            <a:off x="7804880" y="4248176"/>
+            <a:ext cx="3576288" cy="260000"/>
+          </a:xfrm>
+          <a:prstGeom prst="rect">
+            <a:avLst/>
+          </a:prstGeom>
+          <a:noFill/>
+        </p:spPr>
+        <p:txBody>
+          <a:bodyPr wrap="square">
+            <a:spAutoFit/>
+          </a:bodyPr>
+          <a:lstStyle/>
+          <a:p>
+            <a:r>
+              <a:rPr sz="900" b="1">
+                <a:solidFill>
+                  <a:srgbClr val="C2521C"/>
+                </a:solidFill>
+                <a:latin typeface="Malgun Gothic"/>
+              </a:rPr>
+              <a:t>최종 출력</a:t>
+            </a:r>
+          </a:p>
+        </p:txBody>
+      </p:sp>
+      <p:sp>
+        <p:nvSpPr>
+          <p:cNvPr id="63" name="TextBox 62"/>
+          <p:cNvSpPr txBox="1"/>
+          <p:nvPr/>
+        </p:nvSpPr>
+        <p:spPr>
+          <a:xfrm>
+            <a:off x="7804880" y="4528176"/>
+            <a:ext cx="3576288" cy="700000"/>
+          </a:xfrm>
+          <a:prstGeom prst="rect">
+            <a:avLst/>
+          </a:prstGeom>
+          <a:noFill/>
+        </p:spPr>
+        <p:txBody>
+          <a:bodyPr wrap="square">
+            <a:spAutoFit/>
+          </a:bodyPr>
+          <a:lstStyle/>
+          <a:p>
+            <a:r>
+              <a:rPr sz="800" b="0">
+                <a:solidFill>
+                  <a:srgbClr val="1A2233"/>
+                </a:solidFill>
+                <a:latin typeface="Consolas"/>
+              </a:rPr>
+              <a:t>위/경/고도    36.233700252 N  127.364344961 E  41.4952 m</a:t>
+            </a:r>
+          </a:p>
+          <a:p>
+            <a:r>
+              <a:rPr sz="800" b="0">
+                <a:solidFill>
+                  <a:srgbClr val="1A2233"/>
+                </a:solidFill>
+                <a:latin typeface="Consolas"/>
+              </a:rPr>
+              <a:t>안테나 극좌표  R 20000.0000 m  Az 30.000000°  El 0.000000°</a:t>
+            </a:r>
+          </a:p>
+          <a:p>
+            <a:r>
+              <a:rPr sz="800" b="0">
+                <a:solidFill>
+                  <a:srgbClr val="1A2233"/>
+                </a:solidFill>
+                <a:latin typeface="Consolas"/>
+              </a:rPr>
+              <a:t>왕복오차      dR 0.0 m  dAz 1.8e−12°  dEl 1.7e−12°</a:t>
+            </a:r>
+          </a:p>
+        </p:txBody>
+      </p:sp>
+      <p:sp>
+        <p:nvSpPr>
+          <p:cNvPr id="64" name="TextBox 63"/>
+          <p:cNvSpPr txBox="1"/>
+          <p:nvPr/>
+        </p:nvSpPr>
+        <p:spPr>
+          <a:xfrm>
+            <a:off x="566928" y="6053328"/>
+            <a:ext cx="11064240" cy="365760"/>
+          </a:xfrm>
+          <a:prstGeom prst="rect">
+            <a:avLst/>
+          </a:prstGeom>
+          <a:noFill/>
+        </p:spPr>
+        <p:txBody>
+          <a:bodyPr wrap="square">
+            <a:spAutoFit/>
+          </a:bodyPr>
+          <a:lstStyle/>
+          <a:p>
+            <a:r>
+              <a:rPr sz="1300" b="1">
+                <a:solidFill>
+                  <a:srgbClr val="C2521C"/>
+                </a:solidFill>
+                <a:latin typeface="Malgun Gothic"/>
+              </a:rPr>
+              <a:t>roll 슬라이더를 돌리면 앞 장 실험 B 의 고각 변화가 그 자리에서 보입니다. 발표 중에 직접 돌려 봅니다.</a:t>
+            </a:r>
+          </a:p>
+        </p:txBody>
+      </p:sp>
+    </p:spTree>
+  </p:cSld>
+  <p:clrMapOvr>
+    <a:masterClrMapping/>
+  </p:clrMapOvr>
+</p:sld>
+</file>
+
+<file path=ppt/slides/slide34.xml><?xml version="1.0" encoding="utf-8"?>
 <p:sld xmlns:a="http://schemas.openxmlformats.org/drawingml/2006/main" xmlns:r="http://schemas.openxmlformats.org/officeDocument/2006/relationships" xmlns:p="http://schemas.openxmlformats.org/presentationml/2006/main">
   <p:cSld name="Slide 33">
     <p:bg>
@@ -34087,7 +38383,7 @@
 </p:sld>
 </file>
 
-<file path=ppt/slides/slide34.xml><?xml version="1.0" encoding="utf-8"?>
+<file path=ppt/slides/slide35.xml><?xml version="1.0" encoding="utf-8"?>
 <p:sld xmlns:a="http://schemas.openxmlformats.org/drawingml/2006/main" xmlns:r="http://schemas.openxmlformats.org/officeDocument/2006/relationships" xmlns:p="http://schemas.openxmlformats.org/presentationml/2006/main">
   <p:cSld name="Slide 34">
     <p:bg>
@@ -35768,6 +40064,10 @@
             <a:prstDash val="solid"/>
           </a:ln>
         </p:spPr>
+        <p:txBody>
+          <a:bodyPr/>
+          <a:p/>
+        </p:txBody>
       </p:sp>
       <p:sp>
         <p:nvSpPr>
@@ -35944,6 +40244,10 @@
             <a:prstDash val="solid"/>
           </a:ln>
         </p:spPr>
+        <p:txBody>
+          <a:bodyPr/>
+          <a:p/>
+        </p:txBody>
       </p:sp>
       <p:sp>
         <p:nvSpPr>
@@ -36111,6 +40415,10 @@
             <a:prstDash val="solid"/>
           </a:ln>
         </p:spPr>
+        <p:txBody>
+          <a:bodyPr/>
+          <a:p/>
+        </p:txBody>
       </p:sp>
       <p:sp>
         <p:nvSpPr>
@@ -36298,6 +40606,10 @@
             <a:prstDash val="solid"/>
           </a:ln>
         </p:spPr>
+        <p:txBody>
+          <a:bodyPr/>
+          <a:p/>
+        </p:txBody>
       </p:sp>
       <p:sp>
         <p:nvSpPr>
@@ -36485,6 +40797,10 @@
             <a:prstDash val="solid"/>
           </a:ln>
         </p:spPr>
+        <p:txBody>
+          <a:bodyPr/>
+          <a:p/>
+        </p:txBody>
       </p:sp>
       <p:sp>
         <p:nvSpPr>
@@ -36661,6 +40977,10 @@
             <a:prstDash val="solid"/>
           </a:ln>
         </p:spPr>
+        <p:txBody>
+          <a:bodyPr/>
+          <a:p/>
+        </p:txBody>
       </p:sp>
       <p:sp>
         <p:nvSpPr>
@@ -36681,6 +41001,10 @@
           </a:solidFill>
           <a:ln/>
         </p:spPr>
+        <p:txBody>
+          <a:bodyPr/>
+          <a:p/>
+        </p:txBody>
       </p:sp>
       <p:sp>
         <p:nvSpPr>
@@ -36936,6 +41260,10 @@
             <a:prstDash val="solid"/>
           </a:ln>
         </p:spPr>
+        <p:txBody>
+          <a:bodyPr/>
+          <a:p/>
+        </p:txBody>
       </p:sp>
       <p:sp>
         <p:nvSpPr>
@@ -36956,6 +41284,10 @@
           </a:solidFill>
           <a:ln/>
         </p:spPr>
+        <p:txBody>
+          <a:bodyPr/>
+          <a:p/>
+        </p:txBody>
       </p:sp>
       <p:sp>
         <p:nvSpPr>
@@ -37250,6 +41582,10 @@
             <a:prstDash val="solid"/>
           </a:ln>
         </p:spPr>
+        <p:txBody>
+          <a:bodyPr/>
+          <a:p/>
+        </p:txBody>
       </p:sp>
       <p:sp>
         <p:nvSpPr>
@@ -37434,6 +41770,10 @@
             <a:prstDash val="solid"/>
           </a:ln>
         </p:spPr>
+        <p:txBody>
+          <a:bodyPr/>
+          <a:p/>
+        </p:txBody>
       </p:sp>
       <p:sp>
         <p:nvSpPr>
@@ -37673,6 +42013,10 @@
             <a:prstDash val="solid"/>
           </a:ln>
         </p:spPr>
+        <p:txBody>
+          <a:bodyPr/>
+          <a:p/>
+        </p:txBody>
       </p:sp>
       <p:sp>
         <p:nvSpPr>
@@ -37739,6 +42083,10 @@
             <a:prstDash val="solid"/>
           </a:ln>
         </p:spPr>
+        <p:txBody>
+          <a:bodyPr/>
+          <a:p/>
+        </p:txBody>
       </p:sp>
       <p:sp>
         <p:nvSpPr>
@@ -37981,6 +42329,10 @@
             <a:prstDash val="solid"/>
           </a:ln>
         </p:spPr>
+        <p:txBody>
+          <a:bodyPr/>
+          <a:p/>
+        </p:txBody>
       </p:sp>
       <p:sp>
         <p:nvSpPr>
@@ -38196,6 +42548,10 @@
             <a:prstDash val="solid"/>
           </a:ln>
         </p:spPr>
+        <p:txBody>
+          <a:bodyPr/>
+          <a:p/>
+        </p:txBody>
       </p:sp>
       <p:sp>
         <p:nvSpPr>
@@ -38298,6 +42654,10 @@
             <a:prstDash val="solid"/>
           </a:ln>
         </p:spPr>
+        <p:txBody>
+          <a:bodyPr/>
+          <a:p/>
+        </p:txBody>
       </p:sp>
       <p:sp>
         <p:nvSpPr>
@@ -38400,6 +42760,10 @@
             <a:prstDash val="solid"/>
           </a:ln>
         </p:spPr>
+        <p:txBody>
+          <a:bodyPr/>
+          <a:p/>
+        </p:txBody>
       </p:sp>
       <p:sp>
         <p:nvSpPr>
@@ -38502,6 +42866,10 @@
             <a:prstDash val="solid"/>
           </a:ln>
         </p:spPr>
+        <p:txBody>
+          <a:bodyPr/>
+          <a:p/>
+        </p:txBody>
       </p:sp>
       <p:sp>
         <p:nvSpPr>
@@ -38604,6 +42972,10 @@
             <a:prstDash val="solid"/>
           </a:ln>
         </p:spPr>
+        <p:txBody>
+          <a:bodyPr/>
+          <a:p/>
+        </p:txBody>
       </p:sp>
       <p:sp>
         <p:nvSpPr>
@@ -38706,6 +43078,10 @@
             <a:prstDash val="solid"/>
           </a:ln>
         </p:spPr>
+        <p:txBody>
+          <a:bodyPr/>
+          <a:p/>
+        </p:txBody>
       </p:sp>
       <p:sp>
         <p:nvSpPr>

--- a/Part2_CoordFrames/ref/산출물/Chapter2_coordinate_systems.pptx
+++ b/Part2_CoordFrames/ref/산출물/Chapter2_coordinate_systems.pptx
@@ -2671,7 +2671,7 @@
           <a:lstStyle/>
           <a:p>
             <a:r>
-              <a:t>세 번째 주제입니다. 좌표변환은 "적당히 그럴듯한 값" 이 나오기 때문에 눈으로는 검증되지 않습니다. 그래서 C 로 짜서 숫자로 확인했습니다. Visual Studio 2022, C17 로 경고 없이 빌드했고, 시험 12항목을 전부 통과했습니다.</a:t>
+              <a:t>세 번째 주제입니다. 좌표변환은 "적당히 그럴듯한 값" 이 나오기 때문에 눈으로는 검증되지 않습니다. 그래서 C 로 짜서 숫자로 확인했습니다. Visual Studio 2022, C17 로 경고 없이 빌드했고, 되돌린 값이 입력과 반올림 수준까지 맞는 것을 확인했습니다.</a:t>
             </a:r>
           </a:p>
         </p:txBody>
@@ -2775,7 +2775,7 @@
           <a:p/>
           <a:p>
             <a:r>
-              <a:t>셋째, C 로 확인입니다. 설계한 변환을 구현하고 왕복 시험과 시험 12항목, 확인 실험 세 가지로 숫자로 검증합니다.</a:t>
+              <a:t>셋째, C 로 확인입니다. 설계한 변환을 구현하고 왕복 시험과 확인 실험 세 가지로 숫자로 검증하고, UI 에서 자세를 바꿔 가며 확인합니다.</a:t>
             </a:r>
           </a:p>
           <a:p/>
@@ -2891,7 +2891,7 @@
           <a:p/>
           <a:p>
             <a:r>
-              <a:t>시험은 12항목이고 원리는 하나입니다. 갔다가 돌아오면 원래 값이 나와야 합니다. 극좌표와 직교, 안테나와 동체, 동체와 NED, NED 와 ECEF 를 단계별로 왕복해서 부호와 전치 방향 실수를 잡고, LLA 와 ECEF 는 위도 · 경도 · 고도 격자 189개 지점을 왕복해서 (1−e²) 누락이나 공식 오타를 잡습니다. 비대칭 자세 시험은 roll, pitch, yaw 를 전부 다른 값으로 둡니다. 전치 방향이 뒤바뀐 버그는 대칭적인 자세에서는 드러나지 않고 단위행렬 테스트도 두 방향 모두 통과하기 때문에 따로 둔 것입니다. 마지막으로 예제값은 손으로 계산한 동체 좌표, 표적 LLA, 왕복 R/Az/El 을 확인해서 체인 전체의 순서와 방향을 잡습니다.</a:t>
+              <a:t>검증 원리는 하나입니다. 갔다가 돌아오면 원래 값이 나와야 합니다. 콘솔과 UI 가 정변환 뒤 역변환한 값을 입력과 비교해서 차이를 같이 찍고, 예제값의 동체 좌표는 손으로 계산한 값과 맞춰 봤습니다. 전치 방향이 뒤바뀐 실수는 대칭적인 자세에서는 드러나지 않기 때문에, UI 슬라이더로 roll, pitch, yaw 를 전부 다른 값으로 놓고 왕복오차가 그대로 반올림 수준인지 확인합니다.</a:t>
             </a:r>
           </a:p>
         </p:txBody>
@@ -2995,7 +2995,7 @@
           <a:p/>
           <a:p>
             <a:r>
-              <a:t>역변환이 입력값과 컴퓨터 반올림 수준까지 일치합니다. 변환 체인 전체가 서로 정확히 역관계라는 뜻입니다. 시험 12항목 전부 통과, 컴파일 경고 0건, 왕복 오차 1e−9 m 미만입니다.</a:t>
+              <a:t>역변환이 입력값과 컴퓨터 반올림 수준까지 일치합니다. 변환 체인 전체가 서로 정확히 역관계라는 뜻입니다. 왕복 각도 오차 1e−12도, 컴파일 경고 0건, 왕복 거리 오차 1e−9 m 미만입니다.</a:t>
             </a:r>
           </a:p>
         </p:txBody>
@@ -3369,7 +3369,7 @@
           <a:lstStyle/>
           <a:p>
             <a:r>
-              <a:t>C 코드는 프로젝트 세 개로 나눴습니다. 변환 함수와 참고 소스 matrixCalcLib 은 CoordCore 라는 정적 라이브러리에 두고, 콘솔 radar_coord 와 MFC 다이얼로그 CoordUI 가 같은 라이브러리를 씁니다. 콘솔은 과제 3.1 값을 찍고, test 인자를 주면 시험 12항목을 돌립니다.</a:t>
+              <a:t>C 코드는 프로젝트 세 개로 나눴습니다. 변환 함수와 참고 소스 matrixCalcLib 은 CoordCore 라는 정적 라이브러리에 두고, 콘솔 radar_coord 와 MFC 다이얼로그 CoordUI 가 같은 라이브러리를 씁니다. 콘솔은 과제 3.1 값과 왕복오차를 찍습니다.</a:t>
             </a:r>
           </a:p>
           <a:p/>
@@ -3457,7 +3457,7 @@
           <a:p/>
           <a:p>
             <a:r>
-              <a:t>안테나는 "정면에서 오른쪽 30도, 20 km", 함선은 "선수 기준 오른쪽 뒤 120도, 20 km", 바다 위 이 지점 기준으로는 "남쪽으로 19,340 m, 동쪽으로 5,155 m, 위로 10 m", 지구 기준으로는 지구 중심에서 (−3,125,892, +4,093,775, +3,749,164) m, 지도 기준으로는 "북위 36.2337도, 동경 127.3643도, 고도 41.5 m" 입니다.</a:t>
+              <a:t>안테나는 "정면에서 오른쪽 30도, 20 km", 함선은 "뱃머리에서 오른쪽으로 120도쯤, 20 km", 바다 위 이 지점 기준으로는 "남쪽으로 19 km 쯤, 동쪽으로 5 km 쯤", 지구 기준으로는 지구 중심에서 잰 X, Y, Z 세 숫자, 지도 기준으로는 "북위 36.2도, 동경 127.4도 부근" 입니다. 정확한 값은 뒤에서 단계별로 계산하면서 보겠습니다.</a:t>
             </a:r>
           </a:p>
           <a:p/>
@@ -29424,7 +29424,7 @@
                 <a:ea typeface="Consolas" pitchFamily="34" charset="-122"/>
                 <a:cs typeface="Consolas" pitchFamily="34" charset="-120"/>
               </a:rPr>
-              <a:t>Visual Studio 2022  ·  C17  ·  경고 0건  ·  시험 12항목 전부 통과</a:t>
+              <a:t>Visual Studio 2022  ·  C17  ·  경고 0건  ·  왕복 오차 1e−9 m 미만</a:t>
             </a:r>
             <a:endParaRPr lang="en-US" sz="1600" dirty="0"/>
           </a:p>
@@ -30246,7 +30246,7 @@
                 <a:ea typeface="Malgun Gothic" pitchFamily="34" charset="-122"/>
                 <a:cs typeface="Malgun Gothic" pitchFamily="34" charset="-120"/>
               </a:rPr>
-              <a:t>왕복 시험 · 시험 12항목</a:t>
+              <a:t>왕복 시험 · 확인 실험 3가지</a:t>
             </a:r>
             <a:endParaRPr lang="en-US" sz="1350" dirty="0"/>
           </a:p>
@@ -30266,7 +30266,7 @@
                 <a:ea typeface="Malgun Gothic" pitchFamily="34" charset="-122"/>
                 <a:cs typeface="Malgun Gothic" pitchFamily="34" charset="-120"/>
               </a:rPr>
-              <a:t>확인 실험 3가지</a:t>
+              <a:t>UI 로 자세 바꿔 가며 확인</a:t>
             </a:r>
             <a:endParaRPr lang="en-US" sz="1350" dirty="0"/>
           </a:p>
@@ -30967,7 +30967,7 @@
                 <a:ea typeface="Malgun Gothic" pitchFamily="34" charset="-122"/>
                 <a:cs typeface="Malgun Gothic" pitchFamily="34" charset="-120"/>
               </a:rPr>
-              <a:t>시험 12항목 — 갔다가 돌아오면 원래 값이 나와야 합니다</a:t>
+              <a:t>검증 — 갔다가 돌아오면 원래 값이 나와야 합니다</a:t>
             </a:r>
             <a:endParaRPr lang="en-US" sz="1500" dirty="0"/>
           </a:p>
@@ -30989,7 +30989,7 @@
         </p:nvGraphicFramePr>
         <p:xfrm>
           <a:off x="566928" y="5212080"/>
-          <a:ext cx="11064240" cy="914400"/>
+          <a:ext cx="11064240" cy="822960"/>
         </p:xfrm>
         <a:graphic>
           <a:graphicData uri="http://schemas.openxmlformats.org/drawingml/2006/table">
@@ -31018,7 +31018,7 @@
                           <a:ea typeface="Malgun Gothic" pitchFamily="34" charset="-122"/>
                           <a:cs typeface="Malgun Gothic" pitchFamily="34" charset="-120"/>
                         </a:rPr>
-                        <a:t>단계별 왕복</a:t>
+                        <a:t>왕복 시험</a:t>
                       </a:r>
                       <a:endParaRPr lang="en-US" sz="1150" dirty="0">
                         <a:latin typeface="Malgun Gothic" charset="0"/>
@@ -31083,7 +31083,7 @@
                           <a:ea typeface="Malgun Gothic" pitchFamily="34" charset="-122"/>
                           <a:cs typeface="Malgun Gothic" pitchFamily="34" charset="-120"/>
                         </a:rPr>
-                        <a:t>극좌표↔직교 · 안테나↔동체 · 동체↔NED · NED↔ECEF</a:t>
+                        <a:t>측정값 → LLA → 측정값. 콘솔과 UI 가 입력과의 차이를 같이 찍음</a:t>
                       </a:r>
                       <a:endParaRPr lang="en-US" sz="1150" dirty="0">
                         <a:latin typeface="Malgun Gothic" charset="0"/>
@@ -31148,7 +31148,7 @@
                           <a:ea typeface="Malgun Gothic" pitchFamily="34" charset="-122"/>
                           <a:cs typeface="Malgun Gothic" pitchFamily="34" charset="-120"/>
                         </a:rPr>
-                        <a:t>부호 · 전치 방향 실수</a:t>
+                        <a:t>부호 · 전치 방향 · 순서 실수</a:t>
                       </a:r>
                       <a:endParaRPr lang="en-US" sz="1150" dirty="0">
                         <a:latin typeface="Malgun Gothic" charset="0"/>
@@ -31215,7 +31215,7 @@
                           <a:ea typeface="Malgun Gothic" pitchFamily="34" charset="-122"/>
                           <a:cs typeface="Malgun Gothic" pitchFamily="34" charset="-120"/>
                         </a:rPr>
-                        <a:t>LLA↔ECEF 왕복</a:t>
+                        <a:t>예제값 손계산</a:t>
                       </a:r>
                       <a:endParaRPr lang="en-US" sz="1150" dirty="0">
                         <a:latin typeface="Malgun Gothic" charset="0"/>
@@ -31280,7 +31280,7 @@
                           <a:ea typeface="Malgun Gothic" pitchFamily="34" charset="-122"/>
                           <a:cs typeface="Malgun Gothic" pitchFamily="34" charset="-120"/>
                         </a:rPr>
-                        <a:t>위도·경도·고도 격자 189개 지점</a:t>
+                        <a:t>동체 좌표는 Rz(90°) 로 돌리고 오프셋을 더하면 손으로 나옴</a:t>
                       </a:r>
                       <a:endParaRPr lang="en-US" sz="1150" dirty="0">
                         <a:latin typeface="Malgun Gothic" charset="0"/>
@@ -31345,7 +31345,7 @@
                           <a:ea typeface="Malgun Gothic" pitchFamily="34" charset="-122"/>
                           <a:cs typeface="Malgun Gothic" pitchFamily="34" charset="-120"/>
                         </a:rPr>
-                        <a:t>(1−e²) 누락, 공식 오타</a:t>
+                        <a:t>레버암 부호, 설치 방위</a:t>
                       </a:r>
                       <a:endParaRPr lang="en-US" sz="1150" dirty="0">
                         <a:latin typeface="Malgun Gothic" charset="0"/>
@@ -31412,7 +31412,7 @@
                           <a:ea typeface="Malgun Gothic" pitchFamily="34" charset="-122"/>
                           <a:cs typeface="Malgun Gothic" pitchFamily="34" charset="-120"/>
                         </a:rPr>
-                        <a:t>비대칭 자세</a:t>
+                        <a:t>자세 바꿔 가며</a:t>
                       </a:r>
                       <a:endParaRPr lang="en-US" sz="1150" dirty="0">
                         <a:latin typeface="Malgun Gothic" charset="0"/>
@@ -31477,7 +31477,7 @@
                           <a:ea typeface="Malgun Gothic" pitchFamily="34" charset="-122"/>
                           <a:cs typeface="Malgun Gothic" pitchFamily="34" charset="-120"/>
                         </a:rPr>
-                        <a:t>roll·pitch·yaw 를 전부 다른 값으로</a:t>
+                        <a:t>UI 슬라이더로 roll · pitch · yaw 를 다르게 놓고 왕복 확인</a:t>
                       </a:r>
                       <a:endParaRPr lang="en-US" sz="1150" dirty="0">
                         <a:latin typeface="Malgun Gothic" charset="0"/>
@@ -31542,204 +31542,7 @@
                           <a:ea typeface="Malgun Gothic" pitchFamily="34" charset="-122"/>
                           <a:cs typeface="Malgun Gothic" pitchFamily="34" charset="-120"/>
                         </a:rPr>
-                        <a:t>전치 방향 뒤바뀜</a:t>
-                      </a:r>
-                      <a:endParaRPr lang="en-US" sz="1150" dirty="0">
-                        <a:latin typeface="Malgun Gothic" charset="0"/>
-                        <a:ea typeface="Malgun Gothic" charset="0"/>
-                        <a:cs typeface="Malgun Gothic" charset="0"/>
-                      </a:endParaRPr>
-                    </a:p>
-                  </a:txBody>
-                  <a:tcPr marL="91440" marR="91440" marT="45720" marB="45720" anchor="ctr">
-                    <a:lnL w="9525" cap="flat" cmpd="sng" algn="ctr">
-                      <a:solidFill>
-                        <a:srgbClr val="DDE3EE"/>
-                      </a:solidFill>
-                      <a:prstDash val="solid"/>
-                      <a:round/>
-                      <a:headEnd type="none" w="med" len="med"/>
-                      <a:tailEnd type="none" w="med" len="med"/>
-                    </a:lnL>
-                    <a:lnR w="9525" cap="flat" cmpd="sng" algn="ctr">
-                      <a:solidFill>
-                        <a:srgbClr val="DDE3EE"/>
-                      </a:solidFill>
-                      <a:prstDash val="solid"/>
-                      <a:round/>
-                      <a:headEnd type="none" w="med" len="med"/>
-                      <a:tailEnd type="none" w="med" len="med"/>
-                    </a:lnR>
-                    <a:lnT w="9525" cap="flat" cmpd="sng" algn="ctr">
-                      <a:solidFill>
-                        <a:srgbClr val="DDE3EE"/>
-                      </a:solidFill>
-                      <a:prstDash val="solid"/>
-                      <a:round/>
-                      <a:headEnd type="none" w="med" len="med"/>
-                      <a:tailEnd type="none" w="med" len="med"/>
-                    </a:lnT>
-                    <a:lnB w="9525" cap="flat" cmpd="sng" algn="ctr">
-                      <a:solidFill>
-                        <a:srgbClr val="DDE3EE"/>
-                      </a:solidFill>
-                      <a:prstDash val="solid"/>
-                      <a:round/>
-                      <a:headEnd type="none" w="med" len="med"/>
-                      <a:tailEnd type="none" w="med" len="med"/>
-                    </a:lnB>
-                  </a:tcPr>
-                </a:tc>
-              </a:tr>
-              <a:tr h="274320">
-                <a:tc>
-                  <a:txBody>
-                    <a:bodyPr/>
-                    <a:lstStyle/>
-                    <a:p>
-                      <a:pPr indent="0" marL="0">
-                        <a:buNone/>
-                      </a:pPr>
-                      <a:r>
-                        <a:rPr lang="en-US" sz="1150" b="1" dirty="0">
-                          <a:solidFill>
-                            <a:srgbClr val="C2521C"/>
-                          </a:solidFill>
-                          <a:latin typeface="Malgun Gothic" pitchFamily="34" charset="0"/>
-                          <a:ea typeface="Malgun Gothic" pitchFamily="34" charset="-122"/>
-                          <a:cs typeface="Malgun Gothic" pitchFamily="34" charset="-120"/>
-                        </a:rPr>
-                        <a:t>예제값 확인</a:t>
-                      </a:r>
-                      <a:endParaRPr lang="en-US" sz="1150" dirty="0">
-                        <a:latin typeface="Malgun Gothic" charset="0"/>
-                        <a:ea typeface="Malgun Gothic" charset="0"/>
-                        <a:cs typeface="Malgun Gothic" charset="0"/>
-                      </a:endParaRPr>
-                    </a:p>
-                  </a:txBody>
-                  <a:tcPr marL="91440" marR="91440" marT="45720" marB="45720" anchor="ctr">
-                    <a:lnL w="9525" cap="flat" cmpd="sng" algn="ctr">
-                      <a:solidFill>
-                        <a:srgbClr val="DDE3EE"/>
-                      </a:solidFill>
-                      <a:prstDash val="solid"/>
-                      <a:round/>
-                      <a:headEnd type="none" w="med" len="med"/>
-                      <a:tailEnd type="none" w="med" len="med"/>
-                    </a:lnL>
-                    <a:lnR w="9525" cap="flat" cmpd="sng" algn="ctr">
-                      <a:solidFill>
-                        <a:srgbClr val="DDE3EE"/>
-                      </a:solidFill>
-                      <a:prstDash val="solid"/>
-                      <a:round/>
-                      <a:headEnd type="none" w="med" len="med"/>
-                      <a:tailEnd type="none" w="med" len="med"/>
-                    </a:lnR>
-                    <a:lnT w="9525" cap="flat" cmpd="sng" algn="ctr">
-                      <a:solidFill>
-                        <a:srgbClr val="DDE3EE"/>
-                      </a:solidFill>
-                      <a:prstDash val="solid"/>
-                      <a:round/>
-                      <a:headEnd type="none" w="med" len="med"/>
-                      <a:tailEnd type="none" w="med" len="med"/>
-                    </a:lnT>
-                    <a:lnB w="9525" cap="flat" cmpd="sng" algn="ctr">
-                      <a:solidFill>
-                        <a:srgbClr val="DDE3EE"/>
-                      </a:solidFill>
-                      <a:prstDash val="solid"/>
-                      <a:round/>
-                      <a:headEnd type="none" w="med" len="med"/>
-                      <a:tailEnd type="none" w="med" len="med"/>
-                    </a:lnB>
-                  </a:tcPr>
-                </a:tc>
-                <a:tc>
-                  <a:txBody>
-                    <a:bodyPr/>
-                    <a:lstStyle/>
-                    <a:p>
-                      <a:pPr indent="0" marL="0">
-                        <a:buNone/>
-                      </a:pPr>
-                      <a:r>
-                        <a:rPr lang="en-US" sz="1150" dirty="0">
-                          <a:solidFill>
-                            <a:srgbClr val="C2521C"/>
-                          </a:solidFill>
-                          <a:latin typeface="Malgun Gothic" pitchFamily="34" charset="0"/>
-                          <a:ea typeface="Malgun Gothic" pitchFamily="34" charset="-122"/>
-                          <a:cs typeface="Malgun Gothic" pitchFamily="34" charset="-120"/>
-                        </a:rPr>
-                        <a:t>동체 좌표 손계산 · 표적 LLA · 왕복 R/Az/El</a:t>
-                      </a:r>
-                      <a:endParaRPr lang="en-US" sz="1150" dirty="0">
-                        <a:latin typeface="Malgun Gothic" charset="0"/>
-                        <a:ea typeface="Malgun Gothic" charset="0"/>
-                        <a:cs typeface="Malgun Gothic" charset="0"/>
-                      </a:endParaRPr>
-                    </a:p>
-                  </a:txBody>
-                  <a:tcPr marL="91440" marR="91440" marT="45720" marB="45720" anchor="ctr">
-                    <a:lnL w="9525" cap="flat" cmpd="sng" algn="ctr">
-                      <a:solidFill>
-                        <a:srgbClr val="DDE3EE"/>
-                      </a:solidFill>
-                      <a:prstDash val="solid"/>
-                      <a:round/>
-                      <a:headEnd type="none" w="med" len="med"/>
-                      <a:tailEnd type="none" w="med" len="med"/>
-                    </a:lnL>
-                    <a:lnR w="9525" cap="flat" cmpd="sng" algn="ctr">
-                      <a:solidFill>
-                        <a:srgbClr val="DDE3EE"/>
-                      </a:solidFill>
-                      <a:prstDash val="solid"/>
-                      <a:round/>
-                      <a:headEnd type="none" w="med" len="med"/>
-                      <a:tailEnd type="none" w="med" len="med"/>
-                    </a:lnR>
-                    <a:lnT w="9525" cap="flat" cmpd="sng" algn="ctr">
-                      <a:solidFill>
-                        <a:srgbClr val="DDE3EE"/>
-                      </a:solidFill>
-                      <a:prstDash val="solid"/>
-                      <a:round/>
-                      <a:headEnd type="none" w="med" len="med"/>
-                      <a:tailEnd type="none" w="med" len="med"/>
-                    </a:lnT>
-                    <a:lnB w="9525" cap="flat" cmpd="sng" algn="ctr">
-                      <a:solidFill>
-                        <a:srgbClr val="DDE3EE"/>
-                      </a:solidFill>
-                      <a:prstDash val="solid"/>
-                      <a:round/>
-                      <a:headEnd type="none" w="med" len="med"/>
-                      <a:tailEnd type="none" w="med" len="med"/>
-                    </a:lnB>
-                  </a:tcPr>
-                </a:tc>
-                <a:tc>
-                  <a:txBody>
-                    <a:bodyPr/>
-                    <a:lstStyle/>
-                    <a:p>
-                      <a:pPr indent="0" marL="0">
-                        <a:buNone/>
-                      </a:pPr>
-                      <a:r>
-                        <a:rPr lang="en-US" sz="1150" b="1" dirty="0">
-                          <a:solidFill>
-                            <a:srgbClr val="C2521C"/>
-                          </a:solidFill>
-                          <a:latin typeface="Malgun Gothic" pitchFamily="34" charset="0"/>
-                          <a:ea typeface="Malgun Gothic" pitchFamily="34" charset="-122"/>
-                          <a:cs typeface="Malgun Gothic" pitchFamily="34" charset="-120"/>
-                        </a:rPr>
-                        <a:t>체인 순서 · 방향 실수</a:t>
+                        <a:t>대칭 자세에선 안 드러나는 전치 오류</a:t>
                       </a:r>
                       <a:endParaRPr lang="en-US" sz="1150" dirty="0">
                         <a:latin typeface="Malgun Gothic" charset="0"/>
@@ -32839,7 +32642,7 @@
                 <a:ea typeface="Consolas" pitchFamily="34" charset="-122"/>
                 <a:cs typeface="Consolas" pitchFamily="34" charset="-120"/>
               </a:rPr>
-              <a:t>12 / 12</a:t>
+              <a:t>1e−12 °</a:t>
             </a:r>
             <a:endParaRPr lang="en-US" sz="2200" dirty="0"/>
           </a:p>
@@ -32878,7 +32681,7 @@
                 <a:ea typeface="Malgun Gothic" pitchFamily="34" charset="-122"/>
                 <a:cs typeface="Malgun Gothic" pitchFamily="34" charset="-120"/>
               </a:rPr>
-              <a:t>시험 통과</a:t>
+              <a:t>왕복 각도 오차</a:t>
             </a:r>
             <a:endParaRPr lang="en-US" sz="1200" dirty="0"/>
           </a:p>
@@ -33096,7 +32899,7 @@
                 <a:ea typeface="Malgun Gothic" pitchFamily="34" charset="-122"/>
                 <a:cs typeface="Malgun Gothic" pitchFamily="34" charset="-120"/>
               </a:rPr>
-              <a:t>왕복 오차</a:t>
+              <a:t>왕복 거리 오차</a:t>
             </a:r>
             <a:endParaRPr lang="en-US" sz="1200" dirty="0"/>
           </a:p>
@@ -34685,7 +34488,7 @@
                 </a:solidFill>
                 <a:latin typeface="Malgun Gothic"/>
               </a:rPr>
-              <a:t>radar_coord test 로 시험 12항목</a:t>
+              <a:t>왕복오차까지 같이 찍음</a:t>
             </a:r>
           </a:p>
         </p:txBody>
@@ -39589,7 +39392,7 @@
                           <a:ea typeface="Malgun Gothic" pitchFamily="34" charset="-122"/>
                           <a:cs typeface="Malgun Gothic" pitchFamily="34" charset="-120"/>
                         </a:rPr>
-                        <a:t>선수 기준 오른쪽 뒤 120°, 20 km</a:t>
+                        <a:t>뱃머리에서 오른쪽으로 120° 쯤, 20 km</a:t>
                       </a:r>
                       <a:endParaRPr lang="en-US" sz="1500" dirty="0">
                         <a:latin typeface="Malgun Gothic" charset="0"/>
@@ -39721,7 +39524,7 @@
                           <a:ea typeface="Malgun Gothic" pitchFamily="34" charset="-122"/>
                           <a:cs typeface="Malgun Gothic" pitchFamily="34" charset="-120"/>
                         </a:rPr>
-                        <a:t>남쪽으로 19 340 m, 동쪽으로 5 155 m, 위로 10 m</a:t>
+                        <a:t>남쪽으로 19 km 쯤, 동쪽으로 5 km 쯤</a:t>
                       </a:r>
                       <a:endParaRPr lang="en-US" sz="1500" dirty="0">
                         <a:latin typeface="Malgun Gothic" charset="0"/>
@@ -39853,7 +39656,7 @@
                           <a:ea typeface="Malgun Gothic" pitchFamily="34" charset="-122"/>
                           <a:cs typeface="Malgun Gothic" pitchFamily="34" charset="-120"/>
                         </a:rPr>
-                        <a:t>지구 중심에서 (−3 125 892, +4 093 775, +3 749 164) m</a:t>
+                        <a:t>지구 중심에서 잰 X, Y, Z 세 숫자 (수천 km 단위)</a:t>
                       </a:r>
                       <a:endParaRPr lang="en-US" sz="1500" dirty="0">
                         <a:latin typeface="Malgun Gothic" charset="0"/>
@@ -39985,7 +39788,7 @@
                           <a:ea typeface="Malgun Gothic" pitchFamily="34" charset="-122"/>
                           <a:cs typeface="Malgun Gothic" pitchFamily="34" charset="-120"/>
                         </a:rPr>
-                        <a:t>북위 36.2337°, 동경 127.3643°, 고도 41.5 m</a:t>
+                        <a:t>북위 36.2°, 동경 127.4° 부근</a:t>
                       </a:r>
                       <a:endParaRPr lang="en-US" sz="1500" dirty="0">
                         <a:latin typeface="Malgun Gothic" charset="0"/>

--- a/Part2_CoordFrames/ref/산출물/Chapter2_coordinate_systems.pptx
+++ b/Part2_CoordFrames/ref/산출물/Chapter2_coordinate_systems.pptx
@@ -743,7 +743,7 @@
           <a:p/>
           <a:p>
             <a:r>
-              <a:t>역변환에서는 asin 대신 atan2 를 씁니다. 반올림으로 인자가 1 을 살짝 넘으면 asin 은 NaN 을 내고, ±90도 근처에서 정밀도가 무너지기 때문입니다. z 축은 아래가 양수라서 표적이 위에 있으면 z 가 음수가 됩니다.</a:t>
+              <a:t>역변환에서는 asin 대신 atan2 를 씁니다. 반올림으로 인자가 1 을 살짝 넘으면 asin 은 NaN 을 내고, ±90도 근처에서 정밀도가 무너지기 때문입니다. 식을 읽는 법은 이렇습니다. cos(El) 로 표적을 먼저 수평면에 눕히고, 그 길이를 Az 로 앞과 오른쪽에 나눠 담습니다. 위아래는 sin(El) 몫이고, z 축은 아래가 양수라서 표적이 위에 있으면 z 가 음수가 됩니다.</a:t>
             </a:r>
           </a:p>
         </p:txBody>
@@ -841,7 +841,7 @@
           <a:p/>
           <a:p>
             <a:r>
-              <a:t>빔 굵기가 조향각과 무관하게 일정하고 격자로브 위치도 단순하게 나옵니다. 다만 이것은 빔 조향, 즉 안테나 내부의 일이라서 이번 데이터 처리 체인에는 들어가지 않습니다.</a:t>
+              <a:t>빔 굵기가 조향각과 무관하게 일정하고 격자로브 위치도 단순하게 나옵니다. UV 에서 각도로 되돌릴 때도 asin 대신 atan2 를 씁니다. 다만 이것은 빔 조향, 즉 안테나 내부의 일이라서 이번 데이터 처리 체인에는 들어가지 않습니다.</a:t>
             </a:r>
           </a:p>
         </p:txBody>
@@ -1031,7 +1031,7 @@
           <a:p/>
           <a:p>
             <a:r>
-              <a:t>자이로 세 개가 각속도, 즉 초당 몇 도씩 돌고 있는지를 재고, 시간에 대해 적분하면 자세가 나옵니다. 가속도계 세 개가 중력을 뺀 비력을 재고, 두 번 적분하면 속도와 위치가 나옵니다.</a:t>
+              <a:t>자이로 세 개가 각속도, 즉 초당 몇 도씩 돌고 있는지를 재고, 시간에 대해 적분하면 자세가 나옵니다. 가속도계 세 개는 비력, 즉 센서가 느끼는 가속도를 잽니다. 가만히 있어도 중력 1 g 가 잡히기 때문에 중력 모델을 뺀 뒤 두 번 적분하면 속도와 위치가 나옵니다.</a:t>
             </a:r>
           </a:p>
           <a:p/>
@@ -1331,13 +1331,13 @@
           <a:p/>
           <a:p>
             <a:r>
-              <a:t>두 가지 주의점이 있습니다. 첫째, "아래" 는 지구 중심 방향이 아니라 타원체 법선의 반대 방향입니다. 두 방향의 차이는 위도 45도 부근에서 최대 약 0.19도인데, 지표에서 21 km 에 해당합니다.</a:t>
+              <a:t>두 가지 주의점이 있습니다. 첫째, "아래" 는 지구 중심 방향이 아니라 타원체 법선의 반대 방향입니다. 지구 중심 방향과는 위도 45도 부근에서 최대 약 0.19도 어긋나는데, 이 둘을 혼동하면 지표 위치가 약 21 km 틀어집니다.</a:t>
             </a:r>
           </a:p>
           <a:p/>
           <a:p>
             <a:r>
-              <a:t>둘째, 로컬 평면의 한계입니다. 지구는 둥글어서 원점에서 멀어질수록 실제 지표면이 평면 아래로 내려갑니다. 5 km 에서 2 m, 20 km 에서 31 m, 50 km 에서 196 m, 100 km 에서 783 m 입니다. 이 숫자는 뒤에서 다시 나옵니다.</a:t>
+              <a:t>둘째, 로컬 평면의 한계입니다. 지구는 둥글어서 원점에서 멀어질수록 실제 지표면이 평면 아래로 내려갑니다. 5 km 에서 2 m, 20 km 에서 31 m, 50 km 에서 196 m, 100 km 에서 786 m 입니다. 이 숫자는 뒤에서 다시 나옵니다.</a:t>
             </a:r>
           </a:p>
         </p:txBody>
@@ -1527,7 +1527,7 @@
           <a:p/>
           <a:p>
             <a:r>
-              <a:t>WGS-84 타원체는 장반경 6,378,137.0 m, 단반경 6,356,752.3 m, 편평률의 역수 298.257223563 입니다. 적도 반지름과 극 반지름의 차이가 약 21 km 로, 지구 크기에 비하면 0.3 % 정도지만 구로 계산하면 위치 오차가 수십 km 까지 벌어집니다. GPS 와 해도가 쓰는 것도 이것입니다.</a:t>
+              <a:t>WGS-84 타원체는 장반경 6,378,137.0 m, 단반경 6,356,752.3 m, 편평률의 역수 298.257223563 입니다. 적도 반지름과 극 반지름의 차이가 약 21 km 로, 지구 크기에 비하면 0.3 % 정도지만 구로 계산하면 위도 45도 부근에서 위치가 20 km 넘게 어긋납니다. GPS 와 해도가 쓰는 것도 이것입니다.</a:t>
             </a:r>
           </a:p>
           <a:p/>
@@ -1619,7 +1619,7 @@
           <a:lstStyle/>
           <a:p>
             <a:r>
-              <a:t>같은 표적 하나를 두고 레이다는 "20 km 앞, 오른쪽으로 30도" 라고 말합니다. 안테나 자기 정면 기준입니다. 전시기는 "북위 36.2337도, 동경 127.3643도" 로 보여줘야 합니다. 지구 전체 기준입니다.</a:t>
+              <a:t>같은 표적 하나를 두고, 레이다 신호처리가 주는 값은 "20 km 앞, 오른쪽으로 30도" 입니다. 안테나 자기 정면 기준입니다. 전시기에 보여야 하는 값은 "북위 36.2337도, 동경 127.3643도" 입니다. 지구 전체 기준입니다.</a:t>
             </a:r>
           </a:p>
           <a:p/>
@@ -1845,7 +1845,7 @@
           <a:p/>
           <a:p>
             <a:r>
-              <a:t>회전은 설치 도면과 INS 자세가, 이동은 레버암과 INS 위치가 공급합니다. 이 구분이 그대로 오차 예산의 항목이 됩니다.</a:t>
+              <a:t>회전은 설치 방위와 INS 의 자세 · 위경도가, 이동은 레버암과 INS 의 배 위치가 공급합니다. 이 구분이 그대로 오차의 출처 목록이 됩니다. 표기를 하나 짚고 가면, C_ned←body 는 동체 좌표를 NED 좌표로 바꾸는 회전행렬이고 화살표 방향이 곧 변환 방향입니다. 거꾸로 갈 때는 전치를 곱합니다.</a:t>
             </a:r>
           </a:p>
         </p:txBody>
@@ -3093,7 +3093,7 @@
           <a:p/>
           <a:p>
             <a:r>
-              <a:t>실험 B, 배가 기울면. 같은 측정값 Az 30도, El 0도에 자세만 바꿔 넣었습니다. roll 0도에서 실제 고각 +0.03도, 10도에서 −8.61도, 20도에서 −17.19도입니다. 레이다는 여전히 "고각 0도" 라고 보고하지만 그건 안테나 기준일 뿐이고, 20 km 거리에서 고도로 약 5.9 km 차이입니다.</a:t>
+              <a:t>실험 B, 배가 기울면. 같은 측정값 Az 30도, El 0도에 자세만 바꿔 넣었습니다. roll 0도에서 실제 고각 +0.03도, 10도에서 −8.61도, 20도에서 −17.19도입니다. 레이다는 여전히 "고각 0도" 라고 보고하지만 그건 안테나 기준일 뿐이고, roll 20도면 20 km 앞에서 고도가 약 5.9 km 어긋납니다.</a:t>
             </a:r>
           </a:p>
           <a:p/>
@@ -3197,7 +3197,7 @@
           <a:p/>
           <a:p>
             <a:r>
-              <a:t>하나, 좌표계는 "누구 입장에서 말하는가" 이고 좌표변환은 그 통역입니다. 둘, 변환의 재료는 회전과 평행이동 둘뿐입니다. 셋, 순서는 안테나, 동체, 로컬, ECEF, 위경도이고 건너뛸 수 없습니다. 넷, 회전은 INS 의 자세와 위치가, 평행이동은 설치 도면과 배의 위치가 공급합니다. 다섯, 돌아올 때는 전치하고 빼고 순서를 뒤집습니다. 왕복이 맞으면 구현이 맞은 것입니다. 여섯, 배가 기울면 각도 덧셈은 깨지고 회전행렬은 필수입니다. 일곱, 로컬 평면 좌표를 고도로 그대로 쓰면 안 됩니다. 지구는 둥급니다.</a:t>
+              <a:t>하나, 좌표계는 "어디에 서서 어느 방향을 기준으로 재는가" 이고 좌표변환은 그 기준을 맞추는 계산입니다. 둘, 변환의 재료는 회전과 평행이동 둘뿐입니다. 셋, 순서는 안테나, 동체, 로컬, ECEF, 위경도이고 건너뛸 수 없습니다. 넷, 회전은 설치 방위와 INS 의 자세 · 위경도가, 평행이동은 레버암과 배의 위치가 공급합니다. 다섯, 돌아올 때는 전치하고 빼고 순서를 뒤집습니다. 왕복이 맞으면 구현이 맞은 것입니다. 여섯, 배가 기울면 각도 덧셈은 깨지고 회전행렬은 필수입니다. 일곱, 로컬 평면 좌표를 고도로 그대로 쓰면 안 됩니다. 지구는 둥급니다.</a:t>
             </a:r>
           </a:p>
         </p:txBody>
@@ -3451,19 +3451,19 @@
           <a:lstStyle/>
           <a:p>
             <a:r>
-              <a:t>이 슬라이드의 다섯 줄은 전부 같은 표적 하나입니다.</a:t>
+              <a:t>그림의 표적은 하나입니다. 그런데 이 표적을 재는 자가 여럿입니다. 안테나는 자기 위치에서 보어사이트를 기준으로 재고, 함선은 무게중심에서 선수를 기준으로 재고, 로컬 좌표계는 배 위치에서 진북을 기준으로 재고, 지구 좌표계는 지구 중심에서 적도면과 그리니치를 기준으로 잽니다.</a:t>
             </a:r>
           </a:p>
           <a:p/>
           <a:p>
             <a:r>
-              <a:t>안테나는 "정면에서 오른쪽 30도, 20 km", 함선은 "뱃머리에서 오른쪽으로 120도쯤, 20 km", 바다 위 이 지점 기준으로는 "남쪽으로 19 km 쯤, 동쪽으로 5 km 쯤", 지구 기준으로는 지구 중심에서 잰 X, Y, Z 세 숫자, 지도 기준으로는 "북위 36.2도, 동경 127.4도 부근" 입니다. 정확한 값은 뒤에서 단계별로 계산하면서 보겠습니다.</a:t>
+              <a:t>그래서 같은 표적이 안테나에서는 "정면에서 오른쪽 30도, 20 000 m", 함선에서는 "선수에서 오른쪽 120도, 20 015 m", 로컬에서는 "진북에서 165도, 남쪽으로 19 340 m 동쪽으로 5 155 m", 지도에서는 "북위 36.2337도, 동경 127.3643도" 가 됩니다. 각도가 30, 120, 165 로 달라진 것은 기준 방향, 즉 축이 다르기 때문이고, 거리가 20 000 m 와 20 015 m 로 조금 다른 것은 기준점, 즉 원점이 다르기 때문입니다.</a:t>
             </a:r>
           </a:p>
           <a:p/>
           <a:p>
             <a:r>
-              <a:t>다섯 문장 모두 맞습니다. 다른 것은 기준점, 즉 원점과 기준 방향, 즉 축뿐입니다. 표적은 하나인데 언어가 여러 개이고, 화자를 바꿀 때마다 통역이 필요합니다. 그 통역이 좌표변환입니다.</a:t>
+              <a:t>네 줄 모두 같은 점입니다. 숫자를 바꾸는 것은 원점과 축뿐이고, 그 둘을 맞춰 주는 계산이 좌표변환입니다.</a:t>
             </a:r>
           </a:p>
         </p:txBody>
@@ -3561,7 +3561,7 @@
           <a:p/>
           <a:p>
             <a:r>
-              <a:t>둘째, 축이 어디를 향하는가. 특히 z 가 위인지 아래인지입니다. 항법 분야는 z 를 아래로 두는 관습이 있어서 처음엔 거의 반드시 헷갈립니다.</a:t>
+              <a:t>둘째, 축이 어디를 향하는가. 특히 z 가 위인지 아래인지입니다. x 를 앞, y 를 오른쪽으로 잡으면 오른손 좌표계에서 z 는 저절로 아래가 됩니다. 항법 분야의 이 관습이 처음엔 거의 반드시 헷갈립니다.</a:t>
             </a:r>
           </a:p>
           <a:p/>
@@ -3573,7 +3573,7 @@
           <a:p/>
           <a:p>
             <a:r>
-              <a:t>이 발표의 약속 하나만 기억해 주십시오. 모든 좌표계에서 z 는 아래입니다. "10 m 위" 는 z = −10 입니다.</a:t>
+              <a:t>이 발표의 약속 하나만 기억해 주십시오. 안테나, 동체, NED 좌표계에서 z 는 아래입니다. "10 m 위" 는 z = −10 입니다. 지구 중심 좌표계 ECEF 만 Z 가 북극을 향합니다.</a:t>
             </a:r>
           </a:p>
         </p:txBody>
@@ -3677,7 +3677,7 @@
           <a:p/>
           <a:p>
             <a:r>
-              <a:t>아래 식이 그 둘을 한 줄로 쓴 것입니다. 함선 좌표 = Rz(90°) 곱하기 안테나 좌표, 더하기 (−30, 0, −10). 모든 단계는 이 둘 중 하나거나 둘 다입니다. 그게 전부입니다.</a:t>
+              <a:t>아래 식이 그 둘을 한 줄로 쓴 것입니다. 함선 좌표 = Rz(90°) 곱하기 안테나 좌표, 더하기 (−30, 0, −10). Rz(90°) 는 z 축, 즉 위아래 축 둘레로 90도 돌리는 회전행렬인데 생김새는 다음 두 장에서 나옵니다. 모든 단계는 이 둘 중 하나거나 둘 다입니다. 그게 전부입니다.</a:t>
             </a:r>
           </a:p>
         </p:txBody>
@@ -3861,7 +3861,7 @@
           <a:p/>
           <a:p>
             <a:r>
-              <a:t>회전행렬은 늘 세 가지 성질을 갖습니다. 각 행과 열의 길이가 1 이고 서로 직교한다, 행렬식이 +1 이라서 늘이거나 뒤집지 않는다, 그리고 역행렬이 전치와 같다. 마지막 성질 덕분에 되돌리기가 공짜입니다.</a:t>
+              <a:t>회전행렬은 늘 세 가지 성질을 갖습니다. 각 행과 열의 길이가 1 이고 서로 직교, 즉 90도를 이룬다. 행렬식이 +1 이라서 크기를 바꾸지도 거울상으로 뒤집지도 않는다. 그리고 역행렬이 전치, 즉 행과 열을 맞바꾼 것과 같다. 마지막 성질 덕분에 되돌리기가 공짜입니다.</a:t>
             </a:r>
           </a:p>
           <a:p/>
@@ -7461,7 +7461,7 @@
         <p:spPr>
           <a:xfrm>
             <a:off x="566928" y="5577840"/>
-            <a:ext cx="11064240" cy="365760"/>
+            <a:ext cx="11064240" cy="640080"/>
           </a:xfrm>
           <a:prstGeom prst="rect">
             <a:avLst/>
@@ -7485,7 +7485,24 @@
                 <a:ea typeface="Malgun Gothic" pitchFamily="34" charset="-122"/>
                 <a:cs typeface="Malgun Gothic" pitchFamily="34" charset="-120"/>
               </a:rPr>
-              <a:t>z 축은 아래가 양수입니다. 표적이 위에 있으면 z 가 음수가 됩니다.</a:t>
+              <a:t>읽는 법 :  cos(El) 로 표적을 먼저 수평면에 눕히고, 그 길이를 Az 로 앞(x)·오른쪽(y)에 나눠 담습니다.</a:t>
+            </a:r>
+            <a:endParaRPr lang="en-US" sz="1300" dirty="0"/>
+          </a:p>
+          <a:p>
+            <a:pPr algn="ctr" indent="0" marL="0">
+              <a:buNone/>
+            </a:pPr>
+            <a:r>
+              <a:rPr lang="en-US" sz="1300" i="1" dirty="0">
+                <a:solidFill>
+                  <a:srgbClr val="5A6478"/>
+                </a:solidFill>
+                <a:latin typeface="Malgun Gothic" pitchFamily="34" charset="0"/>
+                <a:ea typeface="Malgun Gothic" pitchFamily="34" charset="-122"/>
+                <a:cs typeface="Malgun Gothic" pitchFamily="34" charset="-120"/>
+              </a:rPr>
+              <a:t>위아래(z)는 sin(El) 몫 — z 는 아래가 양수라, 표적이 위에 있으면 z 가 음수가 됩니다.</a:t>
             </a:r>
             <a:endParaRPr lang="en-US" sz="1300" dirty="0"/>
           </a:p>
@@ -8203,14 +8220,14 @@
       </p:sp>
       <p:pic>
         <p:nvPicPr>
-          <p:cNvPr id="21" name="Image 0" descr="/home/claude/gitpkg/Part2_CoordFrames/doc/figures/fig03_uv.png">    </p:cNvPr>
+          <p:cNvPr id="29" name="Picture 28" descr="fig03_uv.png"/>
           <p:cNvPicPr>
             <a:picLocks noChangeAspect="1"/>
           </p:cNvPicPr>
           <p:nvPr/>
         </p:nvPicPr>
         <p:blipFill>
-          <a:blip r:embed="rId1"/>
+          <a:blip r:embed="rId4"/>
           <a:stretch>
             <a:fillRect/>
           </a:stretch>
@@ -8218,7 +8235,7 @@
         <p:spPr>
           <a:xfrm>
             <a:off x="765807" y="1792224"/>
-            <a:ext cx="6826003" cy="3931920"/>
+            <a:ext cx="6826003" cy="3914913"/>
           </a:xfrm>
           <a:prstGeom prst="rect">
             <a:avLst/>
@@ -8455,8 +8472,8 @@
         </p:nvSpPr>
         <p:spPr>
           <a:xfrm>
-            <a:off x="8229600" y="4626864"/>
-            <a:ext cx="3200400" cy="731520"/>
+            <a:off x="8229600" y="4526280"/>
+            <a:ext cx="3200400" cy="1143000"/>
           </a:xfrm>
           <a:prstGeom prst="rect">
             <a:avLst/>
@@ -8507,6 +8524,66 @@
             </a:r>
             <a:endParaRPr lang="en-US" sz="1200" dirty="0"/>
           </a:p>
+          <a:p>
+            <a:pPr indent="0" marL="0">
+              <a:lnSpc>
+                <a:spcPts val="1700"/>
+              </a:lnSpc>
+              <a:buNone/>
+            </a:pPr>
+            <a:r>
+              <a:rPr lang="en-US" sz="1200" i="1" dirty="0">
+                <a:solidFill>
+                  <a:srgbClr val="5A6478"/>
+                </a:solidFill>
+                <a:latin typeface="Malgun Gothic" pitchFamily="34" charset="0"/>
+                <a:ea typeface="Malgun Gothic" pitchFamily="34" charset="-122"/>
+                <a:cs typeface="Malgun Gothic" pitchFamily="34" charset="-120"/>
+              </a:rPr>
+              <a:t>되돌릴 때는 asin 대신 atan2 를 쓴다.</a:t>
+            </a:r>
+            <a:endParaRPr lang="en-US" sz="1200" dirty="0"/>
+          </a:p>
+          <a:p>
+            <a:pPr indent="0" marL="0">
+              <a:lnSpc>
+                <a:spcPts val="1700"/>
+              </a:lnSpc>
+              <a:buNone/>
+            </a:pPr>
+            <a:r>
+              <a:rPr lang="en-US" sz="1200" i="1" dirty="0">
+                <a:solidFill>
+                  <a:srgbClr val="5A6478"/>
+                </a:solidFill>
+                <a:latin typeface="Malgun Gothic" pitchFamily="34" charset="0"/>
+                <a:ea typeface="Malgun Gothic" pitchFamily="34" charset="-122"/>
+                <a:cs typeface="Malgun Gothic" pitchFamily="34" charset="-120"/>
+              </a:rPr>
+              <a:t>Az = atan2(u, w)</a:t>
+            </a:r>
+            <a:endParaRPr lang="en-US" sz="1200" dirty="0"/>
+          </a:p>
+          <a:p>
+            <a:pPr indent="0" marL="0">
+              <a:lnSpc>
+                <a:spcPts val="1700"/>
+              </a:lnSpc>
+              <a:buNone/>
+            </a:pPr>
+            <a:r>
+              <a:rPr lang="en-US" sz="1200" i="1" dirty="0">
+                <a:solidFill>
+                  <a:srgbClr val="5A6478"/>
+                </a:solidFill>
+                <a:latin typeface="Malgun Gothic" pitchFamily="34" charset="0"/>
+                <a:ea typeface="Malgun Gothic" pitchFamily="34" charset="-122"/>
+                <a:cs typeface="Malgun Gothic" pitchFamily="34" charset="-120"/>
+              </a:rPr>
+              <a:t>El = atan2(v, √(u²+w²))</a:t>
+            </a:r>
+            <a:endParaRPr lang="en-US" sz="1200" dirty="0"/>
+          </a:p>
         </p:txBody>
       </p:sp>
       <p:sp>
@@ -8518,7 +8595,7 @@
         <p:spPr>
           <a:xfrm>
             <a:off x="566928" y="5998464"/>
-            <a:ext cx="11064240" cy="365760"/>
+            <a:ext cx="11064240" cy="640080"/>
           </a:xfrm>
           <a:prstGeom prst="rect">
             <a:avLst/>
@@ -8543,6 +8620,23 @@
                 <a:cs typeface="Malgun Gothic" pitchFamily="34" charset="-120"/>
               </a:rPr>
               <a:t>빔 굵기가 조향각과 무관하게 일정하고, 격자로브 위치도 u₀ ± λ/d 로 단순하게 나옵니다.</a:t>
+            </a:r>
+            <a:endParaRPr lang="en-US" sz="1300" dirty="0"/>
+          </a:p>
+          <a:p>
+            <a:pPr algn="ctr" indent="0" marL="0">
+              <a:buNone/>
+            </a:pPr>
+            <a:r>
+              <a:rPr lang="en-US" sz="1300" i="1" dirty="0">
+                <a:solidFill>
+                  <a:srgbClr val="5A6478"/>
+                </a:solidFill>
+                <a:latin typeface="Malgun Gothic" pitchFamily="34" charset="0"/>
+                <a:ea typeface="Malgun Gothic" pitchFamily="34" charset="-122"/>
+                <a:cs typeface="Malgun Gothic" pitchFamily="34" charset="-120"/>
+              </a:rPr>
+              <a:t>UV 는 빔 조향용 표현이라 이번 변환 체인(극좌표 → 직교 → 동체 → …)에는 들어가지 않습니다.</a:t>
             </a:r>
             <a:endParaRPr lang="en-US" sz="1300" dirty="0"/>
           </a:p>
@@ -10678,7 +10772,7 @@
                 <a:ea typeface="Malgun Gothic" pitchFamily="34" charset="-122"/>
                 <a:cs typeface="Malgun Gothic" pitchFamily="34" charset="-120"/>
               </a:rPr>
-              <a:t>비력 — 중력을 뺀 나머지 가속도</a:t>
+              <a:t>비력 — 센서가 느끼는 가속도 (정지 중에도 1 g 잡힘)</a:t>
             </a:r>
             <a:endParaRPr lang="en-US" sz="1350" dirty="0"/>
           </a:p>
@@ -10698,7 +10792,7 @@
                 <a:ea typeface="Malgun Gothic" pitchFamily="34" charset="-122"/>
                 <a:cs typeface="Malgun Gothic" pitchFamily="34" charset="-120"/>
               </a:rPr>
-              <a:t>→ 두 번 적분하면  속도와 위치</a:t>
+              <a:t>→ 중력 모델을 빼고 두 번 적분하면  속도와 위치</a:t>
             </a:r>
             <a:endParaRPr lang="en-US" sz="1350" dirty="0"/>
           </a:p>
@@ -15260,7 +15354,7 @@
         <p:spPr>
           <a:xfrm>
             <a:off x="566928" y="4626864"/>
-            <a:ext cx="5486400" cy="1207008"/>
+            <a:ext cx="5486400" cy="1298448"/>
           </a:xfrm>
           <a:prstGeom prst="roundRect">
             <a:avLst>
@@ -15330,7 +15424,7 @@
         <p:spPr>
           <a:xfrm>
             <a:off x="786384" y="5084064"/>
-            <a:ext cx="5029200" cy="603504"/>
+            <a:ext cx="5029200" cy="786384"/>
           </a:xfrm>
           <a:prstGeom prst="rect">
             <a:avLst/>
@@ -15357,7 +15451,7 @@
                 <a:ea typeface="Malgun Gothic" pitchFamily="34" charset="-122"/>
                 <a:cs typeface="Malgun Gothic" pitchFamily="34" charset="-120"/>
               </a:rPr>
-              <a:t>타원체 법선의 반대 방향이다. 두 방향의 차이는</a:t>
+              <a:t>타원체 법선의 반대 방향이다. 지구 중심 방향과는</a:t>
             </a:r>
             <a:endParaRPr lang="en-US" sz="1200" dirty="0"/>
           </a:p>
@@ -15377,7 +15471,27 @@
                 <a:ea typeface="Malgun Gothic" pitchFamily="34" charset="-122"/>
                 <a:cs typeface="Malgun Gothic" pitchFamily="34" charset="-120"/>
               </a:rPr>
-              <a:t>위도 45° 부근에서 최대 약 0.19° — 지표에서 21 km 에 해당</a:t>
+              <a:t>위도 45° 부근에서 최대 약 0.19° 어긋나는데,</a:t>
+            </a:r>
+            <a:endParaRPr lang="en-US" sz="1200" dirty="0"/>
+          </a:p>
+          <a:p>
+            <a:pPr indent="0" marL="0">
+              <a:lnSpc>
+                <a:spcPts val="1700"/>
+              </a:lnSpc>
+              <a:buNone/>
+            </a:pPr>
+            <a:r>
+              <a:rPr lang="en-US" sz="1200" dirty="0">
+                <a:solidFill>
+                  <a:srgbClr val="5A6478"/>
+                </a:solidFill>
+                <a:latin typeface="Malgun Gothic" pitchFamily="34" charset="0"/>
+                <a:ea typeface="Malgun Gothic" pitchFamily="34" charset="-122"/>
+                <a:cs typeface="Malgun Gothic" pitchFamily="34" charset="-120"/>
+              </a:rPr>
+              <a:t>이 둘을 혼동하면 지표 위치가 약 21 km 틀어진다.</a:t>
             </a:r>
             <a:endParaRPr lang="en-US" sz="1200" dirty="0"/>
           </a:p>
@@ -15392,7 +15506,7 @@
         <p:spPr>
           <a:xfrm>
             <a:off x="6144768" y="4626864"/>
-            <a:ext cx="5486400" cy="1207008"/>
+            <a:ext cx="5486400" cy="1298448"/>
           </a:xfrm>
           <a:prstGeom prst="roundRect">
             <a:avLst>
@@ -15509,7 +15623,7 @@
                 <a:ea typeface="Malgun Gothic" pitchFamily="34" charset="-122"/>
                 <a:cs typeface="Malgun Gothic" pitchFamily="34" charset="-120"/>
               </a:rPr>
-              <a:t>5 km 2 m  ·  20 km 31 m  ·  50 km 196 m  ·  100 km 783 m</a:t>
+              <a:t>5 km 2 m  ·  20 km 31 m  ·  50 km 196 m  ·  100 km 786 m</a:t>
             </a:r>
             <a:endParaRPr lang="en-US" sz="1200" dirty="0"/>
           </a:p>
@@ -17515,7 +17629,7 @@
                 <a:ea typeface="Malgun Gothic" pitchFamily="34" charset="-122"/>
                 <a:cs typeface="Malgun Gothic" pitchFamily="34" charset="-120"/>
               </a:rPr>
-              <a:t>정도지만, 구로 계산하면 위치 오차가</a:t>
+              <a:t>정도지만, 구로 계산하면 위치가</a:t>
             </a:r>
             <a:endParaRPr lang="en-US" sz="1250" dirty="0"/>
           </a:p>
@@ -17535,7 +17649,7 @@
                 <a:ea typeface="Malgun Gothic" pitchFamily="34" charset="-122"/>
                 <a:cs typeface="Malgun Gothic" pitchFamily="34" charset="-120"/>
               </a:rPr>
-              <a:t>수십 km 까지 벌어진다.</a:t>
+              <a:t>20 km 넘게 어긋난다 (위도 45° 부근).</a:t>
             </a:r>
             <a:endParaRPr lang="en-US" sz="1250" dirty="0"/>
           </a:p>
@@ -17754,7 +17868,7 @@
                 <a:ea typeface="Malgun Gothic" pitchFamily="34" charset="-122"/>
                 <a:cs typeface="Malgun Gothic" pitchFamily="34" charset="-120"/>
               </a:rPr>
-              <a:t>같은 표적인데,  말하는 사람이 다르다</a:t>
+              <a:t>레이다가 잰 값과  전시기에 보일 값은 다르다</a:t>
             </a:r>
             <a:endParaRPr lang="en-US" sz="3000" dirty="0"/>
           </a:p>
@@ -17819,7 +17933,7 @@
                 <a:ea typeface="Malgun Gothic" pitchFamily="34" charset="-122"/>
                 <a:cs typeface="Malgun Gothic" pitchFamily="34" charset="-120"/>
               </a:rPr>
-              <a:t>레이다는 이렇게 말한다</a:t>
+              <a:t>레이다(신호처리)가 주는 값</a:t>
             </a:r>
             <a:endParaRPr lang="en-US" sz="1300" dirty="0"/>
           </a:p>
@@ -17985,7 +18099,7 @@
                 <a:ea typeface="Malgun Gothic" pitchFamily="34" charset="-122"/>
                 <a:cs typeface="Malgun Gothic" pitchFamily="34" charset="-120"/>
               </a:rPr>
-              <a:t>전시기는 이걸 보여줘야 한다</a:t>
+              <a:t>전시기에 보여야 하는 값</a:t>
             </a:r>
             <a:endParaRPr lang="en-US" sz="1300" dirty="0"/>
           </a:p>
@@ -21100,7 +21214,7 @@
                 <a:ea typeface="Malgun Gothic" pitchFamily="34" charset="-122"/>
                 <a:cs typeface="Malgun Gothic" pitchFamily="34" charset="-120"/>
               </a:rPr>
-              <a:t>회전은 설치 도면과 INS 자세가, 이동은 레버암과 INS 위치가 공급합니다. 이 구분이 그대로 오차 예산의 항목이 됩니다.</a:t>
+              <a:t>회전은 설치 방위와 INS(자세·위경도)가, 이동은 레버암과 INS(배 위치)가 공급합니다. 이 구분이 그대로 오차의 출처 목록이 됩니다.</a:t>
             </a:r>
             <a:endParaRPr lang="en-US" sz="1400" dirty="0"/>
           </a:p>
@@ -22367,6 +22481,88 @@
                 <a:cs typeface="Malgun Gothic" pitchFamily="34" charset="-120"/>
               </a:rPr>
               <a:t>WGS-84 타원체 · 직교좌표 → 위경도</a:t>
+            </a:r>
+            <a:endParaRPr lang="en-US" sz="1150" dirty="0"/>
+          </a:p>
+        </p:txBody>
+      </p:sp>
+      <p:sp>
+        <p:nvSpPr>
+          <p:cNvPr id="37" name="Text 35"/>
+          <p:cNvSpPr txBox="1"/>
+          <p:nvPr/>
+        </p:nvSpPr>
+        <p:spPr>
+          <a:xfrm>
+            <a:off x="5230368" y="5961888"/>
+            <a:ext cx="6400800" cy="713232"/>
+          </a:xfrm>
+          <a:prstGeom prst="rect">
+            <a:avLst/>
+          </a:prstGeom>
+          <a:noFill/>
+          <a:ln/>
+        </p:spPr>
+        <p:txBody>
+          <a:bodyPr wrap="square" lIns="0" tIns="0" rIns="0" bIns="0" rtlCol="0" anchor="ctr"/>
+          <a:lstStyle/>
+          <a:p>
+            <a:pPr indent="0" marL="0">
+              <a:lnSpc>
+                <a:spcPts val="1600"/>
+              </a:lnSpc>
+              <a:buNone/>
+            </a:pPr>
+            <a:r>
+              <a:rPr lang="en-US" sz="1150" dirty="0">
+                <a:solidFill>
+                  <a:srgbClr val="5A6478"/>
+                </a:solidFill>
+                <a:latin typeface="Malgun Gothic" pitchFamily="34" charset="0"/>
+                <a:ea typeface="Malgun Gothic" pitchFamily="34" charset="-122"/>
+                <a:cs typeface="Malgun Gothic" pitchFamily="34" charset="-120"/>
+              </a:rPr>
+              <a:t>표기 :  C_ned←body 는 동체 좌표를 NED 좌표로 바꾸는 회전행렬.</a:t>
+            </a:r>
+            <a:endParaRPr lang="en-US" sz="1150" dirty="0"/>
+          </a:p>
+          <a:p>
+            <a:pPr indent="0" marL="0">
+              <a:lnSpc>
+                <a:spcPts val="1600"/>
+              </a:lnSpc>
+              <a:buNone/>
+            </a:pPr>
+            <a:r>
+              <a:rPr lang="en-US" sz="1150" dirty="0">
+                <a:solidFill>
+                  <a:srgbClr val="5A6478"/>
+                </a:solidFill>
+                <a:latin typeface="Malgun Gothic" pitchFamily="34" charset="0"/>
+                <a:ea typeface="Malgun Gothic" pitchFamily="34" charset="-122"/>
+                <a:cs typeface="Malgun Gothic" pitchFamily="34" charset="-120"/>
+              </a:rPr>
+              <a:t>v_ned = C_ned←body × v_body — 화살표 방향이 곧 변환 방향.</a:t>
+            </a:r>
+            <a:endParaRPr lang="en-US" sz="1150" dirty="0"/>
+          </a:p>
+          <a:p>
+            <a:pPr indent="0" marL="0">
+              <a:lnSpc>
+                <a:spcPts val="1600"/>
+              </a:lnSpc>
+              <a:buNone/>
+            </a:pPr>
+            <a:r>
+              <a:rPr lang="en-US" sz="1150" dirty="0">
+                <a:solidFill>
+                  <a:srgbClr val="5A6478"/>
+                </a:solidFill>
+                <a:latin typeface="Malgun Gothic" pitchFamily="34" charset="0"/>
+                <a:ea typeface="Malgun Gothic" pitchFamily="34" charset="-122"/>
+                <a:cs typeface="Malgun Gothic" pitchFamily="34" charset="-120"/>
+              </a:rPr>
+              <a:t>거꾸로 갈 때는 전치 C_ned←bodyᵀ 를 곱한다.</a:t>
             </a:r>
             <a:endParaRPr lang="en-US" sz="1150" dirty="0"/>
           </a:p>
@@ -26335,22 +26531,22 @@
       </p:sp>
       <p:pic>
         <p:nvPicPr>
-          <p:cNvPr id="3" name="Image 0" descr="/home/claude/deck/assets/fig10_deck.png">    </p:cNvPr>
+          <p:cNvPr id="19" name="Picture 18" descr="fig10_layout.png"/>
           <p:cNvPicPr>
             <a:picLocks noChangeAspect="1"/>
           </p:cNvPicPr>
           <p:nvPr/>
         </p:nvPicPr>
         <p:blipFill>
-          <a:blip r:embed="rId1"/>
+          <a:blip r:embed="rId4"/>
           <a:stretch>
             <a:fillRect/>
           </a:stretch>
         </p:blipFill>
         <p:spPr>
           <a:xfrm>
-            <a:off x="575089" y="1188720"/>
-            <a:ext cx="4647118" cy="5120640"/>
+            <a:off x="502920" y="1325880"/>
+            <a:ext cx="4572000" cy="4233672"/>
           </a:xfrm>
           <a:prstGeom prst="rect">
             <a:avLst/>
@@ -31675,7 +31871,7 @@
         <p:spPr>
           <a:xfrm>
             <a:off x="566928" y="905256"/>
-            <a:ext cx="11064240" cy="329184"/>
+            <a:ext cx="11064240" cy="566928"/>
           </a:xfrm>
           <a:prstGeom prst="rect">
             <a:avLst/>
@@ -31700,6 +31896,23 @@
                 <a:cs typeface="Malgun Gothic" pitchFamily="34" charset="-120"/>
               </a:rPr>
               <a:t>조건 ⑥ 이 요구한 두 가지 형태</a:t>
+            </a:r>
+            <a:endParaRPr lang="en-US" sz="1400" dirty="0"/>
+          </a:p>
+          <a:p>
+            <a:pPr indent="0" marL="0">
+              <a:buNone/>
+            </a:pPr>
+            <a:r>
+              <a:rPr lang="en-US" sz="1400" dirty="0">
+                <a:solidFill>
+                  <a:srgbClr val="5A6478"/>
+                </a:solidFill>
+                <a:latin typeface="Malgun Gothic" pitchFamily="34" charset="0"/>
+                <a:ea typeface="Malgun Gothic" pitchFamily="34" charset="-122"/>
+                <a:cs typeface="Malgun Gothic" pitchFamily="34" charset="-120"/>
+              </a:rPr>
+              <a:t>입력 :  R 20 km · Az 30° · El 0°   |   플랫폼 36.408°N 127.307°E 0 m (정지)   |   자세 roll 0° · yaw 45° · pitch 0°</a:t>
             </a:r>
             <a:endParaRPr lang="en-US" sz="1400" dirty="0"/>
           </a:p>
@@ -33705,7 +33918,7 @@
         <p:spPr>
           <a:xfrm>
             <a:off x="7955280" y="3675888"/>
-            <a:ext cx="3474720" cy="640080"/>
+            <a:ext cx="3474720" cy="731520"/>
           </a:xfrm>
           <a:prstGeom prst="rect">
             <a:avLst/>
@@ -33772,7 +33985,7 @@
                 <a:ea typeface="Malgun Gothic" pitchFamily="34" charset="-122"/>
                 <a:cs typeface="Malgun Gothic" pitchFamily="34" charset="-120"/>
               </a:rPr>
-              <a:t>20 km 거리에서 고도로 약 5.9 km 차이.</a:t>
+              <a:t>roll 20° 면 20 km 앞 고도가 5.9 km 어긋난다.</a:t>
             </a:r>
             <a:endParaRPr lang="en-US" sz="1150" dirty="0"/>
           </a:p>
@@ -37554,7 +37767,7 @@
                 <a:ea typeface="Malgun Gothic" pitchFamily="34" charset="-122"/>
                 <a:cs typeface="Malgun Gothic" pitchFamily="34" charset="-120"/>
               </a:rPr>
-              <a:t>좌표계는 "누구 입장에서 말하는가" 이고, 좌표변환은 그 통역이다</a:t>
+              <a:t>좌표계는 "어디에 서서 어느 방향을 기준으로 재는가" 이고, 좌표변환은 그 기준을 맞추는 계산이다</a:t>
             </a:r>
             <a:endParaRPr lang="en-US" sz="1600" dirty="0"/>
           </a:p>
@@ -37863,7 +38076,7 @@
                 <a:ea typeface="Malgun Gothic" pitchFamily="34" charset="-122"/>
                 <a:cs typeface="Malgun Gothic" pitchFamily="34" charset="-120"/>
               </a:rPr>
-              <a:t>회전은 INS 의 자세와 위치가, 평행이동은 설치 도면과 배의 위치가 공급한다</a:t>
+              <a:t>회전은 설치 방위와 INS 자세·위경도가, 평행이동은 레버암과 배의 위치가 공급한다</a:t>
             </a:r>
             <a:endParaRPr lang="en-US" sz="1600" dirty="0"/>
           </a:p>
@@ -39007,840 +39220,12 @@
                 <a:ea typeface="Malgun Gothic" pitchFamily="34" charset="-122"/>
                 <a:cs typeface="Malgun Gothic" pitchFamily="34" charset="-120"/>
               </a:rPr>
-              <a:t>아래 다섯 줄은 전부 같은 표적 하나를 가리킵니다</a:t>
+              <a:t>표적은 하나입니다. 어디에서(원점) 어느 방향을 기준으로(축) 재느냐에 따라 숫자만 달라집니다</a:t>
             </a:r>
             <a:endParaRPr lang="en-US" sz="1400" dirty="0"/>
           </a:p>
         </p:txBody>
       </p:sp>
-      <p:graphicFrame>
-        <p:nvGraphicFramePr>
-          <p:cNvPr id="5" name="Table 0"/>
-          <p:cNvGraphicFramePr>
-            <a:graphicFrameLocks noGrp="1"/>
-          </p:cNvGraphicFramePr>
-          <p:nvPr>
-            <p:extLst>
-              <p:ext uri="{D42A27DB-BD31-4B8C-83A1-F6EECF244321}">
-                <p14:modId xmlns:p14="http://schemas.microsoft.com/office/powerpoint/2010/main" val="1579011935"/>
-              </p:ext>
-            </p:extLst>
-          </p:nvPr>
-        </p:nvGraphicFramePr>
-        <p:xfrm>
-          <a:off x="1051560" y="1737360"/>
-          <a:ext cx="10058400" cy="914400"/>
-        </p:xfrm>
-        <a:graphic>
-          <a:graphicData uri="http://schemas.openxmlformats.org/drawingml/2006/table">
-            <a:tbl>
-              <a:tblPr/>
-              <a:tblGrid>
-                <a:gridCol w="2377440"/>
-                <a:gridCol w="7680960"/>
-              </a:tblGrid>
-              <a:tr h="475488">
-                <a:tc>
-                  <a:txBody>
-                    <a:bodyPr/>
-                    <a:lstStyle/>
-                    <a:p>
-                      <a:pPr indent="0" marL="0">
-                        <a:buNone/>
-                      </a:pPr>
-                      <a:r>
-                        <a:rPr lang="en-US" sz="1500" b="1" dirty="0">
-                          <a:solidFill>
-                            <a:srgbClr val="FFFFFF"/>
-                          </a:solidFill>
-                          <a:latin typeface="Malgun Gothic" pitchFamily="34" charset="0"/>
-                          <a:ea typeface="Malgun Gothic" pitchFamily="34" charset="-122"/>
-                          <a:cs typeface="Malgun Gothic" pitchFamily="34" charset="-120"/>
-                        </a:rPr>
-                        <a:t>말하는 사람</a:t>
-                      </a:r>
-                      <a:endParaRPr lang="en-US" sz="1500" dirty="0">
-                        <a:latin typeface="Malgun Gothic" charset="0"/>
-                        <a:ea typeface="Malgun Gothic" charset="0"/>
-                        <a:cs typeface="Malgun Gothic" charset="0"/>
-                      </a:endParaRPr>
-                    </a:p>
-                  </a:txBody>
-                  <a:tcPr marL="91440" marR="91440" marT="45720" marB="45720" anchor="ctr">
-                    <a:lnL w="9525" cap="flat" cmpd="sng" algn="ctr">
-                      <a:solidFill>
-                        <a:srgbClr val="DDE3EE"/>
-                      </a:solidFill>
-                      <a:prstDash val="solid"/>
-                      <a:round/>
-                      <a:headEnd type="none" w="med" len="med"/>
-                      <a:tailEnd type="none" w="med" len="med"/>
-                    </a:lnL>
-                    <a:lnR w="9525" cap="flat" cmpd="sng" algn="ctr">
-                      <a:solidFill>
-                        <a:srgbClr val="DDE3EE"/>
-                      </a:solidFill>
-                      <a:prstDash val="solid"/>
-                      <a:round/>
-                      <a:headEnd type="none" w="med" len="med"/>
-                      <a:tailEnd type="none" w="med" len="med"/>
-                    </a:lnR>
-                    <a:lnT w="9525" cap="flat" cmpd="sng" algn="ctr">
-                      <a:solidFill>
-                        <a:srgbClr val="DDE3EE"/>
-                      </a:solidFill>
-                      <a:prstDash val="solid"/>
-                      <a:round/>
-                      <a:headEnd type="none" w="med" len="med"/>
-                      <a:tailEnd type="none" w="med" len="med"/>
-                    </a:lnT>
-                    <a:lnB w="9525" cap="flat" cmpd="sng" algn="ctr">
-                      <a:solidFill>
-                        <a:srgbClr val="DDE3EE"/>
-                      </a:solidFill>
-                      <a:prstDash val="solid"/>
-                      <a:round/>
-                      <a:headEnd type="none" w="med" len="med"/>
-                      <a:tailEnd type="none" w="med" len="med"/>
-                    </a:lnB>
-                    <a:solidFill>
-                      <a:srgbClr val="2B57A6"/>
-                    </a:solidFill>
-                  </a:tcPr>
-                </a:tc>
-                <a:tc>
-                  <a:txBody>
-                    <a:bodyPr/>
-                    <a:lstStyle/>
-                    <a:p>
-                      <a:pPr indent="0" marL="0">
-                        <a:buNone/>
-                      </a:pPr>
-                      <a:r>
-                        <a:rPr lang="en-US" sz="1500" b="1" dirty="0">
-                          <a:solidFill>
-                            <a:srgbClr val="FFFFFF"/>
-                          </a:solidFill>
-                          <a:latin typeface="Malgun Gothic" pitchFamily="34" charset="0"/>
-                          <a:ea typeface="Malgun Gothic" pitchFamily="34" charset="-122"/>
-                          <a:cs typeface="Malgun Gothic" pitchFamily="34" charset="-120"/>
-                        </a:rPr>
-                        <a:t>표적이 어디 있냐고 물으면</a:t>
-                      </a:r>
-                      <a:endParaRPr lang="en-US" sz="1500" dirty="0">
-                        <a:latin typeface="Malgun Gothic" charset="0"/>
-                        <a:ea typeface="Malgun Gothic" charset="0"/>
-                        <a:cs typeface="Malgun Gothic" charset="0"/>
-                      </a:endParaRPr>
-                    </a:p>
-                  </a:txBody>
-                  <a:tcPr marL="91440" marR="91440" marT="45720" marB="45720" anchor="ctr">
-                    <a:lnL w="9525" cap="flat" cmpd="sng" algn="ctr">
-                      <a:solidFill>
-                        <a:srgbClr val="DDE3EE"/>
-                      </a:solidFill>
-                      <a:prstDash val="solid"/>
-                      <a:round/>
-                      <a:headEnd type="none" w="med" len="med"/>
-                      <a:tailEnd type="none" w="med" len="med"/>
-                    </a:lnL>
-                    <a:lnR w="9525" cap="flat" cmpd="sng" algn="ctr">
-                      <a:solidFill>
-                        <a:srgbClr val="DDE3EE"/>
-                      </a:solidFill>
-                      <a:prstDash val="solid"/>
-                      <a:round/>
-                      <a:headEnd type="none" w="med" len="med"/>
-                      <a:tailEnd type="none" w="med" len="med"/>
-                    </a:lnR>
-                    <a:lnT w="9525" cap="flat" cmpd="sng" algn="ctr">
-                      <a:solidFill>
-                        <a:srgbClr val="DDE3EE"/>
-                      </a:solidFill>
-                      <a:prstDash val="solid"/>
-                      <a:round/>
-                      <a:headEnd type="none" w="med" len="med"/>
-                      <a:tailEnd type="none" w="med" len="med"/>
-                    </a:lnT>
-                    <a:lnB w="9525" cap="flat" cmpd="sng" algn="ctr">
-                      <a:solidFill>
-                        <a:srgbClr val="DDE3EE"/>
-                      </a:solidFill>
-                      <a:prstDash val="solid"/>
-                      <a:round/>
-                      <a:headEnd type="none" w="med" len="med"/>
-                      <a:tailEnd type="none" w="med" len="med"/>
-                    </a:lnB>
-                    <a:solidFill>
-                      <a:srgbClr val="2B57A6"/>
-                    </a:solidFill>
-                  </a:tcPr>
-                </a:tc>
-              </a:tr>
-              <a:tr h="475488">
-                <a:tc>
-                  <a:txBody>
-                    <a:bodyPr/>
-                    <a:lstStyle/>
-                    <a:p>
-                      <a:pPr indent="0" marL="0">
-                        <a:buNone/>
-                      </a:pPr>
-                      <a:r>
-                        <a:rPr lang="en-US" sz="1500" b="1" dirty="0">
-                          <a:solidFill>
-                            <a:srgbClr val="1A2233"/>
-                          </a:solidFill>
-                          <a:latin typeface="Malgun Gothic" pitchFamily="34" charset="0"/>
-                          <a:ea typeface="Malgun Gothic" pitchFamily="34" charset="-122"/>
-                          <a:cs typeface="Malgun Gothic" pitchFamily="34" charset="-120"/>
-                        </a:rPr>
-                        <a:t>안테나</a:t>
-                      </a:r>
-                      <a:endParaRPr lang="en-US" sz="1500" dirty="0">
-                        <a:latin typeface="Malgun Gothic" charset="0"/>
-                        <a:ea typeface="Malgun Gothic" charset="0"/>
-                        <a:cs typeface="Malgun Gothic" charset="0"/>
-                      </a:endParaRPr>
-                    </a:p>
-                  </a:txBody>
-                  <a:tcPr marL="91440" marR="91440" marT="45720" marB="45720" anchor="ctr">
-                    <a:lnL w="9525" cap="flat" cmpd="sng" algn="ctr">
-                      <a:solidFill>
-                        <a:srgbClr val="DDE3EE"/>
-                      </a:solidFill>
-                      <a:prstDash val="solid"/>
-                      <a:round/>
-                      <a:headEnd type="none" w="med" len="med"/>
-                      <a:tailEnd type="none" w="med" len="med"/>
-                    </a:lnL>
-                    <a:lnR w="9525" cap="flat" cmpd="sng" algn="ctr">
-                      <a:solidFill>
-                        <a:srgbClr val="DDE3EE"/>
-                      </a:solidFill>
-                      <a:prstDash val="solid"/>
-                      <a:round/>
-                      <a:headEnd type="none" w="med" len="med"/>
-                      <a:tailEnd type="none" w="med" len="med"/>
-                    </a:lnR>
-                    <a:lnT w="9525" cap="flat" cmpd="sng" algn="ctr">
-                      <a:solidFill>
-                        <a:srgbClr val="DDE3EE"/>
-                      </a:solidFill>
-                      <a:prstDash val="solid"/>
-                      <a:round/>
-                      <a:headEnd type="none" w="med" len="med"/>
-                      <a:tailEnd type="none" w="med" len="med"/>
-                    </a:lnT>
-                    <a:lnB w="9525" cap="flat" cmpd="sng" algn="ctr">
-                      <a:solidFill>
-                        <a:srgbClr val="DDE3EE"/>
-                      </a:solidFill>
-                      <a:prstDash val="solid"/>
-                      <a:round/>
-                      <a:headEnd type="none" w="med" len="med"/>
-                      <a:tailEnd type="none" w="med" len="med"/>
-                    </a:lnB>
-                  </a:tcPr>
-                </a:tc>
-                <a:tc>
-                  <a:txBody>
-                    <a:bodyPr/>
-                    <a:lstStyle/>
-                    <a:p>
-                      <a:pPr indent="0" marL="0">
-                        <a:buNone/>
-                      </a:pPr>
-                      <a:r>
-                        <a:rPr lang="en-US" sz="1500" dirty="0">
-                          <a:solidFill>
-                            <a:srgbClr val="1A2233"/>
-                          </a:solidFill>
-                          <a:latin typeface="Malgun Gothic" pitchFamily="34" charset="0"/>
-                          <a:ea typeface="Malgun Gothic" pitchFamily="34" charset="-122"/>
-                          <a:cs typeface="Malgun Gothic" pitchFamily="34" charset="-120"/>
-                        </a:rPr>
-                        <a:t>내 정면에서 오른쪽 30°, 20 km</a:t>
-                      </a:r>
-                      <a:endParaRPr lang="en-US" sz="1500" dirty="0">
-                        <a:latin typeface="Malgun Gothic" charset="0"/>
-                        <a:ea typeface="Malgun Gothic" charset="0"/>
-                        <a:cs typeface="Malgun Gothic" charset="0"/>
-                      </a:endParaRPr>
-                    </a:p>
-                  </a:txBody>
-                  <a:tcPr marL="91440" marR="91440" marT="45720" marB="45720" anchor="ctr">
-                    <a:lnL w="9525" cap="flat" cmpd="sng" algn="ctr">
-                      <a:solidFill>
-                        <a:srgbClr val="DDE3EE"/>
-                      </a:solidFill>
-                      <a:prstDash val="solid"/>
-                      <a:round/>
-                      <a:headEnd type="none" w="med" len="med"/>
-                      <a:tailEnd type="none" w="med" len="med"/>
-                    </a:lnL>
-                    <a:lnR w="9525" cap="flat" cmpd="sng" algn="ctr">
-                      <a:solidFill>
-                        <a:srgbClr val="DDE3EE"/>
-                      </a:solidFill>
-                      <a:prstDash val="solid"/>
-                      <a:round/>
-                      <a:headEnd type="none" w="med" len="med"/>
-                      <a:tailEnd type="none" w="med" len="med"/>
-                    </a:lnR>
-                    <a:lnT w="9525" cap="flat" cmpd="sng" algn="ctr">
-                      <a:solidFill>
-                        <a:srgbClr val="DDE3EE"/>
-                      </a:solidFill>
-                      <a:prstDash val="solid"/>
-                      <a:round/>
-                      <a:headEnd type="none" w="med" len="med"/>
-                      <a:tailEnd type="none" w="med" len="med"/>
-                    </a:lnT>
-                    <a:lnB w="9525" cap="flat" cmpd="sng" algn="ctr">
-                      <a:solidFill>
-                        <a:srgbClr val="DDE3EE"/>
-                      </a:solidFill>
-                      <a:prstDash val="solid"/>
-                      <a:round/>
-                      <a:headEnd type="none" w="med" len="med"/>
-                      <a:tailEnd type="none" w="med" len="med"/>
-                    </a:lnB>
-                  </a:tcPr>
-                </a:tc>
-              </a:tr>
-              <a:tr h="475488">
-                <a:tc>
-                  <a:txBody>
-                    <a:bodyPr/>
-                    <a:lstStyle/>
-                    <a:p>
-                      <a:pPr indent="0" marL="0">
-                        <a:buNone/>
-                      </a:pPr>
-                      <a:r>
-                        <a:rPr lang="en-US" sz="1500" b="1" dirty="0">
-                          <a:solidFill>
-                            <a:srgbClr val="1A2233"/>
-                          </a:solidFill>
-                          <a:latin typeface="Malgun Gothic" pitchFamily="34" charset="0"/>
-                          <a:ea typeface="Malgun Gothic" pitchFamily="34" charset="-122"/>
-                          <a:cs typeface="Malgun Gothic" pitchFamily="34" charset="-120"/>
-                        </a:rPr>
-                        <a:t>함선</a:t>
-                      </a:r>
-                      <a:endParaRPr lang="en-US" sz="1500" dirty="0">
-                        <a:latin typeface="Malgun Gothic" charset="0"/>
-                        <a:ea typeface="Malgun Gothic" charset="0"/>
-                        <a:cs typeface="Malgun Gothic" charset="0"/>
-                      </a:endParaRPr>
-                    </a:p>
-                  </a:txBody>
-                  <a:tcPr marL="91440" marR="91440" marT="45720" marB="45720" anchor="ctr">
-                    <a:lnL w="9525" cap="flat" cmpd="sng" algn="ctr">
-                      <a:solidFill>
-                        <a:srgbClr val="DDE3EE"/>
-                      </a:solidFill>
-                      <a:prstDash val="solid"/>
-                      <a:round/>
-                      <a:headEnd type="none" w="med" len="med"/>
-                      <a:tailEnd type="none" w="med" len="med"/>
-                    </a:lnL>
-                    <a:lnR w="9525" cap="flat" cmpd="sng" algn="ctr">
-                      <a:solidFill>
-                        <a:srgbClr val="DDE3EE"/>
-                      </a:solidFill>
-                      <a:prstDash val="solid"/>
-                      <a:round/>
-                      <a:headEnd type="none" w="med" len="med"/>
-                      <a:tailEnd type="none" w="med" len="med"/>
-                    </a:lnR>
-                    <a:lnT w="9525" cap="flat" cmpd="sng" algn="ctr">
-                      <a:solidFill>
-                        <a:srgbClr val="DDE3EE"/>
-                      </a:solidFill>
-                      <a:prstDash val="solid"/>
-                      <a:round/>
-                      <a:headEnd type="none" w="med" len="med"/>
-                      <a:tailEnd type="none" w="med" len="med"/>
-                    </a:lnT>
-                    <a:lnB w="9525" cap="flat" cmpd="sng" algn="ctr">
-                      <a:solidFill>
-                        <a:srgbClr val="DDE3EE"/>
-                      </a:solidFill>
-                      <a:prstDash val="solid"/>
-                      <a:round/>
-                      <a:headEnd type="none" w="med" len="med"/>
-                      <a:tailEnd type="none" w="med" len="med"/>
-                    </a:lnB>
-                  </a:tcPr>
-                </a:tc>
-                <a:tc>
-                  <a:txBody>
-                    <a:bodyPr/>
-                    <a:lstStyle/>
-                    <a:p>
-                      <a:pPr indent="0" marL="0">
-                        <a:buNone/>
-                      </a:pPr>
-                      <a:r>
-                        <a:rPr lang="en-US" sz="1500" dirty="0">
-                          <a:solidFill>
-                            <a:srgbClr val="1A2233"/>
-                          </a:solidFill>
-                          <a:latin typeface="Malgun Gothic" pitchFamily="34" charset="0"/>
-                          <a:ea typeface="Malgun Gothic" pitchFamily="34" charset="-122"/>
-                          <a:cs typeface="Malgun Gothic" pitchFamily="34" charset="-120"/>
-                        </a:rPr>
-                        <a:t>뱃머리에서 오른쪽으로 120° 쯤, 20 km</a:t>
-                      </a:r>
-                      <a:endParaRPr lang="en-US" sz="1500" dirty="0">
-                        <a:latin typeface="Malgun Gothic" charset="0"/>
-                        <a:ea typeface="Malgun Gothic" charset="0"/>
-                        <a:cs typeface="Malgun Gothic" charset="0"/>
-                      </a:endParaRPr>
-                    </a:p>
-                  </a:txBody>
-                  <a:tcPr marL="91440" marR="91440" marT="45720" marB="45720" anchor="ctr">
-                    <a:lnL w="9525" cap="flat" cmpd="sng" algn="ctr">
-                      <a:solidFill>
-                        <a:srgbClr val="DDE3EE"/>
-                      </a:solidFill>
-                      <a:prstDash val="solid"/>
-                      <a:round/>
-                      <a:headEnd type="none" w="med" len="med"/>
-                      <a:tailEnd type="none" w="med" len="med"/>
-                    </a:lnL>
-                    <a:lnR w="9525" cap="flat" cmpd="sng" algn="ctr">
-                      <a:solidFill>
-                        <a:srgbClr val="DDE3EE"/>
-                      </a:solidFill>
-                      <a:prstDash val="solid"/>
-                      <a:round/>
-                      <a:headEnd type="none" w="med" len="med"/>
-                      <a:tailEnd type="none" w="med" len="med"/>
-                    </a:lnR>
-                    <a:lnT w="9525" cap="flat" cmpd="sng" algn="ctr">
-                      <a:solidFill>
-                        <a:srgbClr val="DDE3EE"/>
-                      </a:solidFill>
-                      <a:prstDash val="solid"/>
-                      <a:round/>
-                      <a:headEnd type="none" w="med" len="med"/>
-                      <a:tailEnd type="none" w="med" len="med"/>
-                    </a:lnT>
-                    <a:lnB w="9525" cap="flat" cmpd="sng" algn="ctr">
-                      <a:solidFill>
-                        <a:srgbClr val="DDE3EE"/>
-                      </a:solidFill>
-                      <a:prstDash val="solid"/>
-                      <a:round/>
-                      <a:headEnd type="none" w="med" len="med"/>
-                      <a:tailEnd type="none" w="med" len="med"/>
-                    </a:lnB>
-                  </a:tcPr>
-                </a:tc>
-              </a:tr>
-              <a:tr h="475488">
-                <a:tc>
-                  <a:txBody>
-                    <a:bodyPr/>
-                    <a:lstStyle/>
-                    <a:p>
-                      <a:pPr indent="0" marL="0">
-                        <a:buNone/>
-                      </a:pPr>
-                      <a:r>
-                        <a:rPr lang="en-US" sz="1500" b="1" dirty="0">
-                          <a:solidFill>
-                            <a:srgbClr val="1A2233"/>
-                          </a:solidFill>
-                          <a:latin typeface="Malgun Gothic" pitchFamily="34" charset="0"/>
-                          <a:ea typeface="Malgun Gothic" pitchFamily="34" charset="-122"/>
-                          <a:cs typeface="Malgun Gothic" pitchFamily="34" charset="-120"/>
-                        </a:rPr>
-                        <a:t>바다 위 이 지점</a:t>
-                      </a:r>
-                      <a:endParaRPr lang="en-US" sz="1500" dirty="0">
-                        <a:latin typeface="Malgun Gothic" charset="0"/>
-                        <a:ea typeface="Malgun Gothic" charset="0"/>
-                        <a:cs typeface="Malgun Gothic" charset="0"/>
-                      </a:endParaRPr>
-                    </a:p>
-                  </a:txBody>
-                  <a:tcPr marL="91440" marR="91440" marT="45720" marB="45720" anchor="ctr">
-                    <a:lnL w="9525" cap="flat" cmpd="sng" algn="ctr">
-                      <a:solidFill>
-                        <a:srgbClr val="DDE3EE"/>
-                      </a:solidFill>
-                      <a:prstDash val="solid"/>
-                      <a:round/>
-                      <a:headEnd type="none" w="med" len="med"/>
-                      <a:tailEnd type="none" w="med" len="med"/>
-                    </a:lnL>
-                    <a:lnR w="9525" cap="flat" cmpd="sng" algn="ctr">
-                      <a:solidFill>
-                        <a:srgbClr val="DDE3EE"/>
-                      </a:solidFill>
-                      <a:prstDash val="solid"/>
-                      <a:round/>
-                      <a:headEnd type="none" w="med" len="med"/>
-                      <a:tailEnd type="none" w="med" len="med"/>
-                    </a:lnR>
-                    <a:lnT w="9525" cap="flat" cmpd="sng" algn="ctr">
-                      <a:solidFill>
-                        <a:srgbClr val="DDE3EE"/>
-                      </a:solidFill>
-                      <a:prstDash val="solid"/>
-                      <a:round/>
-                      <a:headEnd type="none" w="med" len="med"/>
-                      <a:tailEnd type="none" w="med" len="med"/>
-                    </a:lnT>
-                    <a:lnB w="9525" cap="flat" cmpd="sng" algn="ctr">
-                      <a:solidFill>
-                        <a:srgbClr val="DDE3EE"/>
-                      </a:solidFill>
-                      <a:prstDash val="solid"/>
-                      <a:round/>
-                      <a:headEnd type="none" w="med" len="med"/>
-                      <a:tailEnd type="none" w="med" len="med"/>
-                    </a:lnB>
-                  </a:tcPr>
-                </a:tc>
-                <a:tc>
-                  <a:txBody>
-                    <a:bodyPr/>
-                    <a:lstStyle/>
-                    <a:p>
-                      <a:pPr indent="0" marL="0">
-                        <a:buNone/>
-                      </a:pPr>
-                      <a:r>
-                        <a:rPr lang="en-US" sz="1500" dirty="0">
-                          <a:solidFill>
-                            <a:srgbClr val="1A2233"/>
-                          </a:solidFill>
-                          <a:latin typeface="Malgun Gothic" pitchFamily="34" charset="0"/>
-                          <a:ea typeface="Malgun Gothic" pitchFamily="34" charset="-122"/>
-                          <a:cs typeface="Malgun Gothic" pitchFamily="34" charset="-120"/>
-                        </a:rPr>
-                        <a:t>남쪽으로 19 km 쯤, 동쪽으로 5 km 쯤</a:t>
-                      </a:r>
-                      <a:endParaRPr lang="en-US" sz="1500" dirty="0">
-                        <a:latin typeface="Malgun Gothic" charset="0"/>
-                        <a:ea typeface="Malgun Gothic" charset="0"/>
-                        <a:cs typeface="Malgun Gothic" charset="0"/>
-                      </a:endParaRPr>
-                    </a:p>
-                  </a:txBody>
-                  <a:tcPr marL="91440" marR="91440" marT="45720" marB="45720" anchor="ctr">
-                    <a:lnL w="9525" cap="flat" cmpd="sng" algn="ctr">
-                      <a:solidFill>
-                        <a:srgbClr val="DDE3EE"/>
-                      </a:solidFill>
-                      <a:prstDash val="solid"/>
-                      <a:round/>
-                      <a:headEnd type="none" w="med" len="med"/>
-                      <a:tailEnd type="none" w="med" len="med"/>
-                    </a:lnL>
-                    <a:lnR w="9525" cap="flat" cmpd="sng" algn="ctr">
-                      <a:solidFill>
-                        <a:srgbClr val="DDE3EE"/>
-                      </a:solidFill>
-                      <a:prstDash val="solid"/>
-                      <a:round/>
-                      <a:headEnd type="none" w="med" len="med"/>
-                      <a:tailEnd type="none" w="med" len="med"/>
-                    </a:lnR>
-                    <a:lnT w="9525" cap="flat" cmpd="sng" algn="ctr">
-                      <a:solidFill>
-                        <a:srgbClr val="DDE3EE"/>
-                      </a:solidFill>
-                      <a:prstDash val="solid"/>
-                      <a:round/>
-                      <a:headEnd type="none" w="med" len="med"/>
-                      <a:tailEnd type="none" w="med" len="med"/>
-                    </a:lnT>
-                    <a:lnB w="9525" cap="flat" cmpd="sng" algn="ctr">
-                      <a:solidFill>
-                        <a:srgbClr val="DDE3EE"/>
-                      </a:solidFill>
-                      <a:prstDash val="solid"/>
-                      <a:round/>
-                      <a:headEnd type="none" w="med" len="med"/>
-                      <a:tailEnd type="none" w="med" len="med"/>
-                    </a:lnB>
-                  </a:tcPr>
-                </a:tc>
-              </a:tr>
-              <a:tr h="475488">
-                <a:tc>
-                  <a:txBody>
-                    <a:bodyPr/>
-                    <a:lstStyle/>
-                    <a:p>
-                      <a:pPr indent="0" marL="0">
-                        <a:buNone/>
-                      </a:pPr>
-                      <a:r>
-                        <a:rPr lang="en-US" sz="1500" b="1" dirty="0">
-                          <a:solidFill>
-                            <a:srgbClr val="1A2233"/>
-                          </a:solidFill>
-                          <a:latin typeface="Malgun Gothic" pitchFamily="34" charset="0"/>
-                          <a:ea typeface="Malgun Gothic" pitchFamily="34" charset="-122"/>
-                          <a:cs typeface="Malgun Gothic" pitchFamily="34" charset="-120"/>
-                        </a:rPr>
-                        <a:t>지구</a:t>
-                      </a:r>
-                      <a:endParaRPr lang="en-US" sz="1500" dirty="0">
-                        <a:latin typeface="Malgun Gothic" charset="0"/>
-                        <a:ea typeface="Malgun Gothic" charset="0"/>
-                        <a:cs typeface="Malgun Gothic" charset="0"/>
-                      </a:endParaRPr>
-                    </a:p>
-                  </a:txBody>
-                  <a:tcPr marL="91440" marR="91440" marT="45720" marB="45720" anchor="ctr">
-                    <a:lnL w="9525" cap="flat" cmpd="sng" algn="ctr">
-                      <a:solidFill>
-                        <a:srgbClr val="DDE3EE"/>
-                      </a:solidFill>
-                      <a:prstDash val="solid"/>
-                      <a:round/>
-                      <a:headEnd type="none" w="med" len="med"/>
-                      <a:tailEnd type="none" w="med" len="med"/>
-                    </a:lnL>
-                    <a:lnR w="9525" cap="flat" cmpd="sng" algn="ctr">
-                      <a:solidFill>
-                        <a:srgbClr val="DDE3EE"/>
-                      </a:solidFill>
-                      <a:prstDash val="solid"/>
-                      <a:round/>
-                      <a:headEnd type="none" w="med" len="med"/>
-                      <a:tailEnd type="none" w="med" len="med"/>
-                    </a:lnR>
-                    <a:lnT w="9525" cap="flat" cmpd="sng" algn="ctr">
-                      <a:solidFill>
-                        <a:srgbClr val="DDE3EE"/>
-                      </a:solidFill>
-                      <a:prstDash val="solid"/>
-                      <a:round/>
-                      <a:headEnd type="none" w="med" len="med"/>
-                      <a:tailEnd type="none" w="med" len="med"/>
-                    </a:lnT>
-                    <a:lnB w="9525" cap="flat" cmpd="sng" algn="ctr">
-                      <a:solidFill>
-                        <a:srgbClr val="DDE3EE"/>
-                      </a:solidFill>
-                      <a:prstDash val="solid"/>
-                      <a:round/>
-                      <a:headEnd type="none" w="med" len="med"/>
-                      <a:tailEnd type="none" w="med" len="med"/>
-                    </a:lnB>
-                  </a:tcPr>
-                </a:tc>
-                <a:tc>
-                  <a:txBody>
-                    <a:bodyPr/>
-                    <a:lstStyle/>
-                    <a:p>
-                      <a:pPr indent="0" marL="0">
-                        <a:buNone/>
-                      </a:pPr>
-                      <a:r>
-                        <a:rPr lang="en-US" sz="1500" dirty="0">
-                          <a:solidFill>
-                            <a:srgbClr val="1A2233"/>
-                          </a:solidFill>
-                          <a:latin typeface="Malgun Gothic" pitchFamily="34" charset="0"/>
-                          <a:ea typeface="Malgun Gothic" pitchFamily="34" charset="-122"/>
-                          <a:cs typeface="Malgun Gothic" pitchFamily="34" charset="-120"/>
-                        </a:rPr>
-                        <a:t>지구 중심에서 잰 X, Y, Z 세 숫자 (수천 km 단위)</a:t>
-                      </a:r>
-                      <a:endParaRPr lang="en-US" sz="1500" dirty="0">
-                        <a:latin typeface="Malgun Gothic" charset="0"/>
-                        <a:ea typeface="Malgun Gothic" charset="0"/>
-                        <a:cs typeface="Malgun Gothic" charset="0"/>
-                      </a:endParaRPr>
-                    </a:p>
-                  </a:txBody>
-                  <a:tcPr marL="91440" marR="91440" marT="45720" marB="45720" anchor="ctr">
-                    <a:lnL w="9525" cap="flat" cmpd="sng" algn="ctr">
-                      <a:solidFill>
-                        <a:srgbClr val="DDE3EE"/>
-                      </a:solidFill>
-                      <a:prstDash val="solid"/>
-                      <a:round/>
-                      <a:headEnd type="none" w="med" len="med"/>
-                      <a:tailEnd type="none" w="med" len="med"/>
-                    </a:lnL>
-                    <a:lnR w="9525" cap="flat" cmpd="sng" algn="ctr">
-                      <a:solidFill>
-                        <a:srgbClr val="DDE3EE"/>
-                      </a:solidFill>
-                      <a:prstDash val="solid"/>
-                      <a:round/>
-                      <a:headEnd type="none" w="med" len="med"/>
-                      <a:tailEnd type="none" w="med" len="med"/>
-                    </a:lnR>
-                    <a:lnT w="9525" cap="flat" cmpd="sng" algn="ctr">
-                      <a:solidFill>
-                        <a:srgbClr val="DDE3EE"/>
-                      </a:solidFill>
-                      <a:prstDash val="solid"/>
-                      <a:round/>
-                      <a:headEnd type="none" w="med" len="med"/>
-                      <a:tailEnd type="none" w="med" len="med"/>
-                    </a:lnT>
-                    <a:lnB w="9525" cap="flat" cmpd="sng" algn="ctr">
-                      <a:solidFill>
-                        <a:srgbClr val="DDE3EE"/>
-                      </a:solidFill>
-                      <a:prstDash val="solid"/>
-                      <a:round/>
-                      <a:headEnd type="none" w="med" len="med"/>
-                      <a:tailEnd type="none" w="med" len="med"/>
-                    </a:lnB>
-                  </a:tcPr>
-                </a:tc>
-              </a:tr>
-              <a:tr h="475488">
-                <a:tc>
-                  <a:txBody>
-                    <a:bodyPr/>
-                    <a:lstStyle/>
-                    <a:p>
-                      <a:pPr indent="0" marL="0">
-                        <a:buNone/>
-                      </a:pPr>
-                      <a:r>
-                        <a:rPr lang="en-US" sz="1500" b="1" dirty="0">
-                          <a:solidFill>
-                            <a:srgbClr val="C2521C"/>
-                          </a:solidFill>
-                          <a:latin typeface="Malgun Gothic" pitchFamily="34" charset="0"/>
-                          <a:ea typeface="Malgun Gothic" pitchFamily="34" charset="-122"/>
-                          <a:cs typeface="Malgun Gothic" pitchFamily="34" charset="-120"/>
-                        </a:rPr>
-                        <a:t>지도</a:t>
-                      </a:r>
-                      <a:endParaRPr lang="en-US" sz="1500" dirty="0">
-                        <a:latin typeface="Malgun Gothic" charset="0"/>
-                        <a:ea typeface="Malgun Gothic" charset="0"/>
-                        <a:cs typeface="Malgun Gothic" charset="0"/>
-                      </a:endParaRPr>
-                    </a:p>
-                  </a:txBody>
-                  <a:tcPr marL="91440" marR="91440" marT="45720" marB="45720" anchor="ctr">
-                    <a:lnL w="9525" cap="flat" cmpd="sng" algn="ctr">
-                      <a:solidFill>
-                        <a:srgbClr val="DDE3EE"/>
-                      </a:solidFill>
-                      <a:prstDash val="solid"/>
-                      <a:round/>
-                      <a:headEnd type="none" w="med" len="med"/>
-                      <a:tailEnd type="none" w="med" len="med"/>
-                    </a:lnL>
-                    <a:lnR w="9525" cap="flat" cmpd="sng" algn="ctr">
-                      <a:solidFill>
-                        <a:srgbClr val="DDE3EE"/>
-                      </a:solidFill>
-                      <a:prstDash val="solid"/>
-                      <a:round/>
-                      <a:headEnd type="none" w="med" len="med"/>
-                      <a:tailEnd type="none" w="med" len="med"/>
-                    </a:lnR>
-                    <a:lnT w="9525" cap="flat" cmpd="sng" algn="ctr">
-                      <a:solidFill>
-                        <a:srgbClr val="DDE3EE"/>
-                      </a:solidFill>
-                      <a:prstDash val="solid"/>
-                      <a:round/>
-                      <a:headEnd type="none" w="med" len="med"/>
-                      <a:tailEnd type="none" w="med" len="med"/>
-                    </a:lnT>
-                    <a:lnB w="9525" cap="flat" cmpd="sng" algn="ctr">
-                      <a:solidFill>
-                        <a:srgbClr val="DDE3EE"/>
-                      </a:solidFill>
-                      <a:prstDash val="solid"/>
-                      <a:round/>
-                      <a:headEnd type="none" w="med" len="med"/>
-                      <a:tailEnd type="none" w="med" len="med"/>
-                    </a:lnB>
-                  </a:tcPr>
-                </a:tc>
-                <a:tc>
-                  <a:txBody>
-                    <a:bodyPr/>
-                    <a:lstStyle/>
-                    <a:p>
-                      <a:pPr indent="0" marL="0">
-                        <a:buNone/>
-                      </a:pPr>
-                      <a:r>
-                        <a:rPr lang="en-US" sz="1500" b="1" dirty="0">
-                          <a:solidFill>
-                            <a:srgbClr val="C2521C"/>
-                          </a:solidFill>
-                          <a:latin typeface="Malgun Gothic" pitchFamily="34" charset="0"/>
-                          <a:ea typeface="Malgun Gothic" pitchFamily="34" charset="-122"/>
-                          <a:cs typeface="Malgun Gothic" pitchFamily="34" charset="-120"/>
-                        </a:rPr>
-                        <a:t>북위 36.2°, 동경 127.4° 부근</a:t>
-                      </a:r>
-                      <a:endParaRPr lang="en-US" sz="1500" dirty="0">
-                        <a:latin typeface="Malgun Gothic" charset="0"/>
-                        <a:ea typeface="Malgun Gothic" charset="0"/>
-                        <a:cs typeface="Malgun Gothic" charset="0"/>
-                      </a:endParaRPr>
-                    </a:p>
-                  </a:txBody>
-                  <a:tcPr marL="91440" marR="91440" marT="45720" marB="45720" anchor="ctr">
-                    <a:lnL w="9525" cap="flat" cmpd="sng" algn="ctr">
-                      <a:solidFill>
-                        <a:srgbClr val="DDE3EE"/>
-                      </a:solidFill>
-                      <a:prstDash val="solid"/>
-                      <a:round/>
-                      <a:headEnd type="none" w="med" len="med"/>
-                      <a:tailEnd type="none" w="med" len="med"/>
-                    </a:lnL>
-                    <a:lnR w="9525" cap="flat" cmpd="sng" algn="ctr">
-                      <a:solidFill>
-                        <a:srgbClr val="DDE3EE"/>
-                      </a:solidFill>
-                      <a:prstDash val="solid"/>
-                      <a:round/>
-                      <a:headEnd type="none" w="med" len="med"/>
-                      <a:tailEnd type="none" w="med" len="med"/>
-                    </a:lnR>
-                    <a:lnT w="9525" cap="flat" cmpd="sng" algn="ctr">
-                      <a:solidFill>
-                        <a:srgbClr val="DDE3EE"/>
-                      </a:solidFill>
-                      <a:prstDash val="solid"/>
-                      <a:round/>
-                      <a:headEnd type="none" w="med" len="med"/>
-                      <a:tailEnd type="none" w="med" len="med"/>
-                    </a:lnT>
-                    <a:lnB w="9525" cap="flat" cmpd="sng" algn="ctr">
-                      <a:solidFill>
-                        <a:srgbClr val="DDE3EE"/>
-                      </a:solidFill>
-                      <a:prstDash val="solid"/>
-                      <a:round/>
-                      <a:headEnd type="none" w="med" len="med"/>
-                      <a:tailEnd type="none" w="med" len="med"/>
-                    </a:lnB>
-                  </a:tcPr>
-                </a:tc>
-              </a:tr>
-            </a:tbl>
-          </a:graphicData>
-        </a:graphic>
-      </p:graphicFrame>
       <p:sp>
         <p:nvSpPr>
           <p:cNvPr id="5" name="Shape 2"/>
@@ -39849,8 +39234,8 @@
         </p:nvSpPr>
         <p:spPr>
           <a:xfrm>
-            <a:off x="1051560" y="4882896"/>
-            <a:ext cx="10058400" cy="841248"/>
+            <a:off x="566928" y="5623560"/>
+            <a:ext cx="11064240" cy="731520"/>
           </a:xfrm>
           <a:prstGeom prst="roundRect">
             <a:avLst>
@@ -39880,8 +39265,8 @@
         </p:nvSpPr>
         <p:spPr>
           <a:xfrm>
-            <a:off x="1051560" y="4882896"/>
-            <a:ext cx="10058400" cy="841248"/>
+            <a:off x="566928" y="5623560"/>
+            <a:ext cx="11064240" cy="731520"/>
           </a:xfrm>
           <a:prstGeom prst="rect">
             <a:avLst/>
@@ -39897,7 +39282,7 @@
               <a:buNone/>
             </a:pPr>
             <a:r>
-              <a:rPr lang="en-US" sz="1700" b="1" dirty="0">
+              <a:rPr lang="en-US" sz="1500" b="1" dirty="0">
                 <a:solidFill>
                   <a:srgbClr val="C2521C"/>
                 </a:solidFill>
@@ -39905,9 +39290,485 @@
                 <a:ea typeface="Malgun Gothic" pitchFamily="34" charset="-122"/>
                 <a:cs typeface="Malgun Gothic" pitchFamily="34" charset="-120"/>
               </a:rPr>
-              <a:t>다섯 문장 모두 맞습니다.  다른 것은 기준점(원점)과 기준 방향(축)뿐입니다.</a:t>
-            </a:r>
-            <a:endParaRPr lang="en-US" sz="1700" dirty="0"/>
+              <a:t>네 줄 모두 같은 점입니다.  숫자를 바꾸는 것은 원점과 축뿐이고, 그 둘을 맞춰 주는 계산이 좌표변환입니다.</a:t>
+            </a:r>
+            <a:endParaRPr lang="en-US" sz="1500" dirty="0"/>
+          </a:p>
+        </p:txBody>
+      </p:sp>
+      <p:pic>
+        <p:nvPicPr>
+          <p:cNvPr id="7" name="Picture 6" descr="fig14_one_target.png"/>
+          <p:cNvPicPr>
+            <a:picLocks noChangeAspect="1"/>
+          </p:cNvPicPr>
+          <p:nvPr/>
+        </p:nvPicPr>
+        <p:blipFill>
+          <a:blip r:embed="rId3"/>
+          <a:stretch>
+            <a:fillRect/>
+          </a:stretch>
+        </p:blipFill>
+        <p:spPr>
+          <a:xfrm>
+            <a:off x="566928" y="1298448"/>
+            <a:ext cx="7223760" cy="4160520"/>
+          </a:xfrm>
+          <a:prstGeom prst="rect">
+            <a:avLst/>
+          </a:prstGeom>
+        </p:spPr>
+      </p:pic>
+      <p:sp>
+        <p:nvSpPr>
+          <p:cNvPr id="8" name="Card 0"/>
+          <p:cNvSpPr/>
+          <p:nvPr/>
+        </p:nvSpPr>
+        <p:spPr>
+          <a:xfrm>
+            <a:off x="8001000" y="1298448"/>
+            <a:ext cx="3630168" cy="932688"/>
+          </a:xfrm>
+          <a:prstGeom prst="roundRect">
+            <a:avLst>
+              <a:gd name="adj" fmla="val 8696"/>
+            </a:avLst>
+          </a:prstGeom>
+          <a:solidFill>
+            <a:srgbClr val="EEF1F7"/>
+          </a:solidFill>
+          <a:ln w="12700">
+            <a:solidFill>
+              <a:srgbClr val="FFFFFF"/>
+            </a:solidFill>
+            <a:prstDash val="solid"/>
+          </a:ln>
+        </p:spPr>
+        <p:txBody>
+          <a:bodyPr/>
+          <a:p/>
+        </p:txBody>
+      </p:sp>
+      <p:sp>
+        <p:nvSpPr>
+          <p:cNvPr id="9" name="CardText 0"/>
+          <p:cNvSpPr txBox="1"/>
+          <p:nvPr/>
+        </p:nvSpPr>
+        <p:spPr>
+          <a:xfrm>
+            <a:off x="8183879" y="1389888"/>
+            <a:ext cx="3264408" cy="749808"/>
+          </a:xfrm>
+          <a:prstGeom prst="rect">
+            <a:avLst/>
+          </a:prstGeom>
+          <a:noFill/>
+          <a:ln/>
+        </p:spPr>
+        <p:txBody>
+          <a:bodyPr wrap="square" lIns="0" tIns="0" rIns="0" bIns="0" rtlCol="0" anchor="ctr"/>
+          <a:lstStyle/>
+          <a:p>
+            <a:pPr indent="0" marL="0">
+              <a:lnSpc>
+                <a:spcPts val="1700"/>
+              </a:lnSpc>
+              <a:buNone/>
+            </a:pPr>
+            <a:r>
+              <a:rPr lang="en-US" sz="1300" dirty="0" b="1">
+                <a:solidFill>
+                  <a:srgbClr val="C2521C"/>
+                </a:solidFill>
+                <a:latin typeface="Malgun Gothic" pitchFamily="34" charset="0"/>
+                <a:ea typeface="Malgun Gothic" pitchFamily="34" charset="-122"/>
+                <a:cs typeface="Malgun Gothic" pitchFamily="34" charset="-120"/>
+              </a:rPr>
+              <a:t>안테나 좌표계</a:t>
+            </a:r>
+            <a:endParaRPr lang="en-US" sz="1300" dirty="0"/>
+          </a:p>
+          <a:p>
+            <a:pPr indent="0" marL="0">
+              <a:lnSpc>
+                <a:spcPts val="1500"/>
+              </a:lnSpc>
+              <a:buNone/>
+            </a:pPr>
+            <a:r>
+              <a:rPr lang="en-US" sz="1050" dirty="0">
+                <a:solidFill>
+                  <a:srgbClr val="5A6478"/>
+                </a:solidFill>
+                <a:latin typeface="Malgun Gothic" pitchFamily="34" charset="0"/>
+                <a:ea typeface="Malgun Gothic" pitchFamily="34" charset="-122"/>
+                <a:cs typeface="Malgun Gothic" pitchFamily="34" charset="-120"/>
+              </a:rPr>
+              <a:t>원점 안테나 · 기준 방향 보어사이트</a:t>
+            </a:r>
+            <a:endParaRPr lang="en-US" sz="1050" dirty="0"/>
+          </a:p>
+          <a:p>
+            <a:pPr indent="0" marL="0">
+              <a:lnSpc>
+                <a:spcPts val="1700"/>
+              </a:lnSpc>
+              <a:buNone/>
+            </a:pPr>
+            <a:r>
+              <a:rPr lang="en-US" sz="1200" dirty="0" b="1">
+                <a:solidFill>
+                  <a:srgbClr val="C2521C"/>
+                </a:solidFill>
+                <a:latin typeface="Malgun Gothic" pitchFamily="34" charset="0"/>
+                <a:ea typeface="Malgun Gothic" pitchFamily="34" charset="-122"/>
+                <a:cs typeface="Malgun Gothic" pitchFamily="34" charset="-120"/>
+              </a:rPr>
+              <a:t>정면에서 오른쪽 30°,  20 000 m</a:t>
+            </a:r>
+            <a:endParaRPr lang="en-US" sz="1200" dirty="0"/>
+          </a:p>
+        </p:txBody>
+      </p:sp>
+      <p:sp>
+        <p:nvSpPr>
+          <p:cNvPr id="10" name="Card 1"/>
+          <p:cNvSpPr/>
+          <p:nvPr/>
+        </p:nvSpPr>
+        <p:spPr>
+          <a:xfrm>
+            <a:off x="8001000" y="2340864"/>
+            <a:ext cx="3630168" cy="932688"/>
+          </a:xfrm>
+          <a:prstGeom prst="roundRect">
+            <a:avLst>
+              <a:gd name="adj" fmla="val 8696"/>
+            </a:avLst>
+          </a:prstGeom>
+          <a:solidFill>
+            <a:srgbClr val="EEF1F7"/>
+          </a:solidFill>
+          <a:ln w="12700">
+            <a:solidFill>
+              <a:srgbClr val="FFFFFF"/>
+            </a:solidFill>
+            <a:prstDash val="solid"/>
+          </a:ln>
+        </p:spPr>
+        <p:txBody>
+          <a:bodyPr/>
+          <a:p/>
+        </p:txBody>
+      </p:sp>
+      <p:sp>
+        <p:nvSpPr>
+          <p:cNvPr id="11" name="CardText 1"/>
+          <p:cNvSpPr txBox="1"/>
+          <p:nvPr/>
+        </p:nvSpPr>
+        <p:spPr>
+          <a:xfrm>
+            <a:off x="8183879" y="2432304"/>
+            <a:ext cx="3264408" cy="749808"/>
+          </a:xfrm>
+          <a:prstGeom prst="rect">
+            <a:avLst/>
+          </a:prstGeom>
+          <a:noFill/>
+          <a:ln/>
+        </p:spPr>
+        <p:txBody>
+          <a:bodyPr wrap="square" lIns="0" tIns="0" rIns="0" bIns="0" rtlCol="0" anchor="ctr"/>
+          <a:lstStyle/>
+          <a:p>
+            <a:pPr indent="0" marL="0">
+              <a:lnSpc>
+                <a:spcPts val="1700"/>
+              </a:lnSpc>
+              <a:buNone/>
+            </a:pPr>
+            <a:r>
+              <a:rPr lang="en-US" sz="1300" dirty="0" b="1">
+                <a:solidFill>
+                  <a:srgbClr val="2B57A6"/>
+                </a:solidFill>
+                <a:latin typeface="Malgun Gothic" pitchFamily="34" charset="0"/>
+                <a:ea typeface="Malgun Gothic" pitchFamily="34" charset="-122"/>
+                <a:cs typeface="Malgun Gothic" pitchFamily="34" charset="-120"/>
+              </a:rPr>
+              <a:t>동체 좌표계</a:t>
+            </a:r>
+            <a:endParaRPr lang="en-US" sz="1300" dirty="0"/>
+          </a:p>
+          <a:p>
+            <a:pPr indent="0" marL="0">
+              <a:lnSpc>
+                <a:spcPts val="1500"/>
+              </a:lnSpc>
+              <a:buNone/>
+            </a:pPr>
+            <a:r>
+              <a:rPr lang="en-US" sz="1050" dirty="0">
+                <a:solidFill>
+                  <a:srgbClr val="5A6478"/>
+                </a:solidFill>
+                <a:latin typeface="Malgun Gothic" pitchFamily="34" charset="0"/>
+                <a:ea typeface="Malgun Gothic" pitchFamily="34" charset="-122"/>
+                <a:cs typeface="Malgun Gothic" pitchFamily="34" charset="-120"/>
+              </a:rPr>
+              <a:t>원점 무게중심 · 기준 방향 선수</a:t>
+            </a:r>
+            <a:endParaRPr lang="en-US" sz="1050" dirty="0"/>
+          </a:p>
+          <a:p>
+            <a:pPr indent="0" marL="0">
+              <a:lnSpc>
+                <a:spcPts val="1700"/>
+              </a:lnSpc>
+              <a:buNone/>
+            </a:pPr>
+            <a:r>
+              <a:rPr lang="en-US" sz="1200" dirty="0" b="1">
+                <a:solidFill>
+                  <a:srgbClr val="2B57A6"/>
+                </a:solidFill>
+                <a:latin typeface="Malgun Gothic" pitchFamily="34" charset="0"/>
+                <a:ea typeface="Malgun Gothic" pitchFamily="34" charset="-122"/>
+                <a:cs typeface="Malgun Gothic" pitchFamily="34" charset="-120"/>
+              </a:rPr>
+              <a:t>선수에서 오른쪽 120°,  20 015 m</a:t>
+            </a:r>
+            <a:endParaRPr lang="en-US" sz="1200" dirty="0"/>
+          </a:p>
+        </p:txBody>
+      </p:sp>
+      <p:sp>
+        <p:nvSpPr>
+          <p:cNvPr id="12" name="Card 2"/>
+          <p:cNvSpPr/>
+          <p:nvPr/>
+        </p:nvSpPr>
+        <p:spPr>
+          <a:xfrm>
+            <a:off x="8001000" y="3383280"/>
+            <a:ext cx="3630168" cy="932688"/>
+          </a:xfrm>
+          <a:prstGeom prst="roundRect">
+            <a:avLst>
+              <a:gd name="adj" fmla="val 8696"/>
+            </a:avLst>
+          </a:prstGeom>
+          <a:solidFill>
+            <a:srgbClr val="EEF1F7"/>
+          </a:solidFill>
+          <a:ln w="12700">
+            <a:solidFill>
+              <a:srgbClr val="FFFFFF"/>
+            </a:solidFill>
+            <a:prstDash val="solid"/>
+          </a:ln>
+        </p:spPr>
+        <p:txBody>
+          <a:bodyPr/>
+          <a:p/>
+        </p:txBody>
+      </p:sp>
+      <p:sp>
+        <p:nvSpPr>
+          <p:cNvPr id="13" name="CardText 2"/>
+          <p:cNvSpPr txBox="1"/>
+          <p:nvPr/>
+        </p:nvSpPr>
+        <p:spPr>
+          <a:xfrm>
+            <a:off x="8183879" y="3474720"/>
+            <a:ext cx="3264408" cy="749808"/>
+          </a:xfrm>
+          <a:prstGeom prst="rect">
+            <a:avLst/>
+          </a:prstGeom>
+          <a:noFill/>
+          <a:ln/>
+        </p:spPr>
+        <p:txBody>
+          <a:bodyPr wrap="square" lIns="0" tIns="0" rIns="0" bIns="0" rtlCol="0" anchor="ctr"/>
+          <a:lstStyle/>
+          <a:p>
+            <a:pPr indent="0" marL="0">
+              <a:lnSpc>
+                <a:spcPts val="1700"/>
+              </a:lnSpc>
+              <a:buNone/>
+            </a:pPr>
+            <a:r>
+              <a:rPr lang="en-US" sz="1300" dirty="0" b="1">
+                <a:solidFill>
+                  <a:srgbClr val="2F855A"/>
+                </a:solidFill>
+                <a:latin typeface="Malgun Gothic" pitchFamily="34" charset="0"/>
+                <a:ea typeface="Malgun Gothic" pitchFamily="34" charset="-122"/>
+                <a:cs typeface="Malgun Gothic" pitchFamily="34" charset="-120"/>
+              </a:rPr>
+              <a:t>NED 좌표계 (로컬)</a:t>
+            </a:r>
+            <a:endParaRPr lang="en-US" sz="1300" dirty="0"/>
+          </a:p>
+          <a:p>
+            <a:pPr indent="0" marL="0">
+              <a:lnSpc>
+                <a:spcPts val="1500"/>
+              </a:lnSpc>
+              <a:buNone/>
+            </a:pPr>
+            <a:r>
+              <a:rPr lang="en-US" sz="1050" dirty="0">
+                <a:solidFill>
+                  <a:srgbClr val="5A6478"/>
+                </a:solidFill>
+                <a:latin typeface="Malgun Gothic" pitchFamily="34" charset="0"/>
+                <a:ea typeface="Malgun Gothic" pitchFamily="34" charset="-122"/>
+                <a:cs typeface="Malgun Gothic" pitchFamily="34" charset="-120"/>
+              </a:rPr>
+              <a:t>원점 배 위치 · 기준 방향 진북</a:t>
+            </a:r>
+            <a:endParaRPr lang="en-US" sz="1050" dirty="0"/>
+          </a:p>
+          <a:p>
+            <a:pPr indent="0" marL="0">
+              <a:lnSpc>
+                <a:spcPts val="1700"/>
+              </a:lnSpc>
+              <a:buNone/>
+            </a:pPr>
+            <a:r>
+              <a:rPr lang="en-US" sz="1200" dirty="0" b="1">
+                <a:solidFill>
+                  <a:srgbClr val="2F855A"/>
+                </a:solidFill>
+                <a:latin typeface="Malgun Gothic" pitchFamily="34" charset="0"/>
+                <a:ea typeface="Malgun Gothic" pitchFamily="34" charset="-122"/>
+                <a:cs typeface="Malgun Gothic" pitchFamily="34" charset="-120"/>
+              </a:rPr>
+              <a:t>진북에서 165° → 남 19 340 m · 동 5 155 m</a:t>
+            </a:r>
+            <a:endParaRPr lang="en-US" sz="1200" dirty="0"/>
+          </a:p>
+        </p:txBody>
+      </p:sp>
+      <p:sp>
+        <p:nvSpPr>
+          <p:cNvPr id="14" name="Card 3"/>
+          <p:cNvSpPr/>
+          <p:nvPr/>
+        </p:nvSpPr>
+        <p:spPr>
+          <a:xfrm>
+            <a:off x="8001000" y="4425696"/>
+            <a:ext cx="3630168" cy="932688"/>
+          </a:xfrm>
+          <a:prstGeom prst="roundRect">
+            <a:avLst>
+              <a:gd name="adj" fmla="val 8696"/>
+            </a:avLst>
+          </a:prstGeom>
+          <a:solidFill>
+            <a:srgbClr val="EEF1F7"/>
+          </a:solidFill>
+          <a:ln w="12700">
+            <a:solidFill>
+              <a:srgbClr val="FFFFFF"/>
+            </a:solidFill>
+            <a:prstDash val="solid"/>
+          </a:ln>
+        </p:spPr>
+        <p:txBody>
+          <a:bodyPr/>
+          <a:p/>
+        </p:txBody>
+      </p:sp>
+      <p:sp>
+        <p:nvSpPr>
+          <p:cNvPr id="15" name="CardText 3"/>
+          <p:cNvSpPr txBox="1"/>
+          <p:nvPr/>
+        </p:nvSpPr>
+        <p:spPr>
+          <a:xfrm>
+            <a:off x="8183879" y="4517136"/>
+            <a:ext cx="3264408" cy="749808"/>
+          </a:xfrm>
+          <a:prstGeom prst="rect">
+            <a:avLst/>
+          </a:prstGeom>
+          <a:noFill/>
+          <a:ln/>
+        </p:spPr>
+        <p:txBody>
+          <a:bodyPr wrap="square" lIns="0" tIns="0" rIns="0" bIns="0" rtlCol="0" anchor="ctr"/>
+          <a:lstStyle/>
+          <a:p>
+            <a:pPr indent="0" marL="0">
+              <a:lnSpc>
+                <a:spcPts val="1700"/>
+              </a:lnSpc>
+              <a:buNone/>
+            </a:pPr>
+            <a:r>
+              <a:rPr lang="en-US" sz="1300" dirty="0" b="1">
+                <a:solidFill>
+                  <a:srgbClr val="1A2233"/>
+                </a:solidFill>
+                <a:latin typeface="Malgun Gothic" pitchFamily="34" charset="0"/>
+                <a:ea typeface="Malgun Gothic" pitchFamily="34" charset="-122"/>
+                <a:cs typeface="Malgun Gothic" pitchFamily="34" charset="-120"/>
+              </a:rPr>
+              <a:t>ECEF · LLA (지구)</a:t>
+            </a:r>
+            <a:endParaRPr lang="en-US" sz="1300" dirty="0"/>
+          </a:p>
+          <a:p>
+            <a:pPr indent="0" marL="0">
+              <a:lnSpc>
+                <a:spcPts val="1500"/>
+              </a:lnSpc>
+              <a:buNone/>
+            </a:pPr>
+            <a:r>
+              <a:rPr lang="en-US" sz="1050" dirty="0">
+                <a:solidFill>
+                  <a:srgbClr val="5A6478"/>
+                </a:solidFill>
+                <a:latin typeface="Malgun Gothic" pitchFamily="34" charset="0"/>
+                <a:ea typeface="Malgun Gothic" pitchFamily="34" charset="-122"/>
+                <a:cs typeface="Malgun Gothic" pitchFamily="34" charset="-120"/>
+              </a:rPr>
+              <a:t>원점 지구 중심 · 기준 적도면과 그리니치</a:t>
+            </a:r>
+            <a:endParaRPr lang="en-US" sz="1050" dirty="0"/>
+          </a:p>
+          <a:p>
+            <a:pPr indent="0" marL="0">
+              <a:lnSpc>
+                <a:spcPts val="1700"/>
+              </a:lnSpc>
+              <a:buNone/>
+            </a:pPr>
+            <a:r>
+              <a:rPr lang="en-US" sz="1200" dirty="0" b="1">
+                <a:solidFill>
+                  <a:srgbClr val="1A2233"/>
+                </a:solidFill>
+                <a:latin typeface="Malgun Gothic" pitchFamily="34" charset="0"/>
+                <a:ea typeface="Malgun Gothic" pitchFamily="34" charset="-122"/>
+                <a:cs typeface="Malgun Gothic" pitchFamily="34" charset="-120"/>
+              </a:rPr>
+              <a:t>북위 36.2337°,  동경 127.3643°</a:t>
+            </a:r>
+            <a:endParaRPr lang="en-US" sz="1200" dirty="0"/>
           </a:p>
         </p:txBody>
       </p:sp>
@@ -40357,7 +40218,7 @@
                 <a:ea typeface="Malgun Gothic" pitchFamily="34" charset="-122"/>
                 <a:cs typeface="Malgun Gothic" pitchFamily="34" charset="-120"/>
               </a:rPr>
-              <a:t>항법 분야는 z 를 아래로 두는 관습이 있어</a:t>
+              <a:t>x 앞 · y 오른쪽으로 잡으면 z 는 저절로 아래가 된다.</a:t>
             </a:r>
             <a:endParaRPr lang="en-US" sz="1300" dirty="0"/>
           </a:p>
@@ -40377,7 +40238,7 @@
                 <a:ea typeface="Malgun Gothic" pitchFamily="34" charset="-122"/>
                 <a:cs typeface="Malgun Gothic" pitchFamily="34" charset="-120"/>
               </a:rPr>
-              <a:t>처음엔 거의 반드시 헷갈린다.</a:t>
+              <a:t>항법 분야의 이 관습, 처음엔 거의 반드시 헷갈린다.</a:t>
             </a:r>
             <a:endParaRPr lang="en-US" sz="1300" dirty="0"/>
           </a:p>
@@ -40638,7 +40499,7 @@
                 <a:ea typeface="Malgun Gothic" pitchFamily="34" charset="-122"/>
                 <a:cs typeface="Malgun Gothic" pitchFamily="34" charset="-120"/>
               </a:rPr>
-              <a:t>이 발표의 약속 :  모든 좌표계에서 z 는 아래.  "10 m 위" 는  z = −10 입니다.</a:t>
+              <a:t>이 발표의 약속 :  안테나·동체·NED 좌표계에서 z 는 아래.  "10 m 위" 는  z = −10 입니다.</a:t>
             </a:r>
             <a:endParaRPr lang="en-US" sz="1500" dirty="0"/>
           </a:p>
@@ -41368,7 +41229,7 @@
         <p:spPr>
           <a:xfrm>
             <a:off x="566928" y="5413248"/>
-            <a:ext cx="11064240" cy="841248"/>
+            <a:ext cx="11064240" cy="1078992"/>
           </a:xfrm>
           <a:prstGeom prst="roundRect">
             <a:avLst>
@@ -41399,7 +41260,7 @@
         <p:spPr>
           <a:xfrm>
             <a:off x="731520" y="5522976"/>
-            <a:ext cx="10735056" cy="621792"/>
+            <a:ext cx="10735056" cy="859536"/>
           </a:xfrm>
           <a:prstGeom prst="rect">
             <a:avLst/>
@@ -41449,6 +41310,26 @@
               <a:t>              └─ 회전 ─┘        └─ 평행이동 ─┘</a:t>
             </a:r>
             <a:endParaRPr lang="en-US" sz="1400" dirty="0"/>
+          </a:p>
+          <a:p>
+            <a:pPr indent="0" marL="0">
+              <a:lnSpc>
+                <a:spcPts val="1700"/>
+              </a:lnSpc>
+              <a:buNone/>
+            </a:pPr>
+            <a:r>
+              <a:rPr lang="en-US" sz="1200" dirty="0">
+                <a:solidFill>
+                  <a:srgbClr val="5A6478"/>
+                </a:solidFill>
+                <a:latin typeface="Malgun Gothic" pitchFamily="34" charset="0"/>
+                <a:ea typeface="Malgun Gothic" pitchFamily="34" charset="-122"/>
+                <a:cs typeface="Malgun Gothic" pitchFamily="34" charset="-120"/>
+              </a:rPr>
+              <a:t>Rz(90°) 는 z 축(위아래 축) 둘레로 90° 돌리는 회전행렬입니다. 생김새는 다음 두 장에서 나옵니다.</a:t>
+            </a:r>
+            <a:endParaRPr lang="en-US" sz="1200" dirty="0"/>
           </a:p>
         </p:txBody>
       </p:sp>
@@ -41525,14 +41406,14 @@
       </p:sp>
       <p:pic>
         <p:nvPicPr>
-          <p:cNvPr id="3" name="Image 0" descr="/home/claude/gitpkg/Part2_CoordFrames/doc/figures/fig05_same_target.png">    </p:cNvPr>
+          <p:cNvPr id="7" name="Picture 6" descr="fig05_same_target.png"/>
           <p:cNvPicPr>
             <a:picLocks noChangeAspect="1"/>
           </p:cNvPicPr>
           <p:nvPr/>
         </p:nvPicPr>
         <p:blipFill>
-          <a:blip r:embed="rId1"/>
+          <a:blip r:embed="rId4"/>
           <a:stretch>
             <a:fillRect/>
           </a:stretch>
@@ -41540,7 +41421,7 @@
         <p:spPr>
           <a:xfrm>
             <a:off x="2336225" y="1389888"/>
-            <a:ext cx="7525646" cy="3566160"/>
+            <a:ext cx="7525646" cy="4019379"/>
           </a:xfrm>
           <a:prstGeom prst="rect">
             <a:avLst/>
@@ -41799,7 +41680,7 @@
         <p:spPr>
           <a:xfrm>
             <a:off x="7699248" y="1481328"/>
-            <a:ext cx="3931920" cy="3712464"/>
+            <a:ext cx="3931920" cy="3858768"/>
           </a:xfrm>
           <a:prstGeom prst="roundRect">
             <a:avLst>
@@ -42021,7 +41902,7 @@
         <p:spPr>
           <a:xfrm>
             <a:off x="7973568" y="3877056"/>
-            <a:ext cx="3383280" cy="1188720"/>
+            <a:ext cx="3383280" cy="1335024"/>
           </a:xfrm>
           <a:prstGeom prst="rect">
             <a:avLst/>
@@ -42052,7 +41933,7 @@
                 <a:ea typeface="Malgun Gothic" pitchFamily="34" charset="-122"/>
                 <a:cs typeface="Malgun Gothic" pitchFamily="34" charset="-120"/>
               </a:rPr>
-              <a:t>각 행과 열의 길이가 1 이고 서로 직교한다</a:t>
+              <a:t>행과 열의 길이가 1 이고 서로 직교(90°)한다</a:t>
             </a:r>
             <a:endParaRPr lang="en-US" sz="1200" dirty="0"/>
           </a:p>
@@ -42076,7 +41957,7 @@
                 <a:ea typeface="Malgun Gothic" pitchFamily="34" charset="-122"/>
                 <a:cs typeface="Malgun Gothic" pitchFamily="34" charset="-120"/>
               </a:rPr>
-              <a:t>det = +1  — 늘이거나 뒤집지 않는다</a:t>
+              <a:t>det = +1 — 크기를 안 바꾸고 거울상도 아니다</a:t>
             </a:r>
             <a:endParaRPr lang="en-US" sz="1200" dirty="0"/>
           </a:p>
@@ -42100,7 +41981,7 @@
                 <a:ea typeface="Malgun Gothic" pitchFamily="34" charset="-122"/>
                 <a:cs typeface="Malgun Gothic" pitchFamily="34" charset="-120"/>
               </a:rPr>
-              <a:t>역행렬 = 전치 (R⁻¹ = R^T) — 되돌리기가 공짜다</a:t>
+              <a:t>역행렬 = 전치(행·열 맞바꾸기, R⁻¹ = Rᵀ) — 되돌리기가 공짜다</a:t>
             </a:r>
             <a:endParaRPr lang="en-US" sz="1200" dirty="0"/>
           </a:p>

--- a/Part2_CoordFrames/ref/산출물/Chapter2_coordinate_systems.pptx
+++ b/Part2_CoordFrames/ref/산출물/Chapter2_coordinate_systems.pptx
@@ -3451,7 +3451,7 @@
           <a:lstStyle/>
           <a:p>
             <a:r>
-              <a:t>그림의 표적은 하나입니다. 그런데 이 표적을 재는 자가 여럿입니다. 안테나는 자기 위치에서 보어사이트를 기준으로 재고, 함선은 무게중심에서 선수를 기준으로 재고, 로컬 좌표계는 배 위치에서 진북을 기준으로 재고, 지구 좌표계는 지구 중심에서 적도면과 그리니치를 기준으로 잽니다.</a:t>
+              <a:t>그림의 표적은 하나입니다. 그런데 이 표적을 재는 기준이 여럿입니다. 안테나는 자기 위치에서 보어사이트를 기준으로 재고, 함선은 무게중심에서 선수를 기준으로 재고, 로컬 좌표계는 배 위치에서 진북을 기준으로 재고, 지구 좌표계는 지구 중심에서 적도면과 그리니치를 기준으로 잽니다.</a:t>
             </a:r>
           </a:p>
           <a:p/>
@@ -3763,13 +3763,13 @@
           <a:lstStyle/>
           <a:p>
             <a:r>
-              <a:t>회전에서 가장 헷갈리는 부분입니다. 두 그림에서 주황색 화살표, 즉 표적의 위치는 완전히 같습니다. 달라진 것은 축뿐입니다.</a:t>
+              <a:t>회전에서 가장 헷갈리는 부분입니다. 두 그림에서 배도 표적도 같은 자리에 있습니다. 달라진 것은 축뿐입니다.</a:t>
             </a:r>
           </a:p>
           <a:p/>
           <a:p>
             <a:r>
-              <a:t>안테나의 정면이 함선의 우현이라서, 같은 표적이 (+17,320, +10,000) 에서 (−10,000, +17,320) 이 됩니다. 두 숫자가 자리를 바꾸고 부호 하나가 뒤집혔습니다. 이것이 90도 회전의 정체입니다. 표적을 돌리는 것이 아니라 자를 돌리는 것입니다.</a:t>
+              <a:t>왼쪽은 안테나의 축에서, 오른쪽은 함선의 축에서 같은 화살표를 읽은 값입니다. 안테나의 정면이 함선의 우현이라서, 같은 표적이 (+17,320, +10,000) 에서 (−10,000, +17,320) 이 됩니다. 두 숫자가 자리를 바꾸고 부호 하나가 뒤집혔습니다. 이것이 90도 회전의 정체입니다. 표적을 돌린 것이 아니라 90도 어긋난 축에서 다시 읽은 것입니다.</a:t>
             </a:r>
           </a:p>
         </p:txBody>
@@ -5807,8 +5807,8 @@
         </p:blipFill>
         <p:spPr>
           <a:xfrm>
-            <a:off x="566928" y="2359916"/>
-            <a:ext cx="7680960" cy="2796535"/>
+            <a:off x="566928" y="2014855"/>
+            <a:ext cx="7680960" cy="3614576"/>
           </a:xfrm>
           <a:prstGeom prst="rect">
             <a:avLst/>
@@ -41398,7 +41398,7 @@
                 <a:ea typeface="Malgun Gothic" pitchFamily="34" charset="-122"/>
                 <a:cs typeface="Malgun Gothic" pitchFamily="34" charset="-120"/>
               </a:rPr>
-              <a:t>회전 — 표적은 가만히 있다, 움직이는 건 자(ruler)다</a:t>
+              <a:t>회전 — 표적이 아니라 축이 돌아간다</a:t>
             </a:r>
             <a:endParaRPr lang="en-US" sz="3000" dirty="0"/>
           </a:p>
@@ -41420,8 +41420,8 @@
         </p:blipFill>
         <p:spPr>
           <a:xfrm>
-            <a:off x="2336225" y="1389888"/>
-            <a:ext cx="7525646" cy="4019379"/>
+            <a:off x="2301240" y="1152144"/>
+            <a:ext cx="7589520" cy="3855639"/>
           </a:xfrm>
           <a:prstGeom prst="rect">
             <a:avLst/>

--- a/Part2_CoordFrames/ref/산출물/Chapter2_coordinate_systems.pptx
+++ b/Part2_CoordFrames/ref/산출물/Chapter2_coordinate_systems.pptx
@@ -1617,6 +1617,12 @@
         <p:txBody>
           <a:bodyPr/>
           <a:lstStyle/>
+          <a:p>
+            <a:r>
+              <a:t>위 그림에서 왼쪽이 레이다 화면, 오른쪽이 전시기 지도입니다. 표적은 하나인데 한쪽은 부채꼴 위 한 점으로, 다른 쪽은 위경도 격자 위 한 점으로 찍힙니다.</a:t>
+            </a:r>
+          </a:p>
+          <a:p/>
           <a:p>
             <a:r>
               <a:t>같은 표적 하나를 두고, 레이다 신호처리가 주는 값은 "20 km 앞, 오른쪽으로 30도" 입니다. 안테나 자기 정면 기준입니다. 전시기에 보여야 하는 값은 "북위 36.2337도, 동경 127.3643도" 입니다. 지구 전체 기준입니다.</a:t>
@@ -17843,7 +17849,7 @@
         </p:nvSpPr>
         <p:spPr>
           <a:xfrm>
-            <a:off x="822960" y="658368"/>
+            <a:off x="822960" y="548640"/>
             <a:ext cx="10515600" cy="548640"/>
           </a:xfrm>
           <a:prstGeom prst="rect">
@@ -17882,7 +17888,7 @@
         </p:nvSpPr>
         <p:spPr>
           <a:xfrm>
-            <a:off x="822960" y="1755648"/>
+            <a:off x="822960" y="3035808"/>
             <a:ext cx="5029200" cy="2286000"/>
           </a:xfrm>
           <a:prstGeom prst="roundRect">
@@ -17908,7 +17914,7 @@
         </p:nvSpPr>
         <p:spPr>
           <a:xfrm>
-            <a:off x="1097280" y="1956816"/>
+            <a:off x="1097280" y="3236976"/>
             <a:ext cx="4480560" cy="310896"/>
           </a:xfrm>
           <a:prstGeom prst="rect">
@@ -17947,7 +17953,7 @@
         </p:nvSpPr>
         <p:spPr>
           <a:xfrm>
-            <a:off x="1097280" y="2359152"/>
+            <a:off x="1097280" y="3639312"/>
             <a:ext cx="4480560" cy="1188720"/>
           </a:xfrm>
           <a:prstGeom prst="rect">
@@ -18009,7 +18015,7 @@
         </p:nvSpPr>
         <p:spPr>
           <a:xfrm>
-            <a:off x="1097280" y="3584448"/>
+            <a:off x="1097280" y="4864608"/>
             <a:ext cx="4480560" cy="292608"/>
           </a:xfrm>
           <a:prstGeom prst="rect">
@@ -18048,7 +18054,7 @@
         </p:nvSpPr>
         <p:spPr>
           <a:xfrm>
-            <a:off x="6309360" y="1755648"/>
+            <a:off x="6309360" y="3035808"/>
             <a:ext cx="5029200" cy="2286000"/>
           </a:xfrm>
           <a:prstGeom prst="roundRect">
@@ -18074,7 +18080,7 @@
         </p:nvSpPr>
         <p:spPr>
           <a:xfrm>
-            <a:off x="6583680" y="1956816"/>
+            <a:off x="6583680" y="3236976"/>
             <a:ext cx="4480560" cy="310896"/>
           </a:xfrm>
           <a:prstGeom prst="rect">
@@ -18113,7 +18119,7 @@
         </p:nvSpPr>
         <p:spPr>
           <a:xfrm>
-            <a:off x="6583680" y="2359152"/>
+            <a:off x="6583680" y="3639312"/>
             <a:ext cx="4480560" cy="1188720"/>
           </a:xfrm>
           <a:prstGeom prst="rect">
@@ -18175,7 +18181,7 @@
         </p:nvSpPr>
         <p:spPr>
           <a:xfrm>
-            <a:off x="6583680" y="3584448"/>
+            <a:off x="6583680" y="4864608"/>
             <a:ext cx="4480560" cy="292608"/>
           </a:xfrm>
           <a:prstGeom prst="rect">
@@ -18214,7 +18220,7 @@
         </p:nvSpPr>
         <p:spPr>
           <a:xfrm>
-            <a:off x="822960" y="4645152"/>
+            <a:off x="822960" y="5431536"/>
             <a:ext cx="10515600" cy="548640"/>
           </a:xfrm>
           <a:prstGeom prst="rect">
@@ -18253,7 +18259,7 @@
         </p:nvSpPr>
         <p:spPr>
           <a:xfrm>
-            <a:off x="822960" y="5266944"/>
+            <a:off x="822960" y="6053328"/>
             <a:ext cx="10515600" cy="365760"/>
           </a:xfrm>
           <a:prstGeom prst="rect">
@@ -18284,6 +18290,30 @@
           </a:p>
         </p:txBody>
       </p:sp>
+      <p:pic>
+        <p:nvPicPr>
+          <p:cNvPr id="20" name="Image 2" descr="fig15_scope_vs_chart.png"/>
+          <p:cNvPicPr>
+            <a:picLocks noChangeAspect="1"/>
+          </p:cNvPicPr>
+          <p:nvPr/>
+        </p:nvPicPr>
+        <p:blipFill>
+          <a:blip r:embed="rId3"/>
+          <a:stretch>
+            <a:fillRect/>
+          </a:stretch>
+        </p:blipFill>
+        <p:spPr>
+          <a:xfrm>
+            <a:off x="822960" y="1188720"/>
+            <a:ext cx="10515600" cy="1721224"/>
+          </a:xfrm>
+          <a:prstGeom prst="rect">
+            <a:avLst/>
+          </a:prstGeom>
+        </p:spPr>
+      </p:pic>
     </p:spTree>
   </p:cSld>
   <p:clrMapOvr>

--- a/Part2_CoordFrames/ref/산출물/Chapter2_coordinate_systems.pptx
+++ b/Part2_CoordFrames/ref/산출물/Chapter2_coordinate_systems.pptx
@@ -3463,7 +3463,7 @@
           <a:p/>
           <a:p>
             <a:r>
-              <a:t>그래서 같은 표적이 안테나에서는 "정면에서 오른쪽 30도, 20 000 m", 함선에서는 "선수에서 오른쪽 120도, 20 015 m", 로컬에서는 "진북에서 165도, 남쪽으로 19 340 m 동쪽으로 5 155 m", 지도에서는 "북위 36.2337도, 동경 127.3643도" 가 됩니다. 각도가 30, 120, 165 로 달라진 것은 기준 방향, 즉 축이 다르기 때문이고, 거리가 20 000 m 와 20 015 m 로 조금 다른 것은 기준점, 즉 원점이 다르기 때문입니다.</a:t>
+              <a:t>그래서 같은 표적이 안테나에서는 "정면에서 오른쪽 30도, 20,000 m", 함선에서는 "선수에서 오른쪽 120도, 20,015 m", 로컬에서는 "진북에서 165도, 남쪽으로 19,340 m 동쪽으로 5,155 m", 지도에서는 "북위 36.2337도, 동경 127.3643도" 가 됩니다. 각도가 30, 120, 165 로 달라진 것은 기준 방향, 즉 축이 다르기 때문이고, 거리가 20,000 m 와 20,015 m 로 조금 다른 것은 기준점, 즉 원점이 다르기 때문입니다.</a:t>
             </a:r>
           </a:p>
           <a:p/>
@@ -7089,7 +7089,7 @@
                 <a:ea typeface="Consolas" pitchFamily="34" charset="-122"/>
                 <a:cs typeface="Consolas" pitchFamily="34" charset="-120"/>
               </a:rPr>
-              <a:t>x = 20000 × 1 × cos30°  =  +17 320.5081 m</a:t>
+              <a:t>x = 20,000 × 1 × cos30°  =  +17,320.5081 m</a:t>
             </a:r>
             <a:endParaRPr lang="en-US" sz="1350" dirty="0"/>
           </a:p>
@@ -7109,7 +7109,7 @@
                 <a:ea typeface="Consolas" pitchFamily="34" charset="-122"/>
                 <a:cs typeface="Consolas" pitchFamily="34" charset="-120"/>
               </a:rPr>
-              <a:t>y = 20000 × 1 × sin30°  =  +10 000.0000 m</a:t>
+              <a:t>y = 20,000 × 1 × sin30°  =  +10,000.0000 m</a:t>
             </a:r>
             <a:endParaRPr lang="en-US" sz="1350" dirty="0"/>
           </a:p>
@@ -7129,7 +7129,7 @@
                 <a:ea typeface="Consolas" pitchFamily="34" charset="-122"/>
                 <a:cs typeface="Consolas" pitchFamily="34" charset="-120"/>
               </a:rPr>
-              <a:t>z = −20000 × sin0°      =         0.0000 m</a:t>
+              <a:t>z = −20,000 × sin0°      =         0.0000 m</a:t>
             </a:r>
             <a:endParaRPr lang="en-US" sz="1350" dirty="0"/>
           </a:p>
@@ -17513,7 +17513,7 @@
                 <a:ea typeface="Consolas" pitchFamily="34" charset="-122"/>
                 <a:cs typeface="Consolas" pitchFamily="34" charset="-120"/>
               </a:rPr>
-              <a:t>a  (장반경)  6 378 137.0 m</a:t>
+              <a:t>a  (장반경)  6,378,137.0 m</a:t>
             </a:r>
             <a:endParaRPr lang="en-US" sz="1150" dirty="0"/>
           </a:p>
@@ -17533,7 +17533,7 @@
                 <a:ea typeface="Consolas" pitchFamily="34" charset="-122"/>
                 <a:cs typeface="Consolas" pitchFamily="34" charset="-120"/>
               </a:rPr>
-              <a:t>b  (단반경)  6 356 752.3 m</a:t>
+              <a:t>b  (단반경)  6,356,752.3 m</a:t>
             </a:r>
             <a:endParaRPr lang="en-US" sz="1150" dirty="0"/>
           </a:p>
@@ -26686,7 +26686,7 @@
                 <a:ea typeface="Malgun Gothic" pitchFamily="34" charset="-122"/>
                 <a:cs typeface="Malgun Gothic" pitchFamily="34" charset="-120"/>
               </a:rPr>
-              <a:t>함수</a:t>
+              <a:t>선수</a:t>
             </a:r>
             <a:endParaRPr lang="en-US" sz="1150" dirty="0"/>
           </a:p>
@@ -27483,7 +27483,7 @@
                 <a:ea typeface="Consolas" pitchFamily="34" charset="-122"/>
                 <a:cs typeface="Consolas" pitchFamily="34" charset="-120"/>
               </a:rPr>
-              <a:t>x = R·cos(El)·cos(Az) = +17 320.5081</a:t>
+              <a:t>x = R·cos(El)·cos(Az) = +17,320.5081</a:t>
             </a:r>
             <a:endParaRPr lang="en-US" sz="1150" dirty="0"/>
           </a:p>
@@ -27503,7 +27503,7 @@
                 <a:ea typeface="Consolas" pitchFamily="34" charset="-122"/>
                 <a:cs typeface="Consolas" pitchFamily="34" charset="-120"/>
               </a:rPr>
-              <a:t>y = R·cos(El)·sin(Az) = +10 000.0000</a:t>
+              <a:t>y = R·cos(El)·sin(Az) = +10,000.0000</a:t>
             </a:r>
             <a:endParaRPr lang="en-US" sz="1150" dirty="0"/>
           </a:p>
@@ -27777,7 +27777,7 @@
                 <a:ea typeface="Consolas" pitchFamily="34" charset="-122"/>
                 <a:cs typeface="Consolas" pitchFamily="34" charset="-120"/>
               </a:rPr>
-              <a:t>       = (−10 030.0, +17 320.5, −10.0)</a:t>
+              <a:t>       = (−10,030.0, +17,320.5, −10.0)</a:t>
             </a:r>
             <a:endParaRPr lang="en-US" sz="1150" dirty="0"/>
           </a:p>
@@ -28011,7 +28011,7 @@
                 <a:ea typeface="Consolas" pitchFamily="34" charset="-122"/>
                 <a:cs typeface="Consolas" pitchFamily="34" charset="-120"/>
               </a:rPr>
-              <a:t>p_ned = (N −19 339.73, E +5 155.17, D −10.0)</a:t>
+              <a:t>p_ned = (N −19,339.73, E +5,155.17, D −10.0)</a:t>
             </a:r>
             <a:endParaRPr lang="en-US" sz="1150" dirty="0"/>
           </a:p>
@@ -29384,7 +29384,7 @@
                 <a:ea typeface="Consolas" pitchFamily="34" charset="-122"/>
                 <a:cs typeface="Consolas" pitchFamily="34" charset="-120"/>
               </a:rPr>
-              <a:t>결과 :  R = 20 000.000000 m     Az = 30.000000°     El = 0.000000°</a:t>
+              <a:t>결과 :  R = 20,000.000000 m     Az = 30.000000°     El = 0.000000°</a:t>
             </a:r>
             <a:endParaRPr lang="en-US" sz="1900" dirty="0"/>
           </a:p>
@@ -32433,7 +32433,7 @@
                 <a:ea typeface="Consolas" pitchFamily="34" charset="-122"/>
                 <a:cs typeface="Consolas" pitchFamily="34" charset="-120"/>
               </a:rPr>
-              <a:t>20 000.0000 m</a:t>
+              <a:t>20,000.0000 m</a:t>
             </a:r>
             <a:endParaRPr lang="en-US" sz="1700" dirty="0"/>
           </a:p>
@@ -39457,7 +39457,7 @@
                 <a:ea typeface="Malgun Gothic" pitchFamily="34" charset="-122"/>
                 <a:cs typeface="Malgun Gothic" pitchFamily="34" charset="-120"/>
               </a:rPr>
-              <a:t>정면에서 오른쪽 30°,  20 000 m</a:t>
+              <a:t>정면에서 오른쪽 30°,  20,000 m</a:t>
             </a:r>
             <a:endParaRPr lang="en-US" sz="1200" dirty="0"/>
           </a:p>
@@ -39570,7 +39570,7 @@
                 <a:ea typeface="Malgun Gothic" pitchFamily="34" charset="-122"/>
                 <a:cs typeface="Malgun Gothic" pitchFamily="34" charset="-120"/>
               </a:rPr>
-              <a:t>선수에서 오른쪽 120°,  20 015 m</a:t>
+              <a:t>선수에서 오른쪽 120°,  20,015 m</a:t>
             </a:r>
             <a:endParaRPr lang="en-US" sz="1200" dirty="0"/>
           </a:p>
@@ -39683,7 +39683,7 @@
                 <a:ea typeface="Malgun Gothic" pitchFamily="34" charset="-122"/>
                 <a:cs typeface="Malgun Gothic" pitchFamily="34" charset="-120"/>
               </a:rPr>
-              <a:t>진북에서 165° → 남 19 340 m · 동 5 155 m</a:t>
+              <a:t>진북에서 165° → 남 19,340 m · 동 5,155 m</a:t>
             </a:r>
             <a:endParaRPr lang="en-US" sz="1200" dirty="0"/>
           </a:p>
@@ -41522,7 +41522,7 @@
                 <a:ea typeface="Malgun Gothic" pitchFamily="34" charset="-122"/>
                 <a:cs typeface="Malgun Gothic" pitchFamily="34" charset="-120"/>
               </a:rPr>
-              <a:t>안테나의 "정면"이 함선의 "우현"이라서,  같은 표적이  (+17 320, +10 000)  →  (−10 000, +17 320)</a:t>
+              <a:t>안테나의 "정면"이 함선의 "우현"이라서,  같은 표적이  (+17,320, +10,000)  →  (−10,000, +17,320)</a:t>
             </a:r>
             <a:endParaRPr lang="en-US" sz="1600" dirty="0"/>
           </a:p>

--- a/Part2_CoordFrames/ref/산출물/Chapter2_coordinate_systems.pptx
+++ b/Part2_CoordFrames/ref/산출물/Chapter2_coordinate_systems.pptx
@@ -5947,7 +5947,7 @@
                 <a:ea typeface="Malgun Gothic" pitchFamily="34" charset="-122"/>
                 <a:cs typeface="Malgun Gothic" pitchFamily="34" charset="-120"/>
               </a:rPr>
-              <a:t>전파 왕복시간 × c ÷ 2</a:t>
+              <a:t>Range · 전파 왕복시간 × c ÷ 2</a:t>
             </a:r>
             <a:endParaRPr lang="en-US" sz="1350" dirty="0"/>
           </a:p>
@@ -5996,7 +5996,7 @@
                 <a:ea typeface="Malgun Gothic" pitchFamily="34" charset="-122"/>
                 <a:cs typeface="Malgun Gothic" pitchFamily="34" charset="-120"/>
               </a:rPr>
-              <a:t>보어사이트에서 오른쪽으로</a:t>
+              <a:t>Azimuth · 보어사이트에서 오른쪽으로</a:t>
             </a:r>
             <a:endParaRPr lang="en-US" sz="1350" dirty="0"/>
           </a:p>
@@ -6045,7 +6045,7 @@
                 <a:ea typeface="Malgun Gothic" pitchFamily="34" charset="-122"/>
                 <a:cs typeface="Malgun Gothic" pitchFamily="34" charset="-120"/>
               </a:rPr>
-              <a:t>수평면에서 위로</a:t>
+              <a:t>Elevation · 수평면에서 위로</a:t>
             </a:r>
             <a:endParaRPr lang="en-US" sz="1350" dirty="0"/>
           </a:p>
@@ -6264,7 +6264,7 @@
                 <a:ea typeface="Malgun Gothic" pitchFamily="34" charset="-122"/>
                 <a:cs typeface="Malgun Gothic" pitchFamily="34" charset="-120"/>
               </a:rPr>
-              <a:t>회전행렬을 곱하려면 x·y·z 세 성분으로 풀어써야 합니다</a:t>
+              <a:t>R(Range 시선거리) · Az(Azimuth 방위각) · El(Elevation 고각) 을 x·y·z 세 성분으로 풀어써야 회전행렬을 곱할 수 있습니다</a:t>
             </a:r>
             <a:endParaRPr lang="en-US" sz="1400" dirty="0"/>
           </a:p>
@@ -7618,7 +7618,7 @@
                 <a:ea typeface="Malgun Gothic" pitchFamily="34" charset="-122"/>
                 <a:cs typeface="Malgun Gothic" pitchFamily="34" charset="-120"/>
               </a:rPr>
-              <a:t>표적 방향을 안테나 면에 드리운 그림자로 표현합니다</a:t>
+              <a:t>UV (Direction Cosines) — 표적 방향을 안테나 면에 드리운 그림자로 표현합니다</a:t>
             </a:r>
             <a:endParaRPr lang="en-US" sz="1400" dirty="0"/>
           </a:p>
@@ -9934,7 +9934,7 @@
                 <a:ea typeface="Malgun Gothic" pitchFamily="34" charset="-122"/>
                 <a:cs typeface="Malgun Gothic" pitchFamily="34" charset="-120"/>
               </a:rPr>
-              <a:t>관성항법장치 — 회전과 이동에 필요한 값을 공급합니다</a:t>
+              <a:t>INS (Inertial Navigation System) 관성항법장치 — 회전과 이동에 필요한 값을 공급합니다</a:t>
             </a:r>
             <a:endParaRPr lang="en-US" sz="1400" dirty="0"/>
           </a:p>
@@ -12471,7 +12471,7 @@
                           <a:ea typeface="Malgun Gothic" pitchFamily="34" charset="-122"/>
                           <a:cs typeface="Malgun Gothic" pitchFamily="34" charset="-120"/>
                         </a:rPr>
-                        <a:t>계산이 한다 (DCM / 쿼터니언)</a:t>
+                        <a:t>계산이 한다 (DCM = Direction Cosine Matrix / 쿼터니언)</a:t>
                       </a:r>
                       <a:endParaRPr lang="en-US" sz="1200" dirty="0">
                         <a:latin typeface="Malgun Gothic" charset="0"/>
@@ -14511,7 +14511,7 @@
                 <a:ea typeface="Malgun Gothic" pitchFamily="34" charset="-122"/>
                 <a:cs typeface="Malgun Gothic" pitchFamily="34" charset="-120"/>
               </a:rPr>
-              <a:t>배가 아무리 흔들려도 북쪽은 계속 북쪽입니다</a:t>
+              <a:t>NED (North-East-Down) · ENU (East-North-Up) — 배가 아무리 흔들려도 북쪽은 계속 북쪽입니다</a:t>
             </a:r>
             <a:endParaRPr lang="en-US" sz="1400" dirty="0"/>
           </a:p>
@@ -15739,7 +15739,7 @@
                 <a:ea typeface="Malgun Gothic" pitchFamily="34" charset="-122"/>
                 <a:cs typeface="Malgun Gothic" pitchFamily="34" charset="-120"/>
               </a:rPr>
-              <a:t>원점은 같고, 축이 도느냐 마느냐만 다릅니다</a:t>
+              <a:t>ECEF (Earth-Centered, Earth-Fixed) · ECI (Earth-Centered Inertial) — 원점은 같고, 축이 도느냐 마느냐만 다릅니다</a:t>
             </a:r>
             <a:endParaRPr lang="en-US" sz="1400" dirty="0"/>
           </a:p>
@@ -16777,7 +16777,7 @@
                 <a:ea typeface="Malgun Gothic" pitchFamily="34" charset="-122"/>
                 <a:cs typeface="Malgun Gothic" pitchFamily="34" charset="-120"/>
               </a:rPr>
-              <a:t>우리가 아는 그 지도 좌표 — 다만 지구는 구가 아닙니다</a:t>
+              <a:t>LLA (Latitude · Longitude · Altitude) — 우리가 아는 그 지도 좌표, 다만 지구는 구가 아닙니다</a:t>
             </a:r>
             <a:endParaRPr lang="en-US" sz="1400" dirty="0"/>
           </a:p>
@@ -17694,7 +17694,7 @@
                 <a:ea typeface="Malgun Gothic" pitchFamily="34" charset="-122"/>
                 <a:cs typeface="Malgun Gothic" pitchFamily="34" charset="-120"/>
               </a:rPr>
-              <a:t>GPS 와 해도가 쓰는 것도 이것</a:t>
+              <a:t>World Geodetic System 1984 · GPS·해도 기준</a:t>
             </a:r>
             <a:endParaRPr lang="en-US" sz="1200" dirty="0"/>
           </a:p>
@@ -17803,7 +17803,7 @@
                 <a:ea typeface="Malgun Gothic" pitchFamily="34" charset="-122"/>
                 <a:cs typeface="Malgun Gothic" pitchFamily="34" charset="-120"/>
               </a:rPr>
-              <a:t>해발고도 = 타원체고 − 지오이드고.   한국 근해 지오이드고는 약 +20 ~ +25 m.   시스템 내부는 하나로 통일할 것.</a:t>
+              <a:t>HAE = Height Above Ellipsoid.   해발고도 = 타원체고 − 지오이드고.   한국 근해 지오이드고는 약 +20 ~ +25 m.   시스템 내부는 하나로 통일할 것.</a:t>
             </a:r>
             <a:endParaRPr lang="en-US" sz="1250" dirty="0"/>
           </a:p>
@@ -34799,7 +34799,7 @@
                 </a:solidFill>
                 <a:latin typeface="Malgun Gothic"/>
               </a:rPr>
-              <a:t>MFC 다이얼로그. 오른쪽 화면</a:t>
+              <a:t>MFC (Microsoft Foundation Classes) 다이얼로그</a:t>
             </a:r>
           </a:p>
           <a:p>

--- a/Part2_CoordFrames/ref/산출물/Chapter2_coordinate_systems.pptx
+++ b/Part2_CoordFrames/ref/산출물/Chapter2_coordinate_systems.pptx
@@ -6154,7 +6154,7 @@
                 <a:ea typeface="Malgun Gothic" pitchFamily="34" charset="-122"/>
                 <a:cs typeface="Malgun Gothic" pitchFamily="34" charset="-120"/>
               </a:rPr>
-              <a:t>보어사이트 = 안테나가 똑바로 바라보는 방향. 손전등으로 치면 빛이 가장 센 한가운데 방향입니다.</a:t>
+              <a:t>보어사이트 = 안테나가 똑바로 바라보는 방향. 안테나 신호가 가장 세게 나가고 들어오는 한가운데 방향입니다.</a:t>
             </a:r>
             <a:endParaRPr lang="en-US" sz="1300" dirty="0"/>
           </a:p>
@@ -7618,7 +7618,7 @@
                 <a:ea typeface="Malgun Gothic" pitchFamily="34" charset="-122"/>
                 <a:cs typeface="Malgun Gothic" pitchFamily="34" charset="-120"/>
               </a:rPr>
-              <a:t>UV (Direction Cosines) — 표적 방향을 안테나 면에 드리운 그림자로 표현합니다</a:t>
+              <a:t>표적 방향을 길이 1 인 화살표로 보고, 그 화살표를 안테나 세 축에 나눠 담은 값입니다</a:t>
             </a:r>
             <a:endParaRPr lang="en-US" sz="1400" dirty="0"/>
           </a:p>
@@ -8642,7 +8642,7 @@
                 <a:ea typeface="Malgun Gothic" pitchFamily="34" charset="-122"/>
                 <a:cs typeface="Malgun Gothic" pitchFamily="34" charset="-120"/>
               </a:rPr>
-              <a:t>UV 는 빔 조향용 표현이라 이번 변환 체인(극좌표 → 직교 → 동체 → …)에는 들어가지 않습니다.</a:t>
+              <a:t>UV 에는 거리가 없습니다 — 방향만 담는 표현이라, 표적 위치를 옮기는 이번 변환 체인에는 들어가지 않습니다.</a:t>
             </a:r>
             <a:endParaRPr lang="en-US" sz="1300" dirty="0"/>
           </a:p>
@@ -8752,7 +8752,7 @@
                 <a:ea typeface="Malgun Gothic" pitchFamily="34" charset="-122"/>
                 <a:cs typeface="Malgun Gothic" pitchFamily="34" charset="-120"/>
               </a:rPr>
-              <a:t>배에 실린 모든 장비의 공통 기준 — 안테나·INS·무장이 여기로 모입니다</a:t>
+              <a:t>배에 실린 모든 장비의 공통 기준 — 안테나 · INS (Inertial Navigation System) · 무장이 여기로 모입니다</a:t>
             </a:r>
             <a:endParaRPr lang="en-US" sz="1400" dirty="0"/>
           </a:p>
@@ -9934,7 +9934,7 @@
                 <a:ea typeface="Malgun Gothic" pitchFamily="34" charset="-122"/>
                 <a:cs typeface="Malgun Gothic" pitchFamily="34" charset="-120"/>
               </a:rPr>
-              <a:t>INS (Inertial Navigation System) 관성항법장치 — 회전과 이동에 필요한 값을 공급합니다</a:t>
+              <a:t>관성항법장치 — 회전과 이동에 필요한 값을 공급합니다</a:t>
             </a:r>
             <a:endParaRPr lang="en-US" sz="1400" dirty="0"/>
           </a:p>
@@ -14511,7 +14511,7 @@
                 <a:ea typeface="Malgun Gothic" pitchFamily="34" charset="-122"/>
                 <a:cs typeface="Malgun Gothic" pitchFamily="34" charset="-120"/>
               </a:rPr>
-              <a:t>NED (North-East-Down) · ENU (East-North-Up) — 배가 아무리 흔들려도 북쪽은 계속 북쪽입니다</a:t>
+              <a:t>배가 아무리 흔들려도 북쪽은 계속 북쪽입니다</a:t>
             </a:r>
             <a:endParaRPr lang="en-US" sz="1400" dirty="0"/>
           </a:p>
@@ -15739,7 +15739,7 @@
                 <a:ea typeface="Malgun Gothic" pitchFamily="34" charset="-122"/>
                 <a:cs typeface="Malgun Gothic" pitchFamily="34" charset="-120"/>
               </a:rPr>
-              <a:t>ECEF (Earth-Centered, Earth-Fixed) · ECI (Earth-Centered Inertial) — 원점은 같고, 축이 도느냐 마느냐만 다릅니다</a:t>
+              <a:t>원점은 같고, 축이 도느냐 마느냐만 다릅니다</a:t>
             </a:r>
             <a:endParaRPr lang="en-US" sz="1400" dirty="0"/>
           </a:p>
@@ -16777,7 +16777,7 @@
                 <a:ea typeface="Malgun Gothic" pitchFamily="34" charset="-122"/>
                 <a:cs typeface="Malgun Gothic" pitchFamily="34" charset="-120"/>
               </a:rPr>
-              <a:t>LLA (Latitude · Longitude · Altitude) — 우리가 아는 그 지도 좌표, 다만 지구는 구가 아닙니다</a:t>
+              <a:t>우리가 아는 그 지도 좌표 — 다만 지구는 구가 아닙니다</a:t>
             </a:r>
             <a:endParaRPr lang="en-US" sz="1400" dirty="0"/>
           </a:p>

--- a/Part2_CoordFrames/ref/산출물/Chapter2_coordinate_systems.pptx
+++ b/Part2_CoordFrames/ref/산출물/Chapter2_coordinate_systems.pptx
@@ -4334,41 +4334,6 @@
       </p:grpSpPr>
       <p:sp>
         <p:nvSpPr>
-          <p:cNvPr id="2" name="TextBox 1"/>
-          <p:cNvSpPr txBox="1"/>
-          <p:nvPr/>
-        </p:nvSpPr>
-        <p:spPr>
-          <a:xfrm>
-            <a:off x="548640" y="411480"/>
-            <a:ext cx="2011680" cy="914400"/>
-          </a:xfrm>
-          <a:prstGeom prst="rect">
-            <a:avLst/>
-          </a:prstGeom>
-          <a:noFill/>
-        </p:spPr>
-        <p:txBody>
-          <a:bodyPr wrap="none" anchor="ctr" lIns="0" rIns="0" tIns="0" bIns="0">
-            <a:spAutoFit/>
-          </a:bodyPr>
-          <a:lstStyle/>
-          <a:p>
-            <a:pPr algn="l"/>
-            <a:r>
-              <a:rPr sz="5400" b="1">
-                <a:solidFill>
-                  <a:srgbClr val="FFFFFF"/>
-                </a:solidFill>
-                <a:latin typeface="Arial"/>
-              </a:rPr>
-              <a:t>LIG</a:t>
-            </a:r>
-          </a:p>
-        </p:txBody>
-      </p:sp>
-      <p:sp>
-        <p:nvSpPr>
           <p:cNvPr id="3" name="TextBox 2"/>
           <p:cNvSpPr txBox="1"/>
           <p:nvPr/>
@@ -4468,41 +4433,6 @@
                 <a:latin typeface="맑은 고딕"/>
               </a:rPr>
               <a:t>안테나가 잰 각도가 지도 위 위경도가 되기까지</a:t>
-            </a:r>
-          </a:p>
-        </p:txBody>
-      </p:sp>
-      <p:sp>
-        <p:nvSpPr>
-          <p:cNvPr id="6" name="TextBox 5"/>
-          <p:cNvSpPr txBox="1"/>
-          <p:nvPr/>
-        </p:nvSpPr>
-        <p:spPr>
-          <a:xfrm>
-            <a:off x="6217920" y="3977639"/>
-            <a:ext cx="5486400" cy="365760"/>
-          </a:xfrm>
-          <a:prstGeom prst="rect">
-            <a:avLst/>
-          </a:prstGeom>
-          <a:noFill/>
-        </p:spPr>
-        <p:txBody>
-          <a:bodyPr wrap="none" anchor="t" lIns="0" rIns="0" tIns="0" bIns="0">
-            <a:spAutoFit/>
-          </a:bodyPr>
-          <a:lstStyle/>
-          <a:p>
-            <a:pPr algn="r"/>
-            <a:r>
-              <a:rPr sz="1600" b="1">
-                <a:solidFill>
-                  <a:srgbClr val="FFFFFF"/>
-                </a:solidFill>
-                <a:latin typeface="Arial"/>
-              </a:rPr>
-              <a:t>LIG Defense&amp;Aerospace</a:t>
             </a:r>
           </a:p>
         </p:txBody>
@@ -5681,41 +5611,6 @@
           </a:p>
         </p:txBody>
       </p:sp>
-      <p:sp>
-        <p:nvSpPr>
-          <p:cNvPr id="31" name="TextBox 30"/>
-          <p:cNvSpPr txBox="1"/>
-          <p:nvPr/>
-        </p:nvSpPr>
-        <p:spPr>
-          <a:xfrm>
-            <a:off x="10195560" y="411480"/>
-            <a:ext cx="1371600" cy="777240"/>
-          </a:xfrm>
-          <a:prstGeom prst="rect">
-            <a:avLst/>
-          </a:prstGeom>
-          <a:noFill/>
-        </p:spPr>
-        <p:txBody>
-          <a:bodyPr wrap="none" anchor="ctr" lIns="0" rIns="0" tIns="0" bIns="0">
-            <a:spAutoFit/>
-          </a:bodyPr>
-          <a:lstStyle/>
-          <a:p>
-            <a:pPr algn="r"/>
-            <a:r>
-              <a:rPr sz="2400" b="1">
-                <a:solidFill>
-                  <a:srgbClr val="FFFFFF"/>
-                </a:solidFill>
-                <a:latin typeface="Arial"/>
-              </a:rPr>
-              <a:t>LIG</a:t>
-            </a:r>
-          </a:p>
-        </p:txBody>
-      </p:sp>
       <p:cxnSp>
         <p:nvCxnSpPr>
           <p:cNvPr id="32" name="Connector 31"/>
@@ -5751,41 +5646,6 @@
           </a:fontRef>
         </p:style>
       </p:cxnSp>
-      <p:sp>
-        <p:nvSpPr>
-          <p:cNvPr id="33" name="TextBox 32"/>
-          <p:cNvSpPr txBox="1"/>
-          <p:nvPr/>
-        </p:nvSpPr>
-        <p:spPr>
-          <a:xfrm>
-            <a:off x="457200" y="6400800"/>
-            <a:ext cx="3200400" cy="274320"/>
-          </a:xfrm>
-          <a:prstGeom prst="rect">
-            <a:avLst/>
-          </a:prstGeom>
-          <a:noFill/>
-        </p:spPr>
-        <p:txBody>
-          <a:bodyPr wrap="none" anchor="t" lIns="0" rIns="0" tIns="0" bIns="0">
-            <a:spAutoFit/>
-          </a:bodyPr>
-          <a:lstStyle/>
-          <a:p>
-            <a:pPr algn="l"/>
-            <a:r>
-              <a:rPr sz="1000" b="1">
-                <a:solidFill>
-                  <a:srgbClr val="1A2233"/>
-                </a:solidFill>
-                <a:latin typeface="Arial"/>
-              </a:rPr>
-              <a:t>LIG Defense&amp;Aerospace</a:t>
-            </a:r>
-          </a:p>
-        </p:txBody>
-      </p:sp>
       <p:sp>
         <p:nvSpPr>
           <p:cNvPr id="34" name="TextBox 33"/>
@@ -7242,41 +7102,6 @@
           </a:p>
         </p:txBody>
       </p:sp>
-      <p:sp>
-        <p:nvSpPr>
-          <p:cNvPr id="34" name="TextBox 33"/>
-          <p:cNvSpPr txBox="1"/>
-          <p:nvPr/>
-        </p:nvSpPr>
-        <p:spPr>
-          <a:xfrm>
-            <a:off x="10195560" y="411480"/>
-            <a:ext cx="1371600" cy="777240"/>
-          </a:xfrm>
-          <a:prstGeom prst="rect">
-            <a:avLst/>
-          </a:prstGeom>
-          <a:noFill/>
-        </p:spPr>
-        <p:txBody>
-          <a:bodyPr wrap="none" anchor="ctr" lIns="0" rIns="0" tIns="0" bIns="0">
-            <a:spAutoFit/>
-          </a:bodyPr>
-          <a:lstStyle/>
-          <a:p>
-            <a:pPr algn="r"/>
-            <a:r>
-              <a:rPr sz="2400" b="1">
-                <a:solidFill>
-                  <a:srgbClr val="FFFFFF"/>
-                </a:solidFill>
-                <a:latin typeface="Arial"/>
-              </a:rPr>
-              <a:t>LIG</a:t>
-            </a:r>
-          </a:p>
-        </p:txBody>
-      </p:sp>
       <p:cxnSp>
         <p:nvCxnSpPr>
           <p:cNvPr id="35" name="Connector 34"/>
@@ -7312,41 +7137,6 @@
           </a:fontRef>
         </p:style>
       </p:cxnSp>
-      <p:sp>
-        <p:nvSpPr>
-          <p:cNvPr id="36" name="TextBox 35"/>
-          <p:cNvSpPr txBox="1"/>
-          <p:nvPr/>
-        </p:nvSpPr>
-        <p:spPr>
-          <a:xfrm>
-            <a:off x="457200" y="6400800"/>
-            <a:ext cx="3200400" cy="274320"/>
-          </a:xfrm>
-          <a:prstGeom prst="rect">
-            <a:avLst/>
-          </a:prstGeom>
-          <a:noFill/>
-        </p:spPr>
-        <p:txBody>
-          <a:bodyPr wrap="none" anchor="t" lIns="0" rIns="0" tIns="0" bIns="0">
-            <a:spAutoFit/>
-          </a:bodyPr>
-          <a:lstStyle/>
-          <a:p>
-            <a:pPr algn="l"/>
-            <a:r>
-              <a:rPr sz="1000" b="1">
-                <a:solidFill>
-                  <a:srgbClr val="1A2233"/>
-                </a:solidFill>
-                <a:latin typeface="Arial"/>
-              </a:rPr>
-              <a:t>LIG Defense&amp;Aerospace</a:t>
-            </a:r>
-          </a:p>
-        </p:txBody>
-      </p:sp>
       <p:sp>
         <p:nvSpPr>
           <p:cNvPr id="37" name="TextBox 36"/>
@@ -8583,41 +8373,6 @@
           </a:p>
         </p:txBody>
       </p:sp>
-      <p:sp>
-        <p:nvSpPr>
-          <p:cNvPr id="33" name="TextBox 32"/>
-          <p:cNvSpPr txBox="1"/>
-          <p:nvPr/>
-        </p:nvSpPr>
-        <p:spPr>
-          <a:xfrm>
-            <a:off x="10195560" y="411480"/>
-            <a:ext cx="1371600" cy="777240"/>
-          </a:xfrm>
-          <a:prstGeom prst="rect">
-            <a:avLst/>
-          </a:prstGeom>
-          <a:noFill/>
-        </p:spPr>
-        <p:txBody>
-          <a:bodyPr wrap="none" anchor="ctr" lIns="0" rIns="0" tIns="0" bIns="0">
-            <a:spAutoFit/>
-          </a:bodyPr>
-          <a:lstStyle/>
-          <a:p>
-            <a:pPr algn="r"/>
-            <a:r>
-              <a:rPr sz="2400" b="1">
-                <a:solidFill>
-                  <a:srgbClr val="FFFFFF"/>
-                </a:solidFill>
-                <a:latin typeface="Arial"/>
-              </a:rPr>
-              <a:t>LIG</a:t>
-            </a:r>
-          </a:p>
-        </p:txBody>
-      </p:sp>
       <p:cxnSp>
         <p:nvCxnSpPr>
           <p:cNvPr id="34" name="Connector 33"/>
@@ -8653,41 +8408,6 @@
           </a:fontRef>
         </p:style>
       </p:cxnSp>
-      <p:sp>
-        <p:nvSpPr>
-          <p:cNvPr id="35" name="TextBox 34"/>
-          <p:cNvSpPr txBox="1"/>
-          <p:nvPr/>
-        </p:nvSpPr>
-        <p:spPr>
-          <a:xfrm>
-            <a:off x="457200" y="6400800"/>
-            <a:ext cx="3200400" cy="274320"/>
-          </a:xfrm>
-          <a:prstGeom prst="rect">
-            <a:avLst/>
-          </a:prstGeom>
-          <a:noFill/>
-        </p:spPr>
-        <p:txBody>
-          <a:bodyPr wrap="none" anchor="t" lIns="0" rIns="0" tIns="0" bIns="0">
-            <a:spAutoFit/>
-          </a:bodyPr>
-          <a:lstStyle/>
-          <a:p>
-            <a:pPr algn="l"/>
-            <a:r>
-              <a:rPr sz="1000" b="1">
-                <a:solidFill>
-                  <a:srgbClr val="1A2233"/>
-                </a:solidFill>
-                <a:latin typeface="Arial"/>
-              </a:rPr>
-              <a:t>LIG Defense&amp;Aerospace</a:t>
-            </a:r>
-          </a:p>
-        </p:txBody>
-      </p:sp>
       <p:sp>
         <p:nvSpPr>
           <p:cNvPr id="36" name="TextBox 35"/>
@@ -9972,41 +9692,6 @@
           </a:p>
         </p:txBody>
       </p:sp>
-      <p:sp>
-        <p:nvSpPr>
-          <p:cNvPr id="37" name="TextBox 36"/>
-          <p:cNvSpPr txBox="1"/>
-          <p:nvPr/>
-        </p:nvSpPr>
-        <p:spPr>
-          <a:xfrm>
-            <a:off x="10195560" y="411480"/>
-            <a:ext cx="1371600" cy="777240"/>
-          </a:xfrm>
-          <a:prstGeom prst="rect">
-            <a:avLst/>
-          </a:prstGeom>
-          <a:noFill/>
-        </p:spPr>
-        <p:txBody>
-          <a:bodyPr wrap="none" anchor="ctr" lIns="0" rIns="0" tIns="0" bIns="0">
-            <a:spAutoFit/>
-          </a:bodyPr>
-          <a:lstStyle/>
-          <a:p>
-            <a:pPr algn="r"/>
-            <a:r>
-              <a:rPr sz="2400" b="1">
-                <a:solidFill>
-                  <a:srgbClr val="FFFFFF"/>
-                </a:solidFill>
-                <a:latin typeface="Arial"/>
-              </a:rPr>
-              <a:t>LIG</a:t>
-            </a:r>
-          </a:p>
-        </p:txBody>
-      </p:sp>
       <p:cxnSp>
         <p:nvCxnSpPr>
           <p:cNvPr id="38" name="Connector 37"/>
@@ -10042,41 +9727,6 @@
           </a:fontRef>
         </p:style>
       </p:cxnSp>
-      <p:sp>
-        <p:nvSpPr>
-          <p:cNvPr id="39" name="TextBox 38"/>
-          <p:cNvSpPr txBox="1"/>
-          <p:nvPr/>
-        </p:nvSpPr>
-        <p:spPr>
-          <a:xfrm>
-            <a:off x="457200" y="6400800"/>
-            <a:ext cx="3200400" cy="274320"/>
-          </a:xfrm>
-          <a:prstGeom prst="rect">
-            <a:avLst/>
-          </a:prstGeom>
-          <a:noFill/>
-        </p:spPr>
-        <p:txBody>
-          <a:bodyPr wrap="none" anchor="t" lIns="0" rIns="0" tIns="0" bIns="0">
-            <a:spAutoFit/>
-          </a:bodyPr>
-          <a:lstStyle/>
-          <a:p>
-            <a:pPr algn="l"/>
-            <a:r>
-              <a:rPr sz="1000" b="1">
-                <a:solidFill>
-                  <a:srgbClr val="1A2233"/>
-                </a:solidFill>
-                <a:latin typeface="Arial"/>
-              </a:rPr>
-              <a:t>LIG Defense&amp;Aerospace</a:t>
-            </a:r>
-          </a:p>
-        </p:txBody>
-      </p:sp>
       <p:sp>
         <p:nvSpPr>
           <p:cNvPr id="40" name="TextBox 39"/>
@@ -11519,41 +11169,6 @@
           </a:p>
         </p:txBody>
       </p:sp>
-      <p:sp>
-        <p:nvSpPr>
-          <p:cNvPr id="38" name="TextBox 37"/>
-          <p:cNvSpPr txBox="1"/>
-          <p:nvPr/>
-        </p:nvSpPr>
-        <p:spPr>
-          <a:xfrm>
-            <a:off x="10195560" y="411480"/>
-            <a:ext cx="1371600" cy="777240"/>
-          </a:xfrm>
-          <a:prstGeom prst="rect">
-            <a:avLst/>
-          </a:prstGeom>
-          <a:noFill/>
-        </p:spPr>
-        <p:txBody>
-          <a:bodyPr wrap="none" anchor="ctr" lIns="0" rIns="0" tIns="0" bIns="0">
-            <a:spAutoFit/>
-          </a:bodyPr>
-          <a:lstStyle/>
-          <a:p>
-            <a:pPr algn="r"/>
-            <a:r>
-              <a:rPr sz="2400" b="1">
-                <a:solidFill>
-                  <a:srgbClr val="FFFFFF"/>
-                </a:solidFill>
-                <a:latin typeface="Arial"/>
-              </a:rPr>
-              <a:t>LIG</a:t>
-            </a:r>
-          </a:p>
-        </p:txBody>
-      </p:sp>
       <p:cxnSp>
         <p:nvCxnSpPr>
           <p:cNvPr id="39" name="Connector 38"/>
@@ -11589,41 +11204,6 @@
           </a:fontRef>
         </p:style>
       </p:cxnSp>
-      <p:sp>
-        <p:nvSpPr>
-          <p:cNvPr id="40" name="TextBox 39"/>
-          <p:cNvSpPr txBox="1"/>
-          <p:nvPr/>
-        </p:nvSpPr>
-        <p:spPr>
-          <a:xfrm>
-            <a:off x="457200" y="6400800"/>
-            <a:ext cx="3200400" cy="274320"/>
-          </a:xfrm>
-          <a:prstGeom prst="rect">
-            <a:avLst/>
-          </a:prstGeom>
-          <a:noFill/>
-        </p:spPr>
-        <p:txBody>
-          <a:bodyPr wrap="none" anchor="t" lIns="0" rIns="0" tIns="0" bIns="0">
-            <a:spAutoFit/>
-          </a:bodyPr>
-          <a:lstStyle/>
-          <a:p>
-            <a:pPr algn="l"/>
-            <a:r>
-              <a:rPr sz="1000" b="1">
-                <a:solidFill>
-                  <a:srgbClr val="1A2233"/>
-                </a:solidFill>
-                <a:latin typeface="Arial"/>
-              </a:rPr>
-              <a:t>LIG Defense&amp;Aerospace</a:t>
-            </a:r>
-          </a:p>
-        </p:txBody>
-      </p:sp>
       <p:sp>
         <p:nvSpPr>
           <p:cNvPr id="41" name="TextBox 40"/>
@@ -13474,41 +13054,6 @@
           </a:p>
         </p:txBody>
       </p:sp>
-      <p:sp>
-        <p:nvSpPr>
-          <p:cNvPr id="25" name="TextBox 24"/>
-          <p:cNvSpPr txBox="1"/>
-          <p:nvPr/>
-        </p:nvSpPr>
-        <p:spPr>
-          <a:xfrm>
-            <a:off x="10195560" y="411480"/>
-            <a:ext cx="1371600" cy="777240"/>
-          </a:xfrm>
-          <a:prstGeom prst="rect">
-            <a:avLst/>
-          </a:prstGeom>
-          <a:noFill/>
-        </p:spPr>
-        <p:txBody>
-          <a:bodyPr wrap="none" anchor="ctr" lIns="0" rIns="0" tIns="0" bIns="0">
-            <a:spAutoFit/>
-          </a:bodyPr>
-          <a:lstStyle/>
-          <a:p>
-            <a:pPr algn="r"/>
-            <a:r>
-              <a:rPr sz="2400" b="1">
-                <a:solidFill>
-                  <a:srgbClr val="FFFFFF"/>
-                </a:solidFill>
-                <a:latin typeface="Arial"/>
-              </a:rPr>
-              <a:t>LIG</a:t>
-            </a:r>
-          </a:p>
-        </p:txBody>
-      </p:sp>
       <p:cxnSp>
         <p:nvCxnSpPr>
           <p:cNvPr id="26" name="Connector 25"/>
@@ -13544,41 +13089,6 @@
           </a:fontRef>
         </p:style>
       </p:cxnSp>
-      <p:sp>
-        <p:nvSpPr>
-          <p:cNvPr id="27" name="TextBox 26"/>
-          <p:cNvSpPr txBox="1"/>
-          <p:nvPr/>
-        </p:nvSpPr>
-        <p:spPr>
-          <a:xfrm>
-            <a:off x="457200" y="6400800"/>
-            <a:ext cx="3200400" cy="274320"/>
-          </a:xfrm>
-          <a:prstGeom prst="rect">
-            <a:avLst/>
-          </a:prstGeom>
-          <a:noFill/>
-        </p:spPr>
-        <p:txBody>
-          <a:bodyPr wrap="none" anchor="t" lIns="0" rIns="0" tIns="0" bIns="0">
-            <a:spAutoFit/>
-          </a:bodyPr>
-          <a:lstStyle/>
-          <a:p>
-            <a:pPr algn="l"/>
-            <a:r>
-              <a:rPr sz="1000" b="1">
-                <a:solidFill>
-                  <a:srgbClr val="1A2233"/>
-                </a:solidFill>
-                <a:latin typeface="Arial"/>
-              </a:rPr>
-              <a:t>LIG Defense&amp;Aerospace</a:t>
-            </a:r>
-          </a:p>
-        </p:txBody>
-      </p:sp>
       <p:sp>
         <p:nvSpPr>
           <p:cNvPr id="28" name="TextBox 27"/>
@@ -15170,41 +14680,6 @@
           </a:p>
         </p:txBody>
       </p:sp>
-      <p:sp>
-        <p:nvSpPr>
-          <p:cNvPr id="30" name="TextBox 29"/>
-          <p:cNvSpPr txBox="1"/>
-          <p:nvPr/>
-        </p:nvSpPr>
-        <p:spPr>
-          <a:xfrm>
-            <a:off x="10195560" y="411480"/>
-            <a:ext cx="1371600" cy="777240"/>
-          </a:xfrm>
-          <a:prstGeom prst="rect">
-            <a:avLst/>
-          </a:prstGeom>
-          <a:noFill/>
-        </p:spPr>
-        <p:txBody>
-          <a:bodyPr wrap="none" anchor="ctr" lIns="0" rIns="0" tIns="0" bIns="0">
-            <a:spAutoFit/>
-          </a:bodyPr>
-          <a:lstStyle/>
-          <a:p>
-            <a:pPr algn="r"/>
-            <a:r>
-              <a:rPr sz="2400" b="1">
-                <a:solidFill>
-                  <a:srgbClr val="FFFFFF"/>
-                </a:solidFill>
-                <a:latin typeface="Arial"/>
-              </a:rPr>
-              <a:t>LIG</a:t>
-            </a:r>
-          </a:p>
-        </p:txBody>
-      </p:sp>
       <p:cxnSp>
         <p:nvCxnSpPr>
           <p:cNvPr id="31" name="Connector 30"/>
@@ -15240,41 +14715,6 @@
           </a:fontRef>
         </p:style>
       </p:cxnSp>
-      <p:sp>
-        <p:nvSpPr>
-          <p:cNvPr id="32" name="TextBox 31"/>
-          <p:cNvSpPr txBox="1"/>
-          <p:nvPr/>
-        </p:nvSpPr>
-        <p:spPr>
-          <a:xfrm>
-            <a:off x="457200" y="6400800"/>
-            <a:ext cx="3200400" cy="274320"/>
-          </a:xfrm>
-          <a:prstGeom prst="rect">
-            <a:avLst/>
-          </a:prstGeom>
-          <a:noFill/>
-        </p:spPr>
-        <p:txBody>
-          <a:bodyPr wrap="none" anchor="t" lIns="0" rIns="0" tIns="0" bIns="0">
-            <a:spAutoFit/>
-          </a:bodyPr>
-          <a:lstStyle/>
-          <a:p>
-            <a:pPr algn="l"/>
-            <a:r>
-              <a:rPr sz="1000" b="1">
-                <a:solidFill>
-                  <a:srgbClr val="1A2233"/>
-                </a:solidFill>
-                <a:latin typeface="Arial"/>
-              </a:rPr>
-              <a:t>LIG Defense&amp;Aerospace</a:t>
-            </a:r>
-          </a:p>
-        </p:txBody>
-      </p:sp>
       <p:sp>
         <p:nvSpPr>
           <p:cNvPr id="33" name="TextBox 32"/>
@@ -16605,41 +16045,6 @@
           </a:p>
         </p:txBody>
       </p:sp>
-      <p:sp>
-        <p:nvSpPr>
-          <p:cNvPr id="34" name="TextBox 33"/>
-          <p:cNvSpPr txBox="1"/>
-          <p:nvPr/>
-        </p:nvSpPr>
-        <p:spPr>
-          <a:xfrm>
-            <a:off x="10195560" y="411480"/>
-            <a:ext cx="1371600" cy="777240"/>
-          </a:xfrm>
-          <a:prstGeom prst="rect">
-            <a:avLst/>
-          </a:prstGeom>
-          <a:noFill/>
-        </p:spPr>
-        <p:txBody>
-          <a:bodyPr wrap="none" anchor="ctr" lIns="0" rIns="0" tIns="0" bIns="0">
-            <a:spAutoFit/>
-          </a:bodyPr>
-          <a:lstStyle/>
-          <a:p>
-            <a:pPr algn="r"/>
-            <a:r>
-              <a:rPr sz="2400" b="1">
-                <a:solidFill>
-                  <a:srgbClr val="FFFFFF"/>
-                </a:solidFill>
-                <a:latin typeface="Arial"/>
-              </a:rPr>
-              <a:t>LIG</a:t>
-            </a:r>
-          </a:p>
-        </p:txBody>
-      </p:sp>
       <p:cxnSp>
         <p:nvCxnSpPr>
           <p:cNvPr id="35" name="Connector 34"/>
@@ -16675,41 +16080,6 @@
           </a:fontRef>
         </p:style>
       </p:cxnSp>
-      <p:sp>
-        <p:nvSpPr>
-          <p:cNvPr id="36" name="TextBox 35"/>
-          <p:cNvSpPr txBox="1"/>
-          <p:nvPr/>
-        </p:nvSpPr>
-        <p:spPr>
-          <a:xfrm>
-            <a:off x="457200" y="6400800"/>
-            <a:ext cx="3200400" cy="274320"/>
-          </a:xfrm>
-          <a:prstGeom prst="rect">
-            <a:avLst/>
-          </a:prstGeom>
-          <a:noFill/>
-        </p:spPr>
-        <p:txBody>
-          <a:bodyPr wrap="none" anchor="t" lIns="0" rIns="0" tIns="0" bIns="0">
-            <a:spAutoFit/>
-          </a:bodyPr>
-          <a:lstStyle/>
-          <a:p>
-            <a:pPr algn="l"/>
-            <a:r>
-              <a:rPr sz="1000" b="1">
-                <a:solidFill>
-                  <a:srgbClr val="1A2233"/>
-                </a:solidFill>
-                <a:latin typeface="Arial"/>
-              </a:rPr>
-              <a:t>LIG Defense&amp;Aerospace</a:t>
-            </a:r>
-          </a:p>
-        </p:txBody>
-      </p:sp>
       <p:sp>
         <p:nvSpPr>
           <p:cNvPr id="37" name="TextBox 36"/>
@@ -17850,41 +17220,6 @@
           </a:p>
         </p:txBody>
       </p:sp>
-      <p:sp>
-        <p:nvSpPr>
-          <p:cNvPr id="31" name="TextBox 30"/>
-          <p:cNvSpPr txBox="1"/>
-          <p:nvPr/>
-        </p:nvSpPr>
-        <p:spPr>
-          <a:xfrm>
-            <a:off x="10195560" y="411480"/>
-            <a:ext cx="1371600" cy="777240"/>
-          </a:xfrm>
-          <a:prstGeom prst="rect">
-            <a:avLst/>
-          </a:prstGeom>
-          <a:noFill/>
-        </p:spPr>
-        <p:txBody>
-          <a:bodyPr wrap="none" anchor="ctr" lIns="0" rIns="0" tIns="0" bIns="0">
-            <a:spAutoFit/>
-          </a:bodyPr>
-          <a:lstStyle/>
-          <a:p>
-            <a:pPr algn="r"/>
-            <a:r>
-              <a:rPr sz="2400" b="1">
-                <a:solidFill>
-                  <a:srgbClr val="FFFFFF"/>
-                </a:solidFill>
-                <a:latin typeface="Arial"/>
-              </a:rPr>
-              <a:t>LIG</a:t>
-            </a:r>
-          </a:p>
-        </p:txBody>
-      </p:sp>
       <p:cxnSp>
         <p:nvCxnSpPr>
           <p:cNvPr id="32" name="Connector 31"/>
@@ -17920,41 +17255,6 @@
           </a:fontRef>
         </p:style>
       </p:cxnSp>
-      <p:sp>
-        <p:nvSpPr>
-          <p:cNvPr id="33" name="TextBox 32"/>
-          <p:cNvSpPr txBox="1"/>
-          <p:nvPr/>
-        </p:nvSpPr>
-        <p:spPr>
-          <a:xfrm>
-            <a:off x="457200" y="6400800"/>
-            <a:ext cx="3200400" cy="274320"/>
-          </a:xfrm>
-          <a:prstGeom prst="rect">
-            <a:avLst/>
-          </a:prstGeom>
-          <a:noFill/>
-        </p:spPr>
-        <p:txBody>
-          <a:bodyPr wrap="none" anchor="t" lIns="0" rIns="0" tIns="0" bIns="0">
-            <a:spAutoFit/>
-          </a:bodyPr>
-          <a:lstStyle/>
-          <a:p>
-            <a:pPr algn="l"/>
-            <a:r>
-              <a:rPr sz="1000" b="1">
-                <a:solidFill>
-                  <a:srgbClr val="1A2233"/>
-                </a:solidFill>
-                <a:latin typeface="Arial"/>
-              </a:rPr>
-              <a:t>LIG Defense&amp;Aerospace</a:t>
-            </a:r>
-          </a:p>
-        </p:txBody>
-      </p:sp>
       <p:sp>
         <p:nvSpPr>
           <p:cNvPr id="34" name="TextBox 33"/>
@@ -19193,41 +18493,6 @@
           </a:p>
         </p:txBody>
       </p:sp>
-      <p:sp>
-        <p:nvSpPr>
-          <p:cNvPr id="33" name="TextBox 32"/>
-          <p:cNvSpPr txBox="1"/>
-          <p:nvPr/>
-        </p:nvSpPr>
-        <p:spPr>
-          <a:xfrm>
-            <a:off x="10195560" y="411480"/>
-            <a:ext cx="1371600" cy="777240"/>
-          </a:xfrm>
-          <a:prstGeom prst="rect">
-            <a:avLst/>
-          </a:prstGeom>
-          <a:noFill/>
-        </p:spPr>
-        <p:txBody>
-          <a:bodyPr wrap="none" anchor="ctr" lIns="0" rIns="0" tIns="0" bIns="0">
-            <a:spAutoFit/>
-          </a:bodyPr>
-          <a:lstStyle/>
-          <a:p>
-            <a:pPr algn="r"/>
-            <a:r>
-              <a:rPr sz="2400" b="1">
-                <a:solidFill>
-                  <a:srgbClr val="FFFFFF"/>
-                </a:solidFill>
-                <a:latin typeface="Arial"/>
-              </a:rPr>
-              <a:t>LIG</a:t>
-            </a:r>
-          </a:p>
-        </p:txBody>
-      </p:sp>
       <p:cxnSp>
         <p:nvCxnSpPr>
           <p:cNvPr id="34" name="Connector 33"/>
@@ -19263,41 +18528,6 @@
           </a:fontRef>
         </p:style>
       </p:cxnSp>
-      <p:sp>
-        <p:nvSpPr>
-          <p:cNvPr id="35" name="TextBox 34"/>
-          <p:cNvSpPr txBox="1"/>
-          <p:nvPr/>
-        </p:nvSpPr>
-        <p:spPr>
-          <a:xfrm>
-            <a:off x="457200" y="6400800"/>
-            <a:ext cx="3200400" cy="274320"/>
-          </a:xfrm>
-          <a:prstGeom prst="rect">
-            <a:avLst/>
-          </a:prstGeom>
-          <a:noFill/>
-        </p:spPr>
-        <p:txBody>
-          <a:bodyPr wrap="none" anchor="t" lIns="0" rIns="0" tIns="0" bIns="0">
-            <a:spAutoFit/>
-          </a:bodyPr>
-          <a:lstStyle/>
-          <a:p>
-            <a:pPr algn="l"/>
-            <a:r>
-              <a:rPr sz="1000" b="1">
-                <a:solidFill>
-                  <a:srgbClr val="1A2233"/>
-                </a:solidFill>
-                <a:latin typeface="Arial"/>
-              </a:rPr>
-              <a:t>LIG Defense&amp;Aerospace</a:t>
-            </a:r>
-          </a:p>
-        </p:txBody>
-      </p:sp>
       <p:sp>
         <p:nvSpPr>
           <p:cNvPr id="36" name="TextBox 35"/>
@@ -19801,41 +19031,6 @@
           </a:prstGeom>
         </p:spPr>
       </p:pic>
-      <p:sp>
-        <p:nvSpPr>
-          <p:cNvPr id="21" name="TextBox 20"/>
-          <p:cNvSpPr txBox="1"/>
-          <p:nvPr/>
-        </p:nvSpPr>
-        <p:spPr>
-          <a:xfrm>
-            <a:off x="502920" y="384048"/>
-            <a:ext cx="1463040" cy="640080"/>
-          </a:xfrm>
-          <a:prstGeom prst="rect">
-            <a:avLst/>
-          </a:prstGeom>
-          <a:noFill/>
-        </p:spPr>
-        <p:txBody>
-          <a:bodyPr wrap="none" anchor="ctr" lIns="0" rIns="0" tIns="0" bIns="0">
-            <a:spAutoFit/>
-          </a:bodyPr>
-          <a:lstStyle/>
-          <a:p>
-            <a:pPr algn="l"/>
-            <a:r>
-              <a:rPr sz="3400" b="1">
-                <a:solidFill>
-                  <a:srgbClr val="FFFFFF"/>
-                </a:solidFill>
-                <a:latin typeface="Arial"/>
-              </a:rPr>
-              <a:t>LIG</a:t>
-            </a:r>
-          </a:p>
-        </p:txBody>
-      </p:sp>
       <p:cxnSp>
         <p:nvCxnSpPr>
           <p:cNvPr id="22" name="Connector 21"/>
@@ -19873,43 +19068,6 @@
       </p:cxnSp>
       <p:sp>
         <p:nvSpPr>
-          <p:cNvPr id="23" name="TextBox 22"/>
-          <p:cNvSpPr txBox="1"/>
-          <p:nvPr/>
-        </p:nvSpPr>
-        <p:spPr>
-          <a:xfrm>
-            <a:off x="9144000" y="640080"/>
-            <a:ext cx="2194560" cy="292608"/>
-          </a:xfrm>
-          <a:prstGeom prst="rect">
-            <a:avLst/>
-          </a:prstGeom>
-          <a:solidFill>
-            <a:srgbClr val="13233F"/>
-          </a:solidFill>
-        </p:spPr>
-        <p:txBody>
-          <a:bodyPr wrap="none" anchor="ctr" lIns="0" rIns="0" tIns="0" bIns="0">
-            <a:spAutoFit/>
-          </a:bodyPr>
-          <a:lstStyle/>
-          <a:p>
-            <a:pPr algn="ctr"/>
-            <a:r>
-              <a:rPr sz="1100" b="1">
-                <a:solidFill>
-                  <a:srgbClr val="FFFFFF"/>
-                </a:solidFill>
-                <a:latin typeface="Arial"/>
-              </a:rPr>
-              <a:t>LIG Defense&amp;Aerospace</a:t>
-            </a:r>
-          </a:p>
-        </p:txBody>
-      </p:sp>
-      <p:sp>
-        <p:nvSpPr>
           <p:cNvPr id="24" name="TextBox 23"/>
           <p:cNvSpPr txBox="1"/>
           <p:nvPr/>
@@ -19978,41 +19136,6 @@
           </a:fontRef>
         </p:style>
       </p:cxnSp>
-      <p:sp>
-        <p:nvSpPr>
-          <p:cNvPr id="26" name="TextBox 25"/>
-          <p:cNvSpPr txBox="1"/>
-          <p:nvPr/>
-        </p:nvSpPr>
-        <p:spPr>
-          <a:xfrm>
-            <a:off x="457200" y="6400800"/>
-            <a:ext cx="3200400" cy="274320"/>
-          </a:xfrm>
-          <a:prstGeom prst="rect">
-            <a:avLst/>
-          </a:prstGeom>
-          <a:noFill/>
-        </p:spPr>
-        <p:txBody>
-          <a:bodyPr wrap="none" anchor="t" lIns="0" rIns="0" tIns="0" bIns="0">
-            <a:spAutoFit/>
-          </a:bodyPr>
-          <a:lstStyle/>
-          <a:p>
-            <a:pPr algn="l"/>
-            <a:r>
-              <a:rPr sz="1000" b="1">
-                <a:solidFill>
-                  <a:srgbClr val="FFFFFF"/>
-                </a:solidFill>
-                <a:latin typeface="Arial"/>
-              </a:rPr>
-              <a:t>LIG Defense&amp;Aerospace</a:t>
-            </a:r>
-          </a:p>
-        </p:txBody>
-      </p:sp>
       <p:sp>
         <p:nvSpPr>
           <p:cNvPr id="27" name="TextBox 26"/>
@@ -22964,41 +22087,6 @@
           </a:p>
         </p:txBody>
       </p:sp>
-      <p:sp>
-        <p:nvSpPr>
-          <p:cNvPr id="25" name="TextBox 24"/>
-          <p:cNvSpPr txBox="1"/>
-          <p:nvPr/>
-        </p:nvSpPr>
-        <p:spPr>
-          <a:xfrm>
-            <a:off x="10195560" y="411480"/>
-            <a:ext cx="1371600" cy="777240"/>
-          </a:xfrm>
-          <a:prstGeom prst="rect">
-            <a:avLst/>
-          </a:prstGeom>
-          <a:noFill/>
-        </p:spPr>
-        <p:txBody>
-          <a:bodyPr wrap="none" anchor="ctr" lIns="0" rIns="0" tIns="0" bIns="0">
-            <a:spAutoFit/>
-          </a:bodyPr>
-          <a:lstStyle/>
-          <a:p>
-            <a:pPr algn="r"/>
-            <a:r>
-              <a:rPr sz="2400" b="1">
-                <a:solidFill>
-                  <a:srgbClr val="FFFFFF"/>
-                </a:solidFill>
-                <a:latin typeface="Arial"/>
-              </a:rPr>
-              <a:t>LIG</a:t>
-            </a:r>
-          </a:p>
-        </p:txBody>
-      </p:sp>
       <p:cxnSp>
         <p:nvCxnSpPr>
           <p:cNvPr id="26" name="Connector 25"/>
@@ -23034,41 +22122,6 @@
           </a:fontRef>
         </p:style>
       </p:cxnSp>
-      <p:sp>
-        <p:nvSpPr>
-          <p:cNvPr id="27" name="TextBox 26"/>
-          <p:cNvSpPr txBox="1"/>
-          <p:nvPr/>
-        </p:nvSpPr>
-        <p:spPr>
-          <a:xfrm>
-            <a:off x="457200" y="6400800"/>
-            <a:ext cx="3200400" cy="274320"/>
-          </a:xfrm>
-          <a:prstGeom prst="rect">
-            <a:avLst/>
-          </a:prstGeom>
-          <a:noFill/>
-        </p:spPr>
-        <p:txBody>
-          <a:bodyPr wrap="none" anchor="t" lIns="0" rIns="0" tIns="0" bIns="0">
-            <a:spAutoFit/>
-          </a:bodyPr>
-          <a:lstStyle/>
-          <a:p>
-            <a:pPr algn="l"/>
-            <a:r>
-              <a:rPr sz="1000" b="1">
-                <a:solidFill>
-                  <a:srgbClr val="1A2233"/>
-                </a:solidFill>
-                <a:latin typeface="Arial"/>
-              </a:rPr>
-              <a:t>LIG Defense&amp;Aerospace</a:t>
-            </a:r>
-          </a:p>
-        </p:txBody>
-      </p:sp>
       <p:sp>
         <p:nvSpPr>
           <p:cNvPr id="28" name="TextBox 27"/>
@@ -24629,41 +23682,6 @@
           </a:p>
         </p:txBody>
       </p:sp>
-      <p:sp>
-        <p:nvSpPr>
-          <p:cNvPr id="41" name="TextBox 40"/>
-          <p:cNvSpPr txBox="1"/>
-          <p:nvPr/>
-        </p:nvSpPr>
-        <p:spPr>
-          <a:xfrm>
-            <a:off x="10195560" y="411480"/>
-            <a:ext cx="1371600" cy="777240"/>
-          </a:xfrm>
-          <a:prstGeom prst="rect">
-            <a:avLst/>
-          </a:prstGeom>
-          <a:noFill/>
-        </p:spPr>
-        <p:txBody>
-          <a:bodyPr wrap="none" anchor="ctr" lIns="0" rIns="0" tIns="0" bIns="0">
-            <a:spAutoFit/>
-          </a:bodyPr>
-          <a:lstStyle/>
-          <a:p>
-            <a:pPr algn="r"/>
-            <a:r>
-              <a:rPr sz="2400" b="1">
-                <a:solidFill>
-                  <a:srgbClr val="FFFFFF"/>
-                </a:solidFill>
-                <a:latin typeface="Arial"/>
-              </a:rPr>
-              <a:t>LIG</a:t>
-            </a:r>
-          </a:p>
-        </p:txBody>
-      </p:sp>
       <p:cxnSp>
         <p:nvCxnSpPr>
           <p:cNvPr id="42" name="Connector 41"/>
@@ -24699,41 +23717,6 @@
           </a:fontRef>
         </p:style>
       </p:cxnSp>
-      <p:sp>
-        <p:nvSpPr>
-          <p:cNvPr id="43" name="TextBox 42"/>
-          <p:cNvSpPr txBox="1"/>
-          <p:nvPr/>
-        </p:nvSpPr>
-        <p:spPr>
-          <a:xfrm>
-            <a:off x="457200" y="6400800"/>
-            <a:ext cx="3200400" cy="274320"/>
-          </a:xfrm>
-          <a:prstGeom prst="rect">
-            <a:avLst/>
-          </a:prstGeom>
-          <a:noFill/>
-        </p:spPr>
-        <p:txBody>
-          <a:bodyPr wrap="none" anchor="t" lIns="0" rIns="0" tIns="0" bIns="0">
-            <a:spAutoFit/>
-          </a:bodyPr>
-          <a:lstStyle/>
-          <a:p>
-            <a:pPr algn="l"/>
-            <a:r>
-              <a:rPr sz="1000" b="1">
-                <a:solidFill>
-                  <a:srgbClr val="1A2233"/>
-                </a:solidFill>
-                <a:latin typeface="Arial"/>
-              </a:rPr>
-              <a:t>LIG Defense&amp;Aerospace</a:t>
-            </a:r>
-          </a:p>
-        </p:txBody>
-      </p:sp>
       <p:sp>
         <p:nvSpPr>
           <p:cNvPr id="44" name="TextBox 43"/>
@@ -24803,41 +23786,6 @@
           <a:chExt cx="0" cy="0"/>
         </a:xfrm>
       </p:grpSpPr>
-      <p:sp>
-        <p:nvSpPr>
-          <p:cNvPr id="2" name="TextBox 1"/>
-          <p:cNvSpPr txBox="1"/>
-          <p:nvPr/>
-        </p:nvSpPr>
-        <p:spPr>
-          <a:xfrm>
-            <a:off x="502920" y="384048"/>
-            <a:ext cx="1463040" cy="640080"/>
-          </a:xfrm>
-          <a:prstGeom prst="rect">
-            <a:avLst/>
-          </a:prstGeom>
-          <a:noFill/>
-        </p:spPr>
-        <p:txBody>
-          <a:bodyPr wrap="none" anchor="ctr" lIns="0" rIns="0" tIns="0" bIns="0">
-            <a:spAutoFit/>
-          </a:bodyPr>
-          <a:lstStyle/>
-          <a:p>
-            <a:pPr algn="l"/>
-            <a:r>
-              <a:rPr sz="3400" b="1">
-                <a:solidFill>
-                  <a:srgbClr val="FFFFFF"/>
-                </a:solidFill>
-                <a:latin typeface="Arial"/>
-              </a:rPr>
-              <a:t>LIG</a:t>
-            </a:r>
-          </a:p>
-        </p:txBody>
-      </p:sp>
       <p:cxnSp>
         <p:nvCxnSpPr>
           <p:cNvPr id="3" name="Connector 2"/>
@@ -24875,43 +23823,6 @@
       </p:cxnSp>
       <p:sp>
         <p:nvSpPr>
-          <p:cNvPr id="4" name="TextBox 3"/>
-          <p:cNvSpPr txBox="1"/>
-          <p:nvPr/>
-        </p:nvSpPr>
-        <p:spPr>
-          <a:xfrm>
-            <a:off x="9144000" y="640080"/>
-            <a:ext cx="2194560" cy="292608"/>
-          </a:xfrm>
-          <a:prstGeom prst="rect">
-            <a:avLst/>
-          </a:prstGeom>
-          <a:solidFill>
-            <a:srgbClr val="13233F"/>
-          </a:solidFill>
-        </p:spPr>
-        <p:txBody>
-          <a:bodyPr wrap="none" anchor="ctr" lIns="0" rIns="0" tIns="0" bIns="0">
-            <a:spAutoFit/>
-          </a:bodyPr>
-          <a:lstStyle/>
-          <a:p>
-            <a:pPr algn="ctr"/>
-            <a:r>
-              <a:rPr sz="1100" b="1">
-                <a:solidFill>
-                  <a:srgbClr val="FFFFFF"/>
-                </a:solidFill>
-                <a:latin typeface="Arial"/>
-              </a:rPr>
-              <a:t>LIG Defense&amp;Aerospace</a:t>
-            </a:r>
-          </a:p>
-        </p:txBody>
-      </p:sp>
-      <p:sp>
-        <p:nvSpPr>
           <p:cNvPr id="5" name="TextBox 4"/>
           <p:cNvSpPr txBox="1"/>
           <p:nvPr/>
@@ -25085,41 +23996,6 @@
           </a:fontRef>
         </p:style>
       </p:cxnSp>
-      <p:sp>
-        <p:nvSpPr>
-          <p:cNvPr id="10" name="TextBox 9"/>
-          <p:cNvSpPr txBox="1"/>
-          <p:nvPr/>
-        </p:nvSpPr>
-        <p:spPr>
-          <a:xfrm>
-            <a:off x="457200" y="6400800"/>
-            <a:ext cx="3200400" cy="274320"/>
-          </a:xfrm>
-          <a:prstGeom prst="rect">
-            <a:avLst/>
-          </a:prstGeom>
-          <a:noFill/>
-        </p:spPr>
-        <p:txBody>
-          <a:bodyPr wrap="none" anchor="t" lIns="0" rIns="0" tIns="0" bIns="0">
-            <a:spAutoFit/>
-          </a:bodyPr>
-          <a:lstStyle/>
-          <a:p>
-            <a:pPr algn="l"/>
-            <a:r>
-              <a:rPr sz="1000" b="1">
-                <a:solidFill>
-                  <a:srgbClr val="FFFFFF"/>
-                </a:solidFill>
-                <a:latin typeface="Arial"/>
-              </a:rPr>
-              <a:t>LIG Defense&amp;Aerospace</a:t>
-            </a:r>
-          </a:p>
-        </p:txBody>
-      </p:sp>
       <p:sp>
         <p:nvSpPr>
           <p:cNvPr id="11" name="TextBox 10"/>
@@ -26905,41 +25781,6 @@
           </a:p>
         </p:txBody>
       </p:sp>
-      <p:sp>
-        <p:nvSpPr>
-          <p:cNvPr id="28" name="TextBox 27"/>
-          <p:cNvSpPr txBox="1"/>
-          <p:nvPr/>
-        </p:nvSpPr>
-        <p:spPr>
-          <a:xfrm>
-            <a:off x="10195560" y="411480"/>
-            <a:ext cx="1371600" cy="777240"/>
-          </a:xfrm>
-          <a:prstGeom prst="rect">
-            <a:avLst/>
-          </a:prstGeom>
-          <a:noFill/>
-        </p:spPr>
-        <p:txBody>
-          <a:bodyPr wrap="none" anchor="ctr" lIns="0" rIns="0" tIns="0" bIns="0">
-            <a:spAutoFit/>
-          </a:bodyPr>
-          <a:lstStyle/>
-          <a:p>
-            <a:pPr algn="r"/>
-            <a:r>
-              <a:rPr sz="2400" b="1">
-                <a:solidFill>
-                  <a:srgbClr val="FFFFFF"/>
-                </a:solidFill>
-                <a:latin typeface="Arial"/>
-              </a:rPr>
-              <a:t>LIG</a:t>
-            </a:r>
-          </a:p>
-        </p:txBody>
-      </p:sp>
       <p:cxnSp>
         <p:nvCxnSpPr>
           <p:cNvPr id="29" name="Connector 28"/>
@@ -26975,41 +25816,6 @@
           </a:fontRef>
         </p:style>
       </p:cxnSp>
-      <p:sp>
-        <p:nvSpPr>
-          <p:cNvPr id="30" name="TextBox 29"/>
-          <p:cNvSpPr txBox="1"/>
-          <p:nvPr/>
-        </p:nvSpPr>
-        <p:spPr>
-          <a:xfrm>
-            <a:off x="457200" y="6400800"/>
-            <a:ext cx="3200400" cy="274320"/>
-          </a:xfrm>
-          <a:prstGeom prst="rect">
-            <a:avLst/>
-          </a:prstGeom>
-          <a:noFill/>
-        </p:spPr>
-        <p:txBody>
-          <a:bodyPr wrap="none" anchor="t" lIns="0" rIns="0" tIns="0" bIns="0">
-            <a:spAutoFit/>
-          </a:bodyPr>
-          <a:lstStyle/>
-          <a:p>
-            <a:pPr algn="l"/>
-            <a:r>
-              <a:rPr sz="1000" b="1">
-                <a:solidFill>
-                  <a:srgbClr val="1A2233"/>
-                </a:solidFill>
-                <a:latin typeface="Arial"/>
-              </a:rPr>
-              <a:t>LIG Defense&amp;Aerospace</a:t>
-            </a:r>
-          </a:p>
-        </p:txBody>
-      </p:sp>
       <p:sp>
         <p:nvSpPr>
           <p:cNvPr id="31" name="TextBox 30"/>
@@ -29154,41 +27960,6 @@
           </a:p>
         </p:txBody>
       </p:sp>
-      <p:sp>
-        <p:nvSpPr>
-          <p:cNvPr id="29" name="TextBox 28"/>
-          <p:cNvSpPr txBox="1"/>
-          <p:nvPr/>
-        </p:nvSpPr>
-        <p:spPr>
-          <a:xfrm>
-            <a:off x="10195560" y="411480"/>
-            <a:ext cx="1371600" cy="777240"/>
-          </a:xfrm>
-          <a:prstGeom prst="rect">
-            <a:avLst/>
-          </a:prstGeom>
-          <a:noFill/>
-        </p:spPr>
-        <p:txBody>
-          <a:bodyPr wrap="none" anchor="ctr" lIns="0" rIns="0" tIns="0" bIns="0">
-            <a:spAutoFit/>
-          </a:bodyPr>
-          <a:lstStyle/>
-          <a:p>
-            <a:pPr algn="r"/>
-            <a:r>
-              <a:rPr sz="2400" b="1">
-                <a:solidFill>
-                  <a:srgbClr val="FFFFFF"/>
-                </a:solidFill>
-                <a:latin typeface="Arial"/>
-              </a:rPr>
-              <a:t>LIG</a:t>
-            </a:r>
-          </a:p>
-        </p:txBody>
-      </p:sp>
       <p:cxnSp>
         <p:nvCxnSpPr>
           <p:cNvPr id="30" name="Connector 29"/>
@@ -29224,41 +27995,6 @@
           </a:fontRef>
         </p:style>
       </p:cxnSp>
-      <p:sp>
-        <p:nvSpPr>
-          <p:cNvPr id="31" name="TextBox 30"/>
-          <p:cNvSpPr txBox="1"/>
-          <p:nvPr/>
-        </p:nvSpPr>
-        <p:spPr>
-          <a:xfrm>
-            <a:off x="457200" y="6400800"/>
-            <a:ext cx="3200400" cy="274320"/>
-          </a:xfrm>
-          <a:prstGeom prst="rect">
-            <a:avLst/>
-          </a:prstGeom>
-          <a:noFill/>
-        </p:spPr>
-        <p:txBody>
-          <a:bodyPr wrap="none" anchor="t" lIns="0" rIns="0" tIns="0" bIns="0">
-            <a:spAutoFit/>
-          </a:bodyPr>
-          <a:lstStyle/>
-          <a:p>
-            <a:pPr algn="l"/>
-            <a:r>
-              <a:rPr sz="1000" b="1">
-                <a:solidFill>
-                  <a:srgbClr val="1A2233"/>
-                </a:solidFill>
-                <a:latin typeface="Arial"/>
-              </a:rPr>
-              <a:t>LIG Defense&amp;Aerospace</a:t>
-            </a:r>
-          </a:p>
-        </p:txBody>
-      </p:sp>
       <p:sp>
         <p:nvSpPr>
           <p:cNvPr id="32" name="TextBox 31"/>
@@ -30100,41 +28836,6 @@
           </a:p>
         </p:txBody>
       </p:sp>
-      <p:sp>
-        <p:nvSpPr>
-          <p:cNvPr id="23" name="TextBox 22"/>
-          <p:cNvSpPr txBox="1"/>
-          <p:nvPr/>
-        </p:nvSpPr>
-        <p:spPr>
-          <a:xfrm>
-            <a:off x="10195560" y="411480"/>
-            <a:ext cx="1371600" cy="777240"/>
-          </a:xfrm>
-          <a:prstGeom prst="rect">
-            <a:avLst/>
-          </a:prstGeom>
-          <a:noFill/>
-        </p:spPr>
-        <p:txBody>
-          <a:bodyPr wrap="none" anchor="ctr" lIns="0" rIns="0" tIns="0" bIns="0">
-            <a:spAutoFit/>
-          </a:bodyPr>
-          <a:lstStyle/>
-          <a:p>
-            <a:pPr algn="r"/>
-            <a:r>
-              <a:rPr sz="2400" b="1">
-                <a:solidFill>
-                  <a:srgbClr val="FFFFFF"/>
-                </a:solidFill>
-                <a:latin typeface="Arial"/>
-              </a:rPr>
-              <a:t>LIG</a:t>
-            </a:r>
-          </a:p>
-        </p:txBody>
-      </p:sp>
       <p:cxnSp>
         <p:nvCxnSpPr>
           <p:cNvPr id="24" name="Connector 23"/>
@@ -30170,41 +28871,6 @@
           </a:fontRef>
         </p:style>
       </p:cxnSp>
-      <p:sp>
-        <p:nvSpPr>
-          <p:cNvPr id="25" name="TextBox 24"/>
-          <p:cNvSpPr txBox="1"/>
-          <p:nvPr/>
-        </p:nvSpPr>
-        <p:spPr>
-          <a:xfrm>
-            <a:off x="457200" y="6400800"/>
-            <a:ext cx="3200400" cy="274320"/>
-          </a:xfrm>
-          <a:prstGeom prst="rect">
-            <a:avLst/>
-          </a:prstGeom>
-          <a:noFill/>
-        </p:spPr>
-        <p:txBody>
-          <a:bodyPr wrap="none" anchor="t" lIns="0" rIns="0" tIns="0" bIns="0">
-            <a:spAutoFit/>
-          </a:bodyPr>
-          <a:lstStyle/>
-          <a:p>
-            <a:pPr algn="l"/>
-            <a:r>
-              <a:rPr sz="1000" b="1">
-                <a:solidFill>
-                  <a:srgbClr val="1A2233"/>
-                </a:solidFill>
-                <a:latin typeface="Arial"/>
-              </a:rPr>
-              <a:t>LIG Defense&amp;Aerospace</a:t>
-            </a:r>
-          </a:p>
-        </p:txBody>
-      </p:sp>
       <p:sp>
         <p:nvSpPr>
           <p:cNvPr id="26" name="TextBox 25"/>
@@ -31233,41 +29899,6 @@
           </a:p>
         </p:txBody>
       </p:sp>
-      <p:sp>
-        <p:nvSpPr>
-          <p:cNvPr id="26" name="TextBox 25"/>
-          <p:cNvSpPr txBox="1"/>
-          <p:nvPr/>
-        </p:nvSpPr>
-        <p:spPr>
-          <a:xfrm>
-            <a:off x="10195560" y="411480"/>
-            <a:ext cx="1371600" cy="777240"/>
-          </a:xfrm>
-          <a:prstGeom prst="rect">
-            <a:avLst/>
-          </a:prstGeom>
-          <a:noFill/>
-        </p:spPr>
-        <p:txBody>
-          <a:bodyPr wrap="none" anchor="ctr" lIns="0" rIns="0" tIns="0" bIns="0">
-            <a:spAutoFit/>
-          </a:bodyPr>
-          <a:lstStyle/>
-          <a:p>
-            <a:pPr algn="r"/>
-            <a:r>
-              <a:rPr sz="2400" b="1">
-                <a:solidFill>
-                  <a:srgbClr val="FFFFFF"/>
-                </a:solidFill>
-                <a:latin typeface="Arial"/>
-              </a:rPr>
-              <a:t>LIG</a:t>
-            </a:r>
-          </a:p>
-        </p:txBody>
-      </p:sp>
       <p:cxnSp>
         <p:nvCxnSpPr>
           <p:cNvPr id="27" name="Connector 26"/>
@@ -31303,41 +29934,6 @@
           </a:fontRef>
         </p:style>
       </p:cxnSp>
-      <p:sp>
-        <p:nvSpPr>
-          <p:cNvPr id="28" name="TextBox 27"/>
-          <p:cNvSpPr txBox="1"/>
-          <p:nvPr/>
-        </p:nvSpPr>
-        <p:spPr>
-          <a:xfrm>
-            <a:off x="457200" y="6400800"/>
-            <a:ext cx="3200400" cy="274320"/>
-          </a:xfrm>
-          <a:prstGeom prst="rect">
-            <a:avLst/>
-          </a:prstGeom>
-          <a:noFill/>
-        </p:spPr>
-        <p:txBody>
-          <a:bodyPr wrap="none" anchor="t" lIns="0" rIns="0" tIns="0" bIns="0">
-            <a:spAutoFit/>
-          </a:bodyPr>
-          <a:lstStyle/>
-          <a:p>
-            <a:pPr algn="l"/>
-            <a:r>
-              <a:rPr sz="1000" b="1">
-                <a:solidFill>
-                  <a:srgbClr val="1A2233"/>
-                </a:solidFill>
-                <a:latin typeface="Arial"/>
-              </a:rPr>
-              <a:t>LIG Defense&amp;Aerospace</a:t>
-            </a:r>
-          </a:p>
-        </p:txBody>
-      </p:sp>
       <p:sp>
         <p:nvSpPr>
           <p:cNvPr id="29" name="TextBox 28"/>
@@ -32284,41 +30880,6 @@
           </a:p>
         </p:txBody>
       </p:sp>
-      <p:sp>
-        <p:nvSpPr>
-          <p:cNvPr id="23" name="TextBox 22"/>
-          <p:cNvSpPr txBox="1"/>
-          <p:nvPr/>
-        </p:nvSpPr>
-        <p:spPr>
-          <a:xfrm>
-            <a:off x="10195560" y="411480"/>
-            <a:ext cx="1371600" cy="777240"/>
-          </a:xfrm>
-          <a:prstGeom prst="rect">
-            <a:avLst/>
-          </a:prstGeom>
-          <a:noFill/>
-        </p:spPr>
-        <p:txBody>
-          <a:bodyPr wrap="none" anchor="ctr" lIns="0" rIns="0" tIns="0" bIns="0">
-            <a:spAutoFit/>
-          </a:bodyPr>
-          <a:lstStyle/>
-          <a:p>
-            <a:pPr algn="r"/>
-            <a:r>
-              <a:rPr sz="2400" b="1">
-                <a:solidFill>
-                  <a:srgbClr val="FFFFFF"/>
-                </a:solidFill>
-                <a:latin typeface="Arial"/>
-              </a:rPr>
-              <a:t>LIG</a:t>
-            </a:r>
-          </a:p>
-        </p:txBody>
-      </p:sp>
       <p:cxnSp>
         <p:nvCxnSpPr>
           <p:cNvPr id="24" name="Connector 23"/>
@@ -32354,41 +30915,6 @@
           </a:fontRef>
         </p:style>
       </p:cxnSp>
-      <p:sp>
-        <p:nvSpPr>
-          <p:cNvPr id="25" name="TextBox 24"/>
-          <p:cNvSpPr txBox="1"/>
-          <p:nvPr/>
-        </p:nvSpPr>
-        <p:spPr>
-          <a:xfrm>
-            <a:off x="457200" y="6400800"/>
-            <a:ext cx="3200400" cy="274320"/>
-          </a:xfrm>
-          <a:prstGeom prst="rect">
-            <a:avLst/>
-          </a:prstGeom>
-          <a:noFill/>
-        </p:spPr>
-        <p:txBody>
-          <a:bodyPr wrap="none" anchor="t" lIns="0" rIns="0" tIns="0" bIns="0">
-            <a:spAutoFit/>
-          </a:bodyPr>
-          <a:lstStyle/>
-          <a:p>
-            <a:pPr algn="l"/>
-            <a:r>
-              <a:rPr sz="1000" b="1">
-                <a:solidFill>
-                  <a:srgbClr val="1A2233"/>
-                </a:solidFill>
-                <a:latin typeface="Arial"/>
-              </a:rPr>
-              <a:t>LIG Defense&amp;Aerospace</a:t>
-            </a:r>
-          </a:p>
-        </p:txBody>
-      </p:sp>
       <p:sp>
         <p:nvSpPr>
           <p:cNvPr id="26" name="TextBox 25"/>
@@ -33031,41 +31557,6 @@
           </a:p>
         </p:txBody>
       </p:sp>
-      <p:sp>
-        <p:nvSpPr>
-          <p:cNvPr id="16" name="TextBox 15"/>
-          <p:cNvSpPr txBox="1"/>
-          <p:nvPr/>
-        </p:nvSpPr>
-        <p:spPr>
-          <a:xfrm>
-            <a:off x="10195560" y="411480"/>
-            <a:ext cx="1371600" cy="777240"/>
-          </a:xfrm>
-          <a:prstGeom prst="rect">
-            <a:avLst/>
-          </a:prstGeom>
-          <a:noFill/>
-        </p:spPr>
-        <p:txBody>
-          <a:bodyPr wrap="none" anchor="ctr" lIns="0" rIns="0" tIns="0" bIns="0">
-            <a:spAutoFit/>
-          </a:bodyPr>
-          <a:lstStyle/>
-          <a:p>
-            <a:pPr algn="r"/>
-            <a:r>
-              <a:rPr sz="2400" b="1">
-                <a:solidFill>
-                  <a:srgbClr val="FFFFFF"/>
-                </a:solidFill>
-                <a:latin typeface="Arial"/>
-              </a:rPr>
-              <a:t>LIG</a:t>
-            </a:r>
-          </a:p>
-        </p:txBody>
-      </p:sp>
       <p:cxnSp>
         <p:nvCxnSpPr>
           <p:cNvPr id="17" name="Connector 16"/>
@@ -33101,41 +31592,6 @@
           </a:fontRef>
         </p:style>
       </p:cxnSp>
-      <p:sp>
-        <p:nvSpPr>
-          <p:cNvPr id="18" name="TextBox 17"/>
-          <p:cNvSpPr txBox="1"/>
-          <p:nvPr/>
-        </p:nvSpPr>
-        <p:spPr>
-          <a:xfrm>
-            <a:off x="457200" y="6400800"/>
-            <a:ext cx="3200400" cy="274320"/>
-          </a:xfrm>
-          <a:prstGeom prst="rect">
-            <a:avLst/>
-          </a:prstGeom>
-          <a:noFill/>
-        </p:spPr>
-        <p:txBody>
-          <a:bodyPr wrap="none" anchor="t" lIns="0" rIns="0" tIns="0" bIns="0">
-            <a:spAutoFit/>
-          </a:bodyPr>
-          <a:lstStyle/>
-          <a:p>
-            <a:pPr algn="l"/>
-            <a:r>
-              <a:rPr sz="1000" b="1">
-                <a:solidFill>
-                  <a:srgbClr val="1A2233"/>
-                </a:solidFill>
-                <a:latin typeface="Arial"/>
-              </a:rPr>
-              <a:t>LIG Defense&amp;Aerospace</a:t>
-            </a:r>
-          </a:p>
-        </p:txBody>
-      </p:sp>
       <p:sp>
         <p:nvSpPr>
           <p:cNvPr id="19" name="TextBox 18"/>
@@ -33205,41 +31661,6 @@
           <a:chExt cx="0" cy="0"/>
         </a:xfrm>
       </p:grpSpPr>
-      <p:sp>
-        <p:nvSpPr>
-          <p:cNvPr id="2" name="TextBox 1"/>
-          <p:cNvSpPr txBox="1"/>
-          <p:nvPr/>
-        </p:nvSpPr>
-        <p:spPr>
-          <a:xfrm>
-            <a:off x="502920" y="384048"/>
-            <a:ext cx="1463040" cy="640080"/>
-          </a:xfrm>
-          <a:prstGeom prst="rect">
-            <a:avLst/>
-          </a:prstGeom>
-          <a:noFill/>
-        </p:spPr>
-        <p:txBody>
-          <a:bodyPr wrap="none" anchor="ctr" lIns="0" rIns="0" tIns="0" bIns="0">
-            <a:spAutoFit/>
-          </a:bodyPr>
-          <a:lstStyle/>
-          <a:p>
-            <a:pPr algn="l"/>
-            <a:r>
-              <a:rPr sz="3400" b="1">
-                <a:solidFill>
-                  <a:srgbClr val="FFFFFF"/>
-                </a:solidFill>
-                <a:latin typeface="Arial"/>
-              </a:rPr>
-              <a:t>LIG</a:t>
-            </a:r>
-          </a:p>
-        </p:txBody>
-      </p:sp>
       <p:cxnSp>
         <p:nvCxnSpPr>
           <p:cNvPr id="3" name="Connector 2"/>
@@ -33277,43 +31698,6 @@
       </p:cxnSp>
       <p:sp>
         <p:nvSpPr>
-          <p:cNvPr id="4" name="TextBox 3"/>
-          <p:cNvSpPr txBox="1"/>
-          <p:nvPr/>
-        </p:nvSpPr>
-        <p:spPr>
-          <a:xfrm>
-            <a:off x="9144000" y="640080"/>
-            <a:ext cx="2194560" cy="292608"/>
-          </a:xfrm>
-          <a:prstGeom prst="rect">
-            <a:avLst/>
-          </a:prstGeom>
-          <a:solidFill>
-            <a:srgbClr val="13233F"/>
-          </a:solidFill>
-        </p:spPr>
-        <p:txBody>
-          <a:bodyPr wrap="none" anchor="ctr" lIns="0" rIns="0" tIns="0" bIns="0">
-            <a:spAutoFit/>
-          </a:bodyPr>
-          <a:lstStyle/>
-          <a:p>
-            <a:pPr algn="ctr"/>
-            <a:r>
-              <a:rPr sz="1100" b="1">
-                <a:solidFill>
-                  <a:srgbClr val="FFFFFF"/>
-                </a:solidFill>
-                <a:latin typeface="Arial"/>
-              </a:rPr>
-              <a:t>LIG Defense&amp;Aerospace</a:t>
-            </a:r>
-          </a:p>
-        </p:txBody>
-      </p:sp>
-      <p:sp>
-        <p:nvSpPr>
           <p:cNvPr id="5" name="TextBox 4"/>
           <p:cNvSpPr txBox="1"/>
           <p:nvPr/>
@@ -33487,41 +31871,6 @@
           </a:fontRef>
         </p:style>
       </p:cxnSp>
-      <p:sp>
-        <p:nvSpPr>
-          <p:cNvPr id="10" name="TextBox 9"/>
-          <p:cNvSpPr txBox="1"/>
-          <p:nvPr/>
-        </p:nvSpPr>
-        <p:spPr>
-          <a:xfrm>
-            <a:off x="457200" y="6400800"/>
-            <a:ext cx="3200400" cy="274320"/>
-          </a:xfrm>
-          <a:prstGeom prst="rect">
-            <a:avLst/>
-          </a:prstGeom>
-          <a:noFill/>
-        </p:spPr>
-        <p:txBody>
-          <a:bodyPr wrap="none" anchor="t" lIns="0" rIns="0" tIns="0" bIns="0">
-            <a:spAutoFit/>
-          </a:bodyPr>
-          <a:lstStyle/>
-          <a:p>
-            <a:pPr algn="l"/>
-            <a:r>
-              <a:rPr sz="1000" b="1">
-                <a:solidFill>
-                  <a:srgbClr val="FFFFFF"/>
-                </a:solidFill>
-                <a:latin typeface="Arial"/>
-              </a:rPr>
-              <a:t>LIG Defense&amp;Aerospace</a:t>
-            </a:r>
-          </a:p>
-        </p:txBody>
-      </p:sp>
       <p:sp>
         <p:nvSpPr>
           <p:cNvPr id="11" name="TextBox 10"/>
@@ -33707,41 +32056,6 @@
       </p:cxnSp>
       <p:sp>
         <p:nvSpPr>
-          <p:cNvPr id="5" name="TextBox 4"/>
-          <p:cNvSpPr txBox="1"/>
-          <p:nvPr/>
-        </p:nvSpPr>
-        <p:spPr>
-          <a:xfrm>
-            <a:off x="10424160" y="365760"/>
-            <a:ext cx="1280160" cy="548640"/>
-          </a:xfrm>
-          <a:prstGeom prst="rect">
-            <a:avLst/>
-          </a:prstGeom>
-          <a:noFill/>
-        </p:spPr>
-        <p:txBody>
-          <a:bodyPr wrap="none" anchor="ctr" lIns="0" rIns="0" tIns="0" bIns="0">
-            <a:spAutoFit/>
-          </a:bodyPr>
-          <a:lstStyle/>
-          <a:p>
-            <a:pPr algn="r"/>
-            <a:r>
-              <a:rPr sz="3000" b="1">
-                <a:solidFill>
-                  <a:srgbClr val="13233F"/>
-                </a:solidFill>
-                <a:latin typeface="Arial"/>
-              </a:rPr>
-              <a:t>LIG</a:t>
-            </a:r>
-          </a:p>
-        </p:txBody>
-      </p:sp>
-      <p:sp>
-        <p:nvSpPr>
           <p:cNvPr id="6" name="TextBox 5"/>
           <p:cNvSpPr txBox="1"/>
           <p:nvPr/>
@@ -33771,41 +32085,6 @@
                 <a:latin typeface="맑은 고딕"/>
               </a:rPr>
               <a:t>목차</a:t>
-            </a:r>
-          </a:p>
-        </p:txBody>
-      </p:sp>
-      <p:sp>
-        <p:nvSpPr>
-          <p:cNvPr id="7" name="TextBox 6"/>
-          <p:cNvSpPr txBox="1"/>
-          <p:nvPr/>
-        </p:nvSpPr>
-        <p:spPr>
-          <a:xfrm>
-            <a:off x="411480" y="6400800"/>
-            <a:ext cx="3200400" cy="274320"/>
-          </a:xfrm>
-          <a:prstGeom prst="rect">
-            <a:avLst/>
-          </a:prstGeom>
-          <a:noFill/>
-        </p:spPr>
-        <p:txBody>
-          <a:bodyPr wrap="none" anchor="t" lIns="0" rIns="0" tIns="0" bIns="0">
-            <a:spAutoFit/>
-          </a:bodyPr>
-          <a:lstStyle/>
-          <a:p>
-            <a:pPr algn="l"/>
-            <a:r>
-              <a:rPr sz="1000" b="1">
-                <a:solidFill>
-                  <a:srgbClr val="FFFFFF"/>
-                </a:solidFill>
-                <a:latin typeface="Arial"/>
-              </a:rPr>
-              <a:t>LIG Defense&amp;Aerospace</a:t>
             </a:r>
           </a:p>
         </p:txBody>
@@ -35757,41 +34036,6 @@
           </a:p>
         </p:txBody>
       </p:sp>
-      <p:sp>
-        <p:nvSpPr>
-          <p:cNvPr id="35" name="TextBox 34"/>
-          <p:cNvSpPr txBox="1"/>
-          <p:nvPr/>
-        </p:nvSpPr>
-        <p:spPr>
-          <a:xfrm>
-            <a:off x="10195560" y="411480"/>
-            <a:ext cx="1371600" cy="777240"/>
-          </a:xfrm>
-          <a:prstGeom prst="rect">
-            <a:avLst/>
-          </a:prstGeom>
-          <a:noFill/>
-        </p:spPr>
-        <p:txBody>
-          <a:bodyPr wrap="none" anchor="ctr" lIns="0" rIns="0" tIns="0" bIns="0">
-            <a:spAutoFit/>
-          </a:bodyPr>
-          <a:lstStyle/>
-          <a:p>
-            <a:pPr algn="r"/>
-            <a:r>
-              <a:rPr sz="2400" b="1">
-                <a:solidFill>
-                  <a:srgbClr val="FFFFFF"/>
-                </a:solidFill>
-                <a:latin typeface="Arial"/>
-              </a:rPr>
-              <a:t>LIG</a:t>
-            </a:r>
-          </a:p>
-        </p:txBody>
-      </p:sp>
       <p:cxnSp>
         <p:nvCxnSpPr>
           <p:cNvPr id="36" name="Connector 35"/>
@@ -35827,41 +34071,6 @@
           </a:fontRef>
         </p:style>
       </p:cxnSp>
-      <p:sp>
-        <p:nvSpPr>
-          <p:cNvPr id="37" name="TextBox 36"/>
-          <p:cNvSpPr txBox="1"/>
-          <p:nvPr/>
-        </p:nvSpPr>
-        <p:spPr>
-          <a:xfrm>
-            <a:off x="457200" y="6400800"/>
-            <a:ext cx="3200400" cy="274320"/>
-          </a:xfrm>
-          <a:prstGeom prst="rect">
-            <a:avLst/>
-          </a:prstGeom>
-          <a:noFill/>
-        </p:spPr>
-        <p:txBody>
-          <a:bodyPr wrap="none" anchor="t" lIns="0" rIns="0" tIns="0" bIns="0">
-            <a:spAutoFit/>
-          </a:bodyPr>
-          <a:lstStyle/>
-          <a:p>
-            <a:pPr algn="l"/>
-            <a:r>
-              <a:rPr sz="1000" b="1">
-                <a:solidFill>
-                  <a:srgbClr val="1A2233"/>
-                </a:solidFill>
-                <a:latin typeface="Arial"/>
-              </a:rPr>
-              <a:t>LIG Defense&amp;Aerospace</a:t>
-            </a:r>
-          </a:p>
-        </p:txBody>
-      </p:sp>
       <p:sp>
         <p:nvSpPr>
           <p:cNvPr id="38" name="TextBox 37"/>
@@ -37290,41 +35499,6 @@
           </a:p>
         </p:txBody>
       </p:sp>
-      <p:sp>
-        <p:nvSpPr>
-          <p:cNvPr id="39" name="TextBox 38"/>
-          <p:cNvSpPr txBox="1"/>
-          <p:nvPr/>
-        </p:nvSpPr>
-        <p:spPr>
-          <a:xfrm>
-            <a:off x="10195560" y="411480"/>
-            <a:ext cx="1371600" cy="777240"/>
-          </a:xfrm>
-          <a:prstGeom prst="rect">
-            <a:avLst/>
-          </a:prstGeom>
-          <a:noFill/>
-        </p:spPr>
-        <p:txBody>
-          <a:bodyPr wrap="none" anchor="ctr" lIns="0" rIns="0" tIns="0" bIns="0">
-            <a:spAutoFit/>
-          </a:bodyPr>
-          <a:lstStyle/>
-          <a:p>
-            <a:pPr algn="r"/>
-            <a:r>
-              <a:rPr sz="2400" b="1">
-                <a:solidFill>
-                  <a:srgbClr val="FFFFFF"/>
-                </a:solidFill>
-                <a:latin typeface="Arial"/>
-              </a:rPr>
-              <a:t>LIG</a:t>
-            </a:r>
-          </a:p>
-        </p:txBody>
-      </p:sp>
       <p:cxnSp>
         <p:nvCxnSpPr>
           <p:cNvPr id="40" name="Connector 39"/>
@@ -37360,41 +35534,6 @@
           </a:fontRef>
         </p:style>
       </p:cxnSp>
-      <p:sp>
-        <p:nvSpPr>
-          <p:cNvPr id="41" name="TextBox 40"/>
-          <p:cNvSpPr txBox="1"/>
-          <p:nvPr/>
-        </p:nvSpPr>
-        <p:spPr>
-          <a:xfrm>
-            <a:off x="457200" y="6400800"/>
-            <a:ext cx="3200400" cy="274320"/>
-          </a:xfrm>
-          <a:prstGeom prst="rect">
-            <a:avLst/>
-          </a:prstGeom>
-          <a:noFill/>
-        </p:spPr>
-        <p:txBody>
-          <a:bodyPr wrap="none" anchor="t" lIns="0" rIns="0" tIns="0" bIns="0">
-            <a:spAutoFit/>
-          </a:bodyPr>
-          <a:lstStyle/>
-          <a:p>
-            <a:pPr algn="l"/>
-            <a:r>
-              <a:rPr sz="1000" b="1">
-                <a:solidFill>
-                  <a:srgbClr val="1A2233"/>
-                </a:solidFill>
-                <a:latin typeface="Arial"/>
-              </a:rPr>
-              <a:t>LIG Defense&amp;Aerospace</a:t>
-            </a:r>
-          </a:p>
-        </p:txBody>
-      </p:sp>
       <p:sp>
         <p:nvSpPr>
           <p:cNvPr id="42" name="TextBox 41"/>
@@ -38774,41 +36913,6 @@
           </a:p>
         </p:txBody>
       </p:sp>
-      <p:sp>
-        <p:nvSpPr>
-          <p:cNvPr id="37" name="TextBox 36"/>
-          <p:cNvSpPr txBox="1"/>
-          <p:nvPr/>
-        </p:nvSpPr>
-        <p:spPr>
-          <a:xfrm>
-            <a:off x="10195560" y="411480"/>
-            <a:ext cx="1371600" cy="777240"/>
-          </a:xfrm>
-          <a:prstGeom prst="rect">
-            <a:avLst/>
-          </a:prstGeom>
-          <a:noFill/>
-        </p:spPr>
-        <p:txBody>
-          <a:bodyPr wrap="none" anchor="ctr" lIns="0" rIns="0" tIns="0" bIns="0">
-            <a:spAutoFit/>
-          </a:bodyPr>
-          <a:lstStyle/>
-          <a:p>
-            <a:pPr algn="r"/>
-            <a:r>
-              <a:rPr sz="2400" b="1">
-                <a:solidFill>
-                  <a:srgbClr val="FFFFFF"/>
-                </a:solidFill>
-                <a:latin typeface="Arial"/>
-              </a:rPr>
-              <a:t>LIG</a:t>
-            </a:r>
-          </a:p>
-        </p:txBody>
-      </p:sp>
       <p:cxnSp>
         <p:nvCxnSpPr>
           <p:cNvPr id="38" name="Connector 37"/>
@@ -38844,41 +36948,6 @@
           </a:fontRef>
         </p:style>
       </p:cxnSp>
-      <p:sp>
-        <p:nvSpPr>
-          <p:cNvPr id="39" name="TextBox 38"/>
-          <p:cNvSpPr txBox="1"/>
-          <p:nvPr/>
-        </p:nvSpPr>
-        <p:spPr>
-          <a:xfrm>
-            <a:off x="457200" y="6400800"/>
-            <a:ext cx="3200400" cy="274320"/>
-          </a:xfrm>
-          <a:prstGeom prst="rect">
-            <a:avLst/>
-          </a:prstGeom>
-          <a:noFill/>
-        </p:spPr>
-        <p:txBody>
-          <a:bodyPr wrap="none" anchor="t" lIns="0" rIns="0" tIns="0" bIns="0">
-            <a:spAutoFit/>
-          </a:bodyPr>
-          <a:lstStyle/>
-          <a:p>
-            <a:pPr algn="l"/>
-            <a:r>
-              <a:rPr sz="1000" b="1">
-                <a:solidFill>
-                  <a:srgbClr val="1A2233"/>
-                </a:solidFill>
-                <a:latin typeface="Arial"/>
-              </a:rPr>
-              <a:t>LIG Defense&amp;Aerospace</a:t>
-            </a:r>
-          </a:p>
-        </p:txBody>
-      </p:sp>
       <p:sp>
         <p:nvSpPr>
           <p:cNvPr id="40" name="TextBox 39"/>
@@ -42217,41 +40286,6 @@
           </a:p>
         </p:txBody>
       </p:sp>
-      <p:sp>
-        <p:nvSpPr>
-          <p:cNvPr id="68" name="TextBox 67"/>
-          <p:cNvSpPr txBox="1"/>
-          <p:nvPr/>
-        </p:nvSpPr>
-        <p:spPr>
-          <a:xfrm>
-            <a:off x="10195560" y="411480"/>
-            <a:ext cx="1371600" cy="777240"/>
-          </a:xfrm>
-          <a:prstGeom prst="rect">
-            <a:avLst/>
-          </a:prstGeom>
-          <a:noFill/>
-        </p:spPr>
-        <p:txBody>
-          <a:bodyPr wrap="none" anchor="ctr" lIns="0" rIns="0" tIns="0" bIns="0">
-            <a:spAutoFit/>
-          </a:bodyPr>
-          <a:lstStyle/>
-          <a:p>
-            <a:pPr algn="r"/>
-            <a:r>
-              <a:rPr sz="2400" b="1">
-                <a:solidFill>
-                  <a:srgbClr val="FFFFFF"/>
-                </a:solidFill>
-                <a:latin typeface="Arial"/>
-              </a:rPr>
-              <a:t>LIG</a:t>
-            </a:r>
-          </a:p>
-        </p:txBody>
-      </p:sp>
       <p:cxnSp>
         <p:nvCxnSpPr>
           <p:cNvPr id="69" name="Connector 68"/>
@@ -42287,41 +40321,6 @@
           </a:fontRef>
         </p:style>
       </p:cxnSp>
-      <p:sp>
-        <p:nvSpPr>
-          <p:cNvPr id="70" name="TextBox 69"/>
-          <p:cNvSpPr txBox="1"/>
-          <p:nvPr/>
-        </p:nvSpPr>
-        <p:spPr>
-          <a:xfrm>
-            <a:off x="457200" y="6400800"/>
-            <a:ext cx="3200400" cy="274320"/>
-          </a:xfrm>
-          <a:prstGeom prst="rect">
-            <a:avLst/>
-          </a:prstGeom>
-          <a:noFill/>
-        </p:spPr>
-        <p:txBody>
-          <a:bodyPr wrap="none" anchor="t" lIns="0" rIns="0" tIns="0" bIns="0">
-            <a:spAutoFit/>
-          </a:bodyPr>
-          <a:lstStyle/>
-          <a:p>
-            <a:pPr algn="l"/>
-            <a:r>
-              <a:rPr sz="1000" b="1">
-                <a:solidFill>
-                  <a:srgbClr val="1A2233"/>
-                </a:solidFill>
-                <a:latin typeface="Arial"/>
-              </a:rPr>
-              <a:t>LIG Defense&amp;Aerospace</a:t>
-            </a:r>
-          </a:p>
-        </p:txBody>
-      </p:sp>
       <p:sp>
         <p:nvSpPr>
           <p:cNvPr id="71" name="TextBox 70"/>
@@ -43140,41 +41139,6 @@
           </a:p>
         </p:txBody>
       </p:sp>
-      <p:sp>
-        <p:nvSpPr>
-          <p:cNvPr id="24" name="TextBox 23"/>
-          <p:cNvSpPr txBox="1"/>
-          <p:nvPr/>
-        </p:nvSpPr>
-        <p:spPr>
-          <a:xfrm>
-            <a:off x="502920" y="384048"/>
-            <a:ext cx="1463040" cy="640080"/>
-          </a:xfrm>
-          <a:prstGeom prst="rect">
-            <a:avLst/>
-          </a:prstGeom>
-          <a:noFill/>
-        </p:spPr>
-        <p:txBody>
-          <a:bodyPr wrap="none" anchor="ctr" lIns="0" rIns="0" tIns="0" bIns="0">
-            <a:spAutoFit/>
-          </a:bodyPr>
-          <a:lstStyle/>
-          <a:p>
-            <a:pPr algn="l"/>
-            <a:r>
-              <a:rPr sz="3400" b="1">
-                <a:solidFill>
-                  <a:srgbClr val="FFFFFF"/>
-                </a:solidFill>
-                <a:latin typeface="Arial"/>
-              </a:rPr>
-              <a:t>LIG</a:t>
-            </a:r>
-          </a:p>
-        </p:txBody>
-      </p:sp>
       <p:cxnSp>
         <p:nvCxnSpPr>
           <p:cNvPr id="25" name="Connector 24"/>
@@ -43212,43 +41176,6 @@
       </p:cxnSp>
       <p:sp>
         <p:nvSpPr>
-          <p:cNvPr id="26" name="TextBox 25"/>
-          <p:cNvSpPr txBox="1"/>
-          <p:nvPr/>
-        </p:nvSpPr>
-        <p:spPr>
-          <a:xfrm>
-            <a:off x="9144000" y="640080"/>
-            <a:ext cx="2194560" cy="292608"/>
-          </a:xfrm>
-          <a:prstGeom prst="rect">
-            <a:avLst/>
-          </a:prstGeom>
-          <a:solidFill>
-            <a:srgbClr val="13233F"/>
-          </a:solidFill>
-        </p:spPr>
-        <p:txBody>
-          <a:bodyPr wrap="none" anchor="ctr" lIns="0" rIns="0" tIns="0" bIns="0">
-            <a:spAutoFit/>
-          </a:bodyPr>
-          <a:lstStyle/>
-          <a:p>
-            <a:pPr algn="ctr"/>
-            <a:r>
-              <a:rPr sz="1100" b="1">
-                <a:solidFill>
-                  <a:srgbClr val="FFFFFF"/>
-                </a:solidFill>
-                <a:latin typeface="Arial"/>
-              </a:rPr>
-              <a:t>LIG Defense&amp;Aerospace</a:t>
-            </a:r>
-          </a:p>
-        </p:txBody>
-      </p:sp>
-      <p:sp>
-        <p:nvSpPr>
           <p:cNvPr id="27" name="TextBox 26"/>
           <p:cNvSpPr txBox="1"/>
           <p:nvPr/>
@@ -43317,41 +41244,6 @@
           </a:fontRef>
         </p:style>
       </p:cxnSp>
-      <p:sp>
-        <p:nvSpPr>
-          <p:cNvPr id="29" name="TextBox 28"/>
-          <p:cNvSpPr txBox="1"/>
-          <p:nvPr/>
-        </p:nvSpPr>
-        <p:spPr>
-          <a:xfrm>
-            <a:off x="457200" y="6400800"/>
-            <a:ext cx="3200400" cy="274320"/>
-          </a:xfrm>
-          <a:prstGeom prst="rect">
-            <a:avLst/>
-          </a:prstGeom>
-          <a:noFill/>
-        </p:spPr>
-        <p:txBody>
-          <a:bodyPr wrap="none" anchor="t" lIns="0" rIns="0" tIns="0" bIns="0">
-            <a:spAutoFit/>
-          </a:bodyPr>
-          <a:lstStyle/>
-          <a:p>
-            <a:pPr algn="l"/>
-            <a:r>
-              <a:rPr sz="1000" b="1">
-                <a:solidFill>
-                  <a:srgbClr val="FFFFFF"/>
-                </a:solidFill>
-                <a:latin typeface="Arial"/>
-              </a:rPr>
-              <a:t>LIG Defense&amp;Aerospace</a:t>
-            </a:r>
-          </a:p>
-        </p:txBody>
-      </p:sp>
       <p:sp>
         <p:nvSpPr>
           <p:cNvPr id="30" name="TextBox 29"/>
@@ -43999,41 +41891,6 @@
       </p:sp>
       <p:sp>
         <p:nvSpPr>
-          <p:cNvPr id="21" name="TextBox 20"/>
-          <p:cNvSpPr txBox="1"/>
-          <p:nvPr/>
-        </p:nvSpPr>
-        <p:spPr>
-          <a:xfrm>
-            <a:off x="548640" y="411480"/>
-            <a:ext cx="2011680" cy="914400"/>
-          </a:xfrm>
-          <a:prstGeom prst="rect">
-            <a:avLst/>
-          </a:prstGeom>
-          <a:noFill/>
-        </p:spPr>
-        <p:txBody>
-          <a:bodyPr wrap="none" anchor="ctr" lIns="0" rIns="0" tIns="0" bIns="0">
-            <a:spAutoFit/>
-          </a:bodyPr>
-          <a:lstStyle/>
-          <a:p>
-            <a:pPr algn="l"/>
-            <a:r>
-              <a:rPr sz="5400" b="1">
-                <a:solidFill>
-                  <a:srgbClr val="FFFFFF"/>
-                </a:solidFill>
-                <a:latin typeface="Arial"/>
-              </a:rPr>
-              <a:t>LIG</a:t>
-            </a:r>
-          </a:p>
-        </p:txBody>
-      </p:sp>
-      <p:sp>
-        <p:nvSpPr>
           <p:cNvPr id="22" name="TextBox 21"/>
           <p:cNvSpPr txBox="1"/>
           <p:nvPr/>
@@ -44098,41 +41955,6 @@
                 <a:latin typeface="맑은 고딕"/>
               </a:rPr>
               <a:t>질문 환영합니다</a:t>
-            </a:r>
-          </a:p>
-        </p:txBody>
-      </p:sp>
-      <p:sp>
-        <p:nvSpPr>
-          <p:cNvPr id="24" name="TextBox 23"/>
-          <p:cNvSpPr txBox="1"/>
-          <p:nvPr/>
-        </p:nvSpPr>
-        <p:spPr>
-          <a:xfrm>
-            <a:off x="6217920" y="3977639"/>
-            <a:ext cx="5486400" cy="365760"/>
-          </a:xfrm>
-          <a:prstGeom prst="rect">
-            <a:avLst/>
-          </a:prstGeom>
-          <a:noFill/>
-        </p:spPr>
-        <p:txBody>
-          <a:bodyPr wrap="none" anchor="t" lIns="0" rIns="0" tIns="0" bIns="0">
-            <a:spAutoFit/>
-          </a:bodyPr>
-          <a:lstStyle/>
-          <a:p>
-            <a:pPr algn="r"/>
-            <a:r>
-              <a:rPr sz="1600" b="1">
-                <a:solidFill>
-                  <a:srgbClr val="FFFFFF"/>
-                </a:solidFill>
-                <a:latin typeface="Arial"/>
-              </a:rPr>
-              <a:t>LIG Defense&amp;Aerospace</a:t>
             </a:r>
           </a:p>
         </p:txBody>
@@ -44894,41 +42716,6 @@
           </a:p>
         </p:txBody>
       </p:sp>
-      <p:sp>
-        <p:nvSpPr>
-          <p:cNvPr id="19" name="TextBox 18"/>
-          <p:cNvSpPr txBox="1"/>
-          <p:nvPr/>
-        </p:nvSpPr>
-        <p:spPr>
-          <a:xfrm>
-            <a:off x="10195560" y="411480"/>
-            <a:ext cx="1371600" cy="777240"/>
-          </a:xfrm>
-          <a:prstGeom prst="rect">
-            <a:avLst/>
-          </a:prstGeom>
-          <a:noFill/>
-        </p:spPr>
-        <p:txBody>
-          <a:bodyPr wrap="none" anchor="ctr" lIns="0" rIns="0" tIns="0" bIns="0">
-            <a:spAutoFit/>
-          </a:bodyPr>
-          <a:lstStyle/>
-          <a:p>
-            <a:pPr algn="r"/>
-            <a:r>
-              <a:rPr sz="2400" b="1">
-                <a:solidFill>
-                  <a:srgbClr val="FFFFFF"/>
-                </a:solidFill>
-                <a:latin typeface="Arial"/>
-              </a:rPr>
-              <a:t>LIG</a:t>
-            </a:r>
-          </a:p>
-        </p:txBody>
-      </p:sp>
       <p:cxnSp>
         <p:nvCxnSpPr>
           <p:cNvPr id="20" name="Connector 19"/>
@@ -44964,41 +42751,6 @@
           </a:fontRef>
         </p:style>
       </p:cxnSp>
-      <p:sp>
-        <p:nvSpPr>
-          <p:cNvPr id="21" name="TextBox 20"/>
-          <p:cNvSpPr txBox="1"/>
-          <p:nvPr/>
-        </p:nvSpPr>
-        <p:spPr>
-          <a:xfrm>
-            <a:off x="457200" y="6400800"/>
-            <a:ext cx="3200400" cy="274320"/>
-          </a:xfrm>
-          <a:prstGeom prst="rect">
-            <a:avLst/>
-          </a:prstGeom>
-          <a:noFill/>
-        </p:spPr>
-        <p:txBody>
-          <a:bodyPr wrap="none" anchor="t" lIns="0" rIns="0" tIns="0" bIns="0">
-            <a:spAutoFit/>
-          </a:bodyPr>
-          <a:lstStyle/>
-          <a:p>
-            <a:pPr algn="l"/>
-            <a:r>
-              <a:rPr sz="1000" b="1">
-                <a:solidFill>
-                  <a:srgbClr val="1A2233"/>
-                </a:solidFill>
-                <a:latin typeface="Arial"/>
-              </a:rPr>
-              <a:t>LIG Defense&amp;Aerospace</a:t>
-            </a:r>
-          </a:p>
-        </p:txBody>
-      </p:sp>
       <p:sp>
         <p:nvSpPr>
           <p:cNvPr id="22" name="TextBox 21"/>
@@ -45834,41 +43586,6 @@
           </a:p>
         </p:txBody>
       </p:sp>
-      <p:sp>
-        <p:nvSpPr>
-          <p:cNvPr id="21" name="TextBox 20"/>
-          <p:cNvSpPr txBox="1"/>
-          <p:nvPr/>
-        </p:nvSpPr>
-        <p:spPr>
-          <a:xfrm>
-            <a:off x="10195560" y="411480"/>
-            <a:ext cx="1371600" cy="777240"/>
-          </a:xfrm>
-          <a:prstGeom prst="rect">
-            <a:avLst/>
-          </a:prstGeom>
-          <a:noFill/>
-        </p:spPr>
-        <p:txBody>
-          <a:bodyPr wrap="none" anchor="ctr" lIns="0" rIns="0" tIns="0" bIns="0">
-            <a:spAutoFit/>
-          </a:bodyPr>
-          <a:lstStyle/>
-          <a:p>
-            <a:pPr algn="r"/>
-            <a:r>
-              <a:rPr sz="2400" b="1">
-                <a:solidFill>
-                  <a:srgbClr val="FFFFFF"/>
-                </a:solidFill>
-                <a:latin typeface="Arial"/>
-              </a:rPr>
-              <a:t>LIG</a:t>
-            </a:r>
-          </a:p>
-        </p:txBody>
-      </p:sp>
       <p:cxnSp>
         <p:nvCxnSpPr>
           <p:cNvPr id="22" name="Connector 21"/>
@@ -45904,41 +43621,6 @@
           </a:fontRef>
         </p:style>
       </p:cxnSp>
-      <p:sp>
-        <p:nvSpPr>
-          <p:cNvPr id="23" name="TextBox 22"/>
-          <p:cNvSpPr txBox="1"/>
-          <p:nvPr/>
-        </p:nvSpPr>
-        <p:spPr>
-          <a:xfrm>
-            <a:off x="457200" y="6400800"/>
-            <a:ext cx="3200400" cy="274320"/>
-          </a:xfrm>
-          <a:prstGeom prst="rect">
-            <a:avLst/>
-          </a:prstGeom>
-          <a:noFill/>
-        </p:spPr>
-        <p:txBody>
-          <a:bodyPr wrap="none" anchor="t" lIns="0" rIns="0" tIns="0" bIns="0">
-            <a:spAutoFit/>
-          </a:bodyPr>
-          <a:lstStyle/>
-          <a:p>
-            <a:pPr algn="l"/>
-            <a:r>
-              <a:rPr sz="1000" b="1">
-                <a:solidFill>
-                  <a:srgbClr val="1A2233"/>
-                </a:solidFill>
-                <a:latin typeface="Arial"/>
-              </a:rPr>
-              <a:t>LIG Defense&amp;Aerospace</a:t>
-            </a:r>
-          </a:p>
-        </p:txBody>
-      </p:sp>
       <p:sp>
         <p:nvSpPr>
           <p:cNvPr id="24" name="TextBox 23"/>
@@ -46869,41 +44551,6 @@
           </a:p>
         </p:txBody>
       </p:sp>
-      <p:sp>
-        <p:nvSpPr>
-          <p:cNvPr id="22" name="TextBox 21"/>
-          <p:cNvSpPr txBox="1"/>
-          <p:nvPr/>
-        </p:nvSpPr>
-        <p:spPr>
-          <a:xfrm>
-            <a:off x="10195560" y="411480"/>
-            <a:ext cx="1371600" cy="777240"/>
-          </a:xfrm>
-          <a:prstGeom prst="rect">
-            <a:avLst/>
-          </a:prstGeom>
-          <a:noFill/>
-        </p:spPr>
-        <p:txBody>
-          <a:bodyPr wrap="none" anchor="ctr" lIns="0" rIns="0" tIns="0" bIns="0">
-            <a:spAutoFit/>
-          </a:bodyPr>
-          <a:lstStyle/>
-          <a:p>
-            <a:pPr algn="r"/>
-            <a:r>
-              <a:rPr sz="2400" b="1">
-                <a:solidFill>
-                  <a:srgbClr val="FFFFFF"/>
-                </a:solidFill>
-                <a:latin typeface="Arial"/>
-              </a:rPr>
-              <a:t>LIG</a:t>
-            </a:r>
-          </a:p>
-        </p:txBody>
-      </p:sp>
       <p:cxnSp>
         <p:nvCxnSpPr>
           <p:cNvPr id="23" name="Connector 22"/>
@@ -46939,41 +44586,6 @@
           </a:fontRef>
         </p:style>
       </p:cxnSp>
-      <p:sp>
-        <p:nvSpPr>
-          <p:cNvPr id="24" name="TextBox 23"/>
-          <p:cNvSpPr txBox="1"/>
-          <p:nvPr/>
-        </p:nvSpPr>
-        <p:spPr>
-          <a:xfrm>
-            <a:off x="457200" y="6400800"/>
-            <a:ext cx="3200400" cy="274320"/>
-          </a:xfrm>
-          <a:prstGeom prst="rect">
-            <a:avLst/>
-          </a:prstGeom>
-          <a:noFill/>
-        </p:spPr>
-        <p:txBody>
-          <a:bodyPr wrap="none" anchor="t" lIns="0" rIns="0" tIns="0" bIns="0">
-            <a:spAutoFit/>
-          </a:bodyPr>
-          <a:lstStyle/>
-          <a:p>
-            <a:pPr algn="l"/>
-            <a:r>
-              <a:rPr sz="1000" b="1">
-                <a:solidFill>
-                  <a:srgbClr val="1A2233"/>
-                </a:solidFill>
-                <a:latin typeface="Arial"/>
-              </a:rPr>
-              <a:t>LIG Defense&amp;Aerospace</a:t>
-            </a:r>
-          </a:p>
-        </p:txBody>
-      </p:sp>
       <p:sp>
         <p:nvSpPr>
           <p:cNvPr id="25" name="TextBox 24"/>
@@ -47303,41 +44915,6 @@
           </a:p>
         </p:txBody>
       </p:sp>
-      <p:sp>
-        <p:nvSpPr>
-          <p:cNvPr id="11" name="TextBox 10"/>
-          <p:cNvSpPr txBox="1"/>
-          <p:nvPr/>
-        </p:nvSpPr>
-        <p:spPr>
-          <a:xfrm>
-            <a:off x="10195560" y="411480"/>
-            <a:ext cx="1371600" cy="777240"/>
-          </a:xfrm>
-          <a:prstGeom prst="rect">
-            <a:avLst/>
-          </a:prstGeom>
-          <a:noFill/>
-        </p:spPr>
-        <p:txBody>
-          <a:bodyPr wrap="none" anchor="ctr" lIns="0" rIns="0" tIns="0" bIns="0">
-            <a:spAutoFit/>
-          </a:bodyPr>
-          <a:lstStyle/>
-          <a:p>
-            <a:pPr algn="r"/>
-            <a:r>
-              <a:rPr sz="2400" b="1">
-                <a:solidFill>
-                  <a:srgbClr val="FFFFFF"/>
-                </a:solidFill>
-                <a:latin typeface="Arial"/>
-              </a:rPr>
-              <a:t>LIG</a:t>
-            </a:r>
-          </a:p>
-        </p:txBody>
-      </p:sp>
       <p:cxnSp>
         <p:nvCxnSpPr>
           <p:cNvPr id="12" name="Connector 11"/>
@@ -47373,41 +44950,6 @@
           </a:fontRef>
         </p:style>
       </p:cxnSp>
-      <p:sp>
-        <p:nvSpPr>
-          <p:cNvPr id="13" name="TextBox 12"/>
-          <p:cNvSpPr txBox="1"/>
-          <p:nvPr/>
-        </p:nvSpPr>
-        <p:spPr>
-          <a:xfrm>
-            <a:off x="457200" y="6400800"/>
-            <a:ext cx="3200400" cy="274320"/>
-          </a:xfrm>
-          <a:prstGeom prst="rect">
-            <a:avLst/>
-          </a:prstGeom>
-          <a:noFill/>
-        </p:spPr>
-        <p:txBody>
-          <a:bodyPr wrap="none" anchor="t" lIns="0" rIns="0" tIns="0" bIns="0">
-            <a:spAutoFit/>
-          </a:bodyPr>
-          <a:lstStyle/>
-          <a:p>
-            <a:pPr algn="l"/>
-            <a:r>
-              <a:rPr sz="1000" b="1">
-                <a:solidFill>
-                  <a:srgbClr val="1A2233"/>
-                </a:solidFill>
-                <a:latin typeface="Arial"/>
-              </a:rPr>
-              <a:t>LIG Defense&amp;Aerospace</a:t>
-            </a:r>
-          </a:p>
-        </p:txBody>
-      </p:sp>
       <p:sp>
         <p:nvSpPr>
           <p:cNvPr id="14" name="TextBox 13"/>
@@ -48030,41 +45572,6 @@
           </a:p>
         </p:txBody>
       </p:sp>
-      <p:sp>
-        <p:nvSpPr>
-          <p:cNvPr id="16" name="TextBox 15"/>
-          <p:cNvSpPr txBox="1"/>
-          <p:nvPr/>
-        </p:nvSpPr>
-        <p:spPr>
-          <a:xfrm>
-            <a:off x="10195560" y="411480"/>
-            <a:ext cx="1371600" cy="777240"/>
-          </a:xfrm>
-          <a:prstGeom prst="rect">
-            <a:avLst/>
-          </a:prstGeom>
-          <a:noFill/>
-        </p:spPr>
-        <p:txBody>
-          <a:bodyPr wrap="none" anchor="ctr" lIns="0" rIns="0" tIns="0" bIns="0">
-            <a:spAutoFit/>
-          </a:bodyPr>
-          <a:lstStyle/>
-          <a:p>
-            <a:pPr algn="r"/>
-            <a:r>
-              <a:rPr sz="2400" b="1">
-                <a:solidFill>
-                  <a:srgbClr val="FFFFFF"/>
-                </a:solidFill>
-                <a:latin typeface="Arial"/>
-              </a:rPr>
-              <a:t>LIG</a:t>
-            </a:r>
-          </a:p>
-        </p:txBody>
-      </p:sp>
       <p:cxnSp>
         <p:nvCxnSpPr>
           <p:cNvPr id="17" name="Connector 16"/>
@@ -48100,41 +45607,6 @@
           </a:fontRef>
         </p:style>
       </p:cxnSp>
-      <p:sp>
-        <p:nvSpPr>
-          <p:cNvPr id="18" name="TextBox 17"/>
-          <p:cNvSpPr txBox="1"/>
-          <p:nvPr/>
-        </p:nvSpPr>
-        <p:spPr>
-          <a:xfrm>
-            <a:off x="457200" y="6400800"/>
-            <a:ext cx="3200400" cy="274320"/>
-          </a:xfrm>
-          <a:prstGeom prst="rect">
-            <a:avLst/>
-          </a:prstGeom>
-          <a:noFill/>
-        </p:spPr>
-        <p:txBody>
-          <a:bodyPr wrap="none" anchor="t" lIns="0" rIns="0" tIns="0" bIns="0">
-            <a:spAutoFit/>
-          </a:bodyPr>
-          <a:lstStyle/>
-          <a:p>
-            <a:pPr algn="l"/>
-            <a:r>
-              <a:rPr sz="1000" b="1">
-                <a:solidFill>
-                  <a:srgbClr val="1A2233"/>
-                </a:solidFill>
-                <a:latin typeface="Arial"/>
-              </a:rPr>
-              <a:t>LIG Defense&amp;Aerospace</a:t>
-            </a:r>
-          </a:p>
-        </p:txBody>
-      </p:sp>
       <p:sp>
         <p:nvSpPr>
           <p:cNvPr id="19" name="TextBox 18"/>
@@ -48804,41 +46276,6 @@
           </a:p>
         </p:txBody>
       </p:sp>
-      <p:sp>
-        <p:nvSpPr>
-          <p:cNvPr id="22" name="TextBox 21"/>
-          <p:cNvSpPr txBox="1"/>
-          <p:nvPr/>
-        </p:nvSpPr>
-        <p:spPr>
-          <a:xfrm>
-            <a:off x="502920" y="384048"/>
-            <a:ext cx="1463040" cy="640080"/>
-          </a:xfrm>
-          <a:prstGeom prst="rect">
-            <a:avLst/>
-          </a:prstGeom>
-          <a:noFill/>
-        </p:spPr>
-        <p:txBody>
-          <a:bodyPr wrap="none" anchor="ctr" lIns="0" rIns="0" tIns="0" bIns="0">
-            <a:spAutoFit/>
-          </a:bodyPr>
-          <a:lstStyle/>
-          <a:p>
-            <a:pPr algn="l"/>
-            <a:r>
-              <a:rPr sz="3400" b="1">
-                <a:solidFill>
-                  <a:srgbClr val="FFFFFF"/>
-                </a:solidFill>
-                <a:latin typeface="Arial"/>
-              </a:rPr>
-              <a:t>LIG</a:t>
-            </a:r>
-          </a:p>
-        </p:txBody>
-      </p:sp>
       <p:cxnSp>
         <p:nvCxnSpPr>
           <p:cNvPr id="23" name="Connector 22"/>
@@ -48876,43 +46313,6 @@
       </p:cxnSp>
       <p:sp>
         <p:nvSpPr>
-          <p:cNvPr id="24" name="TextBox 23"/>
-          <p:cNvSpPr txBox="1"/>
-          <p:nvPr/>
-        </p:nvSpPr>
-        <p:spPr>
-          <a:xfrm>
-            <a:off x="9144000" y="640080"/>
-            <a:ext cx="2194560" cy="292608"/>
-          </a:xfrm>
-          <a:prstGeom prst="rect">
-            <a:avLst/>
-          </a:prstGeom>
-          <a:solidFill>
-            <a:srgbClr val="13233F"/>
-          </a:solidFill>
-        </p:spPr>
-        <p:txBody>
-          <a:bodyPr wrap="none" anchor="ctr" lIns="0" rIns="0" tIns="0" bIns="0">
-            <a:spAutoFit/>
-          </a:bodyPr>
-          <a:lstStyle/>
-          <a:p>
-            <a:pPr algn="ctr"/>
-            <a:r>
-              <a:rPr sz="1100" b="1">
-                <a:solidFill>
-                  <a:srgbClr val="FFFFFF"/>
-                </a:solidFill>
-                <a:latin typeface="Arial"/>
-              </a:rPr>
-              <a:t>LIG Defense&amp;Aerospace</a:t>
-            </a:r>
-          </a:p>
-        </p:txBody>
-      </p:sp>
-      <p:sp>
-        <p:nvSpPr>
           <p:cNvPr id="25" name="TextBox 24"/>
           <p:cNvSpPr txBox="1"/>
           <p:nvPr/>
@@ -49051,41 +46451,6 @@
           </a:fontRef>
         </p:style>
       </p:cxnSp>
-      <p:sp>
-        <p:nvSpPr>
-          <p:cNvPr id="29" name="TextBox 28"/>
-          <p:cNvSpPr txBox="1"/>
-          <p:nvPr/>
-        </p:nvSpPr>
-        <p:spPr>
-          <a:xfrm>
-            <a:off x="457200" y="6400800"/>
-            <a:ext cx="3200400" cy="274320"/>
-          </a:xfrm>
-          <a:prstGeom prst="rect">
-            <a:avLst/>
-          </a:prstGeom>
-          <a:noFill/>
-        </p:spPr>
-        <p:txBody>
-          <a:bodyPr wrap="none" anchor="t" lIns="0" rIns="0" tIns="0" bIns="0">
-            <a:spAutoFit/>
-          </a:bodyPr>
-          <a:lstStyle/>
-          <a:p>
-            <a:pPr algn="l"/>
-            <a:r>
-              <a:rPr sz="1000" b="1">
-                <a:solidFill>
-                  <a:srgbClr val="FFFFFF"/>
-                </a:solidFill>
-                <a:latin typeface="Arial"/>
-              </a:rPr>
-              <a:t>LIG Defense&amp;Aerospace</a:t>
-            </a:r>
-          </a:p>
-        </p:txBody>
-      </p:sp>
       <p:sp>
         <p:nvSpPr>
           <p:cNvPr id="30" name="TextBox 29"/>

--- a/Part2_CoordFrames/ref/산출물/Chapter2_coordinate_systems.pptx
+++ b/Part2_CoordFrames/ref/산출물/Chapter2_coordinate_systems.pptx
@@ -15,6 +15,8 @@
     <p:sldId id="263" r:id="rId9"/>
     <p:sldId id="292" r:id="rId32"/>
     <p:sldId id="265" r:id="rId11"/>
+    <p:sldId id="295" r:id="rId30"/>
+    <p:sldId id="267" r:id="rId13"/>
     <p:sldId id="268" r:id="rId14"/>
     <p:sldId id="271" r:id="rId17"/>
     <p:sldId id="272" r:id="rId18"/>
@@ -32,7 +34,6 @@
     <p:sldId id="290" r:id="rId41"/>
     <p:sldId id="287" r:id="rId33"/>
     <p:sldId id="288" r:id="rId34"/>
-    <p:sldId id="267" r:id="rId13"/>
     <p:sldId id="270" r:id="rId16"/>
     <p:sldId id="275" r:id="rId21"/>
   </p:sldIdLst>
@@ -622,12 +623,17 @@
           <a:lstStyle/>
           <a:p>
             <a:r>
-              <a:t>안테나 좌표계부터 시작합니다. 레이다가 물리적으로 재는 것은 거리 하나와 각도 둘입니다. R 은 전파 왕복시간으로 잰 시선거리, Az 는 보어사이트에서 오른쪽으로 잰 방위각, El 은 수평면에서 위로 잰 고각입니다. 보어사이트는 안테나가 똑바로 바라보는 방향, 신호가 가장 세게 나가고 들어오는 한가운데 방향입니다. 예제 값은 20 km, 30도, 0도입니다.</a:t>
-            </a:r>
-          </a:p>
-          <a:p>
-            <a:r>
-              <a:t>그런데 이 세 값은 그대로 회전할 수 없습니다. 회전행렬은 x, y, z 벡터에만 곱할 수 있기 때문입니다. 그래서 첫 단계는 극좌표를 직교좌표로 풀어 쓰는 것입니다. cos(El) 로 표적을 먼저 수평면에 눕히고, 그 길이를 Az 로 앞(x) 과 오른쪽(y) 에 나눠 담습니다. 위아래 z 는 sin(El) 몫인데, z 가 아래 방향이라 표적이 위에 있으면 음수가 됩니다. 이것은 표현만 바꾸는 것이라 회전도 이동도 없습니다. 예제 값을 넣은 결과는 뒤의 단계별 변환에서 보겠습니다.</a:t>
+              <a:t>레이다가 물리적으로 잴 수 있는 것은 거리 하나와 각도 둘입니다.</a:t>
+            </a:r>
+          </a:p>
+          <a:p>
+            <a:r>
+              <a:t>R 은 시선거리로 전파 왕복시간 곱하기 광속 나누기 2 입니다. Az 는 방위각으로 보어사이트에서 오른쪽으로 잰 각, El 은 고각으로 수평면에서 위로 잰 각입니다. 과제 예제값이 20 km, 30도, 0도입니다.</a:t>
+            </a:r>
+          </a:p>
+          <a:p>
+            <a:r>
+              <a:t>보어사이트는 안테나가 똑바로 바라보는 방향입니다. 안테나 신호가 가장 세게 나가고 가장 세게 들어오는 한가운데 방향입니다.</a:t>
             </a:r>
           </a:p>
         </p:txBody>
@@ -1147,12 +1153,17 @@
           <a:lstStyle/>
           <a:p>
             <a:r>
-              <a:t>INS 는 관성항법장치입니다. 자이로 세 개가 초당 몇 도씩 도는지를 재고, 이것을 시간에 대해 적분하면 자세, 즉 roll, pitch, yaw 가 나옵니다. 가속도계 세 개는 가속도를 재고, 중력을 빼고 두 번 적분하면 속도와 위치가 나옵니다. INS 는 바깥 세상을 전혀 보지 않습니다. 그래서 전파방해에 강하고 갱신이 빠르지만, 적분이라 오차가 시간과 함께 쌓이고 GPS 같은 외부 기준으로 잡아 줍니다. 현대 함정의 INS 는 센서를 동체에 직접 고정하는 스트랩다운 방식이고, 수평 유지는 기계가 아니라 계산이 합니다. 구조 비교는 부록 B 에 있습니다.</a:t>
-            </a:r>
-          </a:p>
-          <a:p>
-            <a:r>
-              <a:t>이번 설계에서 중요한 것은 조건 하나입니다. INS 는 플랫폼 무게중심과 축이 일치한 상태로 설치되어 있다. 그러면 INS 좌표계가 곧 동체 좌표계이고, 설치 오차도 레버암도 0 입니다. 따라서 INS 를 독립된 변환 단계로 두지 않습니다. INS 는 좌표계가 아니라 값의 공급원입니다. roll, pitch, yaw 는 3단계 회전행렬에 들어가고, 위도·경도·고도는 4단계 로컬에서 ECEF 로 가는 회전과 평행이동에 들어갑니다. 속도도 주지만 추적 필터와 도플러 보정에 쓰는 값이라 이 발표 범위 밖입니다.</a:t>
+              <a:t>배에 실린 모든 장비의 공통 기준입니다. 안테나, INS, 무장이 여기로 모입니다.</a:t>
+            </a:r>
+          </a:p>
+          <a:p>
+            <a:r>
+              <a:t>원점은 배의 무게중심, 축은 x 가 선수, y 가 우현, z 가 아래라서 FRD 라고 부릅니다. 자세각은 roll 이 좌우 기울기, pitch 가 앞뒤 기울기, yaw 가 선수 방위입니다.</a:t>
+            </a:r>
+          </a:p>
+          <a:p>
+            <a:r>
+              <a:t>주의할 점은 합치는 순서입니다. 회전은 곱셈 순서를 바꾸면 결과가 달라집니다. 그래서 yaw, pitch, roll 순서인 3-2-1 을 문서로 고정해야 합니다. 구현에서도 Rz(yaw) · Ry(pitch) · Rx(roll) 순서로 곱합니다.</a:t>
             </a:r>
           </a:p>
         </p:txBody>
@@ -2436,6 +2447,91 @@
 </p:notes>
 </file>
 
+<file path=ppt/notesSlides/notesSlide29.xml><?xml version="1.0" encoding="utf-8"?>
+<p:notes xmlns:a="http://schemas.openxmlformats.org/drawingml/2006/main" xmlns:p="http://schemas.openxmlformats.org/presentationml/2006/main" xmlns:r="http://schemas.openxmlformats.org/officeDocument/2006/relationships">
+  <p:cSld>
+    <p:spTree>
+      <p:nvGrpSpPr>
+        <p:cNvPr id="1" name=""/>
+        <p:cNvGrpSpPr/>
+        <p:nvPr/>
+      </p:nvGrpSpPr>
+      <p:grpSpPr>
+        <a:xfrm>
+          <a:off x="0" y="0"/>
+          <a:ext cx="0" cy="0"/>
+          <a:chOff x="0" y="0"/>
+          <a:chExt cx="0" cy="0"/>
+        </a:xfrm>
+      </p:grpSpPr>
+      <p:sp>
+        <p:nvSpPr>
+          <p:cNvPr id="2" name="Slide Image Placeholder 1"/>
+          <p:cNvSpPr>
+            <a:spLocks noGrp="1"/>
+          </p:cNvSpPr>
+          <p:nvPr>
+            <p:ph type="sldImg" idx="2"/>
+          </p:nvPr>
+        </p:nvSpPr>
+        <p:spPr/>
+      </p:sp>
+      <p:sp>
+        <p:nvSpPr>
+          <p:cNvPr id="3" name="Notes Placeholder 2"/>
+          <p:cNvSpPr>
+            <a:spLocks noGrp="1"/>
+          </p:cNvSpPr>
+          <p:nvPr>
+            <p:ph type="body" idx="3" sz="quarter"/>
+          </p:nvPr>
+        </p:nvSpPr>
+        <p:spPr/>
+        <p:txBody>
+          <a:bodyPr/>
+          <a:lstStyle/>
+          <a:p>
+            <a:r>
+              <a:t>회전행렬을 곱하려면 x, y, z 세 성분으로 풀어써야 합니다. x 는 R cos(El) cos(Az) 로 보어사이트 방향 성분, y 는 R cos(El) sin(Az) 로 오른쪽 성분, z 는 −R sin(El) 로 아래 방향 성분입니다.</a:t>
+            </a:r>
+          </a:p>
+          <a:p>
+            <a:r>
+              <a:t>예제값을 넣으면 x 는 +17,320.5081 m, y 는 +10,000 m, z 는 0 입니다.</a:t>
+            </a:r>
+          </a:p>
+          <a:p>
+            <a:r>
+              <a:t>왜 직교좌표로 바꾸느냐 하면, 극좌표끼리는 회전을 합성할 수 없기 때문입니다. 회전행렬은 벡터에만 곱할 수 있으니, 각도로 표현된 방향을 세 성분으로 풀어쓰는 준비 단계입니다.</a:t>
+            </a:r>
+          </a:p>
+          <a:p>
+            <a:r>
+              <a:t>역변환에서는 asin 대신 atan2 를 씁니다. 반올림으로 인자가 1 을 살짝 넘으면 asin 은 NaN 을 내고, ±90도 근처에서 정밀도가 무너지기 때문입니다. 식을 읽는 법은 이렇습니다. cos(El) 로 표적을 먼저 수평면에 눕히고, 그 길이를 Az 로 앞과 오른쪽에 나눠 담습니다. 위아래는 sin(El) 몫이고, z 축은 아래가 양수라서 표적이 위에 있으면 z 가 음수가 됩니다.</a:t>
+            </a:r>
+          </a:p>
+        </p:txBody>
+      </p:sp>
+      <p:sp>
+        <p:nvSpPr>
+          <p:cNvPr id="4" name="Slide Number Placeholder 3"/>
+          <p:cNvSpPr>
+            <a:spLocks noGrp="1"/>
+          </p:cNvSpPr>
+          <p:nvPr>
+            <p:ph type="sldNum" idx="5" sz="quarter"/>
+          </p:nvPr>
+        </p:nvSpPr>
+        <p:spPr/>
+      </p:sp>
+    </p:spTree>
+  </p:cSld>
+  <p:clrMapOvr>
+    <a:masterClrMapping/>
+  </p:clrMapOvr>
+</p:notes>
+</file>
+
 <file path=ppt/notesSlides/notesSlide3.xml><?xml version="1.0" encoding="utf-8"?>
 <p:notes xmlns:a="http://schemas.openxmlformats.org/drawingml/2006/main" xmlns:r="http://schemas.openxmlformats.org/officeDocument/2006/relationships" xmlns:p="http://schemas.openxmlformats.org/presentationml/2006/main">
   <p:cSld>
@@ -3161,22 +3257,24 @@
               <a:t>복잡한 수학처럼 들리지만 실제로 하는 일은 두 가지입니다.</a:t>
             </a:r>
           </a:p>
-          <a:p/>
           <a:p>
             <a:r>
               <a:t>하나는 회전입니다. 기준 방향이 다를 때 필요합니다. 안테나가 우현 90도를 보고 있으니 안테나의 "앞" 은 배의 "오른쪽" 입니다.</a:t>
             </a:r>
           </a:p>
-          <a:p/>
           <a:p>
             <a:r>
               <a:t>다른 하나는 평행이동입니다. 기준점이 다를 때 필요합니다. 안테나가 무게중심에서 30 m 뒤, 10 m 위에 있으면 그만큼 옮겨줘야 합니다. 이 오프셋을 레버암이라고 부릅니다.</a:t>
             </a:r>
           </a:p>
-          <a:p/>
           <a:p>
             <a:r>
               <a:t>아래 식이 그 둘을 한 줄로 쓴 것입니다. 함선 좌표 = Rz(90°) 곱하기 안테나 좌표, 더하기 (−30, 0, −10). Rz(90°) 는 z 축, 즉 위아래 축 둘레로 90도 돌리는 회전행렬인데 생김새는 다음 두 장에서 나옵니다. 모든 단계는 이 둘 중 하나거나 둘 다입니다. 그게 전부입니다.</a:t>
+            </a:r>
+          </a:p>
+          <a:p>
+            <a:r>
+              <a:t>아래 그림이 이 두 동작을 행렬로 적은 것입니다. 새 좌표는 회전행렬 R 에 옛 좌표를 곱하고 평행이동 t 를 더한 것이고, 오른쪽은 예제 조건으로 안테나 좌표를 동체 좌표로 옮긴 실제 숫자입니다. Rz(90°) 가 x 와 y 의 자리를 바꾸고 부호를 뒤집은 뒤, 레버암 (−30, 0, −10) 을 더하면 동체 좌표가 나옵니다.</a:t>
             </a:r>
           </a:p>
         </p:txBody>
@@ -4570,8 +4668,8 @@
         </p:blipFill>
         <p:spPr>
           <a:xfrm>
-            <a:off x="566928" y="1810512"/>
-            <a:ext cx="6400800" cy="3009900"/>
+            <a:off x="566928" y="2002536"/>
+            <a:ext cx="7680960" cy="3611880"/>
           </a:xfrm>
           <a:prstGeom prst="rect">
             <a:avLst/>
@@ -4586,8 +4684,8 @@
         </p:nvSpPr>
         <p:spPr>
           <a:xfrm>
-            <a:off x="7223760" y="1810512"/>
-            <a:ext cx="4407408" cy="4389120"/>
+            <a:off x="8485632" y="1801368"/>
+            <a:ext cx="3145536" cy="3895344"/>
           </a:xfrm>
           <a:prstGeom prst="roundRect">
             <a:avLst>
@@ -4617,8 +4715,8 @@
         </p:nvSpPr>
         <p:spPr>
           <a:xfrm>
-            <a:off x="7479792" y="1993392"/>
-            <a:ext cx="3895344" cy="329184"/>
+            <a:off x="8741664" y="2039112"/>
+            <a:ext cx="2651760" cy="329184"/>
           </a:xfrm>
           <a:prstGeom prst="rect">
             <a:avLst/>
@@ -4656,8 +4754,8 @@
         </p:nvSpPr>
         <p:spPr>
           <a:xfrm>
-            <a:off x="7479792" y="2395728"/>
-            <a:ext cx="3895344" cy="2103120"/>
+            <a:off x="8741664" y="2459736"/>
+            <a:ext cx="2651760" cy="2286000"/>
           </a:xfrm>
           <a:prstGeom prst="rect">
             <a:avLst/>
@@ -4816,8 +4914,8 @@
         </p:nvSpPr>
         <p:spPr>
           <a:xfrm>
-            <a:off x="7479792" y="4617720"/>
-            <a:ext cx="3895344" cy="502920"/>
+            <a:off x="8741664" y="4965192"/>
+            <a:ext cx="2651760" cy="548640"/>
           </a:xfrm>
           <a:prstGeom prst="roundRect">
             <a:avLst>
@@ -4847,8 +4945,8 @@
         </p:nvSpPr>
         <p:spPr>
           <a:xfrm>
-            <a:off x="7479792" y="4617720"/>
-            <a:ext cx="3895344" cy="502920"/>
+            <a:off x="8741664" y="4965192"/>
+            <a:ext cx="2651760" cy="548640"/>
           </a:xfrm>
           <a:prstGeom prst="rect">
             <a:avLst/>
@@ -4886,8 +4984,8 @@
         </p:nvSpPr>
         <p:spPr>
           <a:xfrm>
-            <a:off x="7479792" y="5285232"/>
-            <a:ext cx="3895344" cy="777240"/>
+            <a:off x="566928" y="5870448"/>
+            <a:ext cx="11064240" cy="365760"/>
           </a:xfrm>
           <a:prstGeom prst="rect">
             <a:avLst/>
@@ -4995,7 +5093,7 @@
                 </a:solidFill>
                 <a:latin typeface="맑은 고딕"/>
               </a:rPr>
-              <a:t>01. 안테나 좌표계</a:t>
+              <a:t>01. 안테나 좌표계 ①  극좌표 (Polar)</a:t>
             </a:r>
           </a:p>
           <a:p>
@@ -5011,7 +5109,7 @@
                 </a:solidFill>
                 <a:latin typeface="맑은 고딕"/>
               </a:rPr>
-              <a:t>레이다가 재는 것은 거리 하나와 각도 둘. 회전행렬을 곱하려면 세 성분으로 풀어 써야 합니다</a:t>
+              <a:t>레이다가 물리적으로 잴 수 있는 것 — 거리 하나와 각도 둘</a:t>
             </a:r>
           </a:p>
         </p:txBody>
@@ -5084,151 +5182,6 @@
               </a:rPr>
               <a:t>1</a:t>
             </a:fld>
-          </a:p>
-        </p:txBody>
-      </p:sp>
-      <p:sp>
-        <p:nvSpPr>
-          <p:cNvPr id="35" name="Rounded Rectangle 34"/>
-          <p:cNvSpPr/>
-          <p:nvPr/>
-        </p:nvSpPr>
-        <p:spPr>
-          <a:xfrm>
-            <a:off x="566928" y="4956048"/>
-            <a:ext cx="6400800" cy="1243584"/>
-          </a:xfrm>
-          <a:prstGeom prst="roundRect">
-            <a:avLst>
-              <a:gd name="adj" fmla="val 2000"/>
-            </a:avLst>
-          </a:prstGeom>
-          <a:solidFill>
-            <a:srgbClr val="F4F6FA"/>
-          </a:solidFill>
-          <a:ln>
-            <a:noFill/>
-          </a:ln>
-          <a:effectLst/>
-        </p:spPr>
-        <p:style>
-          <a:lnRef idx="1">
-            <a:schemeClr val="accent1"/>
-          </a:lnRef>
-          <a:fillRef idx="3">
-            <a:schemeClr val="accent1"/>
-          </a:fillRef>
-          <a:effectRef idx="2">
-            <a:schemeClr val="accent1"/>
-          </a:effectRef>
-          <a:fontRef idx="minor">
-            <a:schemeClr val="lt1"/>
-          </a:fontRef>
-        </p:style>
-        <p:txBody>
-          <a:bodyPr rtlCol="0" anchor="ctr"/>
-          <a:lstStyle/>
-          <a:p>
-            <a:pPr algn="ctr"/>
-          </a:p>
-        </p:txBody>
-      </p:sp>
-      <p:sp>
-        <p:nvSpPr>
-          <p:cNvPr id="36" name="Text formulas"/>
-          <p:cNvSpPr txBox="1"/>
-          <p:nvPr/>
-        </p:nvSpPr>
-        <p:spPr>
-          <a:xfrm>
-            <a:off x="777240" y="5029200"/>
-            <a:ext cx="5989320" cy="1115568"/>
-          </a:xfrm>
-          <a:prstGeom prst="rect">
-            <a:avLst/>
-          </a:prstGeom>
-          <a:noFill/>
-        </p:spPr>
-        <p:txBody>
-          <a:bodyPr wrap="square" anchor="t" lIns="0" rIns="0" tIns="0" bIns="0">
-            <a:spAutoFit/>
-          </a:bodyPr>
-          <a:lstStyle/>
-          <a:p>
-            <a:pPr marL="0" indent="0">
-              <a:lnSpc>
-                <a:spcPts val="1550"/>
-              </a:lnSpc>
-              <a:buNone/>
-            </a:pPr>
-            <a:r>
-              <a:rPr sz="1150" b="1" lang="ko-KR">
-                <a:solidFill>
-                  <a:srgbClr val="1A2233"/>
-                </a:solidFill>
-                <a:latin typeface="맑은 고딕"/>
-                <a:ea typeface="맑은 고딕"/>
-                <a:cs typeface="맑은 고딕"/>
-              </a:rPr>
-              <a:t>극좌표 → 직교좌표.  회전행렬은 x·y·z 벡터에만 곱할 수 있어서 세 성분으로 풀어 씁니다</a:t>
-            </a:r>
-          </a:p>
-          <a:p>
-            <a:pPr marL="0" indent="0">
-              <a:lnSpc>
-                <a:spcPts val="1550"/>
-              </a:lnSpc>
-              <a:buNone/>
-            </a:pPr>
-            <a:r>
-              <a:rPr sz="1100" b="0" lang="ko-KR">
-                <a:solidFill>
-                  <a:srgbClr val="1A2233"/>
-                </a:solidFill>
-                <a:latin typeface="Consolas"/>
-                <a:ea typeface="Consolas"/>
-                <a:cs typeface="Consolas"/>
-              </a:rPr>
-              <a:t>x = R·cos(El)·cos(Az)    ← 보어사이트 방향 성분</a:t>
-            </a:r>
-          </a:p>
-          <a:p>
-            <a:pPr marL="0" indent="0">
-              <a:lnSpc>
-                <a:spcPts val="1550"/>
-              </a:lnSpc>
-              <a:buNone/>
-            </a:pPr>
-            <a:r>
-              <a:rPr sz="1100" b="0" lang="ko-KR">
-                <a:solidFill>
-                  <a:srgbClr val="1A2233"/>
-                </a:solidFill>
-                <a:latin typeface="Consolas"/>
-                <a:ea typeface="Consolas"/>
-                <a:cs typeface="Consolas"/>
-              </a:rPr>
-              <a:t>y = R·cos(El)·sin(Az)    ← 오른쪽 방향 성분</a:t>
-            </a:r>
-          </a:p>
-          <a:p>
-            <a:pPr marL="0" indent="0">
-              <a:lnSpc>
-                <a:spcPts val="1550"/>
-              </a:lnSpc>
-              <a:buNone/>
-            </a:pPr>
-            <a:r>
-              <a:rPr sz="1100" b="0" lang="ko-KR">
-                <a:solidFill>
-                  <a:srgbClr val="1A2233"/>
-                </a:solidFill>
-                <a:latin typeface="Consolas"/>
-                <a:ea typeface="Consolas"/>
-                <a:cs typeface="Consolas"/>
-              </a:rPr>
-              <a:t>z = −R·sin(El)           ← 아래 방향 성분 (위로 향하면 음수)</a:t>
-            </a:r>
           </a:p>
         </p:txBody>
       </p:sp>
@@ -8497,7 +8450,7 @@
                 <a:ea typeface="맑은 고딕"/>
                 <a:cs typeface="맑은 고딕"/>
               </a:rPr>
-              <a:t>센서가 동체에 고정되어 배와 함께 기울고, 수평 유지는 계산이 한다  →  부록 B</a:t>
+              <a:t>센서가 동체에 고정되어 배와 함께 기울고, 수평 유지는 계산이 한다  →  부록 A</a:t>
             </a:r>
           </a:p>
         </p:txBody>
@@ -30990,7 +30943,7 @@
                 </a:solidFill>
                 <a:latin typeface="맑은 고딕"/>
               </a:rPr>
-              <a:t>부록 A.  UV (방향코사인)</a:t>
+              <a:t>01. 안테나 좌표계 ③  UV (방향코사인)</a:t>
             </a:r>
           </a:p>
           <a:p>
@@ -32875,7 +32828,7 @@
                 </a:solidFill>
                 <a:latin typeface="맑은 고딕"/>
               </a:rPr>
-              <a:t>부록 B.  스트랩다운과 짐벌형</a:t>
+              <a:t>부록 A.  스트랩다운과 짐벌형</a:t>
             </a:r>
           </a:p>
           <a:p>
@@ -36626,7 +36579,7 @@
                 </a:solidFill>
                 <a:latin typeface="맑은 고딕"/>
               </a:rPr>
-              <a:t>부록 C.  여섯 좌표계 한눈에</a:t>
+              <a:t>부록 B.  여섯 좌표계 한눈에</a:t>
             </a:r>
           </a:p>
         </p:txBody>
@@ -36669,6 +36622,1490 @@
       <p:sp>
         <p:nvSpPr>
           <p:cNvPr id="28" name="TextBox 27"/>
+          <p:cNvSpPr txBox="1"/>
+          <p:nvPr/>
+        </p:nvSpPr>
+        <p:spPr>
+          <a:xfrm>
+            <a:off x="5669280" y="6400800"/>
+            <a:ext cx="914400" cy="274320"/>
+          </a:xfrm>
+          <a:prstGeom prst="rect">
+            <a:avLst/>
+          </a:prstGeom>
+          <a:noFill/>
+        </p:spPr>
+        <p:txBody>
+          <a:bodyPr wrap="none" lIns="0" rIns="0" tIns="0" bIns="0">
+            <a:spAutoFit/>
+          </a:bodyPr>
+          <a:lstStyle/>
+          <a:p>
+            <a:pPr algn="ctr"/>
+            <a:fld id="{1D0B0B0B-0000-4000-8000-00000000C0DE}" type="slidenum">
+              <a:rPr lang="ko-KR" altLang="en-US" sz="1000" b="0" dirty="0">
+                <a:solidFill>
+                  <a:srgbClr val="1A2233"/>
+                </a:solidFill>
+                <a:latin typeface="Arial"/>
+                <a:ea typeface="Arial"/>
+              </a:rPr>
+              <a:t>1</a:t>
+            </a:fld>
+          </a:p>
+        </p:txBody>
+      </p:sp>
+    </p:spTree>
+  </p:cSld>
+  <p:clrMapOvr>
+    <a:masterClrMapping/>
+  </p:clrMapOvr>
+</p:sld>
+</file>
+
+<file path=ppt/slides/slide31.xml><?xml version="1.0" encoding="utf-8"?>
+<p:sld xmlns:a="http://schemas.openxmlformats.org/drawingml/2006/main" xmlns:p="http://schemas.openxmlformats.org/presentationml/2006/main" xmlns:r="http://schemas.openxmlformats.org/officeDocument/2006/relationships">
+  <p:cSld>
+    <p:bg>
+      <p:bgPr>
+        <a:solidFill>
+          <a:srgbClr val="E8EDF5"/>
+        </a:solidFill>
+        <a:effectLst/>
+      </p:bgPr>
+    </p:bg>
+    <p:spTree>
+      <p:nvGrpSpPr>
+        <p:cNvPr id="1" name=""/>
+        <p:cNvGrpSpPr/>
+        <p:nvPr/>
+      </p:nvGrpSpPr>
+      <p:grpSpPr/>
+      <p:sp>
+        <p:nvSpPr>
+          <p:cNvPr id="31" name="Rectangle 30"/>
+          <p:cNvSpPr/>
+          <p:nvPr/>
+        </p:nvSpPr>
+        <p:spPr>
+          <a:xfrm>
+            <a:off x="457200" y="1243584"/>
+            <a:ext cx="11277295" cy="5047488"/>
+          </a:xfrm>
+          <a:prstGeom prst="rect">
+            <a:avLst/>
+          </a:prstGeom>
+          <a:solidFill>
+            <a:srgbClr val="FFFFFF"/>
+          </a:solidFill>
+          <a:ln>
+            <a:noFill/>
+          </a:ln>
+          <a:effectLst/>
+        </p:spPr>
+        <p:style>
+          <a:lnRef idx="1">
+            <a:schemeClr val="accent1"/>
+          </a:lnRef>
+          <a:fillRef idx="3">
+            <a:schemeClr val="accent1"/>
+          </a:fillRef>
+          <a:effectRef idx="2">
+            <a:schemeClr val="accent1"/>
+          </a:effectRef>
+          <a:fontRef idx="minor">
+            <a:schemeClr val="lt1"/>
+          </a:fontRef>
+        </p:style>
+        <p:txBody>
+          <a:bodyPr rtlCol="0" anchor="ctr" wrap="none"/>
+          <a:lstStyle/>
+          <a:p>
+            <a:pPr algn="ctr"/>
+          </a:p>
+        </p:txBody>
+      </p:sp>
+      <p:sp>
+        <p:nvSpPr>
+          <p:cNvPr id="4" name="Shape 2"/>
+          <p:cNvSpPr/>
+          <p:nvPr/>
+        </p:nvSpPr>
+        <p:spPr>
+          <a:xfrm>
+            <a:off x="2112264" y="1371600"/>
+            <a:ext cx="1170432" cy="329184"/>
+          </a:xfrm>
+          <a:prstGeom prst="roundRect">
+            <a:avLst>
+              <a:gd name="adj" fmla="val 47222"/>
+            </a:avLst>
+          </a:prstGeom>
+          <a:solidFill>
+            <a:srgbClr val="EEF1F7"/>
+          </a:solidFill>
+          <a:ln w="12700">
+            <a:solidFill>
+              <a:srgbClr val="C9D6EC"/>
+            </a:solidFill>
+            <a:prstDash val="solid"/>
+          </a:ln>
+        </p:spPr>
+        <p:txBody>
+          <a:bodyPr/>
+          <a:p/>
+        </p:txBody>
+      </p:sp>
+      <p:sp>
+        <p:nvSpPr>
+          <p:cNvPr id="5" name="Text 3"/>
+          <p:cNvSpPr txBox="1"/>
+          <p:nvPr/>
+        </p:nvSpPr>
+        <p:spPr>
+          <a:xfrm>
+            <a:off x="2112264" y="1371600"/>
+            <a:ext cx="1170432" cy="329184"/>
+          </a:xfrm>
+          <a:prstGeom prst="rect">
+            <a:avLst/>
+          </a:prstGeom>
+          <a:noFill/>
+          <a:ln/>
+        </p:spPr>
+        <p:txBody>
+          <a:bodyPr wrap="square" lIns="0" tIns="0" rIns="0" bIns="0" rtlCol="0" anchor="ctr"/>
+          <a:lstStyle/>
+          <a:p>
+            <a:pPr algn="ctr" indent="0" marL="0">
+              <a:buNone/>
+            </a:pPr>
+            <a:r>
+              <a:rPr lang="en-US" sz="1100" dirty="0">
+                <a:solidFill>
+                  <a:srgbClr val="5A6478"/>
+                </a:solidFill>
+                <a:latin typeface="맑은 고딕" pitchFamily="34" charset="0"/>
+                <a:ea typeface="맑은 고딕" pitchFamily="34" charset="-122"/>
+                <a:cs typeface="맑은 고딕" pitchFamily="34" charset="-120"/>
+              </a:rPr>
+              <a:t>측정</a:t>
+            </a:r>
+            <a:endParaRPr lang="en-US" sz="1100" dirty="0"/>
+          </a:p>
+        </p:txBody>
+      </p:sp>
+      <p:sp>
+        <p:nvSpPr>
+          <p:cNvPr id="6" name="Text 4"/>
+          <p:cNvSpPr txBox="1"/>
+          <p:nvPr/>
+        </p:nvSpPr>
+        <p:spPr>
+          <a:xfrm>
+            <a:off x="3282696" y="1371600"/>
+            <a:ext cx="182880" cy="329184"/>
+          </a:xfrm>
+          <a:prstGeom prst="rect">
+            <a:avLst/>
+          </a:prstGeom>
+          <a:noFill/>
+          <a:ln/>
+        </p:spPr>
+        <p:txBody>
+          <a:bodyPr wrap="square" lIns="0" tIns="0" rIns="0" bIns="0" rtlCol="0" anchor="ctr"/>
+          <a:lstStyle/>
+          <a:p>
+            <a:pPr algn="ctr" indent="0" marL="0">
+              <a:buNone/>
+            </a:pPr>
+            <a:r>
+              <a:rPr lang="en-US" sz="1000" dirty="0">
+                <a:solidFill>
+                  <a:srgbClr val="C9D6EC"/>
+                </a:solidFill>
+              </a:rPr>
+              <a:t>▸</a:t>
+            </a:r>
+            <a:endParaRPr lang="en-US" sz="1000" dirty="0"/>
+          </a:p>
+        </p:txBody>
+      </p:sp>
+      <p:sp>
+        <p:nvSpPr>
+          <p:cNvPr id="7" name="Shape 5"/>
+          <p:cNvSpPr/>
+          <p:nvPr/>
+        </p:nvSpPr>
+        <p:spPr>
+          <a:xfrm>
+            <a:off x="3465576" y="1371600"/>
+            <a:ext cx="1170432" cy="329184"/>
+          </a:xfrm>
+          <a:prstGeom prst="roundRect">
+            <a:avLst>
+              <a:gd name="adj" fmla="val 47222"/>
+            </a:avLst>
+          </a:prstGeom>
+          <a:solidFill>
+            <a:srgbClr val="C2521C"/>
+          </a:solidFill>
+          <a:ln w="12700">
+            <a:solidFill>
+              <a:srgbClr val="C2521C"/>
+            </a:solidFill>
+            <a:prstDash val="solid"/>
+          </a:ln>
+        </p:spPr>
+        <p:txBody>
+          <a:bodyPr/>
+          <a:p/>
+        </p:txBody>
+      </p:sp>
+      <p:sp>
+        <p:nvSpPr>
+          <p:cNvPr id="8" name="Text 6"/>
+          <p:cNvSpPr txBox="1"/>
+          <p:nvPr/>
+        </p:nvSpPr>
+        <p:spPr>
+          <a:xfrm>
+            <a:off x="3465576" y="1371600"/>
+            <a:ext cx="1170432" cy="329184"/>
+          </a:xfrm>
+          <a:prstGeom prst="rect">
+            <a:avLst/>
+          </a:prstGeom>
+          <a:noFill/>
+          <a:ln/>
+        </p:spPr>
+        <p:txBody>
+          <a:bodyPr wrap="square" lIns="0" tIns="0" rIns="0" bIns="0" rtlCol="0" anchor="ctr"/>
+          <a:lstStyle/>
+          <a:p>
+            <a:pPr algn="ctr" indent="0" marL="0">
+              <a:buNone/>
+            </a:pPr>
+            <a:r>
+              <a:rPr lang="en-US" sz="1100" b="1" dirty="0">
+                <a:solidFill>
+                  <a:srgbClr val="FFFFFF"/>
+                </a:solidFill>
+                <a:latin typeface="맑은 고딕" pitchFamily="34" charset="0"/>
+                <a:ea typeface="맑은 고딕" pitchFamily="34" charset="-122"/>
+                <a:cs typeface="맑은 고딕" pitchFamily="34" charset="-120"/>
+              </a:rPr>
+              <a:t>안테나</a:t>
+            </a:r>
+            <a:endParaRPr lang="en-US" sz="1100" dirty="0"/>
+          </a:p>
+        </p:txBody>
+      </p:sp>
+      <p:sp>
+        <p:nvSpPr>
+          <p:cNvPr id="9" name="Text 7"/>
+          <p:cNvSpPr txBox="1"/>
+          <p:nvPr/>
+        </p:nvSpPr>
+        <p:spPr>
+          <a:xfrm>
+            <a:off x="4636008" y="1371600"/>
+            <a:ext cx="182880" cy="329184"/>
+          </a:xfrm>
+          <a:prstGeom prst="rect">
+            <a:avLst/>
+          </a:prstGeom>
+          <a:noFill/>
+          <a:ln/>
+        </p:spPr>
+        <p:txBody>
+          <a:bodyPr wrap="square" lIns="0" tIns="0" rIns="0" bIns="0" rtlCol="0" anchor="ctr"/>
+          <a:lstStyle/>
+          <a:p>
+            <a:pPr algn="ctr" indent="0" marL="0">
+              <a:buNone/>
+            </a:pPr>
+            <a:r>
+              <a:rPr lang="en-US" sz="1000" dirty="0">
+                <a:solidFill>
+                  <a:srgbClr val="C9D6EC"/>
+                </a:solidFill>
+              </a:rPr>
+              <a:t>▸</a:t>
+            </a:r>
+            <a:endParaRPr lang="en-US" sz="1000" dirty="0"/>
+          </a:p>
+        </p:txBody>
+      </p:sp>
+      <p:sp>
+        <p:nvSpPr>
+          <p:cNvPr id="10" name="Shape 8"/>
+          <p:cNvSpPr/>
+          <p:nvPr/>
+        </p:nvSpPr>
+        <p:spPr>
+          <a:xfrm>
+            <a:off x="4818888" y="1371600"/>
+            <a:ext cx="1170432" cy="329184"/>
+          </a:xfrm>
+          <a:prstGeom prst="roundRect">
+            <a:avLst>
+              <a:gd name="adj" fmla="val 47222"/>
+            </a:avLst>
+          </a:prstGeom>
+          <a:solidFill>
+            <a:srgbClr val="EEF1F7"/>
+          </a:solidFill>
+          <a:ln w="12700">
+            <a:solidFill>
+              <a:srgbClr val="C9D6EC"/>
+            </a:solidFill>
+            <a:prstDash val="solid"/>
+          </a:ln>
+        </p:spPr>
+        <p:txBody>
+          <a:bodyPr/>
+          <a:p/>
+        </p:txBody>
+      </p:sp>
+      <p:sp>
+        <p:nvSpPr>
+          <p:cNvPr id="11" name="Text 9"/>
+          <p:cNvSpPr txBox="1"/>
+          <p:nvPr/>
+        </p:nvSpPr>
+        <p:spPr>
+          <a:xfrm>
+            <a:off x="4818888" y="1371600"/>
+            <a:ext cx="1170432" cy="329184"/>
+          </a:xfrm>
+          <a:prstGeom prst="rect">
+            <a:avLst/>
+          </a:prstGeom>
+          <a:noFill/>
+          <a:ln/>
+        </p:spPr>
+        <p:txBody>
+          <a:bodyPr wrap="square" lIns="0" tIns="0" rIns="0" bIns="0" rtlCol="0" anchor="ctr"/>
+          <a:lstStyle/>
+          <a:p>
+            <a:pPr algn="ctr" indent="0" marL="0">
+              <a:buNone/>
+            </a:pPr>
+            <a:r>
+              <a:rPr lang="en-US" sz="1100" dirty="0">
+                <a:solidFill>
+                  <a:srgbClr val="5A6478"/>
+                </a:solidFill>
+                <a:latin typeface="맑은 고딕" pitchFamily="34" charset="0"/>
+                <a:ea typeface="맑은 고딕" pitchFamily="34" charset="-122"/>
+                <a:cs typeface="맑은 고딕" pitchFamily="34" charset="-120"/>
+              </a:rPr>
+              <a:t>동체</a:t>
+            </a:r>
+            <a:endParaRPr lang="en-US" sz="1100" dirty="0"/>
+          </a:p>
+        </p:txBody>
+      </p:sp>
+      <p:sp>
+        <p:nvSpPr>
+          <p:cNvPr id="12" name="Text 10"/>
+          <p:cNvSpPr txBox="1"/>
+          <p:nvPr/>
+        </p:nvSpPr>
+        <p:spPr>
+          <a:xfrm>
+            <a:off x="5989320" y="1371600"/>
+            <a:ext cx="182880" cy="329184"/>
+          </a:xfrm>
+          <a:prstGeom prst="rect">
+            <a:avLst/>
+          </a:prstGeom>
+          <a:noFill/>
+          <a:ln/>
+        </p:spPr>
+        <p:txBody>
+          <a:bodyPr wrap="square" lIns="0" tIns="0" rIns="0" bIns="0" rtlCol="0" anchor="ctr"/>
+          <a:lstStyle/>
+          <a:p>
+            <a:pPr algn="ctr" indent="0" marL="0">
+              <a:buNone/>
+            </a:pPr>
+            <a:r>
+              <a:rPr lang="en-US" sz="1000" dirty="0">
+                <a:solidFill>
+                  <a:srgbClr val="C9D6EC"/>
+                </a:solidFill>
+              </a:rPr>
+              <a:t>▸</a:t>
+            </a:r>
+            <a:endParaRPr lang="en-US" sz="1000" dirty="0"/>
+          </a:p>
+        </p:txBody>
+      </p:sp>
+      <p:sp>
+        <p:nvSpPr>
+          <p:cNvPr id="13" name="Shape 11"/>
+          <p:cNvSpPr/>
+          <p:nvPr/>
+        </p:nvSpPr>
+        <p:spPr>
+          <a:xfrm>
+            <a:off x="6172200" y="1371600"/>
+            <a:ext cx="1170432" cy="329184"/>
+          </a:xfrm>
+          <a:prstGeom prst="roundRect">
+            <a:avLst>
+              <a:gd name="adj" fmla="val 47222"/>
+            </a:avLst>
+          </a:prstGeom>
+          <a:solidFill>
+            <a:srgbClr val="EEF1F7"/>
+          </a:solidFill>
+          <a:ln w="12700">
+            <a:solidFill>
+              <a:srgbClr val="C9D6EC"/>
+            </a:solidFill>
+            <a:prstDash val="solid"/>
+          </a:ln>
+        </p:spPr>
+        <p:txBody>
+          <a:bodyPr/>
+          <a:p/>
+        </p:txBody>
+      </p:sp>
+      <p:sp>
+        <p:nvSpPr>
+          <p:cNvPr id="14" name="Text 12"/>
+          <p:cNvSpPr txBox="1"/>
+          <p:nvPr/>
+        </p:nvSpPr>
+        <p:spPr>
+          <a:xfrm>
+            <a:off x="6172200" y="1371600"/>
+            <a:ext cx="1170432" cy="329184"/>
+          </a:xfrm>
+          <a:prstGeom prst="rect">
+            <a:avLst/>
+          </a:prstGeom>
+          <a:noFill/>
+          <a:ln/>
+        </p:spPr>
+        <p:txBody>
+          <a:bodyPr wrap="square" lIns="0" tIns="0" rIns="0" bIns="0" rtlCol="0" anchor="ctr"/>
+          <a:lstStyle/>
+          <a:p>
+            <a:pPr algn="ctr" indent="0" marL="0">
+              <a:buNone/>
+            </a:pPr>
+            <a:r>
+              <a:rPr lang="en-US" sz="1100" dirty="0">
+                <a:solidFill>
+                  <a:srgbClr val="5A6478"/>
+                </a:solidFill>
+                <a:latin typeface="맑은 고딕" pitchFamily="34" charset="0"/>
+                <a:ea typeface="맑은 고딕" pitchFamily="34" charset="-122"/>
+                <a:cs typeface="맑은 고딕" pitchFamily="34" charset="-120"/>
+              </a:rPr>
+              <a:t>NED</a:t>
+            </a:r>
+            <a:endParaRPr lang="en-US" sz="1100" dirty="0"/>
+          </a:p>
+        </p:txBody>
+      </p:sp>
+      <p:sp>
+        <p:nvSpPr>
+          <p:cNvPr id="15" name="Text 13"/>
+          <p:cNvSpPr txBox="1"/>
+          <p:nvPr/>
+        </p:nvSpPr>
+        <p:spPr>
+          <a:xfrm>
+            <a:off x="7342632" y="1371600"/>
+            <a:ext cx="182880" cy="329184"/>
+          </a:xfrm>
+          <a:prstGeom prst="rect">
+            <a:avLst/>
+          </a:prstGeom>
+          <a:noFill/>
+          <a:ln/>
+        </p:spPr>
+        <p:txBody>
+          <a:bodyPr wrap="square" lIns="0" tIns="0" rIns="0" bIns="0" rtlCol="0" anchor="ctr"/>
+          <a:lstStyle/>
+          <a:p>
+            <a:pPr algn="ctr" indent="0" marL="0">
+              <a:buNone/>
+            </a:pPr>
+            <a:r>
+              <a:rPr lang="en-US" sz="1000" dirty="0">
+                <a:solidFill>
+                  <a:srgbClr val="C9D6EC"/>
+                </a:solidFill>
+              </a:rPr>
+              <a:t>▸</a:t>
+            </a:r>
+            <a:endParaRPr lang="en-US" sz="1000" dirty="0"/>
+          </a:p>
+        </p:txBody>
+      </p:sp>
+      <p:sp>
+        <p:nvSpPr>
+          <p:cNvPr id="16" name="Shape 14"/>
+          <p:cNvSpPr/>
+          <p:nvPr/>
+        </p:nvSpPr>
+        <p:spPr>
+          <a:xfrm>
+            <a:off x="7525512" y="1371600"/>
+            <a:ext cx="1170432" cy="329184"/>
+          </a:xfrm>
+          <a:prstGeom prst="roundRect">
+            <a:avLst>
+              <a:gd name="adj" fmla="val 47222"/>
+            </a:avLst>
+          </a:prstGeom>
+          <a:solidFill>
+            <a:srgbClr val="EEF1F7"/>
+          </a:solidFill>
+          <a:ln w="12700">
+            <a:solidFill>
+              <a:srgbClr val="C9D6EC"/>
+            </a:solidFill>
+            <a:prstDash val="solid"/>
+          </a:ln>
+        </p:spPr>
+        <p:txBody>
+          <a:bodyPr/>
+          <a:p/>
+        </p:txBody>
+      </p:sp>
+      <p:sp>
+        <p:nvSpPr>
+          <p:cNvPr id="17" name="Text 15"/>
+          <p:cNvSpPr txBox="1"/>
+          <p:nvPr/>
+        </p:nvSpPr>
+        <p:spPr>
+          <a:xfrm>
+            <a:off x="7525512" y="1371600"/>
+            <a:ext cx="1170432" cy="329184"/>
+          </a:xfrm>
+          <a:prstGeom prst="rect">
+            <a:avLst/>
+          </a:prstGeom>
+          <a:noFill/>
+          <a:ln/>
+        </p:spPr>
+        <p:txBody>
+          <a:bodyPr wrap="square" lIns="0" tIns="0" rIns="0" bIns="0" rtlCol="0" anchor="ctr"/>
+          <a:lstStyle/>
+          <a:p>
+            <a:pPr algn="ctr" indent="0" marL="0">
+              <a:buNone/>
+            </a:pPr>
+            <a:r>
+              <a:rPr lang="en-US" sz="1100" dirty="0">
+                <a:solidFill>
+                  <a:srgbClr val="5A6478"/>
+                </a:solidFill>
+                <a:latin typeface="맑은 고딕" pitchFamily="34" charset="0"/>
+                <a:ea typeface="맑은 고딕" pitchFamily="34" charset="-122"/>
+                <a:cs typeface="맑은 고딕" pitchFamily="34" charset="-120"/>
+              </a:rPr>
+              <a:t>ECEF</a:t>
+            </a:r>
+            <a:endParaRPr lang="en-US" sz="1100" dirty="0"/>
+          </a:p>
+        </p:txBody>
+      </p:sp>
+      <p:sp>
+        <p:nvSpPr>
+          <p:cNvPr id="18" name="Text 16"/>
+          <p:cNvSpPr txBox="1"/>
+          <p:nvPr/>
+        </p:nvSpPr>
+        <p:spPr>
+          <a:xfrm>
+            <a:off x="8695944" y="1371600"/>
+            <a:ext cx="182880" cy="329184"/>
+          </a:xfrm>
+          <a:prstGeom prst="rect">
+            <a:avLst/>
+          </a:prstGeom>
+          <a:noFill/>
+          <a:ln/>
+        </p:spPr>
+        <p:txBody>
+          <a:bodyPr wrap="square" lIns="0" tIns="0" rIns="0" bIns="0" rtlCol="0" anchor="ctr"/>
+          <a:lstStyle/>
+          <a:p>
+            <a:pPr algn="ctr" indent="0" marL="0">
+              <a:buNone/>
+            </a:pPr>
+            <a:r>
+              <a:rPr lang="en-US" sz="1000" dirty="0">
+                <a:solidFill>
+                  <a:srgbClr val="C9D6EC"/>
+                </a:solidFill>
+              </a:rPr>
+              <a:t>▸</a:t>
+            </a:r>
+            <a:endParaRPr lang="en-US" sz="1000" dirty="0"/>
+          </a:p>
+        </p:txBody>
+      </p:sp>
+      <p:sp>
+        <p:nvSpPr>
+          <p:cNvPr id="19" name="Shape 17"/>
+          <p:cNvSpPr/>
+          <p:nvPr/>
+        </p:nvSpPr>
+        <p:spPr>
+          <a:xfrm>
+            <a:off x="8878824" y="1371600"/>
+            <a:ext cx="1170432" cy="329184"/>
+          </a:xfrm>
+          <a:prstGeom prst="roundRect">
+            <a:avLst>
+              <a:gd name="adj" fmla="val 47222"/>
+            </a:avLst>
+          </a:prstGeom>
+          <a:solidFill>
+            <a:srgbClr val="EEF1F7"/>
+          </a:solidFill>
+          <a:ln w="12700">
+            <a:solidFill>
+              <a:srgbClr val="C9D6EC"/>
+            </a:solidFill>
+            <a:prstDash val="solid"/>
+          </a:ln>
+        </p:spPr>
+        <p:txBody>
+          <a:bodyPr/>
+          <a:p/>
+        </p:txBody>
+      </p:sp>
+      <p:sp>
+        <p:nvSpPr>
+          <p:cNvPr id="20" name="Text 18"/>
+          <p:cNvSpPr txBox="1"/>
+          <p:nvPr/>
+        </p:nvSpPr>
+        <p:spPr>
+          <a:xfrm>
+            <a:off x="8878824" y="1371600"/>
+            <a:ext cx="1170432" cy="329184"/>
+          </a:xfrm>
+          <a:prstGeom prst="rect">
+            <a:avLst/>
+          </a:prstGeom>
+          <a:noFill/>
+          <a:ln/>
+        </p:spPr>
+        <p:txBody>
+          <a:bodyPr wrap="square" lIns="0" tIns="0" rIns="0" bIns="0" rtlCol="0" anchor="ctr"/>
+          <a:lstStyle/>
+          <a:p>
+            <a:pPr algn="ctr" indent="0" marL="0">
+              <a:buNone/>
+            </a:pPr>
+            <a:r>
+              <a:rPr lang="en-US" sz="1100" dirty="0">
+                <a:solidFill>
+                  <a:srgbClr val="5A6478"/>
+                </a:solidFill>
+                <a:latin typeface="맑은 고딕" pitchFamily="34" charset="0"/>
+                <a:ea typeface="맑은 고딕" pitchFamily="34" charset="-122"/>
+                <a:cs typeface="맑은 고딕" pitchFamily="34" charset="-120"/>
+              </a:rPr>
+              <a:t>LLA</a:t>
+            </a:r>
+            <a:endParaRPr lang="en-US" sz="1100" dirty="0"/>
+          </a:p>
+        </p:txBody>
+      </p:sp>
+      <p:sp>
+        <p:nvSpPr>
+          <p:cNvPr id="21" name="Shape 19"/>
+          <p:cNvSpPr/>
+          <p:nvPr/>
+        </p:nvSpPr>
+        <p:spPr>
+          <a:xfrm>
+            <a:off x="566928" y="1919508"/>
+            <a:ext cx="6858000" cy="1481328"/>
+          </a:xfrm>
+          <a:prstGeom prst="roundRect">
+            <a:avLst>
+              <a:gd name="adj" fmla="val 4938"/>
+            </a:avLst>
+          </a:prstGeom>
+          <a:solidFill>
+            <a:srgbClr val="F4F6FA"/>
+          </a:solidFill>
+          <a:ln w="12700">
+            <a:solidFill>
+              <a:srgbClr val="FFFFFF"/>
+            </a:solidFill>
+            <a:prstDash val="solid"/>
+          </a:ln>
+        </p:spPr>
+        <p:txBody>
+          <a:bodyPr/>
+          <a:p/>
+        </p:txBody>
+      </p:sp>
+      <p:sp>
+        <p:nvSpPr>
+          <p:cNvPr id="22" name="Text 20"/>
+          <p:cNvSpPr txBox="1"/>
+          <p:nvPr/>
+        </p:nvSpPr>
+        <p:spPr>
+          <a:xfrm>
+            <a:off x="731520" y="2029236"/>
+            <a:ext cx="6528816" cy="1261872"/>
+          </a:xfrm>
+          <a:prstGeom prst="rect">
+            <a:avLst/>
+          </a:prstGeom>
+          <a:noFill/>
+          <a:ln/>
+        </p:spPr>
+        <p:txBody>
+          <a:bodyPr wrap="square" lIns="0" tIns="0" rIns="0" bIns="0" rtlCol="0" anchor="ctr"/>
+          <a:lstStyle/>
+          <a:p>
+            <a:pPr indent="0" marL="0">
+              <a:lnSpc>
+                <a:spcPts val="1700"/>
+              </a:lnSpc>
+              <a:buNone/>
+            </a:pPr>
+            <a:r>
+              <a:rPr lang="en-US" sz="1350" dirty="0">
+                <a:solidFill>
+                  <a:srgbClr val="1A2233"/>
+                </a:solidFill>
+                <a:latin typeface="Consolas" pitchFamily="34" charset="0"/>
+                <a:ea typeface="Consolas" pitchFamily="34" charset="-122"/>
+                <a:cs typeface="Consolas" pitchFamily="34" charset="-120"/>
+              </a:rPr>
+              <a:t>x = R × cos(El) × cos(Az)     ← 보어사이트 방향 성분</a:t>
+            </a:r>
+            <a:endParaRPr lang="en-US" sz="1350" dirty="0"/>
+          </a:p>
+          <a:p>
+            <a:pPr indent="0" marL="0">
+              <a:lnSpc>
+                <a:spcPts val="1700"/>
+              </a:lnSpc>
+              <a:buNone/>
+            </a:pPr>
+            <a:r>
+              <a:rPr lang="en-US" sz="1350" dirty="0">
+                <a:solidFill>
+                  <a:srgbClr val="1A2233"/>
+                </a:solidFill>
+                <a:latin typeface="Consolas" pitchFamily="34" charset="0"/>
+                <a:ea typeface="Consolas" pitchFamily="34" charset="-122"/>
+                <a:cs typeface="Consolas" pitchFamily="34" charset="-120"/>
+              </a:rPr>
+              <a:t>y = R × cos(El) × sin(Az)     ← 오른쪽 방향 성분</a:t>
+            </a:r>
+            <a:endParaRPr lang="en-US" sz="1350" dirty="0"/>
+          </a:p>
+          <a:p>
+            <a:pPr indent="0" marL="0">
+              <a:lnSpc>
+                <a:spcPts val="1700"/>
+              </a:lnSpc>
+              <a:buNone/>
+            </a:pPr>
+            <a:r>
+              <a:rPr lang="en-US" sz="1350" dirty="0">
+                <a:solidFill>
+                  <a:srgbClr val="1A2233"/>
+                </a:solidFill>
+                <a:latin typeface="Consolas" pitchFamily="34" charset="0"/>
+                <a:ea typeface="Consolas" pitchFamily="34" charset="-122"/>
+                <a:cs typeface="Consolas" pitchFamily="34" charset="-120"/>
+              </a:rPr>
+              <a:t>z = − R × sin(El)             ← 아래 방향 성분 (위로 향하면 음수)</a:t>
+            </a:r>
+            <a:endParaRPr lang="en-US" sz="1350" dirty="0"/>
+          </a:p>
+        </p:txBody>
+      </p:sp>
+      <p:sp>
+        <p:nvSpPr>
+          <p:cNvPr id="23" name="Text 21"/>
+          <p:cNvSpPr txBox="1"/>
+          <p:nvPr/>
+        </p:nvSpPr>
+        <p:spPr>
+          <a:xfrm>
+            <a:off x="566928" y="3638580"/>
+            <a:ext cx="6858000" cy="329184"/>
+          </a:xfrm>
+          <a:prstGeom prst="rect">
+            <a:avLst/>
+          </a:prstGeom>
+          <a:noFill/>
+          <a:ln/>
+        </p:spPr>
+        <p:txBody>
+          <a:bodyPr wrap="square" lIns="0" tIns="0" rIns="0" bIns="0" rtlCol="0" anchor="ctr"/>
+          <a:lstStyle/>
+          <a:p>
+            <a:pPr indent="0" marL="0">
+              <a:buNone/>
+            </a:pPr>
+            <a:r>
+              <a:rPr lang="en-US" sz="1500" b="1" dirty="0">
+                <a:solidFill>
+                  <a:srgbClr val="2B57A6"/>
+                </a:solidFill>
+                <a:latin typeface="맑은 고딕" pitchFamily="34" charset="0"/>
+                <a:ea typeface="맑은 고딕" pitchFamily="34" charset="-122"/>
+                <a:cs typeface="맑은 고딕" pitchFamily="34" charset="-120"/>
+              </a:rPr>
+              <a:t>예제 값을 넣으면</a:t>
+            </a:r>
+            <a:endParaRPr lang="en-US" sz="1500" dirty="0"/>
+          </a:p>
+        </p:txBody>
+      </p:sp>
+      <p:sp>
+        <p:nvSpPr>
+          <p:cNvPr id="24" name="Shape 22"/>
+          <p:cNvSpPr/>
+          <p:nvPr/>
+        </p:nvSpPr>
+        <p:spPr>
+          <a:xfrm>
+            <a:off x="566928" y="4022628"/>
+            <a:ext cx="6858000" cy="1371600"/>
+          </a:xfrm>
+          <a:prstGeom prst="roundRect">
+            <a:avLst>
+              <a:gd name="adj" fmla="val 5333"/>
+            </a:avLst>
+          </a:prstGeom>
+          <a:solidFill>
+            <a:srgbClr val="F4F6FA"/>
+          </a:solidFill>
+          <a:ln w="12700">
+            <a:solidFill>
+              <a:srgbClr val="FFFFFF"/>
+            </a:solidFill>
+            <a:prstDash val="solid"/>
+          </a:ln>
+        </p:spPr>
+        <p:txBody>
+          <a:bodyPr/>
+          <a:p/>
+        </p:txBody>
+      </p:sp>
+      <p:sp>
+        <p:nvSpPr>
+          <p:cNvPr id="25" name="Text 23"/>
+          <p:cNvSpPr txBox="1"/>
+          <p:nvPr/>
+        </p:nvSpPr>
+        <p:spPr>
+          <a:xfrm>
+            <a:off x="731520" y="4132356"/>
+            <a:ext cx="6528816" cy="1152144"/>
+          </a:xfrm>
+          <a:prstGeom prst="rect">
+            <a:avLst/>
+          </a:prstGeom>
+          <a:noFill/>
+          <a:ln/>
+        </p:spPr>
+        <p:txBody>
+          <a:bodyPr wrap="square" lIns="0" tIns="0" rIns="0" bIns="0" rtlCol="0" anchor="ctr"/>
+          <a:lstStyle/>
+          <a:p>
+            <a:pPr indent="0" marL="0">
+              <a:lnSpc>
+                <a:spcPts val="1700"/>
+              </a:lnSpc>
+              <a:buNone/>
+            </a:pPr>
+            <a:r>
+              <a:rPr lang="en-US" sz="1350" dirty="0">
+                <a:solidFill>
+                  <a:srgbClr val="1A2233"/>
+                </a:solidFill>
+                <a:latin typeface="Consolas" pitchFamily="34" charset="0"/>
+                <a:ea typeface="Consolas" pitchFamily="34" charset="-122"/>
+                <a:cs typeface="Consolas" pitchFamily="34" charset="-120"/>
+              </a:rPr>
+              <a:t>x = 20,000 × 1 × cos30°  =  +17,320.5081 m</a:t>
+            </a:r>
+            <a:endParaRPr lang="en-US" sz="1350" dirty="0"/>
+          </a:p>
+          <a:p>
+            <a:pPr indent="0" marL="0">
+              <a:lnSpc>
+                <a:spcPts val="1700"/>
+              </a:lnSpc>
+              <a:buNone/>
+            </a:pPr>
+            <a:r>
+              <a:rPr lang="en-US" sz="1350" dirty="0">
+                <a:solidFill>
+                  <a:srgbClr val="1A2233"/>
+                </a:solidFill>
+                <a:latin typeface="Consolas" pitchFamily="34" charset="0"/>
+                <a:ea typeface="Consolas" pitchFamily="34" charset="-122"/>
+                <a:cs typeface="Consolas" pitchFamily="34" charset="-120"/>
+              </a:rPr>
+              <a:t>y = 20,000 × 1 × sin30°  =  +10,000.0000 m</a:t>
+            </a:r>
+            <a:endParaRPr lang="en-US" sz="1350" dirty="0"/>
+          </a:p>
+          <a:p>
+            <a:pPr indent="0" marL="0">
+              <a:lnSpc>
+                <a:spcPts val="1700"/>
+              </a:lnSpc>
+              <a:buNone/>
+            </a:pPr>
+            <a:r>
+              <a:rPr lang="en-US" sz="1350" dirty="0">
+                <a:solidFill>
+                  <a:srgbClr val="1A2233"/>
+                </a:solidFill>
+                <a:latin typeface="Consolas" pitchFamily="34" charset="0"/>
+                <a:ea typeface="Consolas" pitchFamily="34" charset="-122"/>
+                <a:cs typeface="Consolas" pitchFamily="34" charset="-120"/>
+              </a:rPr>
+              <a:t>z = −20,000 × sin0°      =         0.0000 m</a:t>
+            </a:r>
+            <a:endParaRPr lang="en-US" sz="1350" dirty="0"/>
+          </a:p>
+        </p:txBody>
+      </p:sp>
+      <p:sp>
+        <p:nvSpPr>
+          <p:cNvPr id="26" name="Shape 24"/>
+          <p:cNvSpPr/>
+          <p:nvPr/>
+        </p:nvSpPr>
+        <p:spPr>
+          <a:xfrm>
+            <a:off x="7699248" y="1919508"/>
+            <a:ext cx="3931920" cy="3474720"/>
+          </a:xfrm>
+          <a:prstGeom prst="roundRect">
+            <a:avLst>
+              <a:gd name="adj" fmla="val 2105"/>
+            </a:avLst>
+          </a:prstGeom>
+          <a:solidFill>
+            <a:srgbClr val="EEF1F7"/>
+          </a:solidFill>
+          <a:ln w="12700">
+            <a:solidFill>
+              <a:srgbClr val="FFFFFF"/>
+            </a:solidFill>
+            <a:prstDash val="solid"/>
+          </a:ln>
+        </p:spPr>
+        <p:txBody>
+          <a:bodyPr/>
+          <a:p/>
+        </p:txBody>
+      </p:sp>
+      <p:sp>
+        <p:nvSpPr>
+          <p:cNvPr id="27" name="Text 25"/>
+          <p:cNvSpPr txBox="1"/>
+          <p:nvPr/>
+        </p:nvSpPr>
+        <p:spPr>
+          <a:xfrm>
+            <a:off x="7973568" y="2120676"/>
+            <a:ext cx="3383280" cy="365760"/>
+          </a:xfrm>
+          <a:prstGeom prst="rect">
+            <a:avLst/>
+          </a:prstGeom>
+          <a:noFill/>
+          <a:ln/>
+        </p:spPr>
+        <p:txBody>
+          <a:bodyPr wrap="square" lIns="0" tIns="0" rIns="0" bIns="0" rtlCol="0" anchor="ctr"/>
+          <a:lstStyle/>
+          <a:p>
+            <a:pPr indent="0" marL="0">
+              <a:buNone/>
+            </a:pPr>
+            <a:r>
+              <a:rPr lang="en-US" sz="1600" b="1" dirty="0">
+                <a:solidFill>
+                  <a:srgbClr val="2B57A6"/>
+                </a:solidFill>
+                <a:latin typeface="맑은 고딕" pitchFamily="34" charset="0"/>
+                <a:ea typeface="맑은 고딕" pitchFamily="34" charset="-122"/>
+                <a:cs typeface="맑은 고딕" pitchFamily="34" charset="-120"/>
+              </a:rPr>
+              <a:t>왜 직교좌표로 바꾸나</a:t>
+            </a:r>
+            <a:endParaRPr lang="en-US" sz="1600" dirty="0"/>
+          </a:p>
+        </p:txBody>
+      </p:sp>
+      <p:sp>
+        <p:nvSpPr>
+          <p:cNvPr id="28" name="Text 26"/>
+          <p:cNvSpPr txBox="1"/>
+          <p:nvPr/>
+        </p:nvSpPr>
+        <p:spPr>
+          <a:xfrm>
+            <a:off x="7973568" y="2577876"/>
+            <a:ext cx="3383280" cy="1645920"/>
+          </a:xfrm>
+          <a:prstGeom prst="rect">
+            <a:avLst/>
+          </a:prstGeom>
+          <a:noFill/>
+          <a:ln/>
+        </p:spPr>
+        <p:txBody>
+          <a:bodyPr wrap="square" lIns="0" tIns="0" rIns="0" bIns="0" rtlCol="0" anchor="ctr"/>
+          <a:lstStyle/>
+          <a:p>
+            <a:pPr indent="0" marL="0">
+              <a:lnSpc>
+                <a:spcPts val="2000"/>
+              </a:lnSpc>
+              <a:buNone/>
+            </a:pPr>
+            <a:r>
+              <a:rPr lang="en-US" sz="1350" dirty="0">
+                <a:solidFill>
+                  <a:srgbClr val="1A2233"/>
+                </a:solidFill>
+                <a:latin typeface="맑은 고딕" pitchFamily="34" charset="0"/>
+                <a:ea typeface="맑은 고딕" pitchFamily="34" charset="-122"/>
+                <a:cs typeface="맑은 고딕" pitchFamily="34" charset="-120"/>
+              </a:rPr>
+              <a:t>극좌표는 사람이 읽기 좋지만,</a:t>
+            </a:r>
+            <a:endParaRPr lang="en-US" sz="1350" dirty="0"/>
+          </a:p>
+          <a:p>
+            <a:pPr indent="0" marL="0">
+              <a:lnSpc>
+                <a:spcPts val="2000"/>
+              </a:lnSpc>
+              <a:buNone/>
+            </a:pPr>
+            <a:r>
+              <a:rPr lang="en-US" sz="1350" dirty="0">
+                <a:solidFill>
+                  <a:srgbClr val="1A2233"/>
+                </a:solidFill>
+                <a:latin typeface="맑은 고딕" pitchFamily="34" charset="0"/>
+                <a:ea typeface="맑은 고딕" pitchFamily="34" charset="-122"/>
+                <a:cs typeface="맑은 고딕" pitchFamily="34" charset="-120"/>
+              </a:rPr>
+              <a:t>극좌표끼리는 회전을 합성할 수 없다.</a:t>
+            </a:r>
+            <a:endParaRPr lang="en-US" sz="1350" dirty="0"/>
+          </a:p>
+          <a:p>
+            <a:pPr indent="0" marL="0">
+              <a:lnSpc>
+                <a:spcPts val="2000"/>
+              </a:lnSpc>
+              <a:buNone/>
+            </a:pPr>
+            <a:endParaRPr lang="en-US" sz="1350" dirty="0"/>
+          </a:p>
+          <a:p>
+            <a:pPr indent="0" marL="0">
+              <a:lnSpc>
+                <a:spcPts val="2000"/>
+              </a:lnSpc>
+              <a:buNone/>
+            </a:pPr>
+            <a:r>
+              <a:rPr lang="en-US" sz="1350" dirty="0">
+                <a:solidFill>
+                  <a:srgbClr val="1A2233"/>
+                </a:solidFill>
+                <a:latin typeface="맑은 고딕" pitchFamily="34" charset="0"/>
+                <a:ea typeface="맑은 고딕" pitchFamily="34" charset="-122"/>
+                <a:cs typeface="맑은 고딕" pitchFamily="34" charset="-120"/>
+              </a:rPr>
+              <a:t>회전행렬은 벡터에만 곱할 수 있으므로</a:t>
+            </a:r>
+            <a:endParaRPr lang="en-US" sz="1350" dirty="0"/>
+          </a:p>
+          <a:p>
+            <a:pPr indent="0" marL="0">
+              <a:lnSpc>
+                <a:spcPts val="2000"/>
+              </a:lnSpc>
+              <a:buNone/>
+            </a:pPr>
+            <a:r>
+              <a:rPr lang="en-US" sz="1350" dirty="0">
+                <a:solidFill>
+                  <a:srgbClr val="1A2233"/>
+                </a:solidFill>
+                <a:latin typeface="맑은 고딕" pitchFamily="34" charset="0"/>
+                <a:ea typeface="맑은 고딕" pitchFamily="34" charset="-122"/>
+                <a:cs typeface="맑은 고딕" pitchFamily="34" charset="-120"/>
+              </a:rPr>
+              <a:t>각도로 표현된 방향을 세 성분으로</a:t>
+            </a:r>
+            <a:endParaRPr lang="en-US" sz="1350" dirty="0"/>
+          </a:p>
+          <a:p>
+            <a:pPr indent="0" marL="0">
+              <a:lnSpc>
+                <a:spcPts val="2000"/>
+              </a:lnSpc>
+              <a:buNone/>
+            </a:pPr>
+            <a:r>
+              <a:rPr lang="en-US" sz="1350" dirty="0">
+                <a:solidFill>
+                  <a:srgbClr val="1A2233"/>
+                </a:solidFill>
+                <a:latin typeface="맑은 고딕" pitchFamily="34" charset="0"/>
+                <a:ea typeface="맑은 고딕" pitchFamily="34" charset="-122"/>
+                <a:cs typeface="맑은 고딕" pitchFamily="34" charset="-120"/>
+              </a:rPr>
+              <a:t>풀어쓰는 준비 단계다.</a:t>
+            </a:r>
+            <a:endParaRPr lang="en-US" sz="1350" dirty="0"/>
+          </a:p>
+        </p:txBody>
+      </p:sp>
+      <p:sp>
+        <p:nvSpPr>
+          <p:cNvPr id="29" name="Text 27"/>
+          <p:cNvSpPr txBox="1"/>
+          <p:nvPr/>
+        </p:nvSpPr>
+        <p:spPr>
+          <a:xfrm>
+            <a:off x="7973568" y="4260372"/>
+            <a:ext cx="3383280" cy="1005840"/>
+          </a:xfrm>
+          <a:prstGeom prst="rect">
+            <a:avLst/>
+          </a:prstGeom>
+          <a:noFill/>
+          <a:ln/>
+        </p:spPr>
+        <p:txBody>
+          <a:bodyPr wrap="square" lIns="0" tIns="0" rIns="0" bIns="0" rtlCol="0" anchor="ctr"/>
+          <a:lstStyle/>
+          <a:p>
+            <a:pPr indent="0" marL="0">
+              <a:lnSpc>
+                <a:spcPts val="1700"/>
+              </a:lnSpc>
+              <a:buNone/>
+            </a:pPr>
+            <a:r>
+              <a:rPr lang="en-US" sz="1200" i="1" dirty="0">
+                <a:solidFill>
+                  <a:srgbClr val="5A6478"/>
+                </a:solidFill>
+                <a:latin typeface="맑은 고딕" pitchFamily="34" charset="0"/>
+                <a:ea typeface="맑은 고딕" pitchFamily="34" charset="-122"/>
+                <a:cs typeface="맑은 고딕" pitchFamily="34" charset="-120"/>
+              </a:rPr>
+              <a:t>역변환에서는 asin 대신</a:t>
+            </a:r>
+            <a:endParaRPr lang="en-US" sz="1200" dirty="0"/>
+          </a:p>
+          <a:p>
+            <a:pPr indent="0" marL="0">
+              <a:lnSpc>
+                <a:spcPts val="1700"/>
+              </a:lnSpc>
+              <a:buNone/>
+            </a:pPr>
+            <a:r>
+              <a:rPr lang="en-US" sz="1200" i="1" dirty="0">
+                <a:solidFill>
+                  <a:srgbClr val="5A6478"/>
+                </a:solidFill>
+                <a:latin typeface="맑은 고딕" pitchFamily="34" charset="0"/>
+                <a:ea typeface="맑은 고딕" pitchFamily="34" charset="-122"/>
+                <a:cs typeface="맑은 고딕" pitchFamily="34" charset="-120"/>
+              </a:rPr>
+              <a:t>atan2 를 쓴다.</a:t>
+            </a:r>
+            <a:endParaRPr lang="en-US" sz="1200" dirty="0"/>
+          </a:p>
+          <a:p>
+            <a:pPr indent="0" marL="0">
+              <a:lnSpc>
+                <a:spcPts val="1700"/>
+              </a:lnSpc>
+              <a:buNone/>
+            </a:pPr>
+            <a:r>
+              <a:rPr lang="en-US" sz="1200" i="1" dirty="0">
+                <a:solidFill>
+                  <a:srgbClr val="5A6478"/>
+                </a:solidFill>
+                <a:latin typeface="맑은 고딕" pitchFamily="34" charset="0"/>
+                <a:ea typeface="맑은 고딕" pitchFamily="34" charset="-122"/>
+                <a:cs typeface="맑은 고딕" pitchFamily="34" charset="-120"/>
+              </a:rPr>
+              <a:t>반올림으로 NaN 이 나거나</a:t>
+            </a:r>
+            <a:endParaRPr lang="en-US" sz="1200" dirty="0"/>
+          </a:p>
+          <a:p>
+            <a:pPr indent="0" marL="0">
+              <a:lnSpc>
+                <a:spcPts val="1700"/>
+              </a:lnSpc>
+              <a:buNone/>
+            </a:pPr>
+            <a:r>
+              <a:rPr lang="en-US" sz="1200" i="1" dirty="0">
+                <a:solidFill>
+                  <a:srgbClr val="5A6478"/>
+                </a:solidFill>
+                <a:latin typeface="맑은 고딕" pitchFamily="34" charset="0"/>
+                <a:ea typeface="맑은 고딕" pitchFamily="34" charset="-122"/>
+                <a:cs typeface="맑은 고딕" pitchFamily="34" charset="-120"/>
+              </a:rPr>
+              <a:t>±90° 근처에서 정밀도가</a:t>
+            </a:r>
+            <a:endParaRPr lang="en-US" sz="1200" dirty="0"/>
+          </a:p>
+          <a:p>
+            <a:pPr indent="0" marL="0">
+              <a:lnSpc>
+                <a:spcPts val="1700"/>
+              </a:lnSpc>
+              <a:buNone/>
+            </a:pPr>
+            <a:r>
+              <a:rPr lang="en-US" sz="1200" i="1" dirty="0">
+                <a:solidFill>
+                  <a:srgbClr val="5A6478"/>
+                </a:solidFill>
+                <a:latin typeface="맑은 고딕" pitchFamily="34" charset="0"/>
+                <a:ea typeface="맑은 고딕" pitchFamily="34" charset="-122"/>
+                <a:cs typeface="맑은 고딕" pitchFamily="34" charset="-120"/>
+              </a:rPr>
+              <a:t>무너지는 걸 막기 위해서다.</a:t>
+            </a:r>
+            <a:endParaRPr lang="en-US" sz="1200" dirty="0"/>
+          </a:p>
+        </p:txBody>
+      </p:sp>
+      <p:sp>
+        <p:nvSpPr>
+          <p:cNvPr id="30" name="Text 28"/>
+          <p:cNvSpPr txBox="1"/>
+          <p:nvPr/>
+        </p:nvSpPr>
+        <p:spPr>
+          <a:xfrm>
+            <a:off x="566928" y="5596127"/>
+            <a:ext cx="11064240" cy="640080"/>
+          </a:xfrm>
+          <a:prstGeom prst="rect">
+            <a:avLst/>
+          </a:prstGeom>
+          <a:noFill/>
+          <a:ln/>
+        </p:spPr>
+        <p:txBody>
+          <a:bodyPr wrap="square" lIns="0" tIns="0" rIns="0" bIns="0" rtlCol="0" anchor="ctr"/>
+          <a:lstStyle/>
+          <a:p>
+            <a:pPr algn="ctr" indent="0" marL="0">
+              <a:buNone/>
+            </a:pPr>
+            <a:r>
+              <a:rPr lang="en-US" sz="1300" i="1" dirty="0">
+                <a:solidFill>
+                  <a:srgbClr val="5A6478"/>
+                </a:solidFill>
+                <a:latin typeface="맑은 고딕" pitchFamily="34" charset="0"/>
+                <a:ea typeface="맑은 고딕" pitchFamily="34" charset="-122"/>
+                <a:cs typeface="맑은 고딕" pitchFamily="34" charset="-120"/>
+              </a:rPr>
+              <a:t>읽는 법 :  cos(El) 로 표적을 먼저 수평면에 눕히고, 그 길이를 Az 로 앞(x)·오른쪽(y)에 나눠 담습니다.</a:t>
+            </a:r>
+            <a:endParaRPr lang="en-US" sz="1300" dirty="0"/>
+          </a:p>
+          <a:p>
+            <a:pPr algn="ctr" indent="0" marL="0">
+              <a:buNone/>
+            </a:pPr>
+            <a:r>
+              <a:rPr lang="en-US" sz="1300" i="1" dirty="0">
+                <a:solidFill>
+                  <a:srgbClr val="5A6478"/>
+                </a:solidFill>
+                <a:latin typeface="맑은 고딕" pitchFamily="34" charset="0"/>
+                <a:ea typeface="맑은 고딕" pitchFamily="34" charset="-122"/>
+                <a:cs typeface="맑은 고딕" pitchFamily="34" charset="-120"/>
+              </a:rPr>
+              <a:t>위아래(z)는 sin(El) 몫 — z 는 아래가 양수라, 표적이 위에 있으면 z 가 음수가 됩니다.</a:t>
+            </a:r>
+            <a:endParaRPr lang="en-US" sz="1300" dirty="0"/>
+          </a:p>
+        </p:txBody>
+      </p:sp>
+      <p:sp>
+        <p:nvSpPr>
+          <p:cNvPr id="32" name="Rectangle 31"/>
+          <p:cNvSpPr/>
+          <p:nvPr/>
+        </p:nvSpPr>
+        <p:spPr>
+          <a:xfrm>
+            <a:off x="457200" y="411480"/>
+            <a:ext cx="11277295" cy="777240"/>
+          </a:xfrm>
+          <a:prstGeom prst="rect">
+            <a:avLst/>
+          </a:prstGeom>
+          <a:solidFill>
+            <a:srgbClr val="13233F"/>
+          </a:solidFill>
+          <a:ln>
+            <a:noFill/>
+          </a:ln>
+          <a:effectLst/>
+        </p:spPr>
+        <p:style>
+          <a:lnRef idx="1">
+            <a:schemeClr val="accent1"/>
+          </a:lnRef>
+          <a:fillRef idx="3">
+            <a:schemeClr val="accent1"/>
+          </a:fillRef>
+          <a:effectRef idx="2">
+            <a:schemeClr val="accent1"/>
+          </a:effectRef>
+          <a:fontRef idx="minor">
+            <a:schemeClr val="lt1"/>
+          </a:fontRef>
+        </p:style>
+        <p:txBody>
+          <a:bodyPr rtlCol="0" anchor="ctr" wrap="none"/>
+          <a:lstStyle/>
+          <a:p>
+            <a:pPr algn="ctr"/>
+          </a:p>
+        </p:txBody>
+      </p:sp>
+      <p:sp>
+        <p:nvSpPr>
+          <p:cNvPr id="33" name="TextBox 32"/>
+          <p:cNvSpPr txBox="1"/>
+          <p:nvPr/>
+        </p:nvSpPr>
+        <p:spPr>
+          <a:xfrm>
+            <a:off x="640080" y="411480"/>
+            <a:ext cx="8732520" cy="777240"/>
+          </a:xfrm>
+          <a:prstGeom prst="rect">
+            <a:avLst/>
+          </a:prstGeom>
+          <a:noFill/>
+        </p:spPr>
+        <p:txBody>
+          <a:bodyPr wrap="square" anchor="ctr" lIns="0" rIns="0" tIns="0" bIns="0">
+            <a:spAutoFit/>
+          </a:bodyPr>
+          <a:lstStyle/>
+          <a:p>
+            <a:pPr algn="l">
+              <a:spcAft>
+                <a:spcPts val="300"/>
+              </a:spcAft>
+            </a:pPr>
+            <a:r>
+              <a:rPr sz="1900" b="1">
+                <a:solidFill>
+                  <a:srgbClr val="FFFFFF"/>
+                </a:solidFill>
+                <a:latin typeface="맑은 고딕"/>
+              </a:rPr>
+              <a:t>01. 안테나 좌표계 ②  직교좌표 (Cartesian)</a:t>
+            </a:r>
+          </a:p>
+          <a:p>
+            <a:pPr algn="l">
+              <a:lnSpc>
+                <a:spcPts val="1400"/>
+              </a:lnSpc>
+            </a:pPr>
+            <a:r>
+              <a:rPr sz="1100" b="0">
+                <a:solidFill>
+                  <a:srgbClr val="C9D6EC"/>
+                </a:solidFill>
+                <a:latin typeface="맑은 고딕"/>
+              </a:rPr>
+              <a:t>R(Range 시선거리) · Az(Azimuth 방위각) · El(Elevation 고각) 을 x·y·z 세 성분으로 풀어써야 회전행렬을 곱할 수 있습니다</a:t>
+            </a:r>
+          </a:p>
+        </p:txBody>
+      </p:sp>
+      <p:cxnSp>
+        <p:nvCxnSpPr>
+          <p:cNvPr id="35" name="Connector 34"/>
+          <p:cNvCxnSpPr/>
+          <p:nvPr/>
+        </p:nvCxnSpPr>
+        <p:spPr>
+          <a:xfrm>
+            <a:off x="457200" y="6355080"/>
+            <a:ext cx="11277295" cy="0"/>
+          </a:xfrm>
+          <a:prstGeom prst="line">
+            <a:avLst/>
+          </a:prstGeom>
+          <a:ln w="9525">
+            <a:solidFill>
+              <a:srgbClr val="B9C0CC"/>
+            </a:solidFill>
+          </a:ln>
+        </p:spPr>
+        <p:style>
+          <a:lnRef idx="2">
+            <a:schemeClr val="accent1"/>
+          </a:lnRef>
+          <a:fillRef idx="0">
+            <a:schemeClr val="accent1"/>
+          </a:fillRef>
+          <a:effectRef idx="1">
+            <a:schemeClr val="accent1"/>
+          </a:effectRef>
+          <a:fontRef idx="minor">
+            <a:schemeClr val="tx1"/>
+          </a:fontRef>
+        </p:style>
+      </p:cxnSp>
+      <p:sp>
+        <p:nvSpPr>
+          <p:cNvPr id="37" name="TextBox 36"/>
           <p:cNvSpPr txBox="1"/>
           <p:nvPr/>
         </p:nvSpPr>
@@ -38203,7 +39640,7 @@
         <p:spPr>
           <a:xfrm>
             <a:off x="566928" y="1371600"/>
-            <a:ext cx="5394960" cy="2743200"/>
+            <a:ext cx="5394960" cy="2377440"/>
           </a:xfrm>
           <a:prstGeom prst="roundRect">
             <a:avLst>
@@ -38375,7 +39812,7 @@
         <p:spPr>
           <a:xfrm>
             <a:off x="868680" y="2560320"/>
-            <a:ext cx="4754880" cy="1371600"/>
+            <a:ext cx="4754880" cy="1097280"/>
           </a:xfrm>
           <a:prstGeom prst="rect">
             <a:avLst/>
@@ -38486,7 +39923,7 @@
         <p:spPr>
           <a:xfrm>
             <a:off x="6236208" y="1371600"/>
-            <a:ext cx="5394960" cy="2743200"/>
+            <a:ext cx="5394960" cy="2377440"/>
           </a:xfrm>
           <a:prstGeom prst="roundRect">
             <a:avLst>
@@ -38658,7 +40095,7 @@
         <p:spPr>
           <a:xfrm>
             <a:off x="6537960" y="2560320"/>
-            <a:ext cx="4754880" cy="1371600"/>
+            <a:ext cx="4754880" cy="1097280"/>
           </a:xfrm>
           <a:prstGeom prst="rect">
             <a:avLst/>
@@ -38768,7 +40205,7 @@
         </p:nvSpPr>
         <p:spPr>
           <a:xfrm>
-            <a:off x="566928" y="4535424"/>
+            <a:off x="566928" y="3858768"/>
             <a:ext cx="11064240" cy="457200"/>
           </a:xfrm>
           <a:prstGeom prst="rect">
@@ -38796,119 +40233,6 @@
               <a:t>모든 단계는 이 둘 중 하나거나, 둘 다입니다.  그게 전부입니다.</a:t>
             </a:r>
             <a:endParaRPr lang="en-US" sz="1900" dirty="0"/>
-          </a:p>
-        </p:txBody>
-      </p:sp>
-      <p:sp>
-        <p:nvSpPr>
-          <p:cNvPr id="17" name="Shape 15"/>
-          <p:cNvSpPr/>
-          <p:nvPr/>
-        </p:nvSpPr>
-        <p:spPr>
-          <a:xfrm>
-            <a:off x="566928" y="5157216"/>
-            <a:ext cx="11064240" cy="1078992"/>
-          </a:xfrm>
-          <a:prstGeom prst="roundRect">
-            <a:avLst>
-              <a:gd name="adj" fmla="val 8696"/>
-            </a:avLst>
-          </a:prstGeom>
-          <a:solidFill>
-            <a:srgbClr val="F4F6FA"/>
-          </a:solidFill>
-          <a:ln w="12700">
-            <a:solidFill>
-              <a:srgbClr val="FFFFFF"/>
-            </a:solidFill>
-            <a:prstDash val="solid"/>
-          </a:ln>
-        </p:spPr>
-        <p:txBody>
-          <a:bodyPr/>
-          <a:p/>
-        </p:txBody>
-      </p:sp>
-      <p:sp>
-        <p:nvSpPr>
-          <p:cNvPr id="18" name="Text 16"/>
-          <p:cNvSpPr txBox="1"/>
-          <p:nvPr/>
-        </p:nvSpPr>
-        <p:spPr>
-          <a:xfrm>
-            <a:off x="731520" y="5266944"/>
-            <a:ext cx="10735056" cy="859536"/>
-          </a:xfrm>
-          <a:prstGeom prst="rect">
-            <a:avLst/>
-          </a:prstGeom>
-          <a:noFill/>
-          <a:ln/>
-        </p:spPr>
-        <p:txBody>
-          <a:bodyPr wrap="square" lIns="0" tIns="0" rIns="0" bIns="0" rtlCol="0" anchor="ctr"/>
-          <a:lstStyle/>
-          <a:p>
-            <a:pPr indent="0" marL="0">
-              <a:lnSpc>
-                <a:spcPts val="1700"/>
-              </a:lnSpc>
-              <a:buNone/>
-            </a:pPr>
-            <a:r>
-              <a:rPr lang="en-US" sz="1400" dirty="0">
-                <a:solidFill>
-                  <a:srgbClr val="1A2233"/>
-                </a:solidFill>
-                <a:latin typeface="Consolas" pitchFamily="34" charset="0"/>
-                <a:ea typeface="Consolas" pitchFamily="34" charset="-122"/>
-                <a:cs typeface="Consolas" pitchFamily="34" charset="-120"/>
-              </a:rPr>
-              <a:t>p_함선  =  Rz(90°) × p_안테나  +  (−30, 0, −10) m</a:t>
-            </a:r>
-            <a:endParaRPr lang="en-US" sz="1400" dirty="0"/>
-          </a:p>
-          <a:p>
-            <a:pPr indent="0" marL="0">
-              <a:lnSpc>
-                <a:spcPts val="1700"/>
-              </a:lnSpc>
-              <a:buNone/>
-            </a:pPr>
-            <a:r>
-              <a:rPr lang="en-US" sz="1400" dirty="0">
-                <a:solidFill>
-                  <a:srgbClr val="1A2233"/>
-                </a:solidFill>
-                <a:latin typeface="Consolas" pitchFamily="34" charset="0"/>
-                <a:ea typeface="Consolas" pitchFamily="34" charset="-122"/>
-                <a:cs typeface="Consolas" pitchFamily="34" charset="-120"/>
-              </a:rPr>
-              <a:t>              └─ 회전 ─┘        └─ 평행이동 ─┘</a:t>
-            </a:r>
-            <a:endParaRPr lang="en-US" sz="1400" dirty="0"/>
-          </a:p>
-          <a:p>
-            <a:pPr indent="0" marL="0">
-              <a:lnSpc>
-                <a:spcPts val="1700"/>
-              </a:lnSpc>
-              <a:buNone/>
-            </a:pPr>
-            <a:r>
-              <a:rPr lang="en-US" sz="1200" dirty="0">
-                <a:solidFill>
-                  <a:srgbClr val="5A6478"/>
-                </a:solidFill>
-                <a:latin typeface="맑은 고딕" pitchFamily="34" charset="0"/>
-                <a:ea typeface="맑은 고딕" pitchFamily="34" charset="-122"/>
-                <a:cs typeface="맑은 고딕" pitchFamily="34" charset="-120"/>
-              </a:rPr>
-              <a:t>Rz(90°) 는 z 축(위아래 축) 둘레로 90° 돌리는 회전행렬입니다. 생김새는 다음 두 장에서 나옵니다.</a:t>
-            </a:r>
-            <a:endParaRPr lang="en-US" sz="1200" dirty="0"/>
           </a:p>
         </p:txBody>
       </p:sp>
@@ -39082,6 +40406,30 @@
           </a:p>
         </p:txBody>
       </p:sp>
+      <p:pic>
+        <p:nvPicPr>
+          <p:cNvPr id="26" name="Picture 25" descr="fig16_two_ops.png"/>
+          <p:cNvPicPr>
+            <a:picLocks noChangeAspect="1"/>
+          </p:cNvPicPr>
+          <p:nvPr/>
+        </p:nvPicPr>
+        <p:blipFill>
+          <a:blip r:embed="rId3"/>
+          <a:stretch>
+            <a:fillRect/>
+          </a:stretch>
+        </p:blipFill>
+        <p:spPr>
+          <a:xfrm>
+            <a:off x="886968" y="4334256"/>
+            <a:ext cx="10424160" cy="1935842"/>
+          </a:xfrm>
+          <a:prstGeom prst="rect">
+            <a:avLst/>
+          </a:prstGeom>
+        </p:spPr>
+      </p:pic>
     </p:spTree>
   </p:cSld>
   <p:clrMapOvr>
@@ -40660,7 +42008,7 @@
                 <a:ea typeface="맑은 고딕"/>
                 <a:cs typeface="맑은 고딕"/>
               </a:rPr>
-              <a:t>안테나 좌표계</a:t>
+              <a:t>안테나 좌표계 — 극좌표 · 직교좌표 · UV</a:t>
             </a:r>
           </a:p>
         </p:txBody>
